--- a/Documents/Final_Presentation.pptx
+++ b/Documents/Final_Presentation.pptx
@@ -2809,7 +2809,7 @@
                     <a:srgbClr val="2A9D8F"/>
                   </a:solidFill>
                 </a:rPr>
-                <a:t>A Final Report — Master of Engineering in Data Science and Engineering</a:t>
+                <a:t>A Final Report — Master of Science in Data Science and Engineering</a:t>
               </a:r>
               <a:endParaRPr lang="en-US" sz="1100" dirty="0"/>
             </a:p>

--- a/Documents/Final_Presentation.pptx
+++ b/Documents/Final_Presentation.pptx
@@ -18,9 +18,6 @@
     <p:sldId id="263" r:id="rId9"/>
     <p:sldId id="264" r:id="rId10"/>
     <p:sldId id="265" r:id="rId11"/>
-    <p:sldId id="266" r:id="rId12"/>
-    <p:sldId id="267" r:id="rId13"/>
-    <p:sldId id="268" r:id="rId14"/>
     <p:sldId id="269" r:id="rId15"/>
     <p:sldId id="270" r:id="rId16"/>
     <p:sldId id="271" r:id="rId17"/>
@@ -779,273 +776,6 @@
 </p:notes>
 </file>
 
-<file path=ppt/notesSlides/notesSlide11.xml><?xml version="1.0" encoding="utf-8"?>
-<p:notes xmlns:a="http://schemas.openxmlformats.org/drawingml/2006/main" xmlns:r="http://schemas.openxmlformats.org/officeDocument/2006/relationships" xmlns:p="http://schemas.openxmlformats.org/presentationml/2006/main">
-  <p:cSld>
-    <p:spTree>
-      <p:nvGrpSpPr>
-        <p:cNvPr id="1" name=""/>
-        <p:cNvGrpSpPr/>
-        <p:nvPr/>
-      </p:nvGrpSpPr>
-      <p:grpSpPr>
-        <a:xfrm>
-          <a:off x="0" y="0"/>
-          <a:ext cx="0" cy="0"/>
-          <a:chOff x="0" y="0"/>
-          <a:chExt cx="0" cy="0"/>
-        </a:xfrm>
-      </p:grpSpPr>
-      <p:sp>
-        <p:nvSpPr>
-          <p:cNvPr id="2" name="Slide Image Placeholder 1"/>
-          <p:cNvSpPr>
-            <a:spLocks noGrp="1" noRot="1" noChangeAspect="1"/>
-          </p:cNvSpPr>
-          <p:nvPr>
-            <p:ph type="sldImg"/>
-          </p:nvPr>
-        </p:nvSpPr>
-        <p:spPr/>
-      </p:sp>
-      <p:sp>
-        <p:nvSpPr>
-          <p:cNvPr id="3" name="Notes Placeholder 2"/>
-          <p:cNvSpPr>
-            <a:spLocks noGrp="1"/>
-          </p:cNvSpPr>
-          <p:nvPr>
-            <p:ph type="body" idx="1"/>
-          </p:nvPr>
-        </p:nvSpPr>
-        <p:spPr/>
-        <p:txBody>
-          <a:bodyPr/>
-          <a:lstStyle/>
-          <a:p>
-            <a:r>
-              <a:rPr lang="en-US" dirty="0"/>
-              <a:t>ETL benchmarks across 4 layers. Staging: 58,813 records in 22.8s full vs 6.0s incremental. The full staging is slower because it truncates and reloads all records; incremental uses watermark delta to load only changed records.
-Bronze: 39.5s full vs 30.3s incremental — Bronze processes 184,108 records in full load using hash key generation and HashDiff comparison, while incremental processes only 50 changed records.
-Silver and Gold: Silver takes 3.4/3.5s and Gold takes 11.0/12.7s because PIT tables, Bridge tables, dimensions, and facts are rebuilt completely regardless of load type.
-The net result: staging watermark overhead (+13.2s) exceeds Bronze savings (-3.9s), making incremental 6.1s slower overall. This is acceptable because incremental loading is designed for data integrity and auditability, not speed — it ensures only changed records propagate through the pipeline.</a:t>
-            </a:r>
-          </a:p>
-        </p:txBody>
-      </p:sp>
-      <p:sp>
-        <p:nvSpPr>
-          <p:cNvPr id="4" name="Slide Number Placeholder 3"/>
-          <p:cNvSpPr>
-            <a:spLocks noGrp="1"/>
-          </p:cNvSpPr>
-          <p:nvPr>
-            <p:ph type="sldNum" sz="quarter" idx="10"/>
-          </p:nvPr>
-        </p:nvSpPr>
-        <p:spPr/>
-        <p:txBody>
-          <a:bodyPr/>
-          <a:lstStyle/>
-          <a:p>
-            <a:fld id="{F7021451-1387-4CA6-816F-3879F97B5CBC}" type="slidenum">
-              <a:rPr lang="en-US"/>
-              <a:t>11</a:t>
-            </a:fld>
-            <a:endParaRPr lang="en-US"/>
-          </a:p>
-        </p:txBody>
-      </p:sp>
-    </p:spTree>
-    <p:extLst>
-      <p:ext uri="{BB962C8B-B14F-4D97-AF65-F5344CB8AC3E}">
-        <p14:creationId xmlns:p14="http://schemas.microsoft.com/office/powerpoint/2010/main" val="1024086991"/>
-      </p:ext>
-    </p:extLst>
-  </p:cSld>
-  <p:clrMapOvr>
-    <a:masterClrMapping/>
-  </p:clrMapOvr>
-</p:notes>
-</file>
-
-<file path=ppt/notesSlides/notesSlide12.xml><?xml version="1.0" encoding="utf-8"?>
-<p:notes xmlns:a="http://schemas.openxmlformats.org/drawingml/2006/main" xmlns:r="http://schemas.openxmlformats.org/officeDocument/2006/relationships" xmlns:p="http://schemas.openxmlformats.org/presentationml/2006/main">
-  <p:cSld>
-    <p:spTree>
-      <p:nvGrpSpPr>
-        <p:cNvPr id="1" name=""/>
-        <p:cNvGrpSpPr/>
-        <p:nvPr/>
-      </p:nvGrpSpPr>
-      <p:grpSpPr>
-        <a:xfrm>
-          <a:off x="0" y="0"/>
-          <a:ext cx="0" cy="0"/>
-          <a:chOff x="0" y="0"/>
-          <a:chExt cx="0" cy="0"/>
-        </a:xfrm>
-      </p:grpSpPr>
-      <p:sp>
-        <p:nvSpPr>
-          <p:cNvPr id="2" name="Slide Image Placeholder 1"/>
-          <p:cNvSpPr>
-            <a:spLocks noGrp="1" noRot="1" noChangeAspect="1"/>
-          </p:cNvSpPr>
-          <p:nvPr>
-            <p:ph type="sldImg"/>
-          </p:nvPr>
-        </p:nvSpPr>
-        <p:spPr/>
-      </p:sp>
-      <p:sp>
-        <p:nvSpPr>
-          <p:cNvPr id="3" name="Notes Placeholder 2"/>
-          <p:cNvSpPr>
-            <a:spLocks noGrp="1"/>
-          </p:cNvSpPr>
-          <p:nvPr>
-            <p:ph type="body" idx="1"/>
-          </p:nvPr>
-        </p:nvSpPr>
-        <p:spPr/>
-        <p:txBody>
-          <a:bodyPr/>
-          <a:lstStyle/>
-          <a:p>
-            <a:r>
-              <a:rPr lang="en-US" dirty="0"/>
-              <a:t>Three key discussion insights. First, Flexibility and Scalability: when we need to add a new attribute like TaxpayerRiskLevel, we only create a new Satellite — verified with 23/23 existing objects unchanged after adding SAT_Taxpayer_RiskLevel and loading 10 risk records.
-Second, Materialized Views: we implemented and tested vw_GoldMonthlyRevenue. Baseline: 73ms elapsed. With NOEXPAND indexed view: 34ms — a verified 2.1x speedup. With production-scale data, the improvement would be 4x-6x. We use a hybrid approach combining indexed views with stored procedures for cross-database queries.
-Third, Early Arriving Facts: verified with TAX-2026-EARLY test case. Hub created at 06:40:14, Link loaded at 06:40:15, SAT arrived 263 seconds later at 06:44:37 — simple INSERT, no placeholders, no reconciliation, no UPDATE needed.</a:t>
-            </a:r>
-          </a:p>
-        </p:txBody>
-      </p:sp>
-      <p:sp>
-        <p:nvSpPr>
-          <p:cNvPr id="4" name="Slide Number Placeholder 3"/>
-          <p:cNvSpPr>
-            <a:spLocks noGrp="1"/>
-          </p:cNvSpPr>
-          <p:nvPr>
-            <p:ph type="sldNum" sz="quarter" idx="10"/>
-          </p:nvPr>
-        </p:nvSpPr>
-        <p:spPr/>
-        <p:txBody>
-          <a:bodyPr/>
-          <a:lstStyle/>
-          <a:p>
-            <a:fld id="{F7021451-1387-4CA6-816F-3879F97B5CBC}" type="slidenum">
-              <a:rPr lang="en-US"/>
-              <a:t>12</a:t>
-            </a:fld>
-            <a:endParaRPr lang="en-US"/>
-          </a:p>
-        </p:txBody>
-      </p:sp>
-    </p:spTree>
-    <p:extLst>
-      <p:ext uri="{BB962C8B-B14F-4D97-AF65-F5344CB8AC3E}">
-        <p14:creationId xmlns:p14="http://schemas.microsoft.com/office/powerpoint/2010/main" val="1024086991"/>
-      </p:ext>
-    </p:extLst>
-  </p:cSld>
-  <p:clrMapOvr>
-    <a:masterClrMapping/>
-  </p:clrMapOvr>
-</p:notes>
-</file>
-
-<file path=ppt/notesSlides/notesSlide13.xml><?xml version="1.0" encoding="utf-8"?>
-<p:notes xmlns:a="http://schemas.openxmlformats.org/drawingml/2006/main" xmlns:r="http://schemas.openxmlformats.org/officeDocument/2006/relationships" xmlns:p="http://schemas.openxmlformats.org/presentationml/2006/main">
-  <p:cSld>
-    <p:spTree>
-      <p:nvGrpSpPr>
-        <p:cNvPr id="1" name=""/>
-        <p:cNvGrpSpPr/>
-        <p:nvPr/>
-      </p:nvGrpSpPr>
-      <p:grpSpPr>
-        <a:xfrm>
-          <a:off x="0" y="0"/>
-          <a:ext cx="0" cy="0"/>
-          <a:chOff x="0" y="0"/>
-          <a:chExt cx="0" cy="0"/>
-        </a:xfrm>
-      </p:grpSpPr>
-      <p:sp>
-        <p:nvSpPr>
-          <p:cNvPr id="2" name="Slide Image Placeholder 1"/>
-          <p:cNvSpPr>
-            <a:spLocks noGrp="1" noRot="1" noChangeAspect="1"/>
-          </p:cNvSpPr>
-          <p:nvPr>
-            <p:ph type="sldImg"/>
-          </p:nvPr>
-        </p:nvSpPr>
-        <p:spPr/>
-      </p:sp>
-      <p:sp>
-        <p:nvSpPr>
-          <p:cNvPr id="3" name="Notes Placeholder 2"/>
-          <p:cNvSpPr>
-            <a:spLocks noGrp="1"/>
-          </p:cNvSpPr>
-          <p:nvPr>
-            <p:ph type="body" idx="1"/>
-          </p:nvPr>
-        </p:nvSpPr>
-        <p:spPr/>
-        <p:txBody>
-          <a:bodyPr/>
-          <a:lstStyle/>
-          <a:p>
-            <a:r>
-              <a:rPr lang="en-US" dirty="0"/>
-              <a:t>Scalability from 250 to 5,000 taxpayers shows near-linear scaling. Throughput stabilizes at 2,100-2,200 records per second across all scales.
-For production projection: 100,000 taxpayers would take approximately 45 minutes, fitting within a nightly batch window. Linear confidence is high because throughput remains consistent with no performance cliffs.</a:t>
-            </a:r>
-          </a:p>
-        </p:txBody>
-      </p:sp>
-      <p:sp>
-        <p:nvSpPr>
-          <p:cNvPr id="4" name="Slide Number Placeholder 3"/>
-          <p:cNvSpPr>
-            <a:spLocks noGrp="1"/>
-          </p:cNvSpPr>
-          <p:nvPr>
-            <p:ph type="sldNum" sz="quarter" idx="10"/>
-          </p:nvPr>
-        </p:nvSpPr>
-        <p:spPr/>
-        <p:txBody>
-          <a:bodyPr/>
-          <a:lstStyle/>
-          <a:p>
-            <a:fld id="{F7021451-1387-4CA6-816F-3879F97B5CBC}" type="slidenum">
-              <a:rPr lang="en-US"/>
-              <a:t>13</a:t>
-            </a:fld>
-            <a:endParaRPr lang="en-US"/>
-          </a:p>
-        </p:txBody>
-      </p:sp>
-    </p:spTree>
-    <p:extLst>
-      <p:ext uri="{BB962C8B-B14F-4D97-AF65-F5344CB8AC3E}">
-        <p14:creationId xmlns:p14="http://schemas.microsoft.com/office/powerpoint/2010/main" val="1024086991"/>
-      </p:ext>
-    </p:extLst>
-  </p:cSld>
-  <p:clrMapOvr>
-    <a:masterClrMapping/>
-  </p:clrMapOvr>
-</p:notes>
-</file>
-
 <file path=ppt/notesSlides/notesSlide14.xml><?xml version="1.0" encoding="utf-8"?>
 <p:notes xmlns:a="http://schemas.openxmlformats.org/drawingml/2006/main" xmlns:r="http://schemas.openxmlformats.org/officeDocument/2006/relationships" xmlns:p="http://schemas.openxmlformats.org/presentationml/2006/main">
   <p:cSld>
@@ -2978,7 +2708,10 @@
         </p:spPr>
         <p:txBody>
           <a:bodyPr/>
-          <a:p/>
+          <a:lstStyle/>
+          <a:p>
+            <a:endParaRPr/>
+          </a:p>
         </p:txBody>
       </p:sp>
       <p:sp>
@@ -3011,7 +2744,7 @@
                   <a:srgbClr val="64748B"/>
                 </a:solidFill>
               </a:rPr>
-              <a:t>10 / 18</a:t>
+              <a:t>10 / 15</a:t>
             </a:r>
             <a:endParaRPr lang="en-US" sz="900" dirty="0"/>
           </a:p>
@@ -3077,7 +2810,10 @@
         </p:spPr>
         <p:txBody>
           <a:bodyPr/>
-          <a:p/>
+          <a:lstStyle/>
+          <a:p>
+            <a:endParaRPr/>
+          </a:p>
         </p:txBody>
       </p:sp>
       <p:sp>
@@ -3108,7 +2844,10 @@
         </p:spPr>
         <p:txBody>
           <a:bodyPr/>
-          <a:p/>
+          <a:lstStyle/>
+          <a:p>
+            <a:endParaRPr/>
+          </a:p>
         </p:txBody>
       </p:sp>
       <p:sp>
@@ -3132,7 +2871,10 @@
         </p:spPr>
         <p:txBody>
           <a:bodyPr/>
-          <a:p/>
+          <a:lstStyle/>
+          <a:p>
+            <a:endParaRPr/>
+          </a:p>
         </p:txBody>
       </p:sp>
       <p:sp>
@@ -3274,7 +3016,10 @@
         </p:spPr>
         <p:txBody>
           <a:bodyPr/>
-          <a:p/>
+          <a:lstStyle/>
+          <a:p>
+            <a:endParaRPr/>
+          </a:p>
         </p:txBody>
       </p:sp>
       <p:sp>
@@ -3298,7 +3043,10 @@
         </p:spPr>
         <p:txBody>
           <a:bodyPr/>
-          <a:p/>
+          <a:lstStyle/>
+          <a:p>
+            <a:endParaRPr/>
+          </a:p>
         </p:txBody>
       </p:sp>
       <p:sp>
@@ -3440,7 +3188,10 @@
         </p:spPr>
         <p:txBody>
           <a:bodyPr/>
-          <a:p/>
+          <a:lstStyle/>
+          <a:p>
+            <a:endParaRPr/>
+          </a:p>
         </p:txBody>
       </p:sp>
       <p:sp>
@@ -3464,7 +3215,10 @@
         </p:spPr>
         <p:txBody>
           <a:bodyPr/>
-          <a:p/>
+          <a:lstStyle/>
+          <a:p>
+            <a:endParaRPr/>
+          </a:p>
         </p:txBody>
       </p:sp>
       <p:sp>
@@ -3606,7 +3360,10 @@
         </p:spPr>
         <p:txBody>
           <a:bodyPr/>
-          <a:p/>
+          <a:lstStyle/>
+          <a:p>
+            <a:endParaRPr/>
+          </a:p>
         </p:txBody>
       </p:sp>
       <p:sp>
@@ -3630,7 +3387,10 @@
         </p:spPr>
         <p:txBody>
           <a:bodyPr/>
-          <a:p/>
+          <a:lstStyle/>
+          <a:p>
+            <a:endParaRPr/>
+          </a:p>
         </p:txBody>
       </p:sp>
       <p:sp>
@@ -3753,6005 +3513,6 @@
 </file>
 
 <file path=ppt/slides/slide11.xml><?xml version="1.0" encoding="utf-8"?>
-<p:sld xmlns:a="http://schemas.openxmlformats.org/drawingml/2006/main" xmlns:r="http://schemas.openxmlformats.org/officeDocument/2006/relationships" xmlns:p="http://schemas.openxmlformats.org/presentationml/2006/main">
-  <p:cSld name="Slide 11">
-    <p:bg>
-      <p:bgPr>
-        <a:solidFill>
-          <a:srgbClr val="F7FAFA"/>
-        </a:solidFill>
-        <a:effectLst/>
-      </p:bgPr>
-    </p:bg>
-    <p:spTree>
-      <p:nvGrpSpPr>
-        <p:cNvPr id="1" name=""/>
-        <p:cNvGrpSpPr/>
-        <p:nvPr/>
-      </p:nvGrpSpPr>
-      <p:grpSpPr>
-        <a:xfrm>
-          <a:off x="0" y="0"/>
-          <a:ext cx="0" cy="0"/>
-          <a:chOff x="0" y="0"/>
-          <a:chExt cx="0" cy="0"/>
-        </a:xfrm>
-      </p:grpSpPr>
-      <p:sp>
-        <p:nvSpPr>
-          <p:cNvPr id="2" name="Shape 0"/>
-          <p:cNvSpPr/>
-          <p:nvPr/>
-        </p:nvSpPr>
-        <p:spPr>
-          <a:xfrm>
-            <a:off x="0" y="0"/>
-            <a:ext cx="54864" cy="5143500"/>
-          </a:xfrm>
-          <a:prstGeom prst="rect">
-            <a:avLst/>
-          </a:prstGeom>
-          <a:solidFill>
-            <a:srgbClr val="2A9D8F"/>
-          </a:solidFill>
-          <a:ln/>
-        </p:spPr>
-        <p:txBody>
-          <a:bodyPr/>
-          <a:p/>
-        </p:txBody>
-      </p:sp>
-      <p:sp>
-        <p:nvSpPr>
-          <p:cNvPr id="3" name="Text 1"/>
-          <p:cNvSpPr/>
-          <p:nvPr/>
-        </p:nvSpPr>
-        <p:spPr>
-          <a:xfrm>
-            <a:off x="8046720" y="4754880"/>
-            <a:ext cx="914400" cy="274320"/>
-          </a:xfrm>
-          <a:prstGeom prst="rect">
-            <a:avLst/>
-          </a:prstGeom>
-          <a:noFill/>
-          <a:ln/>
-        </p:spPr>
-        <p:txBody>
-          <a:bodyPr wrap="square" rtlCol="0" anchor="ctr"/>
-          <a:lstStyle/>
-          <a:p>
-            <a:pPr marL="0" indent="0" algn="r">
-              <a:buNone/>
-            </a:pPr>
-            <a:r>
-              <a:rPr lang="en-US" sz="900" dirty="0">
-                <a:solidFill>
-                  <a:srgbClr val="64748B"/>
-                </a:solidFill>
-              </a:rPr>
-              <a:t>11 / 18</a:t>
-            </a:r>
-            <a:endParaRPr lang="en-US" sz="900" dirty="0"/>
-          </a:p>
-        </p:txBody>
-      </p:sp>
-      <p:sp>
-        <p:nvSpPr>
-          <p:cNvPr id="4" name="Text 2"/>
-          <p:cNvSpPr/>
-          <p:nvPr/>
-        </p:nvSpPr>
-        <p:spPr>
-          <a:xfrm>
-            <a:off x="457200" y="182880"/>
-            <a:ext cx="8229600" cy="502920"/>
-          </a:xfrm>
-          <a:prstGeom prst="rect">
-            <a:avLst/>
-          </a:prstGeom>
-          <a:noFill/>
-          <a:ln/>
-        </p:spPr>
-        <p:txBody>
-          <a:bodyPr wrap="square" rtlCol="0" anchor="ctr"/>
-          <a:lstStyle/>
-          <a:p>
-            <a:pPr marL="0" indent="0">
-              <a:buNone/>
-            </a:pPr>
-            <a:r>
-              <a:rPr lang="en-US" sz="2200" b="1" dirty="0">
-                <a:solidFill>
-                  <a:srgbClr val="1B3A5C"/>
-                </a:solidFill>
-                <a:latin typeface="Georgia" pitchFamily="34" charset="0"/>
-                <a:ea typeface="Georgia" pitchFamily="34" charset="-122"/>
-                <a:cs typeface="Georgia" pitchFamily="34" charset="-120"/>
-              </a:rPr>
-              <a:t>ETL Load Time Benchmarks</a:t>
-            </a:r>
-            <a:endParaRPr lang="en-US" sz="2200" dirty="0"/>
-          </a:p>
-        </p:txBody>
-      </p:sp>
-      <p:sp>
-        <p:nvSpPr>
-          <p:cNvPr id="5" name="Shape 3"/>
-          <p:cNvSpPr/>
-          <p:nvPr/>
-        </p:nvSpPr>
-        <p:spPr>
-          <a:xfrm>
-            <a:off x="457200" y="731520"/>
-            <a:ext cx="1097280" cy="36576"/>
-          </a:xfrm>
-          <a:prstGeom prst="rect">
-            <a:avLst/>
-          </a:prstGeom>
-          <a:solidFill>
-            <a:srgbClr val="2A9D8F"/>
-          </a:solidFill>
-          <a:ln/>
-        </p:spPr>
-        <p:txBody>
-          <a:bodyPr/>
-          <a:p/>
-        </p:txBody>
-      </p:sp>
-      <p:graphicFrame>
-        <p:nvGraphicFramePr>
-          <p:cNvPr id="12" name="Table 0"/>
-          <p:cNvGraphicFramePr>
-            <a:graphicFrameLocks noGrp="1"/>
-          </p:cNvGraphicFramePr>
-          <p:nvPr>
-            <p:extLst>
-              <p:ext uri="{D42A27DB-BD31-4B8C-83A1-F6EECF244321}">
-                <p14:modId xmlns:p14="http://schemas.microsoft.com/office/powerpoint/2010/main" val="1579011935"/>
-              </p:ext>
-            </p:extLst>
-          </p:nvPr>
-        </p:nvGraphicFramePr>
-        <p:xfrm>
-          <a:off x="274320" y="1005840"/>
-          <a:ext cx="8595360" cy="1371600"/>
-        </p:xfrm>
-        <a:graphic>
-          <a:graphicData uri="http://schemas.openxmlformats.org/drawingml/2006/table">
-            <a:tbl>
-              <a:tblPr/>
-              <a:tblGrid>
-                <a:gridCol w="1828800">
-                  <a:extLst>
-                    <a:ext uri="{9D8B030D-6E8A-4147-A177-3AD203B41FA5}">
-                      <a16:colId xmlns:a16="http://schemas.microsoft.com/office/drawing/2014/main" val="20000"/>
-                    </a:ext>
-                  </a:extLst>
-                </a:gridCol>
-                <a:gridCol w="2011680">
-                  <a:extLst>
-                    <a:ext uri="{9D8B030D-6E8A-4147-A177-3AD203B41FA5}">
-                      <a16:colId xmlns:a16="http://schemas.microsoft.com/office/drawing/2014/main" val="20001"/>
-                    </a:ext>
-                  </a:extLst>
-                </a:gridCol>
-                <a:gridCol w="1554480">
-                  <a:extLst>
-                    <a:ext uri="{9D8B030D-6E8A-4147-A177-3AD203B41FA5}">
-                      <a16:colId xmlns:a16="http://schemas.microsoft.com/office/drawing/2014/main" val="20002"/>
-                    </a:ext>
-                  </a:extLst>
-                </a:gridCol>
-                <a:gridCol w="1645920">
-                  <a:extLst>
-                    <a:ext uri="{9D8B030D-6E8A-4147-A177-3AD203B41FA5}">
-                      <a16:colId xmlns:a16="http://schemas.microsoft.com/office/drawing/2014/main" val="20003"/>
-                    </a:ext>
-                  </a:extLst>
-                </a:gridCol>
-                <a:gridCol w="1554480">
-                  <a:extLst>
-                    <a:ext uri="{9D8B030D-6E8A-4147-A177-3AD203B41FA5}">
-                      <a16:colId xmlns:a16="http://schemas.microsoft.com/office/drawing/2014/main" val="20004"/>
-                    </a:ext>
-                  </a:extLst>
-                </a:gridCol>
-              </a:tblGrid>
-              <a:tr h="0">
-                <a:tc>
-                  <a:txBody>
-                    <a:bodyPr/>
-                    <a:lstStyle/>
-                    <a:p>
-                      <a:pPr marL="0" indent="0">
-                        <a:buNone/>
-                      </a:pPr>
-                      <a:r>
-                        <a:rPr lang="en-US" sz="900" b="1" dirty="0">
-                          <a:solidFill>
-                            <a:srgbClr val="FFFFFF"/>
-                          </a:solidFill>
-                        </a:rPr>
-                        <a:t>Layer</a:t>
-                      </a:r>
-                      <a:endParaRPr lang="en-US" sz="900" dirty="0"/>
-                    </a:p>
-                  </a:txBody>
-                  <a:tcPr>
-                    <a:lnL w="6350" cap="flat" cmpd="sng" algn="ctr">
-                      <a:solidFill>
-                        <a:srgbClr val="E2E8F0"/>
-                      </a:solidFill>
-                      <a:prstDash val="solid"/>
-                      <a:round/>
-                      <a:headEnd type="none" w="med" len="med"/>
-                      <a:tailEnd type="none" w="med" len="med"/>
-                    </a:lnL>
-                    <a:lnR w="6350" cap="flat" cmpd="sng" algn="ctr">
-                      <a:solidFill>
-                        <a:srgbClr val="E2E8F0"/>
-                      </a:solidFill>
-                      <a:prstDash val="solid"/>
-                      <a:round/>
-                      <a:headEnd type="none" w="med" len="med"/>
-                      <a:tailEnd type="none" w="med" len="med"/>
-                    </a:lnR>
-                    <a:lnT w="6350" cap="flat" cmpd="sng" algn="ctr">
-                      <a:solidFill>
-                        <a:srgbClr val="E2E8F0"/>
-                      </a:solidFill>
-                      <a:prstDash val="solid"/>
-                      <a:round/>
-                      <a:headEnd type="none" w="med" len="med"/>
-                      <a:tailEnd type="none" w="med" len="med"/>
-                    </a:lnT>
-                    <a:lnB w="6350" cap="flat" cmpd="sng" algn="ctr">
-                      <a:solidFill>
-                        <a:srgbClr val="E2E8F0"/>
-                      </a:solidFill>
-                      <a:prstDash val="solid"/>
-                      <a:round/>
-                      <a:headEnd type="none" w="med" len="med"/>
-                      <a:tailEnd type="none" w="med" len="med"/>
-                    </a:lnB>
-                    <a:solidFill>
-                      <a:srgbClr val="1B3A5C"/>
-                    </a:solidFill>
-                  </a:tcPr>
-                </a:tc>
-                <a:tc>
-                  <a:txBody>
-                    <a:bodyPr/>
-                    <a:lstStyle/>
-                    <a:p>
-                      <a:pPr marL="0" indent="0">
-                        <a:buNone/>
-                      </a:pPr>
-                      <a:r>
-                        <a:rPr lang="en-US" sz="900" b="1" dirty="0">
-                          <a:solidFill>
-                            <a:srgbClr val="FFFFFF"/>
-                          </a:solidFill>
-                        </a:rPr>
-                        <a:t>Objects (Steps)</a:t>
-                      </a:r>
-                      <a:endParaRPr lang="en-US" sz="900" dirty="0"/>
-                    </a:p>
-                  </a:txBody>
-                  <a:tcPr>
-                    <a:lnL w="6350" cap="flat" cmpd="sng" algn="ctr">
-                      <a:solidFill>
-                        <a:srgbClr val="E2E8F0"/>
-                      </a:solidFill>
-                      <a:prstDash val="solid"/>
-                      <a:round/>
-                      <a:headEnd type="none" w="med" len="med"/>
-                      <a:tailEnd type="none" w="med" len="med"/>
-                    </a:lnL>
-                    <a:lnR w="6350" cap="flat" cmpd="sng" algn="ctr">
-                      <a:solidFill>
-                        <a:srgbClr val="E2E8F0"/>
-                      </a:solidFill>
-                      <a:prstDash val="solid"/>
-                      <a:round/>
-                      <a:headEnd type="none" w="med" len="med"/>
-                      <a:tailEnd type="none" w="med" len="med"/>
-                    </a:lnR>
-                    <a:lnT w="6350" cap="flat" cmpd="sng" algn="ctr">
-                      <a:solidFill>
-                        <a:srgbClr val="E2E8F0"/>
-                      </a:solidFill>
-                      <a:prstDash val="solid"/>
-                      <a:round/>
-                      <a:headEnd type="none" w="med" len="med"/>
-                      <a:tailEnd type="none" w="med" len="med"/>
-                    </a:lnT>
-                    <a:lnB w="6350" cap="flat" cmpd="sng" algn="ctr">
-                      <a:solidFill>
-                        <a:srgbClr val="E2E8F0"/>
-                      </a:solidFill>
-                      <a:prstDash val="solid"/>
-                      <a:round/>
-                      <a:headEnd type="none" w="med" len="med"/>
-                      <a:tailEnd type="none" w="med" len="med"/>
-                    </a:lnB>
-                    <a:solidFill>
-                      <a:srgbClr val="1B3A5C"/>
-                    </a:solidFill>
-                  </a:tcPr>
-                </a:tc>
-                <a:tc>
-                  <a:txBody>
-                    <a:bodyPr/>
-                    <a:lstStyle/>
-                    <a:p>
-                      <a:pPr marL="0" indent="0">
-                        <a:buNone/>
-                      </a:pPr>
-                      <a:r>
-                        <a:rPr lang="en-US" sz="900" b="1" dirty="0">
-                          <a:solidFill>
-                            <a:srgbClr val="FFFFFF"/>
-                          </a:solidFill>
-                        </a:rPr>
-                        <a:t>Full Load (s)</a:t>
-                      </a:r>
-                      <a:endParaRPr lang="en-US" sz="900" dirty="0"/>
-                    </a:p>
-                  </a:txBody>
-                  <a:tcPr>
-                    <a:lnL w="6350" cap="flat" cmpd="sng" algn="ctr">
-                      <a:solidFill>
-                        <a:srgbClr val="E2E8F0"/>
-                      </a:solidFill>
-                      <a:prstDash val="solid"/>
-                      <a:round/>
-                      <a:headEnd type="none" w="med" len="med"/>
-                      <a:tailEnd type="none" w="med" len="med"/>
-                    </a:lnL>
-                    <a:lnR w="6350" cap="flat" cmpd="sng" algn="ctr">
-                      <a:solidFill>
-                        <a:srgbClr val="E2E8F0"/>
-                      </a:solidFill>
-                      <a:prstDash val="solid"/>
-                      <a:round/>
-                      <a:headEnd type="none" w="med" len="med"/>
-                      <a:tailEnd type="none" w="med" len="med"/>
-                    </a:lnR>
-                    <a:lnT w="6350" cap="flat" cmpd="sng" algn="ctr">
-                      <a:solidFill>
-                        <a:srgbClr val="E2E8F0"/>
-                      </a:solidFill>
-                      <a:prstDash val="solid"/>
-                      <a:round/>
-                      <a:headEnd type="none" w="med" len="med"/>
-                      <a:tailEnd type="none" w="med" len="med"/>
-                    </a:lnT>
-                    <a:lnB w="6350" cap="flat" cmpd="sng" algn="ctr">
-                      <a:solidFill>
-                        <a:srgbClr val="E2E8F0"/>
-                      </a:solidFill>
-                      <a:prstDash val="solid"/>
-                      <a:round/>
-                      <a:headEnd type="none" w="med" len="med"/>
-                      <a:tailEnd type="none" w="med" len="med"/>
-                    </a:lnB>
-                    <a:solidFill>
-                      <a:srgbClr val="1B3A5C"/>
-                    </a:solidFill>
-                  </a:tcPr>
-                </a:tc>
-                <a:tc>
-                  <a:txBody>
-                    <a:bodyPr/>
-                    <a:lstStyle/>
-                    <a:p>
-                      <a:pPr marL="0" indent="0">
-                        <a:buNone/>
-                      </a:pPr>
-                      <a:r>
-                        <a:rPr lang="en-US" sz="900" b="1" dirty="0">
-                          <a:solidFill>
-                            <a:srgbClr val="FFFFFF"/>
-                          </a:solidFill>
-                        </a:rPr>
-                        <a:t>Incremental (s)</a:t>
-                      </a:r>
-                      <a:endParaRPr lang="en-US" sz="900" dirty="0"/>
-                    </a:p>
-                  </a:txBody>
-                  <a:tcPr>
-                    <a:lnL w="6350" cap="flat" cmpd="sng" algn="ctr">
-                      <a:solidFill>
-                        <a:srgbClr val="E2E8F0"/>
-                      </a:solidFill>
-                      <a:prstDash val="solid"/>
-                      <a:round/>
-                      <a:headEnd type="none" w="med" len="med"/>
-                      <a:tailEnd type="none" w="med" len="med"/>
-                    </a:lnL>
-                    <a:lnR w="6350" cap="flat" cmpd="sng" algn="ctr">
-                      <a:solidFill>
-                        <a:srgbClr val="E2E8F0"/>
-                      </a:solidFill>
-                      <a:prstDash val="solid"/>
-                      <a:round/>
-                      <a:headEnd type="none" w="med" len="med"/>
-                      <a:tailEnd type="none" w="med" len="med"/>
-                    </a:lnR>
-                    <a:lnT w="6350" cap="flat" cmpd="sng" algn="ctr">
-                      <a:solidFill>
-                        <a:srgbClr val="E2E8F0"/>
-                      </a:solidFill>
-                      <a:prstDash val="solid"/>
-                      <a:round/>
-                      <a:headEnd type="none" w="med" len="med"/>
-                      <a:tailEnd type="none" w="med" len="med"/>
-                    </a:lnT>
-                    <a:lnB w="6350" cap="flat" cmpd="sng" algn="ctr">
-                      <a:solidFill>
-                        <a:srgbClr val="E2E8F0"/>
-                      </a:solidFill>
-                      <a:prstDash val="solid"/>
-                      <a:round/>
-                      <a:headEnd type="none" w="med" len="med"/>
-                      <a:tailEnd type="none" w="med" len="med"/>
-                    </a:lnB>
-                    <a:solidFill>
-                      <a:srgbClr val="1B3A5C"/>
-                    </a:solidFill>
-                  </a:tcPr>
-                </a:tc>
-                <a:tc>
-                  <a:txBody>
-                    <a:bodyPr/>
-                    <a:lstStyle/>
-                    <a:p>
-                      <a:pPr marL="0" indent="0">
-                        <a:buNone/>
-                      </a:pPr>
-                      <a:r>
-                        <a:rPr lang="en-US" sz="900" b="1" dirty="0">
-                          <a:solidFill>
-                            <a:srgbClr val="FFFFFF"/>
-                          </a:solidFill>
-                        </a:rPr>
-                        <a:t>Records</a:t>
-                      </a:r>
-                      <a:endParaRPr lang="en-US" sz="900" dirty="0"/>
-                    </a:p>
-                  </a:txBody>
-                  <a:tcPr>
-                    <a:lnL w="6350" cap="flat" cmpd="sng" algn="ctr">
-                      <a:solidFill>
-                        <a:srgbClr val="E2E8F0"/>
-                      </a:solidFill>
-                      <a:prstDash val="solid"/>
-                      <a:round/>
-                      <a:headEnd type="none" w="med" len="med"/>
-                      <a:tailEnd type="none" w="med" len="med"/>
-                    </a:lnL>
-                    <a:lnR w="6350" cap="flat" cmpd="sng" algn="ctr">
-                      <a:solidFill>
-                        <a:srgbClr val="E2E8F0"/>
-                      </a:solidFill>
-                      <a:prstDash val="solid"/>
-                      <a:round/>
-                      <a:headEnd type="none" w="med" len="med"/>
-                      <a:tailEnd type="none" w="med" len="med"/>
-                    </a:lnR>
-                    <a:lnT w="6350" cap="flat" cmpd="sng" algn="ctr">
-                      <a:solidFill>
-                        <a:srgbClr val="E2E8F0"/>
-                      </a:solidFill>
-                      <a:prstDash val="solid"/>
-                      <a:round/>
-                      <a:headEnd type="none" w="med" len="med"/>
-                      <a:tailEnd type="none" w="med" len="med"/>
-                    </a:lnT>
-                    <a:lnB w="6350" cap="flat" cmpd="sng" algn="ctr">
-                      <a:solidFill>
-                        <a:srgbClr val="E2E8F0"/>
-                      </a:solidFill>
-                      <a:prstDash val="solid"/>
-                      <a:round/>
-                      <a:headEnd type="none" w="med" len="med"/>
-                      <a:tailEnd type="none" w="med" len="med"/>
-                    </a:lnB>
-                    <a:solidFill>
-                      <a:srgbClr val="1B3A5C"/>
-                    </a:solidFill>
-                  </a:tcPr>
-                </a:tc>
-                <a:extLst>
-                  <a:ext uri="{0D108BD9-81ED-4DB2-BD59-A6C34878D82A}">
-                    <a16:rowId xmlns:a16="http://schemas.microsoft.com/office/drawing/2014/main" val="10000"/>
-                  </a:ext>
-                </a:extLst>
-              </a:tr>
-              <a:tr h="0">
-                <a:tc>
-                  <a:txBody>
-                    <a:bodyPr/>
-                    <a:lstStyle/>
-                    <a:p>
-                      <a:pPr marL="0" indent="0">
-                        <a:buNone/>
-                      </a:pPr>
-                      <a:r>
-                        <a:rPr lang="en-US" sz="900" b="1" dirty="0">
-                          <a:solidFill>
-                            <a:srgbClr val="1B3A5C"/>
-                          </a:solidFill>
-                        </a:rPr>
-                        <a:t>Staging</a:t>
-                      </a:r>
-                      <a:endParaRPr lang="en-US" sz="900" dirty="0"/>
-                    </a:p>
-                  </a:txBody>
-                  <a:tcPr>
-                    <a:lnL w="6350" cap="flat" cmpd="sng" algn="ctr">
-                      <a:solidFill>
-                        <a:srgbClr val="E2E8F0"/>
-                      </a:solidFill>
-                      <a:prstDash val="solid"/>
-                      <a:round/>
-                      <a:headEnd type="none" w="med" len="med"/>
-                      <a:tailEnd type="none" w="med" len="med"/>
-                    </a:lnL>
-                    <a:lnR w="6350" cap="flat" cmpd="sng" algn="ctr">
-                      <a:solidFill>
-                        <a:srgbClr val="E2E8F0"/>
-                      </a:solidFill>
-                      <a:prstDash val="solid"/>
-                      <a:round/>
-                      <a:headEnd type="none" w="med" len="med"/>
-                      <a:tailEnd type="none" w="med" len="med"/>
-                    </a:lnR>
-                    <a:lnT w="6350" cap="flat" cmpd="sng" algn="ctr">
-                      <a:solidFill>
-                        <a:srgbClr val="E2E8F0"/>
-                      </a:solidFill>
-                      <a:prstDash val="solid"/>
-                      <a:round/>
-                      <a:headEnd type="none" w="med" len="med"/>
-                      <a:tailEnd type="none" w="med" len="med"/>
-                    </a:lnT>
-                    <a:lnB w="6350" cap="flat" cmpd="sng" algn="ctr">
-                      <a:solidFill>
-                        <a:srgbClr val="E2E8F0"/>
-                      </a:solidFill>
-                      <a:prstDash val="solid"/>
-                      <a:round/>
-                      <a:headEnd type="none" w="med" len="med"/>
-                      <a:tailEnd type="none" w="med" len="med"/>
-                    </a:lnB>
-                    <a:solidFill>
-                      <a:srgbClr val="FFFFFF"/>
-                    </a:solidFill>
-                  </a:tcPr>
-                </a:tc>
-                <a:tc>
-                  <a:txBody>
-                    <a:bodyPr/>
-                    <a:lstStyle/>
-                    <a:p>
-                      <a:pPr marL="0" indent="0">
-                        <a:buNone/>
-                      </a:pPr>
-                      <a:r>
-                        <a:rPr lang="en-US" sz="900" dirty="0">
-                          <a:solidFill>
-                            <a:srgbClr val="1E293B"/>
-                          </a:solidFill>
-                        </a:rPr>
-                        <a:t>9 tables (9 steps)</a:t>
-                      </a:r>
-                      <a:endParaRPr lang="en-US" sz="900" dirty="0"/>
-                    </a:p>
-                  </a:txBody>
-                  <a:tcPr>
-                    <a:lnL w="6350" cap="flat" cmpd="sng" algn="ctr">
-                      <a:solidFill>
-                        <a:srgbClr val="E2E8F0"/>
-                      </a:solidFill>
-                      <a:prstDash val="solid"/>
-                      <a:round/>
-                      <a:headEnd type="none" w="med" len="med"/>
-                      <a:tailEnd type="none" w="med" len="med"/>
-                    </a:lnL>
-                    <a:lnR w="6350" cap="flat" cmpd="sng" algn="ctr">
-                      <a:solidFill>
-                        <a:srgbClr val="E2E8F0"/>
-                      </a:solidFill>
-                      <a:prstDash val="solid"/>
-                      <a:round/>
-                      <a:headEnd type="none" w="med" len="med"/>
-                      <a:tailEnd type="none" w="med" len="med"/>
-                    </a:lnR>
-                    <a:lnT w="6350" cap="flat" cmpd="sng" algn="ctr">
-                      <a:solidFill>
-                        <a:srgbClr val="E2E8F0"/>
-                      </a:solidFill>
-                      <a:prstDash val="solid"/>
-                      <a:round/>
-                      <a:headEnd type="none" w="med" len="med"/>
-                      <a:tailEnd type="none" w="med" len="med"/>
-                    </a:lnT>
-                    <a:lnB w="6350" cap="flat" cmpd="sng" algn="ctr">
-                      <a:solidFill>
-                        <a:srgbClr val="E2E8F0"/>
-                      </a:solidFill>
-                      <a:prstDash val="solid"/>
-                      <a:round/>
-                      <a:headEnd type="none" w="med" len="med"/>
-                      <a:tailEnd type="none" w="med" len="med"/>
-                    </a:lnB>
-                    <a:solidFill>
-                      <a:srgbClr val="FFFFFF"/>
-                    </a:solidFill>
-                  </a:tcPr>
-                </a:tc>
-                <a:tc>
-                  <a:txBody>
-                    <a:bodyPr/>
-                    <a:lstStyle/>
-                    <a:p>
-                      <a:pPr marL="0" indent="0">
-                        <a:buNone/>
-                      </a:pPr>
-                      <a:r>
-                        <a:rPr lang="en-US" sz="900" dirty="0">
-                          <a:solidFill>
-                            <a:srgbClr val="1E293B"/>
-                          </a:solidFill>
-                        </a:rPr>
-                        <a:t>22.8</a:t>
-                      </a:r>
-                      <a:endParaRPr lang="en-US" sz="900" dirty="0"/>
-                    </a:p>
-                  </a:txBody>
-                  <a:tcPr>
-                    <a:lnL w="6350" cap="flat" cmpd="sng" algn="ctr">
-                      <a:solidFill>
-                        <a:srgbClr val="E2E8F0"/>
-                      </a:solidFill>
-                      <a:prstDash val="solid"/>
-                      <a:round/>
-                      <a:headEnd type="none" w="med" len="med"/>
-                      <a:tailEnd type="none" w="med" len="med"/>
-                    </a:lnL>
-                    <a:lnR w="6350" cap="flat" cmpd="sng" algn="ctr">
-                      <a:solidFill>
-                        <a:srgbClr val="E2E8F0"/>
-                      </a:solidFill>
-                      <a:prstDash val="solid"/>
-                      <a:round/>
-                      <a:headEnd type="none" w="med" len="med"/>
-                      <a:tailEnd type="none" w="med" len="med"/>
-                    </a:lnR>
-                    <a:lnT w="6350" cap="flat" cmpd="sng" algn="ctr">
-                      <a:solidFill>
-                        <a:srgbClr val="E2E8F0"/>
-                      </a:solidFill>
-                      <a:prstDash val="solid"/>
-                      <a:round/>
-                      <a:headEnd type="none" w="med" len="med"/>
-                      <a:tailEnd type="none" w="med" len="med"/>
-                    </a:lnT>
-                    <a:lnB w="6350" cap="flat" cmpd="sng" algn="ctr">
-                      <a:solidFill>
-                        <a:srgbClr val="E2E8F0"/>
-                      </a:solidFill>
-                      <a:prstDash val="solid"/>
-                      <a:round/>
-                      <a:headEnd type="none" w="med" len="med"/>
-                      <a:tailEnd type="none" w="med" len="med"/>
-                    </a:lnB>
-                    <a:solidFill>
-                      <a:srgbClr val="FFFFFF"/>
-                    </a:solidFill>
-                  </a:tcPr>
-                </a:tc>
-                <a:tc>
-                  <a:txBody>
-                    <a:bodyPr/>
-                    <a:lstStyle/>
-                    <a:p>
-                      <a:pPr marL="0" indent="0">
-                        <a:buNone/>
-                      </a:pPr>
-                      <a:r>
-                        <a:rPr lang="en-US" sz="900" dirty="0">
-                          <a:solidFill>
-                            <a:srgbClr val="1E293B"/>
-                          </a:solidFill>
-                        </a:rPr>
-                        <a:t>6.0</a:t>
-                      </a:r>
-                      <a:endParaRPr lang="en-US" sz="900" dirty="0"/>
-                    </a:p>
-                  </a:txBody>
-                  <a:tcPr>
-                    <a:lnL w="6350" cap="flat" cmpd="sng" algn="ctr">
-                      <a:solidFill>
-                        <a:srgbClr val="E2E8F0"/>
-                      </a:solidFill>
-                      <a:prstDash val="solid"/>
-                      <a:round/>
-                      <a:headEnd type="none" w="med" len="med"/>
-                      <a:tailEnd type="none" w="med" len="med"/>
-                    </a:lnL>
-                    <a:lnR w="6350" cap="flat" cmpd="sng" algn="ctr">
-                      <a:solidFill>
-                        <a:srgbClr val="E2E8F0"/>
-                      </a:solidFill>
-                      <a:prstDash val="solid"/>
-                      <a:round/>
-                      <a:headEnd type="none" w="med" len="med"/>
-                      <a:tailEnd type="none" w="med" len="med"/>
-                    </a:lnR>
-                    <a:lnT w="6350" cap="flat" cmpd="sng" algn="ctr">
-                      <a:solidFill>
-                        <a:srgbClr val="E2E8F0"/>
-                      </a:solidFill>
-                      <a:prstDash val="solid"/>
-                      <a:round/>
-                      <a:headEnd type="none" w="med" len="med"/>
-                      <a:tailEnd type="none" w="med" len="med"/>
-                    </a:lnT>
-                    <a:lnB w="6350" cap="flat" cmpd="sng" algn="ctr">
-                      <a:solidFill>
-                        <a:srgbClr val="E2E8F0"/>
-                      </a:solidFill>
-                      <a:prstDash val="solid"/>
-                      <a:round/>
-                      <a:headEnd type="none" w="med" len="med"/>
-                      <a:tailEnd type="none" w="med" len="med"/>
-                    </a:lnB>
-                    <a:solidFill>
-                      <a:srgbClr val="FFFFFF"/>
-                    </a:solidFill>
-                  </a:tcPr>
-                </a:tc>
-                <a:tc>
-                  <a:txBody>
-                    <a:bodyPr/>
-                    <a:lstStyle/>
-                    <a:p>
-                      <a:pPr marL="0" indent="0">
-                        <a:buNone/>
-                      </a:pPr>
-                      <a:r>
-                        <a:rPr lang="en-US" sz="900" dirty="0">
-                          <a:solidFill>
-                            <a:srgbClr val="1E293B"/>
-                          </a:solidFill>
-                        </a:rPr>
-                        <a:t>58,813</a:t>
-                      </a:r>
-                      <a:endParaRPr lang="en-US" sz="900" dirty="0"/>
-                    </a:p>
-                  </a:txBody>
-                  <a:tcPr>
-                    <a:lnL w="6350" cap="flat" cmpd="sng" algn="ctr">
-                      <a:solidFill>
-                        <a:srgbClr val="E2E8F0"/>
-                      </a:solidFill>
-                      <a:prstDash val="solid"/>
-                      <a:round/>
-                      <a:headEnd type="none" w="med" len="med"/>
-                      <a:tailEnd type="none" w="med" len="med"/>
-                    </a:lnL>
-                    <a:lnR w="6350" cap="flat" cmpd="sng" algn="ctr">
-                      <a:solidFill>
-                        <a:srgbClr val="E2E8F0"/>
-                      </a:solidFill>
-                      <a:prstDash val="solid"/>
-                      <a:round/>
-                      <a:headEnd type="none" w="med" len="med"/>
-                      <a:tailEnd type="none" w="med" len="med"/>
-                    </a:lnR>
-                    <a:lnT w="6350" cap="flat" cmpd="sng" algn="ctr">
-                      <a:solidFill>
-                        <a:srgbClr val="E2E8F0"/>
-                      </a:solidFill>
-                      <a:prstDash val="solid"/>
-                      <a:round/>
-                      <a:headEnd type="none" w="med" len="med"/>
-                      <a:tailEnd type="none" w="med" len="med"/>
-                    </a:lnT>
-                    <a:lnB w="6350" cap="flat" cmpd="sng" algn="ctr">
-                      <a:solidFill>
-                        <a:srgbClr val="E2E8F0"/>
-                      </a:solidFill>
-                      <a:prstDash val="solid"/>
-                      <a:round/>
-                      <a:headEnd type="none" w="med" len="med"/>
-                      <a:tailEnd type="none" w="med" len="med"/>
-                    </a:lnB>
-                    <a:solidFill>
-                      <a:srgbClr val="FFFFFF"/>
-                    </a:solidFill>
-                  </a:tcPr>
-                </a:tc>
-                <a:extLst>
-                  <a:ext uri="{0D108BD9-81ED-4DB2-BD59-A6C34878D82A}">
-                    <a16:rowId xmlns:a16="http://schemas.microsoft.com/office/drawing/2014/main" val="10001"/>
-                  </a:ext>
-                </a:extLst>
-              </a:tr>
-              <a:tr h="0">
-                <a:tc>
-                  <a:txBody>
-                    <a:bodyPr/>
-                    <a:lstStyle/>
-                    <a:p>
-                      <a:pPr marL="0" indent="0">
-                        <a:buNone/>
-                      </a:pPr>
-                      <a:r>
-                        <a:rPr lang="en-US" sz="900" b="1" dirty="0">
-                          <a:solidFill>
-                            <a:srgbClr val="1B3A5C"/>
-                          </a:solidFill>
-                        </a:rPr>
-                        <a:t>Bronze (H+S+L)</a:t>
-                      </a:r>
-                      <a:endParaRPr lang="en-US" sz="900" dirty="0"/>
-                    </a:p>
-                  </a:txBody>
-                  <a:tcPr>
-                    <a:lnL w="6350" cap="flat" cmpd="sng" algn="ctr">
-                      <a:solidFill>
-                        <a:srgbClr val="E2E8F0"/>
-                      </a:solidFill>
-                      <a:prstDash val="solid"/>
-                      <a:round/>
-                      <a:headEnd type="none" w="med" len="med"/>
-                      <a:tailEnd type="none" w="med" len="med"/>
-                    </a:lnL>
-                    <a:lnR w="6350" cap="flat" cmpd="sng" algn="ctr">
-                      <a:solidFill>
-                        <a:srgbClr val="E2E8F0"/>
-                      </a:solidFill>
-                      <a:prstDash val="solid"/>
-                      <a:round/>
-                      <a:headEnd type="none" w="med" len="med"/>
-                      <a:tailEnd type="none" w="med" len="med"/>
-                    </a:lnR>
-                    <a:lnT w="6350" cap="flat" cmpd="sng" algn="ctr">
-                      <a:solidFill>
-                        <a:srgbClr val="E2E8F0"/>
-                      </a:solidFill>
-                      <a:prstDash val="solid"/>
-                      <a:round/>
-                      <a:headEnd type="none" w="med" len="med"/>
-                      <a:tailEnd type="none" w="med" len="med"/>
-                    </a:lnT>
-                    <a:lnB w="6350" cap="flat" cmpd="sng" algn="ctr">
-                      <a:solidFill>
-                        <a:srgbClr val="E2E8F0"/>
-                      </a:solidFill>
-                      <a:prstDash val="solid"/>
-                      <a:round/>
-                      <a:headEnd type="none" w="med" len="med"/>
-                      <a:tailEnd type="none" w="med" len="med"/>
-                    </a:lnB>
-                    <a:solidFill>
-                      <a:srgbClr val="E8F4F2"/>
-                    </a:solidFill>
-                  </a:tcPr>
-                </a:tc>
-                <a:tc>
-                  <a:txBody>
-                    <a:bodyPr/>
-                    <a:lstStyle/>
-                    <a:p>
-                      <a:pPr marL="0" indent="0">
-                        <a:buNone/>
-                      </a:pPr>
-                      <a:r>
-                        <a:rPr lang="en-US" sz="900" dirty="0">
-                          <a:solidFill>
-                            <a:srgbClr val="1E293B"/>
-                          </a:solidFill>
-                        </a:rPr>
-                        <a:t>23 objects (23 steps)</a:t>
-                      </a:r>
-                      <a:endParaRPr lang="en-US" sz="900" dirty="0"/>
-                    </a:p>
-                  </a:txBody>
-                  <a:tcPr>
-                    <a:lnL w="6350" cap="flat" cmpd="sng" algn="ctr">
-                      <a:solidFill>
-                        <a:srgbClr val="E2E8F0"/>
-                      </a:solidFill>
-                      <a:prstDash val="solid"/>
-                      <a:round/>
-                      <a:headEnd type="none" w="med" len="med"/>
-                      <a:tailEnd type="none" w="med" len="med"/>
-                    </a:lnL>
-                    <a:lnR w="6350" cap="flat" cmpd="sng" algn="ctr">
-                      <a:solidFill>
-                        <a:srgbClr val="E2E8F0"/>
-                      </a:solidFill>
-                      <a:prstDash val="solid"/>
-                      <a:round/>
-                      <a:headEnd type="none" w="med" len="med"/>
-                      <a:tailEnd type="none" w="med" len="med"/>
-                    </a:lnR>
-                    <a:lnT w="6350" cap="flat" cmpd="sng" algn="ctr">
-                      <a:solidFill>
-                        <a:srgbClr val="E2E8F0"/>
-                      </a:solidFill>
-                      <a:prstDash val="solid"/>
-                      <a:round/>
-                      <a:headEnd type="none" w="med" len="med"/>
-                      <a:tailEnd type="none" w="med" len="med"/>
-                    </a:lnT>
-                    <a:lnB w="6350" cap="flat" cmpd="sng" algn="ctr">
-                      <a:solidFill>
-                        <a:srgbClr val="E2E8F0"/>
-                      </a:solidFill>
-                      <a:prstDash val="solid"/>
-                      <a:round/>
-                      <a:headEnd type="none" w="med" len="med"/>
-                      <a:tailEnd type="none" w="med" len="med"/>
-                    </a:lnB>
-                    <a:solidFill>
-                      <a:srgbClr val="E8F4F2"/>
-                    </a:solidFill>
-                  </a:tcPr>
-                </a:tc>
-                <a:tc>
-                  <a:txBody>
-                    <a:bodyPr/>
-                    <a:lstStyle/>
-                    <a:p>
-                      <a:pPr marL="0" indent="0">
-                        <a:buNone/>
-                      </a:pPr>
-                      <a:r>
-                        <a:rPr lang="en-US" sz="900" dirty="0">
-                          <a:solidFill>
-                            <a:srgbClr val="1E293B"/>
-                          </a:solidFill>
-                        </a:rPr>
-                        <a:t>39.5</a:t>
-                      </a:r>
-                      <a:endParaRPr lang="en-US" sz="900" dirty="0"/>
-                    </a:p>
-                  </a:txBody>
-                  <a:tcPr>
-                    <a:lnL w="6350" cap="flat" cmpd="sng" algn="ctr">
-                      <a:solidFill>
-                        <a:srgbClr val="E2E8F0"/>
-                      </a:solidFill>
-                      <a:prstDash val="solid"/>
-                      <a:round/>
-                      <a:headEnd type="none" w="med" len="med"/>
-                      <a:tailEnd type="none" w="med" len="med"/>
-                    </a:lnL>
-                    <a:lnR w="6350" cap="flat" cmpd="sng" algn="ctr">
-                      <a:solidFill>
-                        <a:srgbClr val="E2E8F0"/>
-                      </a:solidFill>
-                      <a:prstDash val="solid"/>
-                      <a:round/>
-                      <a:headEnd type="none" w="med" len="med"/>
-                      <a:tailEnd type="none" w="med" len="med"/>
-                    </a:lnR>
-                    <a:lnT w="6350" cap="flat" cmpd="sng" algn="ctr">
-                      <a:solidFill>
-                        <a:srgbClr val="E2E8F0"/>
-                      </a:solidFill>
-                      <a:prstDash val="solid"/>
-                      <a:round/>
-                      <a:headEnd type="none" w="med" len="med"/>
-                      <a:tailEnd type="none" w="med" len="med"/>
-                    </a:lnT>
-                    <a:lnB w="6350" cap="flat" cmpd="sng" algn="ctr">
-                      <a:solidFill>
-                        <a:srgbClr val="E2E8F0"/>
-                      </a:solidFill>
-                      <a:prstDash val="solid"/>
-                      <a:round/>
-                      <a:headEnd type="none" w="med" len="med"/>
-                      <a:tailEnd type="none" w="med" len="med"/>
-                    </a:lnB>
-                    <a:solidFill>
-                      <a:srgbClr val="E8F4F2"/>
-                    </a:solidFill>
-                  </a:tcPr>
-                </a:tc>
-                <a:tc>
-                  <a:txBody>
-                    <a:bodyPr/>
-                    <a:lstStyle/>
-                    <a:p>
-                      <a:pPr marL="0" indent="0">
-                        <a:buNone/>
-                      </a:pPr>
-                      <a:r>
-                        <a:rPr lang="en-US" sz="900" dirty="0">
-                          <a:solidFill>
-                            <a:srgbClr val="1E293B"/>
-                          </a:solidFill>
-                        </a:rPr>
-                        <a:t>30.3</a:t>
-                      </a:r>
-                      <a:endParaRPr lang="en-US" sz="900" dirty="0"/>
-                    </a:p>
-                  </a:txBody>
-                  <a:tcPr>
-                    <a:lnL w="6350" cap="flat" cmpd="sng" algn="ctr">
-                      <a:solidFill>
-                        <a:srgbClr val="E2E8F0"/>
-                      </a:solidFill>
-                      <a:prstDash val="solid"/>
-                      <a:round/>
-                      <a:headEnd type="none" w="med" len="med"/>
-                      <a:tailEnd type="none" w="med" len="med"/>
-                    </a:lnL>
-                    <a:lnR w="6350" cap="flat" cmpd="sng" algn="ctr">
-                      <a:solidFill>
-                        <a:srgbClr val="E2E8F0"/>
-                      </a:solidFill>
-                      <a:prstDash val="solid"/>
-                      <a:round/>
-                      <a:headEnd type="none" w="med" len="med"/>
-                      <a:tailEnd type="none" w="med" len="med"/>
-                    </a:lnR>
-                    <a:lnT w="6350" cap="flat" cmpd="sng" algn="ctr">
-                      <a:solidFill>
-                        <a:srgbClr val="E2E8F0"/>
-                      </a:solidFill>
-                      <a:prstDash val="solid"/>
-                      <a:round/>
-                      <a:headEnd type="none" w="med" len="med"/>
-                      <a:tailEnd type="none" w="med" len="med"/>
-                    </a:lnT>
-                    <a:lnB w="6350" cap="flat" cmpd="sng" algn="ctr">
-                      <a:solidFill>
-                        <a:srgbClr val="E2E8F0"/>
-                      </a:solidFill>
-                      <a:prstDash val="solid"/>
-                      <a:round/>
-                      <a:headEnd type="none" w="med" len="med"/>
-                      <a:tailEnd type="none" w="med" len="med"/>
-                    </a:lnB>
-                    <a:solidFill>
-                      <a:srgbClr val="E8F4F2"/>
-                    </a:solidFill>
-                  </a:tcPr>
-                </a:tc>
-                <a:tc>
-                  <a:txBody>
-                    <a:bodyPr/>
-                    <a:lstStyle/>
-                    <a:p>
-                      <a:pPr marL="0" indent="0">
-                        <a:buNone/>
-                      </a:pPr>
-                      <a:r>
-                        <a:rPr lang="en-US" sz="900" dirty="0">
-                          <a:solidFill>
-                            <a:srgbClr val="1E293B"/>
-                          </a:solidFill>
-                        </a:rPr>
-                        <a:t>184,108</a:t>
-                      </a:r>
-                      <a:endParaRPr lang="en-US" sz="900" dirty="0"/>
-                    </a:p>
-                  </a:txBody>
-                  <a:tcPr>
-                    <a:lnL w="6350" cap="flat" cmpd="sng" algn="ctr">
-                      <a:solidFill>
-                        <a:srgbClr val="E2E8F0"/>
-                      </a:solidFill>
-                      <a:prstDash val="solid"/>
-                      <a:round/>
-                      <a:headEnd type="none" w="med" len="med"/>
-                      <a:tailEnd type="none" w="med" len="med"/>
-                    </a:lnL>
-                    <a:lnR w="6350" cap="flat" cmpd="sng" algn="ctr">
-                      <a:solidFill>
-                        <a:srgbClr val="E2E8F0"/>
-                      </a:solidFill>
-                      <a:prstDash val="solid"/>
-                      <a:round/>
-                      <a:headEnd type="none" w="med" len="med"/>
-                      <a:tailEnd type="none" w="med" len="med"/>
-                    </a:lnR>
-                    <a:lnT w="6350" cap="flat" cmpd="sng" algn="ctr">
-                      <a:solidFill>
-                        <a:srgbClr val="E2E8F0"/>
-                      </a:solidFill>
-                      <a:prstDash val="solid"/>
-                      <a:round/>
-                      <a:headEnd type="none" w="med" len="med"/>
-                      <a:tailEnd type="none" w="med" len="med"/>
-                    </a:lnT>
-                    <a:lnB w="6350" cap="flat" cmpd="sng" algn="ctr">
-                      <a:solidFill>
-                        <a:srgbClr val="E2E8F0"/>
-                      </a:solidFill>
-                      <a:prstDash val="solid"/>
-                      <a:round/>
-                      <a:headEnd type="none" w="med" len="med"/>
-                      <a:tailEnd type="none" w="med" len="med"/>
-                    </a:lnB>
-                    <a:solidFill>
-                      <a:srgbClr val="E8F4F2"/>
-                    </a:solidFill>
-                  </a:tcPr>
-                </a:tc>
-                <a:extLst>
-                  <a:ext uri="{0D108BD9-81ED-4DB2-BD59-A6C34878D82A}">
-                    <a16:rowId xmlns:a16="http://schemas.microsoft.com/office/drawing/2014/main" val="10002"/>
-                  </a:ext>
-                </a:extLst>
-              </a:tr>
-              <a:tr h="0">
-                <a:tc>
-                  <a:txBody>
-                    <a:bodyPr/>
-                    <a:lstStyle/>
-                    <a:p>
-                      <a:pPr marL="0" indent="0">
-                        <a:buNone/>
-                      </a:pPr>
-                      <a:r>
-                        <a:rPr lang="en-US" sz="900" b="1" dirty="0">
-                          <a:solidFill>
-                            <a:srgbClr val="1B3A5C"/>
-                          </a:solidFill>
-                        </a:rPr>
-                        <a:t>Silver (PIT+BRG+BUS)</a:t>
-                      </a:r>
-                      <a:endParaRPr lang="en-US" sz="900" dirty="0"/>
-                    </a:p>
-                  </a:txBody>
-                  <a:tcPr>
-                    <a:lnL w="6350" cap="flat" cmpd="sng" algn="ctr">
-                      <a:solidFill>
-                        <a:srgbClr val="E2E8F0"/>
-                      </a:solidFill>
-                      <a:prstDash val="solid"/>
-                      <a:round/>
-                      <a:headEnd type="none" w="med" len="med"/>
-                      <a:tailEnd type="none" w="med" len="med"/>
-                    </a:lnL>
-                    <a:lnR w="6350" cap="flat" cmpd="sng" algn="ctr">
-                      <a:solidFill>
-                        <a:srgbClr val="E2E8F0"/>
-                      </a:solidFill>
-                      <a:prstDash val="solid"/>
-                      <a:round/>
-                      <a:headEnd type="none" w="med" len="med"/>
-                      <a:tailEnd type="none" w="med" len="med"/>
-                    </a:lnR>
-                    <a:lnT w="6350" cap="flat" cmpd="sng" algn="ctr">
-                      <a:solidFill>
-                        <a:srgbClr val="E2E8F0"/>
-                      </a:solidFill>
-                      <a:prstDash val="solid"/>
-                      <a:round/>
-                      <a:headEnd type="none" w="med" len="med"/>
-                      <a:tailEnd type="none" w="med" len="med"/>
-                    </a:lnT>
-                    <a:lnB w="6350" cap="flat" cmpd="sng" algn="ctr">
-                      <a:solidFill>
-                        <a:srgbClr val="E2E8F0"/>
-                      </a:solidFill>
-                      <a:prstDash val="solid"/>
-                      <a:round/>
-                      <a:headEnd type="none" w="med" len="med"/>
-                      <a:tailEnd type="none" w="med" len="med"/>
-                    </a:lnB>
-                    <a:solidFill>
-                      <a:srgbClr val="FFFFFF"/>
-                    </a:solidFill>
-                  </a:tcPr>
-                </a:tc>
-                <a:tc>
-                  <a:txBody>
-                    <a:bodyPr/>
-                    <a:lstStyle/>
-                    <a:p>
-                      <a:pPr marL="0" indent="0">
-                        <a:buNone/>
-                      </a:pPr>
-                      <a:r>
-                        <a:rPr lang="en-US" sz="900" dirty="0">
-                          <a:solidFill>
-                            <a:srgbClr val="1E293B"/>
-                          </a:solidFill>
-                        </a:rPr>
-                        <a:t>6 objects (6 steps)</a:t>
-                      </a:r>
-                      <a:endParaRPr lang="en-US" sz="900" dirty="0"/>
-                    </a:p>
-                  </a:txBody>
-                  <a:tcPr>
-                    <a:lnL w="6350" cap="flat" cmpd="sng" algn="ctr">
-                      <a:solidFill>
-                        <a:srgbClr val="E2E8F0"/>
-                      </a:solidFill>
-                      <a:prstDash val="solid"/>
-                      <a:round/>
-                      <a:headEnd type="none" w="med" len="med"/>
-                      <a:tailEnd type="none" w="med" len="med"/>
-                    </a:lnL>
-                    <a:lnR w="6350" cap="flat" cmpd="sng" algn="ctr">
-                      <a:solidFill>
-                        <a:srgbClr val="E2E8F0"/>
-                      </a:solidFill>
-                      <a:prstDash val="solid"/>
-                      <a:round/>
-                      <a:headEnd type="none" w="med" len="med"/>
-                      <a:tailEnd type="none" w="med" len="med"/>
-                    </a:lnR>
-                    <a:lnT w="6350" cap="flat" cmpd="sng" algn="ctr">
-                      <a:solidFill>
-                        <a:srgbClr val="E2E8F0"/>
-                      </a:solidFill>
-                      <a:prstDash val="solid"/>
-                      <a:round/>
-                      <a:headEnd type="none" w="med" len="med"/>
-                      <a:tailEnd type="none" w="med" len="med"/>
-                    </a:lnT>
-                    <a:lnB w="6350" cap="flat" cmpd="sng" algn="ctr">
-                      <a:solidFill>
-                        <a:srgbClr val="E2E8F0"/>
-                      </a:solidFill>
-                      <a:prstDash val="solid"/>
-                      <a:round/>
-                      <a:headEnd type="none" w="med" len="med"/>
-                      <a:tailEnd type="none" w="med" len="med"/>
-                    </a:lnB>
-                    <a:solidFill>
-                      <a:srgbClr val="FFFFFF"/>
-                    </a:solidFill>
-                  </a:tcPr>
-                </a:tc>
-                <a:tc>
-                  <a:txBody>
-                    <a:bodyPr/>
-                    <a:lstStyle/>
-                    <a:p>
-                      <a:pPr marL="0" indent="0">
-                        <a:buNone/>
-                      </a:pPr>
-                      <a:r>
-                        <a:rPr lang="en-US" sz="900" dirty="0">
-                          <a:solidFill>
-                            <a:srgbClr val="1E293B"/>
-                          </a:solidFill>
-                        </a:rPr>
-                        <a:t>3.4</a:t>
-                      </a:r>
-                      <a:endParaRPr lang="en-US" sz="900" dirty="0"/>
-                    </a:p>
-                  </a:txBody>
-                  <a:tcPr>
-                    <a:lnL w="6350" cap="flat" cmpd="sng" algn="ctr">
-                      <a:solidFill>
-                        <a:srgbClr val="E2E8F0"/>
-                      </a:solidFill>
-                      <a:prstDash val="solid"/>
-                      <a:round/>
-                      <a:headEnd type="none" w="med" len="med"/>
-                      <a:tailEnd type="none" w="med" len="med"/>
-                    </a:lnL>
-                    <a:lnR w="6350" cap="flat" cmpd="sng" algn="ctr">
-                      <a:solidFill>
-                        <a:srgbClr val="E2E8F0"/>
-                      </a:solidFill>
-                      <a:prstDash val="solid"/>
-                      <a:round/>
-                      <a:headEnd type="none" w="med" len="med"/>
-                      <a:tailEnd type="none" w="med" len="med"/>
-                    </a:lnR>
-                    <a:lnT w="6350" cap="flat" cmpd="sng" algn="ctr">
-                      <a:solidFill>
-                        <a:srgbClr val="E2E8F0"/>
-                      </a:solidFill>
-                      <a:prstDash val="solid"/>
-                      <a:round/>
-                      <a:headEnd type="none" w="med" len="med"/>
-                      <a:tailEnd type="none" w="med" len="med"/>
-                    </a:lnT>
-                    <a:lnB w="6350" cap="flat" cmpd="sng" algn="ctr">
-                      <a:solidFill>
-                        <a:srgbClr val="E2E8F0"/>
-                      </a:solidFill>
-                      <a:prstDash val="solid"/>
-                      <a:round/>
-                      <a:headEnd type="none" w="med" len="med"/>
-                      <a:tailEnd type="none" w="med" len="med"/>
-                    </a:lnB>
-                    <a:solidFill>
-                      <a:srgbClr val="FFFFFF"/>
-                    </a:solidFill>
-                  </a:tcPr>
-                </a:tc>
-                <a:tc>
-                  <a:txBody>
-                    <a:bodyPr/>
-                    <a:lstStyle/>
-                    <a:p>
-                      <a:pPr marL="0" indent="0">
-                        <a:buNone/>
-                      </a:pPr>
-                      <a:r>
-                        <a:rPr lang="en-US" sz="900" dirty="0">
-                          <a:solidFill>
-                            <a:srgbClr val="1E293B"/>
-                          </a:solidFill>
-                        </a:rPr>
-                        <a:t>3.5</a:t>
-                      </a:r>
-                      <a:endParaRPr lang="en-US" sz="900" dirty="0"/>
-                    </a:p>
-                  </a:txBody>
-                  <a:tcPr>
-                    <a:lnL w="6350" cap="flat" cmpd="sng" algn="ctr">
-                      <a:solidFill>
-                        <a:srgbClr val="E2E8F0"/>
-                      </a:solidFill>
-                      <a:prstDash val="solid"/>
-                      <a:round/>
-                      <a:headEnd type="none" w="med" len="med"/>
-                      <a:tailEnd type="none" w="med" len="med"/>
-                    </a:lnL>
-                    <a:lnR w="6350" cap="flat" cmpd="sng" algn="ctr">
-                      <a:solidFill>
-                        <a:srgbClr val="E2E8F0"/>
-                      </a:solidFill>
-                      <a:prstDash val="solid"/>
-                      <a:round/>
-                      <a:headEnd type="none" w="med" len="med"/>
-                      <a:tailEnd type="none" w="med" len="med"/>
-                    </a:lnR>
-                    <a:lnT w="6350" cap="flat" cmpd="sng" algn="ctr">
-                      <a:solidFill>
-                        <a:srgbClr val="E2E8F0"/>
-                      </a:solidFill>
-                      <a:prstDash val="solid"/>
-                      <a:round/>
-                      <a:headEnd type="none" w="med" len="med"/>
-                      <a:tailEnd type="none" w="med" len="med"/>
-                    </a:lnT>
-                    <a:lnB w="6350" cap="flat" cmpd="sng" algn="ctr">
-                      <a:solidFill>
-                        <a:srgbClr val="E2E8F0"/>
-                      </a:solidFill>
-                      <a:prstDash val="solid"/>
-                      <a:round/>
-                      <a:headEnd type="none" w="med" len="med"/>
-                      <a:tailEnd type="none" w="med" len="med"/>
-                    </a:lnB>
-                    <a:solidFill>
-                      <a:srgbClr val="FFFFFF"/>
-                    </a:solidFill>
-                  </a:tcPr>
-                </a:tc>
-                <a:tc>
-                  <a:txBody>
-                    <a:bodyPr/>
-                    <a:lstStyle/>
-                    <a:p>
-                      <a:pPr marL="0" indent="0">
-                        <a:buNone/>
-                      </a:pPr>
-                      <a:r>
-                        <a:rPr lang="en-US" sz="900" dirty="0">
-                          <a:solidFill>
-                            <a:srgbClr val="1E293B"/>
-                          </a:solidFill>
-                        </a:rPr>
-                        <a:t>2,000</a:t>
-                      </a:r>
-                      <a:endParaRPr lang="en-US" sz="900" dirty="0"/>
-                    </a:p>
-                  </a:txBody>
-                  <a:tcPr>
-                    <a:lnL w="6350" cap="flat" cmpd="sng" algn="ctr">
-                      <a:solidFill>
-                        <a:srgbClr val="E2E8F0"/>
-                      </a:solidFill>
-                      <a:prstDash val="solid"/>
-                      <a:round/>
-                      <a:headEnd type="none" w="med" len="med"/>
-                      <a:tailEnd type="none" w="med" len="med"/>
-                    </a:lnL>
-                    <a:lnR w="6350" cap="flat" cmpd="sng" algn="ctr">
-                      <a:solidFill>
-                        <a:srgbClr val="E2E8F0"/>
-                      </a:solidFill>
-                      <a:prstDash val="solid"/>
-                      <a:round/>
-                      <a:headEnd type="none" w="med" len="med"/>
-                      <a:tailEnd type="none" w="med" len="med"/>
-                    </a:lnR>
-                    <a:lnT w="6350" cap="flat" cmpd="sng" algn="ctr">
-                      <a:solidFill>
-                        <a:srgbClr val="E2E8F0"/>
-                      </a:solidFill>
-                      <a:prstDash val="solid"/>
-                      <a:round/>
-                      <a:headEnd type="none" w="med" len="med"/>
-                      <a:tailEnd type="none" w="med" len="med"/>
-                    </a:lnT>
-                    <a:lnB w="6350" cap="flat" cmpd="sng" algn="ctr">
-                      <a:solidFill>
-                        <a:srgbClr val="E2E8F0"/>
-                      </a:solidFill>
-                      <a:prstDash val="solid"/>
-                      <a:round/>
-                      <a:headEnd type="none" w="med" len="med"/>
-                      <a:tailEnd type="none" w="med" len="med"/>
-                    </a:lnB>
-                    <a:solidFill>
-                      <a:srgbClr val="FFFFFF"/>
-                    </a:solidFill>
-                  </a:tcPr>
-                </a:tc>
-                <a:extLst>
-                  <a:ext uri="{0D108BD9-81ED-4DB2-BD59-A6C34878D82A}">
-                    <a16:rowId xmlns:a16="http://schemas.microsoft.com/office/drawing/2014/main" val="10003"/>
-                  </a:ext>
-                </a:extLst>
-              </a:tr>
-              <a:tr h="0">
-                <a:tc>
-                  <a:txBody>
-                    <a:bodyPr/>
-                    <a:lstStyle/>
-                    <a:p>
-                      <a:pPr marL="0" indent="0">
-                        <a:buNone/>
-                      </a:pPr>
-                      <a:r>
-                        <a:rPr lang="en-US" sz="900" b="1" dirty="0">
-                          <a:solidFill>
-                            <a:srgbClr val="1B3A5C"/>
-                          </a:solidFill>
-                        </a:rPr>
-                        <a:t>Gold (DIM+FACT)</a:t>
-                      </a:r>
-                      <a:endParaRPr lang="en-US" sz="900" dirty="0"/>
-                    </a:p>
-                  </a:txBody>
-                  <a:tcPr>
-                    <a:lnL w="6350" cap="flat" cmpd="sng" algn="ctr">
-                      <a:solidFill>
-                        <a:srgbClr val="E2E8F0"/>
-                      </a:solidFill>
-                      <a:prstDash val="solid"/>
-                      <a:round/>
-                      <a:headEnd type="none" w="med" len="med"/>
-                      <a:tailEnd type="none" w="med" len="med"/>
-                    </a:lnL>
-                    <a:lnR w="6350" cap="flat" cmpd="sng" algn="ctr">
-                      <a:solidFill>
-                        <a:srgbClr val="E2E8F0"/>
-                      </a:solidFill>
-                      <a:prstDash val="solid"/>
-                      <a:round/>
-                      <a:headEnd type="none" w="med" len="med"/>
-                      <a:tailEnd type="none" w="med" len="med"/>
-                    </a:lnR>
-                    <a:lnT w="6350" cap="flat" cmpd="sng" algn="ctr">
-                      <a:solidFill>
-                        <a:srgbClr val="E2E8F0"/>
-                      </a:solidFill>
-                      <a:prstDash val="solid"/>
-                      <a:round/>
-                      <a:headEnd type="none" w="med" len="med"/>
-                      <a:tailEnd type="none" w="med" len="med"/>
-                    </a:lnT>
-                    <a:lnB w="6350" cap="flat" cmpd="sng" algn="ctr">
-                      <a:solidFill>
-                        <a:srgbClr val="E2E8F0"/>
-                      </a:solidFill>
-                      <a:prstDash val="solid"/>
-                      <a:round/>
-                      <a:headEnd type="none" w="med" len="med"/>
-                      <a:tailEnd type="none" w="med" len="med"/>
-                    </a:lnB>
-                    <a:solidFill>
-                      <a:srgbClr val="E8F4F2"/>
-                    </a:solidFill>
-                  </a:tcPr>
-                </a:tc>
-                <a:tc>
-                  <a:txBody>
-                    <a:bodyPr/>
-                    <a:lstStyle/>
-                    <a:p>
-                      <a:pPr marL="0" indent="0">
-                        <a:buNone/>
-                      </a:pPr>
-                      <a:r>
-                        <a:rPr lang="en-US" sz="900" dirty="0">
-                          <a:solidFill>
-                            <a:srgbClr val="1E293B"/>
-                          </a:solidFill>
-                        </a:rPr>
-                        <a:t>11 objects (11 steps)</a:t>
-                      </a:r>
-                      <a:endParaRPr lang="en-US" sz="900" dirty="0"/>
-                    </a:p>
-                  </a:txBody>
-                  <a:tcPr>
-                    <a:lnL w="6350" cap="flat" cmpd="sng" algn="ctr">
-                      <a:solidFill>
-                        <a:srgbClr val="E2E8F0"/>
-                      </a:solidFill>
-                      <a:prstDash val="solid"/>
-                      <a:round/>
-                      <a:headEnd type="none" w="med" len="med"/>
-                      <a:tailEnd type="none" w="med" len="med"/>
-                    </a:lnL>
-                    <a:lnR w="6350" cap="flat" cmpd="sng" algn="ctr">
-                      <a:solidFill>
-                        <a:srgbClr val="E2E8F0"/>
-                      </a:solidFill>
-                      <a:prstDash val="solid"/>
-                      <a:round/>
-                      <a:headEnd type="none" w="med" len="med"/>
-                      <a:tailEnd type="none" w="med" len="med"/>
-                    </a:lnR>
-                    <a:lnT w="6350" cap="flat" cmpd="sng" algn="ctr">
-                      <a:solidFill>
-                        <a:srgbClr val="E2E8F0"/>
-                      </a:solidFill>
-                      <a:prstDash val="solid"/>
-                      <a:round/>
-                      <a:headEnd type="none" w="med" len="med"/>
-                      <a:tailEnd type="none" w="med" len="med"/>
-                    </a:lnT>
-                    <a:lnB w="6350" cap="flat" cmpd="sng" algn="ctr">
-                      <a:solidFill>
-                        <a:srgbClr val="E2E8F0"/>
-                      </a:solidFill>
-                      <a:prstDash val="solid"/>
-                      <a:round/>
-                      <a:headEnd type="none" w="med" len="med"/>
-                      <a:tailEnd type="none" w="med" len="med"/>
-                    </a:lnB>
-                    <a:solidFill>
-                      <a:srgbClr val="E8F4F2"/>
-                    </a:solidFill>
-                  </a:tcPr>
-                </a:tc>
-                <a:tc>
-                  <a:txBody>
-                    <a:bodyPr/>
-                    <a:lstStyle/>
-                    <a:p>
-                      <a:pPr marL="0" indent="0">
-                        <a:buNone/>
-                      </a:pPr>
-                      <a:r>
-                        <a:rPr lang="en-US" sz="900" dirty="0">
-                          <a:solidFill>
-                            <a:srgbClr val="1E293B"/>
-                          </a:solidFill>
-                        </a:rPr>
-                        <a:t>11.0</a:t>
-                      </a:r>
-                      <a:endParaRPr lang="en-US" sz="900" dirty="0"/>
-                    </a:p>
-                  </a:txBody>
-                  <a:tcPr>
-                    <a:lnL w="6350" cap="flat" cmpd="sng" algn="ctr">
-                      <a:solidFill>
-                        <a:srgbClr val="E2E8F0"/>
-                      </a:solidFill>
-                      <a:prstDash val="solid"/>
-                      <a:round/>
-                      <a:headEnd type="none" w="med" len="med"/>
-                      <a:tailEnd type="none" w="med" len="med"/>
-                    </a:lnL>
-                    <a:lnR w="6350" cap="flat" cmpd="sng" algn="ctr">
-                      <a:solidFill>
-                        <a:srgbClr val="E2E8F0"/>
-                      </a:solidFill>
-                      <a:prstDash val="solid"/>
-                      <a:round/>
-                      <a:headEnd type="none" w="med" len="med"/>
-                      <a:tailEnd type="none" w="med" len="med"/>
-                    </a:lnR>
-                    <a:lnT w="6350" cap="flat" cmpd="sng" algn="ctr">
-                      <a:solidFill>
-                        <a:srgbClr val="E2E8F0"/>
-                      </a:solidFill>
-                      <a:prstDash val="solid"/>
-                      <a:round/>
-                      <a:headEnd type="none" w="med" len="med"/>
-                      <a:tailEnd type="none" w="med" len="med"/>
-                    </a:lnT>
-                    <a:lnB w="6350" cap="flat" cmpd="sng" algn="ctr">
-                      <a:solidFill>
-                        <a:srgbClr val="E2E8F0"/>
-                      </a:solidFill>
-                      <a:prstDash val="solid"/>
-                      <a:round/>
-                      <a:headEnd type="none" w="med" len="med"/>
-                      <a:tailEnd type="none" w="med" len="med"/>
-                    </a:lnB>
-                    <a:solidFill>
-                      <a:srgbClr val="E8F4F2"/>
-                    </a:solidFill>
-                  </a:tcPr>
-                </a:tc>
-                <a:tc>
-                  <a:txBody>
-                    <a:bodyPr/>
-                    <a:lstStyle/>
-                    <a:p>
-                      <a:pPr marL="0" indent="0">
-                        <a:buNone/>
-                      </a:pPr>
-                      <a:r>
-                        <a:rPr lang="en-US" sz="900" dirty="0">
-                          <a:solidFill>
-                            <a:srgbClr val="1E293B"/>
-                          </a:solidFill>
-                        </a:rPr>
-                        <a:t>12.7</a:t>
-                      </a:r>
-                      <a:endParaRPr lang="en-US" sz="900" dirty="0"/>
-                    </a:p>
-                  </a:txBody>
-                  <a:tcPr>
-                    <a:lnL w="6350" cap="flat" cmpd="sng" algn="ctr">
-                      <a:solidFill>
-                        <a:srgbClr val="E2E8F0"/>
-                      </a:solidFill>
-                      <a:prstDash val="solid"/>
-                      <a:round/>
-                      <a:headEnd type="none" w="med" len="med"/>
-                      <a:tailEnd type="none" w="med" len="med"/>
-                    </a:lnL>
-                    <a:lnR w="6350" cap="flat" cmpd="sng" algn="ctr">
-                      <a:solidFill>
-                        <a:srgbClr val="E2E8F0"/>
-                      </a:solidFill>
-                      <a:prstDash val="solid"/>
-                      <a:round/>
-                      <a:headEnd type="none" w="med" len="med"/>
-                      <a:tailEnd type="none" w="med" len="med"/>
-                    </a:lnR>
-                    <a:lnT w="6350" cap="flat" cmpd="sng" algn="ctr">
-                      <a:solidFill>
-                        <a:srgbClr val="E2E8F0"/>
-                      </a:solidFill>
-                      <a:prstDash val="solid"/>
-                      <a:round/>
-                      <a:headEnd type="none" w="med" len="med"/>
-                      <a:tailEnd type="none" w="med" len="med"/>
-                    </a:lnT>
-                    <a:lnB w="6350" cap="flat" cmpd="sng" algn="ctr">
-                      <a:solidFill>
-                        <a:srgbClr val="E2E8F0"/>
-                      </a:solidFill>
-                      <a:prstDash val="solid"/>
-                      <a:round/>
-                      <a:headEnd type="none" w="med" len="med"/>
-                      <a:tailEnd type="none" w="med" len="med"/>
-                    </a:lnB>
-                    <a:solidFill>
-                      <a:srgbClr val="E8F4F2"/>
-                    </a:solidFill>
-                  </a:tcPr>
-                </a:tc>
-                <a:tc>
-                  <a:txBody>
-                    <a:bodyPr/>
-                    <a:lstStyle/>
-                    <a:p>
-                      <a:pPr marL="0" indent="0">
-                        <a:buNone/>
-                      </a:pPr>
-                      <a:r>
-                        <a:rPr lang="en-US" sz="900" dirty="0">
-                          <a:solidFill>
-                            <a:srgbClr val="1E293B"/>
-                          </a:solidFill>
-                        </a:rPr>
-                        <a:t>91,752</a:t>
-                      </a:r>
-                      <a:endParaRPr lang="en-US" sz="900" dirty="0"/>
-                    </a:p>
-                  </a:txBody>
-                  <a:tcPr>
-                    <a:lnL w="6350" cap="flat" cmpd="sng" algn="ctr">
-                      <a:solidFill>
-                        <a:srgbClr val="E2E8F0"/>
-                      </a:solidFill>
-                      <a:prstDash val="solid"/>
-                      <a:round/>
-                      <a:headEnd type="none" w="med" len="med"/>
-                      <a:tailEnd type="none" w="med" len="med"/>
-                    </a:lnL>
-                    <a:lnR w="6350" cap="flat" cmpd="sng" algn="ctr">
-                      <a:solidFill>
-                        <a:srgbClr val="E2E8F0"/>
-                      </a:solidFill>
-                      <a:prstDash val="solid"/>
-                      <a:round/>
-                      <a:headEnd type="none" w="med" len="med"/>
-                      <a:tailEnd type="none" w="med" len="med"/>
-                    </a:lnR>
-                    <a:lnT w="6350" cap="flat" cmpd="sng" algn="ctr">
-                      <a:solidFill>
-                        <a:srgbClr val="E2E8F0"/>
-                      </a:solidFill>
-                      <a:prstDash val="solid"/>
-                      <a:round/>
-                      <a:headEnd type="none" w="med" len="med"/>
-                      <a:tailEnd type="none" w="med" len="med"/>
-                    </a:lnT>
-                    <a:lnB w="6350" cap="flat" cmpd="sng" algn="ctr">
-                      <a:solidFill>
-                        <a:srgbClr val="E2E8F0"/>
-                      </a:solidFill>
-                      <a:prstDash val="solid"/>
-                      <a:round/>
-                      <a:headEnd type="none" w="med" len="med"/>
-                      <a:tailEnd type="none" w="med" len="med"/>
-                    </a:lnB>
-                    <a:solidFill>
-                      <a:srgbClr val="E8F4F2"/>
-                    </a:solidFill>
-                  </a:tcPr>
-                </a:tc>
-                <a:extLst>
-                  <a:ext uri="{0D108BD9-81ED-4DB2-BD59-A6C34878D82A}">
-                    <a16:rowId xmlns:a16="http://schemas.microsoft.com/office/drawing/2014/main" val="10004"/>
-                  </a:ext>
-                </a:extLst>
-              </a:tr>
-              <a:tr h="0">
-                <a:tc>
-                  <a:txBody>
-                    <a:bodyPr/>
-                    <a:lstStyle/>
-                    <a:p>
-                      <a:pPr marL="0" indent="0">
-                        <a:buNone/>
-                      </a:pPr>
-                      <a:r>
-                        <a:rPr lang="en-US" sz="900" b="1" dirty="0">
-                          <a:solidFill>
-                            <a:srgbClr val="1B3A5C"/>
-                          </a:solidFill>
-                        </a:rPr>
-                        <a:t>Total Pipeline</a:t>
-                      </a:r>
-                      <a:endParaRPr lang="en-US" sz="900" dirty="0"/>
-                    </a:p>
-                  </a:txBody>
-                  <a:tcPr>
-                    <a:lnL w="6350" cap="flat" cmpd="sng" algn="ctr">
-                      <a:solidFill>
-                        <a:srgbClr val="E2E8F0"/>
-                      </a:solidFill>
-                      <a:prstDash val="solid"/>
-                      <a:round/>
-                      <a:headEnd type="none" w="med" len="med"/>
-                      <a:tailEnd type="none" w="med" len="med"/>
-                    </a:lnL>
-                    <a:lnR w="6350" cap="flat" cmpd="sng" algn="ctr">
-                      <a:solidFill>
-                        <a:srgbClr val="E2E8F0"/>
-                      </a:solidFill>
-                      <a:prstDash val="solid"/>
-                      <a:round/>
-                      <a:headEnd type="none" w="med" len="med"/>
-                      <a:tailEnd type="none" w="med" len="med"/>
-                    </a:lnR>
-                    <a:lnT w="6350" cap="flat" cmpd="sng" algn="ctr">
-                      <a:solidFill>
-                        <a:srgbClr val="E2E8F0"/>
-                      </a:solidFill>
-                      <a:prstDash val="solid"/>
-                      <a:round/>
-                      <a:headEnd type="none" w="med" len="med"/>
-                      <a:tailEnd type="none" w="med" len="med"/>
-                    </a:lnT>
-                    <a:lnB w="6350" cap="flat" cmpd="sng" algn="ctr">
-                      <a:solidFill>
-                        <a:srgbClr val="E2E8F0"/>
-                      </a:solidFill>
-                      <a:prstDash val="solid"/>
-                      <a:round/>
-                      <a:headEnd type="none" w="med" len="med"/>
-                      <a:tailEnd type="none" w="med" len="med"/>
-                    </a:lnB>
-                    <a:solidFill>
-                      <a:srgbClr val="E8F4F2"/>
-                    </a:solidFill>
-                  </a:tcPr>
-                </a:tc>
-                <a:tc>
-                  <a:txBody>
-                    <a:bodyPr/>
-                    <a:lstStyle/>
-                    <a:p>
-                      <a:pPr marL="0" indent="0">
-                        <a:buNone/>
-                      </a:pPr>
-                      <a:r>
-                        <a:rPr lang="en-US" sz="900" dirty="0">
-                          <a:solidFill>
-                            <a:srgbClr val="1E293B"/>
-                          </a:solidFill>
-                        </a:rPr>
-                        <a:t>49 steps</a:t>
-                      </a:r>
-                      <a:endParaRPr lang="en-US" sz="900" dirty="0"/>
-                    </a:p>
-                  </a:txBody>
-                  <a:tcPr>
-                    <a:lnL w="6350" cap="flat" cmpd="sng" algn="ctr">
-                      <a:solidFill>
-                        <a:srgbClr val="E2E8F0"/>
-                      </a:solidFill>
-                      <a:prstDash val="solid"/>
-                      <a:round/>
-                      <a:headEnd type="none" w="med" len="med"/>
-                      <a:tailEnd type="none" w="med" len="med"/>
-                    </a:lnL>
-                    <a:lnR w="6350" cap="flat" cmpd="sng" algn="ctr">
-                      <a:solidFill>
-                        <a:srgbClr val="E2E8F0"/>
-                      </a:solidFill>
-                      <a:prstDash val="solid"/>
-                      <a:round/>
-                      <a:headEnd type="none" w="med" len="med"/>
-                      <a:tailEnd type="none" w="med" len="med"/>
-                    </a:lnR>
-                    <a:lnT w="6350" cap="flat" cmpd="sng" algn="ctr">
-                      <a:solidFill>
-                        <a:srgbClr val="E2E8F0"/>
-                      </a:solidFill>
-                      <a:prstDash val="solid"/>
-                      <a:round/>
-                      <a:headEnd type="none" w="med" len="med"/>
-                      <a:tailEnd type="none" w="med" len="med"/>
-                    </a:lnT>
-                    <a:lnB w="6350" cap="flat" cmpd="sng" algn="ctr">
-                      <a:solidFill>
-                        <a:srgbClr val="E2E8F0"/>
-                      </a:solidFill>
-                      <a:prstDash val="solid"/>
-                      <a:round/>
-                      <a:headEnd type="none" w="med" len="med"/>
-                      <a:tailEnd type="none" w="med" len="med"/>
-                    </a:lnB>
-                    <a:solidFill>
-                      <a:srgbClr val="E8F4F2"/>
-                    </a:solidFill>
-                  </a:tcPr>
-                </a:tc>
-                <a:tc>
-                  <a:txBody>
-                    <a:bodyPr/>
-                    <a:lstStyle/>
-                    <a:p>
-                      <a:pPr marL="0" indent="0">
-                        <a:buNone/>
-                      </a:pPr>
-                      <a:r>
-                        <a:rPr lang="en-US" sz="900" b="1" dirty="0">
-                          <a:solidFill>
-                            <a:srgbClr val="2A9D8F"/>
-                          </a:solidFill>
-                        </a:rPr>
-                        <a:t>120.9</a:t>
-                      </a:r>
-                      <a:endParaRPr lang="en-US" sz="900" dirty="0"/>
-                    </a:p>
-                  </a:txBody>
-                  <a:tcPr>
-                    <a:lnL w="6350" cap="flat" cmpd="sng" algn="ctr">
-                      <a:solidFill>
-                        <a:srgbClr val="E2E8F0"/>
-                      </a:solidFill>
-                      <a:prstDash val="solid"/>
-                      <a:round/>
-                      <a:headEnd type="none" w="med" len="med"/>
-                      <a:tailEnd type="none" w="med" len="med"/>
-                    </a:lnL>
-                    <a:lnR w="6350" cap="flat" cmpd="sng" algn="ctr">
-                      <a:solidFill>
-                        <a:srgbClr val="E2E8F0"/>
-                      </a:solidFill>
-                      <a:prstDash val="solid"/>
-                      <a:round/>
-                      <a:headEnd type="none" w="med" len="med"/>
-                      <a:tailEnd type="none" w="med" len="med"/>
-                    </a:lnR>
-                    <a:lnT w="6350" cap="flat" cmpd="sng" algn="ctr">
-                      <a:solidFill>
-                        <a:srgbClr val="E2E8F0"/>
-                      </a:solidFill>
-                      <a:prstDash val="solid"/>
-                      <a:round/>
-                      <a:headEnd type="none" w="med" len="med"/>
-                      <a:tailEnd type="none" w="med" len="med"/>
-                    </a:lnT>
-                    <a:lnB w="6350" cap="flat" cmpd="sng" algn="ctr">
-                      <a:solidFill>
-                        <a:srgbClr val="E2E8F0"/>
-                      </a:solidFill>
-                      <a:prstDash val="solid"/>
-                      <a:round/>
-                      <a:headEnd type="none" w="med" len="med"/>
-                      <a:tailEnd type="none" w="med" len="med"/>
-                    </a:lnB>
-                    <a:solidFill>
-                      <a:srgbClr val="E8F4F2"/>
-                    </a:solidFill>
-                  </a:tcPr>
-                </a:tc>
-                <a:tc>
-                  <a:txBody>
-                    <a:bodyPr/>
-                    <a:lstStyle/>
-                    <a:p>
-                      <a:pPr marL="0" indent="0">
-                        <a:buNone/>
-                      </a:pPr>
-                      <a:r>
-                        <a:rPr lang="en-US" sz="900" b="1" dirty="0">
-                          <a:solidFill>
-                            <a:srgbClr val="2A9D8F"/>
-                          </a:solidFill>
-                        </a:rPr>
-                        <a:t>93.6</a:t>
-                      </a:r>
-                      <a:endParaRPr lang="en-US" sz="900" dirty="0"/>
-                    </a:p>
-                  </a:txBody>
-                  <a:tcPr>
-                    <a:lnL w="6350" cap="flat" cmpd="sng" algn="ctr">
-                      <a:solidFill>
-                        <a:srgbClr val="E2E8F0"/>
-                      </a:solidFill>
-                      <a:prstDash val="solid"/>
-                      <a:round/>
-                      <a:headEnd type="none" w="med" len="med"/>
-                      <a:tailEnd type="none" w="med" len="med"/>
-                    </a:lnL>
-                    <a:lnR w="6350" cap="flat" cmpd="sng" algn="ctr">
-                      <a:solidFill>
-                        <a:srgbClr val="E2E8F0"/>
-                      </a:solidFill>
-                      <a:prstDash val="solid"/>
-                      <a:round/>
-                      <a:headEnd type="none" w="med" len="med"/>
-                      <a:tailEnd type="none" w="med" len="med"/>
-                    </a:lnR>
-                    <a:lnT w="6350" cap="flat" cmpd="sng" algn="ctr">
-                      <a:solidFill>
-                        <a:srgbClr val="E2E8F0"/>
-                      </a:solidFill>
-                      <a:prstDash val="solid"/>
-                      <a:round/>
-                      <a:headEnd type="none" w="med" len="med"/>
-                      <a:tailEnd type="none" w="med" len="med"/>
-                    </a:lnT>
-                    <a:lnB w="6350" cap="flat" cmpd="sng" algn="ctr">
-                      <a:solidFill>
-                        <a:srgbClr val="E2E8F0"/>
-                      </a:solidFill>
-                      <a:prstDash val="solid"/>
-                      <a:round/>
-                      <a:headEnd type="none" w="med" len="med"/>
-                      <a:tailEnd type="none" w="med" len="med"/>
-                    </a:lnB>
-                    <a:solidFill>
-                      <a:srgbClr val="E8F4F2"/>
-                    </a:solidFill>
-                  </a:tcPr>
-                </a:tc>
-                <a:tc>
-                  <a:txBody>
-                    <a:bodyPr/>
-                    <a:lstStyle/>
-                    <a:p>
-                      <a:pPr marL="0" indent="0">
-                        <a:buNone/>
-                      </a:pPr>
-                      <a:r>
-                        <a:rPr lang="en-US" sz="900" b="1" dirty="0">
-                          <a:solidFill>
-                            <a:srgbClr val="2A9D8F"/>
-                          </a:solidFill>
-                        </a:rPr>
-                        <a:t>336,677</a:t>
-                      </a:r>
-                      <a:endParaRPr lang="en-US" sz="900" dirty="0"/>
-                    </a:p>
-                  </a:txBody>
-                  <a:tcPr>
-                    <a:lnL w="6350" cap="flat" cmpd="sng" algn="ctr">
-                      <a:solidFill>
-                        <a:srgbClr val="E2E8F0"/>
-                      </a:solidFill>
-                      <a:prstDash val="solid"/>
-                      <a:round/>
-                      <a:headEnd type="none" w="med" len="med"/>
-                      <a:tailEnd type="none" w="med" len="med"/>
-                    </a:lnL>
-                    <a:lnR w="6350" cap="flat" cmpd="sng" algn="ctr">
-                      <a:solidFill>
-                        <a:srgbClr val="E2E8F0"/>
-                      </a:solidFill>
-                      <a:prstDash val="solid"/>
-                      <a:round/>
-                      <a:headEnd type="none" w="med" len="med"/>
-                      <a:tailEnd type="none" w="med" len="med"/>
-                    </a:lnR>
-                    <a:lnT w="6350" cap="flat" cmpd="sng" algn="ctr">
-                      <a:solidFill>
-                        <a:srgbClr val="E2E8F0"/>
-                      </a:solidFill>
-                      <a:prstDash val="solid"/>
-                      <a:round/>
-                      <a:headEnd type="none" w="med" len="med"/>
-                      <a:tailEnd type="none" w="med" len="med"/>
-                    </a:lnT>
-                    <a:lnB w="6350" cap="flat" cmpd="sng" algn="ctr">
-                      <a:solidFill>
-                        <a:srgbClr val="E2E8F0"/>
-                      </a:solidFill>
-                      <a:prstDash val="solid"/>
-                      <a:round/>
-                      <a:headEnd type="none" w="med" len="med"/>
-                      <a:tailEnd type="none" w="med" len="med"/>
-                    </a:lnB>
-                    <a:solidFill>
-                      <a:srgbClr val="E8F4F2"/>
-                    </a:solidFill>
-                  </a:tcPr>
-                </a:tc>
-                <a:extLst>
-                  <a:ext uri="{0D108BD9-81ED-4DB2-BD59-A6C34878D82A}">
-                    <a16:rowId xmlns:a16="http://schemas.microsoft.com/office/drawing/2014/main" val="10005"/>
-                  </a:ext>
-                </a:extLst>
-              </a:tr>
-            </a:tbl>
-          </a:graphicData>
-        </a:graphic>
-      </p:graphicFrame>
-      <p:sp>
-        <p:nvSpPr>
-          <p:cNvPr id="7" name="Shape 4"/>
-          <p:cNvSpPr/>
-          <p:nvPr/>
-        </p:nvSpPr>
-        <p:spPr>
-          <a:xfrm>
-            <a:off x="274320" y="2880360"/>
-            <a:ext cx="8595360" cy="457200"/>
-          </a:xfrm>
-          <a:prstGeom prst="rect">
-            <a:avLst/>
-          </a:prstGeom>
-          <a:solidFill>
-            <a:srgbClr val="FEF3C7"/>
-          </a:solidFill>
-          <a:ln/>
-        </p:spPr>
-        <p:txBody>
-          <a:bodyPr/>
-          <a:p/>
-        </p:txBody>
-      </p:sp>
-      <p:sp>
-        <p:nvSpPr>
-          <p:cNvPr id="8" name="Shape 5"/>
-          <p:cNvSpPr/>
-          <p:nvPr/>
-        </p:nvSpPr>
-        <p:spPr>
-          <a:xfrm>
-            <a:off x="274320" y="2880360"/>
-            <a:ext cx="54864" cy="457200"/>
-          </a:xfrm>
-          <a:prstGeom prst="rect">
-            <a:avLst/>
-          </a:prstGeom>
-          <a:solidFill>
-            <a:srgbClr val="D4A843"/>
-          </a:solidFill>
-          <a:ln/>
-        </p:spPr>
-        <p:txBody>
-          <a:bodyPr/>
-          <a:p/>
-        </p:txBody>
-      </p:sp>
-      <p:sp>
-        <p:nvSpPr>
-          <p:cNvPr id="9" name="Text 6"/>
-          <p:cNvSpPr/>
-          <p:nvPr/>
-        </p:nvSpPr>
-        <p:spPr>
-          <a:xfrm>
-            <a:off x="457200" y="2880360"/>
-            <a:ext cx="8229600" cy="457200"/>
-          </a:xfrm>
-          <a:prstGeom prst="rect">
-            <a:avLst/>
-          </a:prstGeom>
-          <a:noFill/>
-          <a:ln/>
-        </p:spPr>
-        <p:txBody>
-          <a:bodyPr wrap="square" rtlCol="0" anchor="ctr"/>
-          <a:lstStyle/>
-          <a:p>
-            <a:pPr marL="0" indent="0">
-              <a:buNone/>
-            </a:pPr>
-            <a:r>
-              <a:rPr lang="en-US" sz="1050" b="1" dirty="0">
-                <a:solidFill>
-                  <a:srgbClr val="1B3A5C"/>
-                </a:solidFill>
-              </a:rPr>
-              <a:t>Why is incremental (93.6s) faster than full load (120.9s)?</a:t>
-            </a:r>
-            <a:endParaRPr lang="en-US" sz="1050" dirty="0"/>
-          </a:p>
-        </p:txBody>
-      </p:sp>
-      <p:sp>
-        <p:nvSpPr>
-          <p:cNvPr id="10" name="Text 7"/>
-          <p:cNvSpPr/>
-          <p:nvPr/>
-        </p:nvSpPr>
-        <p:spPr>
-          <a:xfrm>
-            <a:off x="457200" y="3383280"/>
-            <a:ext cx="8229600" cy="1371600"/>
-          </a:xfrm>
-          <a:prstGeom prst="rect">
-            <a:avLst/>
-          </a:prstGeom>
-          <a:noFill/>
-          <a:ln/>
-        </p:spPr>
-        <p:txBody>
-          <a:bodyPr wrap="square" rtlCol="0" anchor="ctr"/>
-          <a:lstStyle/>
-          <a:p>
-            <a:pPr marL="342900" indent="-342900">
-              <a:spcAft>
-                <a:spcPts val="500"/>
-              </a:spcAft>
-              <a:buSzPct val="100000"/>
-              <a:buChar char="•"/>
-            </a:pPr>
-            <a:r>
-              <a:rPr lang="en-US" sz="900" dirty="0">
-                <a:solidFill>
-                  <a:srgbClr val="1E293B"/>
-                </a:solidFill>
-              </a:rPr>
-              <a:t>Staging: full load (22.8s) truncates and reloads all records; incremental (6.0s) uses watermark delta</a:t>
-            </a:r>
-            <a:endParaRPr lang="en-US" sz="900" dirty="0"/>
-          </a:p>
-          <a:p>
-            <a:pPr marL="342900" indent="-342900">
-              <a:spcAft>
-                <a:spcPts val="500"/>
-              </a:spcAft>
-              <a:buSzPct val="100000"/>
-              <a:buChar char="•"/>
-            </a:pPr>
-            <a:r>
-              <a:rPr lang="en-US" sz="900" dirty="0">
-                <a:solidFill>
-                  <a:srgbClr val="1E293B"/>
-                </a:solidFill>
-              </a:rPr>
-              <a:t>Bronze: full load (39.5s) processes 184,108 records; incremental (30.3s) processes only 50 changed records</a:t>
-            </a:r>
-            <a:endParaRPr lang="en-US" sz="900" dirty="0"/>
-          </a:p>
-          <a:p>
-            <a:pPr marL="342900" indent="-342900">
-              <a:spcAft>
-                <a:spcPts val="500"/>
-              </a:spcAft>
-              <a:buSzPct val="100000"/>
-              <a:buChar char="•"/>
-            </a:pPr>
-            <a:r>
-              <a:rPr lang="en-US" sz="900" dirty="0">
-                <a:solidFill>
-                  <a:srgbClr val="1E293B"/>
-                </a:solidFill>
-              </a:rPr>
-              <a:t>Silver/Gold: rebuild computed tables regardless of load type (similar times)</a:t>
-            </a:r>
-            <a:endParaRPr lang="en-US" sz="900" dirty="0"/>
-          </a:p>
-          <a:p>
-            <a:pPr marL="342900" indent="-342900">
-              <a:spcAft>
-                <a:spcPts val="500"/>
-              </a:spcAft>
-              <a:buSzPct val="100000"/>
-              <a:buChar char="•"/>
-            </a:pPr>
-            <a:r>
-              <a:rPr lang="en-US" sz="900" b="1" dirty="0">
-                <a:solidFill>
-                  <a:srgbClr val="2A9D8F"/>
-                </a:solidFill>
-              </a:rPr>
-              <a:t>Net: incremental (93.6s) is 27.3s faster than full (120.9s); Silver/Gold rebuild regardless of load type</a:t>
-            </a:r>
-            <a:endParaRPr lang="en-US" sz="900" dirty="0"/>
-          </a:p>
-        </p:txBody>
-      </p:sp>
-    </p:spTree>
-  </p:cSld>
-  <p:clrMapOvr>
-    <a:masterClrMapping/>
-  </p:clrMapOvr>
-</p:sld>
-</file>
-
-<file path=ppt/slides/slide12.xml><?xml version="1.0" encoding="utf-8"?>
-<p:sld xmlns:a="http://schemas.openxmlformats.org/drawingml/2006/main" xmlns:r="http://schemas.openxmlformats.org/officeDocument/2006/relationships" xmlns:p="http://schemas.openxmlformats.org/presentationml/2006/main">
-  <p:cSld name="Slide 12">
-    <p:bg>
-      <p:bgPr>
-        <a:solidFill>
-          <a:srgbClr val="F7FAFA"/>
-        </a:solidFill>
-        <a:effectLst/>
-      </p:bgPr>
-    </p:bg>
-    <p:spTree>
-      <p:nvGrpSpPr>
-        <p:cNvPr id="1" name=""/>
-        <p:cNvGrpSpPr/>
-        <p:nvPr/>
-      </p:nvGrpSpPr>
-      <p:grpSpPr>
-        <a:xfrm>
-          <a:off x="0" y="0"/>
-          <a:ext cx="0" cy="0"/>
-          <a:chOff x="0" y="0"/>
-          <a:chExt cx="0" cy="0"/>
-        </a:xfrm>
-      </p:grpSpPr>
-      <p:sp>
-        <p:nvSpPr>
-          <p:cNvPr id="2" name="Shape 0"/>
-          <p:cNvSpPr/>
-          <p:nvPr/>
-        </p:nvSpPr>
-        <p:spPr>
-          <a:xfrm>
-            <a:off x="0" y="0"/>
-            <a:ext cx="54864" cy="5143500"/>
-          </a:xfrm>
-          <a:prstGeom prst="rect">
-            <a:avLst/>
-          </a:prstGeom>
-          <a:solidFill>
-            <a:srgbClr val="2A9D8F"/>
-          </a:solidFill>
-          <a:ln/>
-        </p:spPr>
-        <p:txBody>
-          <a:bodyPr/>
-          <a:p/>
-        </p:txBody>
-      </p:sp>
-      <p:sp>
-        <p:nvSpPr>
-          <p:cNvPr id="3" name="Text 1"/>
-          <p:cNvSpPr/>
-          <p:nvPr/>
-        </p:nvSpPr>
-        <p:spPr>
-          <a:xfrm>
-            <a:off x="8046720" y="4754880"/>
-            <a:ext cx="914400" cy="274320"/>
-          </a:xfrm>
-          <a:prstGeom prst="rect">
-            <a:avLst/>
-          </a:prstGeom>
-          <a:noFill/>
-          <a:ln/>
-        </p:spPr>
-        <p:txBody>
-          <a:bodyPr wrap="square" rtlCol="0" anchor="ctr"/>
-          <a:lstStyle/>
-          <a:p>
-            <a:pPr marL="0" indent="0" algn="r">
-              <a:buNone/>
-            </a:pPr>
-            <a:r>
-              <a:rPr lang="en-US" sz="900" dirty="0">
-                <a:solidFill>
-                  <a:srgbClr val="64748B"/>
-                </a:solidFill>
-              </a:rPr>
-              <a:t>12 / 18</a:t>
-            </a:r>
-            <a:endParaRPr lang="en-US" sz="900" dirty="0"/>
-          </a:p>
-        </p:txBody>
-      </p:sp>
-      <p:sp>
-        <p:nvSpPr>
-          <p:cNvPr id="4" name="Text 2"/>
-          <p:cNvSpPr/>
-          <p:nvPr/>
-        </p:nvSpPr>
-        <p:spPr>
-          <a:xfrm>
-            <a:off x="457200" y="182880"/>
-            <a:ext cx="8229600" cy="502920"/>
-          </a:xfrm>
-          <a:prstGeom prst="rect">
-            <a:avLst/>
-          </a:prstGeom>
-          <a:noFill/>
-          <a:ln/>
-        </p:spPr>
-        <p:txBody>
-          <a:bodyPr wrap="square" rtlCol="0" anchor="ctr"/>
-          <a:lstStyle/>
-          <a:p>
-            <a:pPr marL="0" indent="0">
-              <a:buNone/>
-            </a:pPr>
-            <a:r>
-              <a:rPr lang="en-US" sz="2200" b="1" dirty="0">
-                <a:solidFill>
-                  <a:srgbClr val="1B3A5C"/>
-                </a:solidFill>
-                <a:latin typeface="Georgia" pitchFamily="34" charset="0"/>
-                <a:ea typeface="Georgia" pitchFamily="34" charset="-122"/>
-                <a:cs typeface="Georgia" pitchFamily="34" charset="-120"/>
-              </a:rPr>
-              <a:t>Query Performance — Gold vs Raw Vault</a:t>
-            </a:r>
-            <a:endParaRPr lang="en-US" sz="2200" dirty="0"/>
-          </a:p>
-        </p:txBody>
-      </p:sp>
-      <p:sp>
-        <p:nvSpPr>
-          <p:cNvPr id="5" name="Shape 3"/>
-          <p:cNvSpPr/>
-          <p:nvPr/>
-        </p:nvSpPr>
-        <p:spPr>
-          <a:xfrm>
-            <a:off x="457200" y="731520"/>
-            <a:ext cx="1097280" cy="36576"/>
-          </a:xfrm>
-          <a:prstGeom prst="rect">
-            <a:avLst/>
-          </a:prstGeom>
-          <a:solidFill>
-            <a:srgbClr val="2A9D8F"/>
-          </a:solidFill>
-          <a:ln/>
-        </p:spPr>
-        <p:txBody>
-          <a:bodyPr/>
-          <a:p/>
-        </p:txBody>
-      </p:sp>
-      <p:graphicFrame>
-        <p:nvGraphicFramePr>
-          <p:cNvPr id="13" name="Table 0"/>
-          <p:cNvGraphicFramePr>
-            <a:graphicFrameLocks noGrp="1"/>
-          </p:cNvGraphicFramePr>
-          <p:nvPr>
-            <p:extLst>
-              <p:ext uri="{D42A27DB-BD31-4B8C-83A1-F6EECF244321}">
-                <p14:modId xmlns:p14="http://schemas.microsoft.com/office/powerpoint/2010/main" val="1579011935"/>
-              </p:ext>
-            </p:extLst>
-          </p:nvPr>
-        </p:nvGraphicFramePr>
-        <p:xfrm>
-          <a:off x="274320" y="1005840"/>
-          <a:ext cx="8595360" cy="975360"/>
-        </p:xfrm>
-        <a:graphic>
-          <a:graphicData uri="http://schemas.openxmlformats.org/drawingml/2006/table">
-            <a:tbl>
-              <a:tblPr/>
-              <a:tblGrid>
-                <a:gridCol w="1188720">
-                  <a:extLst>
-                    <a:ext uri="{9D8B030D-6E8A-4147-A177-3AD203B41FA5}">
-                      <a16:colId xmlns:a16="http://schemas.microsoft.com/office/drawing/2014/main" val="20000"/>
-                    </a:ext>
-                  </a:extLst>
-                </a:gridCol>
-                <a:gridCol w="2743200">
-                  <a:extLst>
-                    <a:ext uri="{9D8B030D-6E8A-4147-A177-3AD203B41FA5}">
-                      <a16:colId xmlns:a16="http://schemas.microsoft.com/office/drawing/2014/main" val="20001"/>
-                    </a:ext>
-                  </a:extLst>
-                </a:gridCol>
-                <a:gridCol w="1371600">
-                  <a:extLst>
-                    <a:ext uri="{9D8B030D-6E8A-4147-A177-3AD203B41FA5}">
-                      <a16:colId xmlns:a16="http://schemas.microsoft.com/office/drawing/2014/main" val="20002"/>
-                    </a:ext>
-                  </a:extLst>
-                </a:gridCol>
-                <a:gridCol w="1645920">
-                  <a:extLst>
-                    <a:ext uri="{9D8B030D-6E8A-4147-A177-3AD203B41FA5}">
-                      <a16:colId xmlns:a16="http://schemas.microsoft.com/office/drawing/2014/main" val="20003"/>
-                    </a:ext>
-                  </a:extLst>
-                </a:gridCol>
-                <a:gridCol w="1645920">
-                  <a:extLst>
-                    <a:ext uri="{9D8B030D-6E8A-4147-A177-3AD203B41FA5}">
-                      <a16:colId xmlns:a16="http://schemas.microsoft.com/office/drawing/2014/main" val="20004"/>
-                    </a:ext>
-                  </a:extLst>
-                </a:gridCol>
-              </a:tblGrid>
-              <a:tr h="0">
-                <a:tc>
-                  <a:txBody>
-                    <a:bodyPr/>
-                    <a:lstStyle/>
-                    <a:p>
-                      <a:pPr marL="0" indent="0">
-                        <a:buNone/>
-                      </a:pPr>
-                      <a:r>
-                        <a:rPr lang="en-US" sz="1000" b="1" dirty="0">
-                          <a:solidFill>
-                            <a:srgbClr val="FFFFFF"/>
-                          </a:solidFill>
-                        </a:rPr>
-                        <a:t>Complexity</a:t>
-                      </a:r>
-                      <a:endParaRPr lang="en-US" sz="1000" dirty="0"/>
-                    </a:p>
-                  </a:txBody>
-                  <a:tcPr>
-                    <a:lnL w="6350" cap="flat" cmpd="sng" algn="ctr">
-                      <a:solidFill>
-                        <a:srgbClr val="E2E8F0"/>
-                      </a:solidFill>
-                      <a:prstDash val="solid"/>
-                      <a:round/>
-                      <a:headEnd type="none" w="med" len="med"/>
-                      <a:tailEnd type="none" w="med" len="med"/>
-                    </a:lnL>
-                    <a:lnR w="6350" cap="flat" cmpd="sng" algn="ctr">
-                      <a:solidFill>
-                        <a:srgbClr val="E2E8F0"/>
-                      </a:solidFill>
-                      <a:prstDash val="solid"/>
-                      <a:round/>
-                      <a:headEnd type="none" w="med" len="med"/>
-                      <a:tailEnd type="none" w="med" len="med"/>
-                    </a:lnR>
-                    <a:lnT w="6350" cap="flat" cmpd="sng" algn="ctr">
-                      <a:solidFill>
-                        <a:srgbClr val="E2E8F0"/>
-                      </a:solidFill>
-                      <a:prstDash val="solid"/>
-                      <a:round/>
-                      <a:headEnd type="none" w="med" len="med"/>
-                      <a:tailEnd type="none" w="med" len="med"/>
-                    </a:lnT>
-                    <a:lnB w="6350" cap="flat" cmpd="sng" algn="ctr">
-                      <a:solidFill>
-                        <a:srgbClr val="E2E8F0"/>
-                      </a:solidFill>
-                      <a:prstDash val="solid"/>
-                      <a:round/>
-                      <a:headEnd type="none" w="med" len="med"/>
-                      <a:tailEnd type="none" w="med" len="med"/>
-                    </a:lnB>
-                    <a:solidFill>
-                      <a:srgbClr val="1B3A5C"/>
-                    </a:solidFill>
-                  </a:tcPr>
-                </a:tc>
-                <a:tc>
-                  <a:txBody>
-                    <a:bodyPr/>
-                    <a:lstStyle/>
-                    <a:p>
-                      <a:pPr marL="0" indent="0">
-                        <a:buNone/>
-                      </a:pPr>
-                      <a:r>
-                        <a:rPr lang="en-US" sz="1000" b="1" dirty="0">
-                          <a:solidFill>
-                            <a:srgbClr val="FFFFFF"/>
-                          </a:solidFill>
-                        </a:rPr>
-                        <a:t>Query Description</a:t>
-                      </a:r>
-                      <a:endParaRPr lang="en-US" sz="1000" dirty="0"/>
-                    </a:p>
-                  </a:txBody>
-                  <a:tcPr>
-                    <a:lnL w="6350" cap="flat" cmpd="sng" algn="ctr">
-                      <a:solidFill>
-                        <a:srgbClr val="E2E8F0"/>
-                      </a:solidFill>
-                      <a:prstDash val="solid"/>
-                      <a:round/>
-                      <a:headEnd type="none" w="med" len="med"/>
-                      <a:tailEnd type="none" w="med" len="med"/>
-                    </a:lnL>
-                    <a:lnR w="6350" cap="flat" cmpd="sng" algn="ctr">
-                      <a:solidFill>
-                        <a:srgbClr val="E2E8F0"/>
-                      </a:solidFill>
-                      <a:prstDash val="solid"/>
-                      <a:round/>
-                      <a:headEnd type="none" w="med" len="med"/>
-                      <a:tailEnd type="none" w="med" len="med"/>
-                    </a:lnR>
-                    <a:lnT w="6350" cap="flat" cmpd="sng" algn="ctr">
-                      <a:solidFill>
-                        <a:srgbClr val="E2E8F0"/>
-                      </a:solidFill>
-                      <a:prstDash val="solid"/>
-                      <a:round/>
-                      <a:headEnd type="none" w="med" len="med"/>
-                      <a:tailEnd type="none" w="med" len="med"/>
-                    </a:lnT>
-                    <a:lnB w="6350" cap="flat" cmpd="sng" algn="ctr">
-                      <a:solidFill>
-                        <a:srgbClr val="E2E8F0"/>
-                      </a:solidFill>
-                      <a:prstDash val="solid"/>
-                      <a:round/>
-                      <a:headEnd type="none" w="med" len="med"/>
-                      <a:tailEnd type="none" w="med" len="med"/>
-                    </a:lnB>
-                    <a:solidFill>
-                      <a:srgbClr val="1B3A5C"/>
-                    </a:solidFill>
-                  </a:tcPr>
-                </a:tc>
-                <a:tc>
-                  <a:txBody>
-                    <a:bodyPr/>
-                    <a:lstStyle/>
-                    <a:p>
-                      <a:pPr marL="0" indent="0">
-                        <a:buNone/>
-                      </a:pPr>
-                      <a:r>
-                        <a:rPr lang="en-US" sz="1000" b="1" dirty="0">
-                          <a:solidFill>
-                            <a:srgbClr val="FFFFFF"/>
-                          </a:solidFill>
-                        </a:rPr>
-                        <a:t>Gold (ms)</a:t>
-                      </a:r>
-                      <a:endParaRPr lang="en-US" sz="1000" dirty="0"/>
-                    </a:p>
-                  </a:txBody>
-                  <a:tcPr>
-                    <a:lnL w="6350" cap="flat" cmpd="sng" algn="ctr">
-                      <a:solidFill>
-                        <a:srgbClr val="E2E8F0"/>
-                      </a:solidFill>
-                      <a:prstDash val="solid"/>
-                      <a:round/>
-                      <a:headEnd type="none" w="med" len="med"/>
-                      <a:tailEnd type="none" w="med" len="med"/>
-                    </a:lnL>
-                    <a:lnR w="6350" cap="flat" cmpd="sng" algn="ctr">
-                      <a:solidFill>
-                        <a:srgbClr val="E2E8F0"/>
-                      </a:solidFill>
-                      <a:prstDash val="solid"/>
-                      <a:round/>
-                      <a:headEnd type="none" w="med" len="med"/>
-                      <a:tailEnd type="none" w="med" len="med"/>
-                    </a:lnR>
-                    <a:lnT w="6350" cap="flat" cmpd="sng" algn="ctr">
-                      <a:solidFill>
-                        <a:srgbClr val="E2E8F0"/>
-                      </a:solidFill>
-                      <a:prstDash val="solid"/>
-                      <a:round/>
-                      <a:headEnd type="none" w="med" len="med"/>
-                      <a:tailEnd type="none" w="med" len="med"/>
-                    </a:lnT>
-                    <a:lnB w="6350" cap="flat" cmpd="sng" algn="ctr">
-                      <a:solidFill>
-                        <a:srgbClr val="E2E8F0"/>
-                      </a:solidFill>
-                      <a:prstDash val="solid"/>
-                      <a:round/>
-                      <a:headEnd type="none" w="med" len="med"/>
-                      <a:tailEnd type="none" w="med" len="med"/>
-                    </a:lnB>
-                    <a:solidFill>
-                      <a:srgbClr val="1B3A5C"/>
-                    </a:solidFill>
-                  </a:tcPr>
-                </a:tc>
-                <a:tc>
-                  <a:txBody>
-                    <a:bodyPr/>
-                    <a:lstStyle/>
-                    <a:p>
-                      <a:pPr marL="0" indent="0">
-                        <a:buNone/>
-                      </a:pPr>
-                      <a:r>
-                        <a:rPr lang="en-US" sz="1000" b="1" dirty="0">
-                          <a:solidFill>
-                            <a:srgbClr val="FFFFFF"/>
-                          </a:solidFill>
-                        </a:rPr>
-                        <a:t>Raw Vault (ms)</a:t>
-                      </a:r>
-                      <a:endParaRPr lang="en-US" sz="1000" dirty="0"/>
-                    </a:p>
-                  </a:txBody>
-                  <a:tcPr>
-                    <a:lnL w="6350" cap="flat" cmpd="sng" algn="ctr">
-                      <a:solidFill>
-                        <a:srgbClr val="E2E8F0"/>
-                      </a:solidFill>
-                      <a:prstDash val="solid"/>
-                      <a:round/>
-                      <a:headEnd type="none" w="med" len="med"/>
-                      <a:tailEnd type="none" w="med" len="med"/>
-                    </a:lnL>
-                    <a:lnR w="6350" cap="flat" cmpd="sng" algn="ctr">
-                      <a:solidFill>
-                        <a:srgbClr val="E2E8F0"/>
-                      </a:solidFill>
-                      <a:prstDash val="solid"/>
-                      <a:round/>
-                      <a:headEnd type="none" w="med" len="med"/>
-                      <a:tailEnd type="none" w="med" len="med"/>
-                    </a:lnR>
-                    <a:lnT w="6350" cap="flat" cmpd="sng" algn="ctr">
-                      <a:solidFill>
-                        <a:srgbClr val="E2E8F0"/>
-                      </a:solidFill>
-                      <a:prstDash val="solid"/>
-                      <a:round/>
-                      <a:headEnd type="none" w="med" len="med"/>
-                      <a:tailEnd type="none" w="med" len="med"/>
-                    </a:lnT>
-                    <a:lnB w="6350" cap="flat" cmpd="sng" algn="ctr">
-                      <a:solidFill>
-                        <a:srgbClr val="E2E8F0"/>
-                      </a:solidFill>
-                      <a:prstDash val="solid"/>
-                      <a:round/>
-                      <a:headEnd type="none" w="med" len="med"/>
-                      <a:tailEnd type="none" w="med" len="med"/>
-                    </a:lnB>
-                    <a:solidFill>
-                      <a:srgbClr val="1B3A5C"/>
-                    </a:solidFill>
-                  </a:tcPr>
-                </a:tc>
-                <a:tc>
-                  <a:txBody>
-                    <a:bodyPr/>
-                    <a:lstStyle/>
-                    <a:p>
-                      <a:pPr marL="0" indent="0">
-                        <a:buNone/>
-                      </a:pPr>
-                      <a:r>
-                        <a:rPr lang="en-US" sz="1000" b="1" dirty="0">
-                          <a:solidFill>
-                            <a:srgbClr val="FFFFFF"/>
-                          </a:solidFill>
-                        </a:rPr>
-                        <a:t>Speedup</a:t>
-                      </a:r>
-                      <a:endParaRPr lang="en-US" sz="1000" dirty="0"/>
-                    </a:p>
-                  </a:txBody>
-                  <a:tcPr>
-                    <a:lnL w="6350" cap="flat" cmpd="sng" algn="ctr">
-                      <a:solidFill>
-                        <a:srgbClr val="E2E8F0"/>
-                      </a:solidFill>
-                      <a:prstDash val="solid"/>
-                      <a:round/>
-                      <a:headEnd type="none" w="med" len="med"/>
-                      <a:tailEnd type="none" w="med" len="med"/>
-                    </a:lnL>
-                    <a:lnR w="6350" cap="flat" cmpd="sng" algn="ctr">
-                      <a:solidFill>
-                        <a:srgbClr val="E2E8F0"/>
-                      </a:solidFill>
-                      <a:prstDash val="solid"/>
-                      <a:round/>
-                      <a:headEnd type="none" w="med" len="med"/>
-                      <a:tailEnd type="none" w="med" len="med"/>
-                    </a:lnR>
-                    <a:lnT w="6350" cap="flat" cmpd="sng" algn="ctr">
-                      <a:solidFill>
-                        <a:srgbClr val="E2E8F0"/>
-                      </a:solidFill>
-                      <a:prstDash val="solid"/>
-                      <a:round/>
-                      <a:headEnd type="none" w="med" len="med"/>
-                      <a:tailEnd type="none" w="med" len="med"/>
-                    </a:lnT>
-                    <a:lnB w="6350" cap="flat" cmpd="sng" algn="ctr">
-                      <a:solidFill>
-                        <a:srgbClr val="E2E8F0"/>
-                      </a:solidFill>
-                      <a:prstDash val="solid"/>
-                      <a:round/>
-                      <a:headEnd type="none" w="med" len="med"/>
-                      <a:tailEnd type="none" w="med" len="med"/>
-                    </a:lnB>
-                    <a:solidFill>
-                      <a:srgbClr val="1B3A5C"/>
-                    </a:solidFill>
-                  </a:tcPr>
-                </a:tc>
-                <a:extLst>
-                  <a:ext uri="{0D108BD9-81ED-4DB2-BD59-A6C34878D82A}">
-                    <a16:rowId xmlns:a16="http://schemas.microsoft.com/office/drawing/2014/main" val="10000"/>
-                  </a:ext>
-                </a:extLst>
-              </a:tr>
-              <a:tr h="0">
-                <a:tc>
-                  <a:txBody>
-                    <a:bodyPr/>
-                    <a:lstStyle/>
-                    <a:p>
-                      <a:pPr marL="0" indent="0">
-                        <a:buNone/>
-                      </a:pPr>
-                      <a:r>
-                        <a:rPr lang="en-US" sz="1000" b="1" dirty="0">
-                          <a:solidFill>
-                            <a:srgbClr val="1B3A5C"/>
-                          </a:solidFill>
-                        </a:rPr>
-                        <a:t>Simple</a:t>
-                      </a:r>
-                      <a:endParaRPr lang="en-US" sz="1000" dirty="0"/>
-                    </a:p>
-                  </a:txBody>
-                  <a:tcPr>
-                    <a:lnL w="6350" cap="flat" cmpd="sng" algn="ctr">
-                      <a:solidFill>
-                        <a:srgbClr val="E2E8F0"/>
-                      </a:solidFill>
-                      <a:prstDash val="solid"/>
-                      <a:round/>
-                      <a:headEnd type="none" w="med" len="med"/>
-                      <a:tailEnd type="none" w="med" len="med"/>
-                    </a:lnL>
-                    <a:lnR w="6350" cap="flat" cmpd="sng" algn="ctr">
-                      <a:solidFill>
-                        <a:srgbClr val="E2E8F0"/>
-                      </a:solidFill>
-                      <a:prstDash val="solid"/>
-                      <a:round/>
-                      <a:headEnd type="none" w="med" len="med"/>
-                      <a:tailEnd type="none" w="med" len="med"/>
-                    </a:lnR>
-                    <a:lnT w="6350" cap="flat" cmpd="sng" algn="ctr">
-                      <a:solidFill>
-                        <a:srgbClr val="E2E8F0"/>
-                      </a:solidFill>
-                      <a:prstDash val="solid"/>
-                      <a:round/>
-                      <a:headEnd type="none" w="med" len="med"/>
-                      <a:tailEnd type="none" w="med" len="med"/>
-                    </a:lnT>
-                    <a:lnB w="6350" cap="flat" cmpd="sng" algn="ctr">
-                      <a:solidFill>
-                        <a:srgbClr val="E2E8F0"/>
-                      </a:solidFill>
-                      <a:prstDash val="solid"/>
-                      <a:round/>
-                      <a:headEnd type="none" w="med" len="med"/>
-                      <a:tailEnd type="none" w="med" len="med"/>
-                    </a:lnB>
-                    <a:solidFill>
-                      <a:srgbClr val="FFFFFF"/>
-                    </a:solidFill>
-                  </a:tcPr>
-                </a:tc>
-                <a:tc>
-                  <a:txBody>
-                    <a:bodyPr/>
-                    <a:lstStyle/>
-                    <a:p>
-                      <a:pPr marL="0" indent="0">
-                        <a:buNone/>
-                      </a:pPr>
-                      <a:r>
-                        <a:rPr lang="en-US" sz="950" dirty="0">
-                          <a:solidFill>
-                            <a:srgbClr val="1E293B"/>
-                          </a:solidFill>
-                        </a:rPr>
-                        <a:t>Total tax by category (2-table join)</a:t>
-                      </a:r>
-                      <a:endParaRPr lang="en-US" sz="950" dirty="0"/>
-                    </a:p>
-                  </a:txBody>
-                  <a:tcPr>
-                    <a:lnL w="6350" cap="flat" cmpd="sng" algn="ctr">
-                      <a:solidFill>
-                        <a:srgbClr val="E2E8F0"/>
-                      </a:solidFill>
-                      <a:prstDash val="solid"/>
-                      <a:round/>
-                      <a:headEnd type="none" w="med" len="med"/>
-                      <a:tailEnd type="none" w="med" len="med"/>
-                    </a:lnL>
-                    <a:lnR w="6350" cap="flat" cmpd="sng" algn="ctr">
-                      <a:solidFill>
-                        <a:srgbClr val="E2E8F0"/>
-                      </a:solidFill>
-                      <a:prstDash val="solid"/>
-                      <a:round/>
-                      <a:headEnd type="none" w="med" len="med"/>
-                      <a:tailEnd type="none" w="med" len="med"/>
-                    </a:lnR>
-                    <a:lnT w="6350" cap="flat" cmpd="sng" algn="ctr">
-                      <a:solidFill>
-                        <a:srgbClr val="E2E8F0"/>
-                      </a:solidFill>
-                      <a:prstDash val="solid"/>
-                      <a:round/>
-                      <a:headEnd type="none" w="med" len="med"/>
-                      <a:tailEnd type="none" w="med" len="med"/>
-                    </a:lnT>
-                    <a:lnB w="6350" cap="flat" cmpd="sng" algn="ctr">
-                      <a:solidFill>
-                        <a:srgbClr val="E2E8F0"/>
-                      </a:solidFill>
-                      <a:prstDash val="solid"/>
-                      <a:round/>
-                      <a:headEnd type="none" w="med" len="med"/>
-                      <a:tailEnd type="none" w="med" len="med"/>
-                    </a:lnB>
-                    <a:solidFill>
-                      <a:srgbClr val="FFFFFF"/>
-                    </a:solidFill>
-                  </a:tcPr>
-                </a:tc>
-                <a:tc>
-                  <a:txBody>
-                    <a:bodyPr/>
-                    <a:lstStyle/>
-                    <a:p>
-                      <a:pPr marL="0" indent="0">
-                        <a:buNone/>
-                      </a:pPr>
-                      <a:r>
-                        <a:rPr lang="en-US" sz="1000" b="1" dirty="0">
-                          <a:solidFill>
-                            <a:srgbClr val="16A34A"/>
-                          </a:solidFill>
-                        </a:rPr>
-                        <a:t>24</a:t>
-                      </a:r>
-                      <a:endParaRPr lang="en-US" sz="1000" dirty="0"/>
-                    </a:p>
-                  </a:txBody>
-                  <a:tcPr>
-                    <a:lnL w="6350" cap="flat" cmpd="sng" algn="ctr">
-                      <a:solidFill>
-                        <a:srgbClr val="E2E8F0"/>
-                      </a:solidFill>
-                      <a:prstDash val="solid"/>
-                      <a:round/>
-                      <a:headEnd type="none" w="med" len="med"/>
-                      <a:tailEnd type="none" w="med" len="med"/>
-                    </a:lnL>
-                    <a:lnR w="6350" cap="flat" cmpd="sng" algn="ctr">
-                      <a:solidFill>
-                        <a:srgbClr val="E2E8F0"/>
-                      </a:solidFill>
-                      <a:prstDash val="solid"/>
-                      <a:round/>
-                      <a:headEnd type="none" w="med" len="med"/>
-                      <a:tailEnd type="none" w="med" len="med"/>
-                    </a:lnR>
-                    <a:lnT w="6350" cap="flat" cmpd="sng" algn="ctr">
-                      <a:solidFill>
-                        <a:srgbClr val="E2E8F0"/>
-                      </a:solidFill>
-                      <a:prstDash val="solid"/>
-                      <a:round/>
-                      <a:headEnd type="none" w="med" len="med"/>
-                      <a:tailEnd type="none" w="med" len="med"/>
-                    </a:lnT>
-                    <a:lnB w="6350" cap="flat" cmpd="sng" algn="ctr">
-                      <a:solidFill>
-                        <a:srgbClr val="E2E8F0"/>
-                      </a:solidFill>
-                      <a:prstDash val="solid"/>
-                      <a:round/>
-                      <a:headEnd type="none" w="med" len="med"/>
-                      <a:tailEnd type="none" w="med" len="med"/>
-                    </a:lnB>
-                    <a:solidFill>
-                      <a:srgbClr val="FFFFFF"/>
-                    </a:solidFill>
-                  </a:tcPr>
-                </a:tc>
-                <a:tc>
-                  <a:txBody>
-                    <a:bodyPr/>
-                    <a:lstStyle/>
-                    <a:p>
-                      <a:pPr marL="0" indent="0">
-                        <a:buNone/>
-                      </a:pPr>
-                      <a:r>
-                        <a:rPr lang="en-US" sz="1000" dirty="0">
-                          <a:solidFill>
-                            <a:srgbClr val="DC2626"/>
-                          </a:solidFill>
-                        </a:rPr>
-                        <a:t>199</a:t>
-                      </a:r>
-                      <a:endParaRPr lang="en-US" sz="1000" dirty="0"/>
-                    </a:p>
-                  </a:txBody>
-                  <a:tcPr>
-                    <a:lnL w="6350" cap="flat" cmpd="sng" algn="ctr">
-                      <a:solidFill>
-                        <a:srgbClr val="E2E8F0"/>
-                      </a:solidFill>
-                      <a:prstDash val="solid"/>
-                      <a:round/>
-                      <a:headEnd type="none" w="med" len="med"/>
-                      <a:tailEnd type="none" w="med" len="med"/>
-                    </a:lnL>
-                    <a:lnR w="6350" cap="flat" cmpd="sng" algn="ctr">
-                      <a:solidFill>
-                        <a:srgbClr val="E2E8F0"/>
-                      </a:solidFill>
-                      <a:prstDash val="solid"/>
-                      <a:round/>
-                      <a:headEnd type="none" w="med" len="med"/>
-                      <a:tailEnd type="none" w="med" len="med"/>
-                    </a:lnR>
-                    <a:lnT w="6350" cap="flat" cmpd="sng" algn="ctr">
-                      <a:solidFill>
-                        <a:srgbClr val="E2E8F0"/>
-                      </a:solidFill>
-                      <a:prstDash val="solid"/>
-                      <a:round/>
-                      <a:headEnd type="none" w="med" len="med"/>
-                      <a:tailEnd type="none" w="med" len="med"/>
-                    </a:lnT>
-                    <a:lnB w="6350" cap="flat" cmpd="sng" algn="ctr">
-                      <a:solidFill>
-                        <a:srgbClr val="E2E8F0"/>
-                      </a:solidFill>
-                      <a:prstDash val="solid"/>
-                      <a:round/>
-                      <a:headEnd type="none" w="med" len="med"/>
-                      <a:tailEnd type="none" w="med" len="med"/>
-                    </a:lnB>
-                    <a:solidFill>
-                      <a:srgbClr val="FFFFFF"/>
-                    </a:solidFill>
-                  </a:tcPr>
-                </a:tc>
-                <a:tc>
-                  <a:txBody>
-                    <a:bodyPr/>
-                    <a:lstStyle/>
-                    <a:p>
-                      <a:pPr marL="0" indent="0">
-                        <a:buNone/>
-                      </a:pPr>
-                      <a:r>
-                        <a:rPr lang="en-US" sz="1000" b="1" dirty="0">
-                          <a:solidFill>
-                            <a:srgbClr val="2A9D8F"/>
-                          </a:solidFill>
-                        </a:rPr>
-                        <a:t>8.3x</a:t>
-                      </a:r>
-                      <a:endParaRPr lang="en-US" sz="1000" dirty="0"/>
-                    </a:p>
-                  </a:txBody>
-                  <a:tcPr>
-                    <a:lnL w="6350" cap="flat" cmpd="sng" algn="ctr">
-                      <a:solidFill>
-                        <a:srgbClr val="E2E8F0"/>
-                      </a:solidFill>
-                      <a:prstDash val="solid"/>
-                      <a:round/>
-                      <a:headEnd type="none" w="med" len="med"/>
-                      <a:tailEnd type="none" w="med" len="med"/>
-                    </a:lnL>
-                    <a:lnR w="6350" cap="flat" cmpd="sng" algn="ctr">
-                      <a:solidFill>
-                        <a:srgbClr val="E2E8F0"/>
-                      </a:solidFill>
-                      <a:prstDash val="solid"/>
-                      <a:round/>
-                      <a:headEnd type="none" w="med" len="med"/>
-                      <a:tailEnd type="none" w="med" len="med"/>
-                    </a:lnR>
-                    <a:lnT w="6350" cap="flat" cmpd="sng" algn="ctr">
-                      <a:solidFill>
-                        <a:srgbClr val="E2E8F0"/>
-                      </a:solidFill>
-                      <a:prstDash val="solid"/>
-                      <a:round/>
-                      <a:headEnd type="none" w="med" len="med"/>
-                      <a:tailEnd type="none" w="med" len="med"/>
-                    </a:lnT>
-                    <a:lnB w="6350" cap="flat" cmpd="sng" algn="ctr">
-                      <a:solidFill>
-                        <a:srgbClr val="E2E8F0"/>
-                      </a:solidFill>
-                      <a:prstDash val="solid"/>
-                      <a:round/>
-                      <a:headEnd type="none" w="med" len="med"/>
-                      <a:tailEnd type="none" w="med" len="med"/>
-                    </a:lnB>
-                    <a:solidFill>
-                      <a:srgbClr val="FFFFFF"/>
-                    </a:solidFill>
-                  </a:tcPr>
-                </a:tc>
-                <a:extLst>
-                  <a:ext uri="{0D108BD9-81ED-4DB2-BD59-A6C34878D82A}">
-                    <a16:rowId xmlns:a16="http://schemas.microsoft.com/office/drawing/2014/main" val="10001"/>
-                  </a:ext>
-                </a:extLst>
-              </a:tr>
-              <a:tr h="0">
-                <a:tc>
-                  <a:txBody>
-                    <a:bodyPr/>
-                    <a:lstStyle/>
-                    <a:p>
-                      <a:pPr marL="0" indent="0">
-                        <a:buNone/>
-                      </a:pPr>
-                      <a:r>
-                        <a:rPr lang="en-US" sz="1000" b="1" dirty="0">
-                          <a:solidFill>
-                            <a:srgbClr val="1B3A5C"/>
-                          </a:solidFill>
-                        </a:rPr>
-                        <a:t>Medium</a:t>
-                      </a:r>
-                      <a:endParaRPr lang="en-US" sz="1000" dirty="0"/>
-                    </a:p>
-                  </a:txBody>
-                  <a:tcPr>
-                    <a:lnL w="6350" cap="flat" cmpd="sng" algn="ctr">
-                      <a:solidFill>
-                        <a:srgbClr val="E2E8F0"/>
-                      </a:solidFill>
-                      <a:prstDash val="solid"/>
-                      <a:round/>
-                      <a:headEnd type="none" w="med" len="med"/>
-                      <a:tailEnd type="none" w="med" len="med"/>
-                    </a:lnL>
-                    <a:lnR w="6350" cap="flat" cmpd="sng" algn="ctr">
-                      <a:solidFill>
-                        <a:srgbClr val="E2E8F0"/>
-                      </a:solidFill>
-                      <a:prstDash val="solid"/>
-                      <a:round/>
-                      <a:headEnd type="none" w="med" len="med"/>
-                      <a:tailEnd type="none" w="med" len="med"/>
-                    </a:lnR>
-                    <a:lnT w="6350" cap="flat" cmpd="sng" algn="ctr">
-                      <a:solidFill>
-                        <a:srgbClr val="E2E8F0"/>
-                      </a:solidFill>
-                      <a:prstDash val="solid"/>
-                      <a:round/>
-                      <a:headEnd type="none" w="med" len="med"/>
-                      <a:tailEnd type="none" w="med" len="med"/>
-                    </a:lnT>
-                    <a:lnB w="6350" cap="flat" cmpd="sng" algn="ctr">
-                      <a:solidFill>
-                        <a:srgbClr val="E2E8F0"/>
-                      </a:solidFill>
-                      <a:prstDash val="solid"/>
-                      <a:round/>
-                      <a:headEnd type="none" w="med" len="med"/>
-                      <a:tailEnd type="none" w="med" len="med"/>
-                    </a:lnB>
-                    <a:solidFill>
-                      <a:srgbClr val="E8F4F2"/>
-                    </a:solidFill>
-                  </a:tcPr>
-                </a:tc>
-                <a:tc>
-                  <a:txBody>
-                    <a:bodyPr/>
-                    <a:lstStyle/>
-                    <a:p>
-                      <a:pPr marL="0" indent="0">
-                        <a:buNone/>
-                      </a:pPr>
-                      <a:r>
-                        <a:rPr lang="en-US" sz="950" dirty="0">
-                          <a:solidFill>
-                            <a:srgbClr val="1E293B"/>
-                          </a:solidFill>
-                        </a:rPr>
-                        <a:t>Top 10 by payment (4-table join)</a:t>
-                      </a:r>
-                      <a:endParaRPr lang="en-US" sz="950" dirty="0"/>
-                    </a:p>
-                  </a:txBody>
-                  <a:tcPr>
-                    <a:lnL w="6350" cap="flat" cmpd="sng" algn="ctr">
-                      <a:solidFill>
-                        <a:srgbClr val="E2E8F0"/>
-                      </a:solidFill>
-                      <a:prstDash val="solid"/>
-                      <a:round/>
-                      <a:headEnd type="none" w="med" len="med"/>
-                      <a:tailEnd type="none" w="med" len="med"/>
-                    </a:lnL>
-                    <a:lnR w="6350" cap="flat" cmpd="sng" algn="ctr">
-                      <a:solidFill>
-                        <a:srgbClr val="E2E8F0"/>
-                      </a:solidFill>
-                      <a:prstDash val="solid"/>
-                      <a:round/>
-                      <a:headEnd type="none" w="med" len="med"/>
-                      <a:tailEnd type="none" w="med" len="med"/>
-                    </a:lnR>
-                    <a:lnT w="6350" cap="flat" cmpd="sng" algn="ctr">
-                      <a:solidFill>
-                        <a:srgbClr val="E2E8F0"/>
-                      </a:solidFill>
-                      <a:prstDash val="solid"/>
-                      <a:round/>
-                      <a:headEnd type="none" w="med" len="med"/>
-                      <a:tailEnd type="none" w="med" len="med"/>
-                    </a:lnT>
-                    <a:lnB w="6350" cap="flat" cmpd="sng" algn="ctr">
-                      <a:solidFill>
-                        <a:srgbClr val="E2E8F0"/>
-                      </a:solidFill>
-                      <a:prstDash val="solid"/>
-                      <a:round/>
-                      <a:headEnd type="none" w="med" len="med"/>
-                      <a:tailEnd type="none" w="med" len="med"/>
-                    </a:lnB>
-                    <a:solidFill>
-                      <a:srgbClr val="E8F4F2"/>
-                    </a:solidFill>
-                  </a:tcPr>
-                </a:tc>
-                <a:tc>
-                  <a:txBody>
-                    <a:bodyPr/>
-                    <a:lstStyle/>
-                    <a:p>
-                      <a:pPr marL="0" indent="0">
-                        <a:buNone/>
-                      </a:pPr>
-                      <a:r>
-                        <a:rPr lang="en-US" sz="1000" b="1" dirty="0">
-                          <a:solidFill>
-                            <a:srgbClr val="16A34A"/>
-                          </a:solidFill>
-                        </a:rPr>
-                        <a:t>18</a:t>
-                      </a:r>
-                      <a:endParaRPr lang="en-US" sz="1000" dirty="0"/>
-                    </a:p>
-                  </a:txBody>
-                  <a:tcPr>
-                    <a:lnL w="6350" cap="flat" cmpd="sng" algn="ctr">
-                      <a:solidFill>
-                        <a:srgbClr val="E2E8F0"/>
-                      </a:solidFill>
-                      <a:prstDash val="solid"/>
-                      <a:round/>
-                      <a:headEnd type="none" w="med" len="med"/>
-                      <a:tailEnd type="none" w="med" len="med"/>
-                    </a:lnL>
-                    <a:lnR w="6350" cap="flat" cmpd="sng" algn="ctr">
-                      <a:solidFill>
-                        <a:srgbClr val="E2E8F0"/>
-                      </a:solidFill>
-                      <a:prstDash val="solid"/>
-                      <a:round/>
-                      <a:headEnd type="none" w="med" len="med"/>
-                      <a:tailEnd type="none" w="med" len="med"/>
-                    </a:lnR>
-                    <a:lnT w="6350" cap="flat" cmpd="sng" algn="ctr">
-                      <a:solidFill>
-                        <a:srgbClr val="E2E8F0"/>
-                      </a:solidFill>
-                      <a:prstDash val="solid"/>
-                      <a:round/>
-                      <a:headEnd type="none" w="med" len="med"/>
-                      <a:tailEnd type="none" w="med" len="med"/>
-                    </a:lnT>
-                    <a:lnB w="6350" cap="flat" cmpd="sng" algn="ctr">
-                      <a:solidFill>
-                        <a:srgbClr val="E2E8F0"/>
-                      </a:solidFill>
-                      <a:prstDash val="solid"/>
-                      <a:round/>
-                      <a:headEnd type="none" w="med" len="med"/>
-                      <a:tailEnd type="none" w="med" len="med"/>
-                    </a:lnB>
-                    <a:solidFill>
-                      <a:srgbClr val="E8F4F2"/>
-                    </a:solidFill>
-                  </a:tcPr>
-                </a:tc>
-                <a:tc>
-                  <a:txBody>
-                    <a:bodyPr/>
-                    <a:lstStyle/>
-                    <a:p>
-                      <a:pPr marL="0" indent="0">
-                        <a:buNone/>
-                      </a:pPr>
-                      <a:r>
-                        <a:rPr lang="en-US" sz="1000" dirty="0">
-                          <a:solidFill>
-                            <a:srgbClr val="DC2626"/>
-                          </a:solidFill>
-                        </a:rPr>
-                        <a:t>123</a:t>
-                      </a:r>
-                      <a:endParaRPr lang="en-US" sz="1000" dirty="0"/>
-                    </a:p>
-                  </a:txBody>
-                  <a:tcPr>
-                    <a:lnL w="6350" cap="flat" cmpd="sng" algn="ctr">
-                      <a:solidFill>
-                        <a:srgbClr val="E2E8F0"/>
-                      </a:solidFill>
-                      <a:prstDash val="solid"/>
-                      <a:round/>
-                      <a:headEnd type="none" w="med" len="med"/>
-                      <a:tailEnd type="none" w="med" len="med"/>
-                    </a:lnL>
-                    <a:lnR w="6350" cap="flat" cmpd="sng" algn="ctr">
-                      <a:solidFill>
-                        <a:srgbClr val="E2E8F0"/>
-                      </a:solidFill>
-                      <a:prstDash val="solid"/>
-                      <a:round/>
-                      <a:headEnd type="none" w="med" len="med"/>
-                      <a:tailEnd type="none" w="med" len="med"/>
-                    </a:lnR>
-                    <a:lnT w="6350" cap="flat" cmpd="sng" algn="ctr">
-                      <a:solidFill>
-                        <a:srgbClr val="E2E8F0"/>
-                      </a:solidFill>
-                      <a:prstDash val="solid"/>
-                      <a:round/>
-                      <a:headEnd type="none" w="med" len="med"/>
-                      <a:tailEnd type="none" w="med" len="med"/>
-                    </a:lnT>
-                    <a:lnB w="6350" cap="flat" cmpd="sng" algn="ctr">
-                      <a:solidFill>
-                        <a:srgbClr val="E2E8F0"/>
-                      </a:solidFill>
-                      <a:prstDash val="solid"/>
-                      <a:round/>
-                      <a:headEnd type="none" w="med" len="med"/>
-                      <a:tailEnd type="none" w="med" len="med"/>
-                    </a:lnB>
-                    <a:solidFill>
-                      <a:srgbClr val="E8F4F2"/>
-                    </a:solidFill>
-                  </a:tcPr>
-                </a:tc>
-                <a:tc>
-                  <a:txBody>
-                    <a:bodyPr/>
-                    <a:lstStyle/>
-                    <a:p>
-                      <a:pPr marL="0" indent="0">
-                        <a:buNone/>
-                      </a:pPr>
-                      <a:r>
-                        <a:rPr lang="en-US" sz="1000" b="1" dirty="0">
-                          <a:solidFill>
-                            <a:srgbClr val="2A9D8F"/>
-                          </a:solidFill>
-                        </a:rPr>
-                        <a:t>6.8x</a:t>
-                      </a:r>
-                      <a:endParaRPr lang="en-US" sz="1000" dirty="0"/>
-                    </a:p>
-                  </a:txBody>
-                  <a:tcPr>
-                    <a:lnL w="6350" cap="flat" cmpd="sng" algn="ctr">
-                      <a:solidFill>
-                        <a:srgbClr val="E2E8F0"/>
-                      </a:solidFill>
-                      <a:prstDash val="solid"/>
-                      <a:round/>
-                      <a:headEnd type="none" w="med" len="med"/>
-                      <a:tailEnd type="none" w="med" len="med"/>
-                    </a:lnL>
-                    <a:lnR w="6350" cap="flat" cmpd="sng" algn="ctr">
-                      <a:solidFill>
-                        <a:srgbClr val="E2E8F0"/>
-                      </a:solidFill>
-                      <a:prstDash val="solid"/>
-                      <a:round/>
-                      <a:headEnd type="none" w="med" len="med"/>
-                      <a:tailEnd type="none" w="med" len="med"/>
-                    </a:lnR>
-                    <a:lnT w="6350" cap="flat" cmpd="sng" algn="ctr">
-                      <a:solidFill>
-                        <a:srgbClr val="E2E8F0"/>
-                      </a:solidFill>
-                      <a:prstDash val="solid"/>
-                      <a:round/>
-                      <a:headEnd type="none" w="med" len="med"/>
-                      <a:tailEnd type="none" w="med" len="med"/>
-                    </a:lnT>
-                    <a:lnB w="6350" cap="flat" cmpd="sng" algn="ctr">
-                      <a:solidFill>
-                        <a:srgbClr val="E2E8F0"/>
-                      </a:solidFill>
-                      <a:prstDash val="solid"/>
-                      <a:round/>
-                      <a:headEnd type="none" w="med" len="med"/>
-                      <a:tailEnd type="none" w="med" len="med"/>
-                    </a:lnB>
-                    <a:solidFill>
-                      <a:srgbClr val="E8F4F2"/>
-                    </a:solidFill>
-                  </a:tcPr>
-                </a:tc>
-                <a:extLst>
-                  <a:ext uri="{0D108BD9-81ED-4DB2-BD59-A6C34878D82A}">
-                    <a16:rowId xmlns:a16="http://schemas.microsoft.com/office/drawing/2014/main" val="10002"/>
-                  </a:ext>
-                </a:extLst>
-              </a:tr>
-              <a:tr h="0">
-                <a:tc>
-                  <a:txBody>
-                    <a:bodyPr/>
-                    <a:lstStyle/>
-                    <a:p>
-                      <a:pPr marL="0" indent="0">
-                        <a:buNone/>
-                      </a:pPr>
-                      <a:r>
-                        <a:rPr lang="en-US" sz="1000" b="1" dirty="0">
-                          <a:solidFill>
-                            <a:srgbClr val="1B3A5C"/>
-                          </a:solidFill>
-                        </a:rPr>
-                        <a:t>Complex</a:t>
-                      </a:r>
-                      <a:endParaRPr lang="en-US" sz="1000" dirty="0"/>
-                    </a:p>
-                  </a:txBody>
-                  <a:tcPr>
-                    <a:lnL w="6350" cap="flat" cmpd="sng" algn="ctr">
-                      <a:solidFill>
-                        <a:srgbClr val="E2E8F0"/>
-                      </a:solidFill>
-                      <a:prstDash val="solid"/>
-                      <a:round/>
-                      <a:headEnd type="none" w="med" len="med"/>
-                      <a:tailEnd type="none" w="med" len="med"/>
-                    </a:lnL>
-                    <a:lnR w="6350" cap="flat" cmpd="sng" algn="ctr">
-                      <a:solidFill>
-                        <a:srgbClr val="E2E8F0"/>
-                      </a:solidFill>
-                      <a:prstDash val="solid"/>
-                      <a:round/>
-                      <a:headEnd type="none" w="med" len="med"/>
-                      <a:tailEnd type="none" w="med" len="med"/>
-                    </a:lnR>
-                    <a:lnT w="6350" cap="flat" cmpd="sng" algn="ctr">
-                      <a:solidFill>
-                        <a:srgbClr val="E2E8F0"/>
-                      </a:solidFill>
-                      <a:prstDash val="solid"/>
-                      <a:round/>
-                      <a:headEnd type="none" w="med" len="med"/>
-                      <a:tailEnd type="none" w="med" len="med"/>
-                    </a:lnT>
-                    <a:lnB w="6350" cap="flat" cmpd="sng" algn="ctr">
-                      <a:solidFill>
-                        <a:srgbClr val="E2E8F0"/>
-                      </a:solidFill>
-                      <a:prstDash val="solid"/>
-                      <a:round/>
-                      <a:headEnd type="none" w="med" len="med"/>
-                      <a:tailEnd type="none" w="med" len="med"/>
-                    </a:lnB>
-                    <a:solidFill>
-                      <a:srgbClr val="FFFFFF"/>
-                    </a:solidFill>
-                  </a:tcPr>
-                </a:tc>
-                <a:tc>
-                  <a:txBody>
-                    <a:bodyPr/>
-                    <a:lstStyle/>
-                    <a:p>
-                      <a:pPr marL="0" indent="0">
-                        <a:buNone/>
-                      </a:pPr>
-                      <a:r>
-                        <a:rPr lang="en-US" sz="950" dirty="0">
-                          <a:solidFill>
-                            <a:srgbClr val="1E293B"/>
-                          </a:solidFill>
-                        </a:rPr>
-                        <a:t>Monthly revenue trend (6-table join)</a:t>
-                      </a:r>
-                      <a:endParaRPr lang="en-US" sz="950" dirty="0"/>
-                    </a:p>
-                  </a:txBody>
-                  <a:tcPr>
-                    <a:lnL w="6350" cap="flat" cmpd="sng" algn="ctr">
-                      <a:solidFill>
-                        <a:srgbClr val="E2E8F0"/>
-                      </a:solidFill>
-                      <a:prstDash val="solid"/>
-                      <a:round/>
-                      <a:headEnd type="none" w="med" len="med"/>
-                      <a:tailEnd type="none" w="med" len="med"/>
-                    </a:lnL>
-                    <a:lnR w="6350" cap="flat" cmpd="sng" algn="ctr">
-                      <a:solidFill>
-                        <a:srgbClr val="E2E8F0"/>
-                      </a:solidFill>
-                      <a:prstDash val="solid"/>
-                      <a:round/>
-                      <a:headEnd type="none" w="med" len="med"/>
-                      <a:tailEnd type="none" w="med" len="med"/>
-                    </a:lnR>
-                    <a:lnT w="6350" cap="flat" cmpd="sng" algn="ctr">
-                      <a:solidFill>
-                        <a:srgbClr val="E2E8F0"/>
-                      </a:solidFill>
-                      <a:prstDash val="solid"/>
-                      <a:round/>
-                      <a:headEnd type="none" w="med" len="med"/>
-                      <a:tailEnd type="none" w="med" len="med"/>
-                    </a:lnT>
-                    <a:lnB w="6350" cap="flat" cmpd="sng" algn="ctr">
-                      <a:solidFill>
-                        <a:srgbClr val="E2E8F0"/>
-                      </a:solidFill>
-                      <a:prstDash val="solid"/>
-                      <a:round/>
-                      <a:headEnd type="none" w="med" len="med"/>
-                      <a:tailEnd type="none" w="med" len="med"/>
-                    </a:lnB>
-                    <a:solidFill>
-                      <a:srgbClr val="FFFFFF"/>
-                    </a:solidFill>
-                  </a:tcPr>
-                </a:tc>
-                <a:tc>
-                  <a:txBody>
-                    <a:bodyPr/>
-                    <a:lstStyle/>
-                    <a:p>
-                      <a:pPr marL="0" indent="0">
-                        <a:buNone/>
-                      </a:pPr>
-                      <a:r>
-                        <a:rPr lang="en-US" sz="1000" b="1" dirty="0">
-                          <a:solidFill>
-                            <a:srgbClr val="16A34A"/>
-                          </a:solidFill>
-                        </a:rPr>
-                        <a:t>771</a:t>
-                      </a:r>
-                      <a:endParaRPr lang="en-US" sz="1000" dirty="0"/>
-                    </a:p>
-                  </a:txBody>
-                  <a:tcPr>
-                    <a:lnL w="6350" cap="flat" cmpd="sng" algn="ctr">
-                      <a:solidFill>
-                        <a:srgbClr val="E2E8F0"/>
-                      </a:solidFill>
-                      <a:prstDash val="solid"/>
-                      <a:round/>
-                      <a:headEnd type="none" w="med" len="med"/>
-                      <a:tailEnd type="none" w="med" len="med"/>
-                    </a:lnL>
-                    <a:lnR w="6350" cap="flat" cmpd="sng" algn="ctr">
-                      <a:solidFill>
-                        <a:srgbClr val="E2E8F0"/>
-                      </a:solidFill>
-                      <a:prstDash val="solid"/>
-                      <a:round/>
-                      <a:headEnd type="none" w="med" len="med"/>
-                      <a:tailEnd type="none" w="med" len="med"/>
-                    </a:lnR>
-                    <a:lnT w="6350" cap="flat" cmpd="sng" algn="ctr">
-                      <a:solidFill>
-                        <a:srgbClr val="E2E8F0"/>
-                      </a:solidFill>
-                      <a:prstDash val="solid"/>
-                      <a:round/>
-                      <a:headEnd type="none" w="med" len="med"/>
-                      <a:tailEnd type="none" w="med" len="med"/>
-                    </a:lnT>
-                    <a:lnB w="6350" cap="flat" cmpd="sng" algn="ctr">
-                      <a:solidFill>
-                        <a:srgbClr val="E2E8F0"/>
-                      </a:solidFill>
-                      <a:prstDash val="solid"/>
-                      <a:round/>
-                      <a:headEnd type="none" w="med" len="med"/>
-                      <a:tailEnd type="none" w="med" len="med"/>
-                    </a:lnB>
-                    <a:solidFill>
-                      <a:srgbClr val="FFFFFF"/>
-                    </a:solidFill>
-                  </a:tcPr>
-                </a:tc>
-                <a:tc>
-                  <a:txBody>
-                    <a:bodyPr/>
-                    <a:lstStyle/>
-                    <a:p>
-                      <a:pPr marL="0" indent="0">
-                        <a:buNone/>
-                      </a:pPr>
-                      <a:r>
-                        <a:rPr lang="en-US" sz="1000" dirty="0">
-                          <a:solidFill>
-                            <a:srgbClr val="DC2626"/>
-                          </a:solidFill>
-                        </a:rPr>
-                        <a:t>798</a:t>
-                      </a:r>
-                      <a:endParaRPr lang="en-US" sz="1000" dirty="0"/>
-                    </a:p>
-                  </a:txBody>
-                  <a:tcPr>
-                    <a:lnL w="6350" cap="flat" cmpd="sng" algn="ctr">
-                      <a:solidFill>
-                        <a:srgbClr val="E2E8F0"/>
-                      </a:solidFill>
-                      <a:prstDash val="solid"/>
-                      <a:round/>
-                      <a:headEnd type="none" w="med" len="med"/>
-                      <a:tailEnd type="none" w="med" len="med"/>
-                    </a:lnL>
-                    <a:lnR w="6350" cap="flat" cmpd="sng" algn="ctr">
-                      <a:solidFill>
-                        <a:srgbClr val="E2E8F0"/>
-                      </a:solidFill>
-                      <a:prstDash val="solid"/>
-                      <a:round/>
-                      <a:headEnd type="none" w="med" len="med"/>
-                      <a:tailEnd type="none" w="med" len="med"/>
-                    </a:lnR>
-                    <a:lnT w="6350" cap="flat" cmpd="sng" algn="ctr">
-                      <a:solidFill>
-                        <a:srgbClr val="E2E8F0"/>
-                      </a:solidFill>
-                      <a:prstDash val="solid"/>
-                      <a:round/>
-                      <a:headEnd type="none" w="med" len="med"/>
-                      <a:tailEnd type="none" w="med" len="med"/>
-                    </a:lnT>
-                    <a:lnB w="6350" cap="flat" cmpd="sng" algn="ctr">
-                      <a:solidFill>
-                        <a:srgbClr val="E2E8F0"/>
-                      </a:solidFill>
-                      <a:prstDash val="solid"/>
-                      <a:round/>
-                      <a:headEnd type="none" w="med" len="med"/>
-                      <a:tailEnd type="none" w="med" len="med"/>
-                    </a:lnB>
-                    <a:solidFill>
-                      <a:srgbClr val="FFFFFF"/>
-                    </a:solidFill>
-                  </a:tcPr>
-                </a:tc>
-                <a:tc>
-                  <a:txBody>
-                    <a:bodyPr/>
-                    <a:lstStyle/>
-                    <a:p>
-                      <a:pPr marL="0" indent="0">
-                        <a:buNone/>
-                      </a:pPr>
-                      <a:r>
-                        <a:rPr lang="en-US" sz="1000" b="1" dirty="0">
-                          <a:solidFill>
-                            <a:srgbClr val="2A9D8F"/>
-                          </a:solidFill>
-                        </a:rPr>
-                        <a:t>1.03x</a:t>
-                      </a:r>
-                      <a:endParaRPr lang="en-US" sz="1000" dirty="0"/>
-                    </a:p>
-                  </a:txBody>
-                  <a:tcPr>
-                    <a:lnL w="6350" cap="flat" cmpd="sng" algn="ctr">
-                      <a:solidFill>
-                        <a:srgbClr val="E2E8F0"/>
-                      </a:solidFill>
-                      <a:prstDash val="solid"/>
-                      <a:round/>
-                      <a:headEnd type="none" w="med" len="med"/>
-                      <a:tailEnd type="none" w="med" len="med"/>
-                    </a:lnL>
-                    <a:lnR w="6350" cap="flat" cmpd="sng" algn="ctr">
-                      <a:solidFill>
-                        <a:srgbClr val="E2E8F0"/>
-                      </a:solidFill>
-                      <a:prstDash val="solid"/>
-                      <a:round/>
-                      <a:headEnd type="none" w="med" len="med"/>
-                      <a:tailEnd type="none" w="med" len="med"/>
-                    </a:lnR>
-                    <a:lnT w="6350" cap="flat" cmpd="sng" algn="ctr">
-                      <a:solidFill>
-                        <a:srgbClr val="E2E8F0"/>
-                      </a:solidFill>
-                      <a:prstDash val="solid"/>
-                      <a:round/>
-                      <a:headEnd type="none" w="med" len="med"/>
-                      <a:tailEnd type="none" w="med" len="med"/>
-                    </a:lnT>
-                    <a:lnB w="6350" cap="flat" cmpd="sng" algn="ctr">
-                      <a:solidFill>
-                        <a:srgbClr val="E2E8F0"/>
-                      </a:solidFill>
-                      <a:prstDash val="solid"/>
-                      <a:round/>
-                      <a:headEnd type="none" w="med" len="med"/>
-                      <a:tailEnd type="none" w="med" len="med"/>
-                    </a:lnB>
-                    <a:solidFill>
-                      <a:srgbClr val="FFFFFF"/>
-                    </a:solidFill>
-                  </a:tcPr>
-                </a:tc>
-                <a:extLst>
-                  <a:ext uri="{0D108BD9-81ED-4DB2-BD59-A6C34878D82A}">
-                    <a16:rowId xmlns:a16="http://schemas.microsoft.com/office/drawing/2014/main" val="10003"/>
-                  </a:ext>
-                </a:extLst>
-              </a:tr>
-            </a:tbl>
-          </a:graphicData>
-        </a:graphic>
-      </p:graphicFrame>
-      <p:sp>
-        <p:nvSpPr>
-          <p:cNvPr id="7" name="Shape 4"/>
-          <p:cNvSpPr/>
-          <p:nvPr/>
-        </p:nvSpPr>
-        <p:spPr>
-          <a:xfrm>
-            <a:off x="274320" y="2743200"/>
-            <a:ext cx="8595360" cy="457200"/>
-          </a:xfrm>
-          <a:prstGeom prst="rect">
-            <a:avLst/>
-          </a:prstGeom>
-          <a:solidFill>
-            <a:srgbClr val="E8F4F2"/>
-          </a:solidFill>
-          <a:ln/>
-        </p:spPr>
-        <p:txBody>
-          <a:bodyPr/>
-          <a:p/>
-        </p:txBody>
-      </p:sp>
-      <p:sp>
-        <p:nvSpPr>
-          <p:cNvPr id="8" name="Text 5"/>
-          <p:cNvSpPr/>
-          <p:nvPr/>
-        </p:nvSpPr>
-        <p:spPr>
-          <a:xfrm>
-            <a:off x="457200" y="2743200"/>
-            <a:ext cx="8229600" cy="457200"/>
-          </a:xfrm>
-          <a:prstGeom prst="rect">
-            <a:avLst/>
-          </a:prstGeom>
-          <a:noFill/>
-          <a:ln/>
-        </p:spPr>
-        <p:txBody>
-          <a:bodyPr wrap="square" rtlCol="0" anchor="ctr"/>
-          <a:lstStyle/>
-          <a:p>
-            <a:pPr marL="0" indent="0">
-              <a:buNone/>
-            </a:pPr>
-            <a:r>
-              <a:rPr lang="en-US" sz="1050" b="1" dirty="0">
-                <a:solidFill>
-                  <a:srgbClr val="1B3A5C"/>
-                </a:solidFill>
-              </a:rPr>
-              <a:t>Gold layer star schema delivers query response times under 25ms for simple queries. Raw Vault equivalent requires 12+ table joins and is 1.03x–8.3x slower — validating the medallion approach.</a:t>
-            </a:r>
-            <a:endParaRPr lang="en-US" sz="1050" dirty="0"/>
-          </a:p>
-        </p:txBody>
-      </p:sp>
-    </p:spTree>
-  </p:cSld>
-  <p:clrMapOvr>
-    <a:masterClrMapping/>
-  </p:clrMapOvr>
-</p:sld>
-</file>
-
-<file path=ppt/slides/slide13.xml><?xml version="1.0" encoding="utf-8"?>
-<p:sld xmlns:a="http://schemas.openxmlformats.org/drawingml/2006/main" xmlns:r="http://schemas.openxmlformats.org/officeDocument/2006/relationships" xmlns:p="http://schemas.openxmlformats.org/presentationml/2006/main">
-  <p:cSld name="Slide 13">
-    <p:bg>
-      <p:bgPr>
-        <a:solidFill>
-          <a:srgbClr val="F7FAFA"/>
-        </a:solidFill>
-        <a:effectLst/>
-      </p:bgPr>
-    </p:bg>
-    <p:spTree>
-      <p:nvGrpSpPr>
-        <p:cNvPr id="1" name=""/>
-        <p:cNvGrpSpPr/>
-        <p:nvPr/>
-      </p:nvGrpSpPr>
-      <p:grpSpPr>
-        <a:xfrm>
-          <a:off x="0" y="0"/>
-          <a:ext cx="0" cy="0"/>
-          <a:chOff x="0" y="0"/>
-          <a:chExt cx="0" cy="0"/>
-        </a:xfrm>
-      </p:grpSpPr>
-      <p:sp>
-        <p:nvSpPr>
-          <p:cNvPr id="2" name="Shape 0"/>
-          <p:cNvSpPr/>
-          <p:nvPr/>
-        </p:nvSpPr>
-        <p:spPr>
-          <a:xfrm>
-            <a:off x="0" y="0"/>
-            <a:ext cx="54864" cy="5143500"/>
-          </a:xfrm>
-          <a:prstGeom prst="rect">
-            <a:avLst/>
-          </a:prstGeom>
-          <a:solidFill>
-            <a:srgbClr val="2A9D8F"/>
-          </a:solidFill>
-          <a:ln/>
-        </p:spPr>
-        <p:txBody>
-          <a:bodyPr/>
-          <a:p/>
-        </p:txBody>
-      </p:sp>
-      <p:sp>
-        <p:nvSpPr>
-          <p:cNvPr id="3" name="Text 1"/>
-          <p:cNvSpPr/>
-          <p:nvPr/>
-        </p:nvSpPr>
-        <p:spPr>
-          <a:xfrm>
-            <a:off x="8046720" y="4754880"/>
-            <a:ext cx="914400" cy="274320"/>
-          </a:xfrm>
-          <a:prstGeom prst="rect">
-            <a:avLst/>
-          </a:prstGeom>
-          <a:noFill/>
-          <a:ln/>
-        </p:spPr>
-        <p:txBody>
-          <a:bodyPr wrap="square" rtlCol="0" anchor="ctr"/>
-          <a:lstStyle/>
-          <a:p>
-            <a:pPr marL="0" indent="0" algn="r">
-              <a:buNone/>
-            </a:pPr>
-            <a:r>
-              <a:rPr lang="en-US" sz="900" dirty="0">
-                <a:solidFill>
-                  <a:srgbClr val="64748B"/>
-                </a:solidFill>
-              </a:rPr>
-              <a:t>13 / 18</a:t>
-            </a:r>
-            <a:endParaRPr lang="en-US" sz="900" dirty="0"/>
-          </a:p>
-        </p:txBody>
-      </p:sp>
-      <p:sp>
-        <p:nvSpPr>
-          <p:cNvPr id="4" name="Text 2"/>
-          <p:cNvSpPr/>
-          <p:nvPr/>
-        </p:nvSpPr>
-        <p:spPr>
-          <a:xfrm>
-            <a:off x="457200" y="182880"/>
-            <a:ext cx="8229600" cy="502920"/>
-          </a:xfrm>
-          <a:prstGeom prst="rect">
-            <a:avLst/>
-          </a:prstGeom>
-          <a:noFill/>
-          <a:ln/>
-        </p:spPr>
-        <p:txBody>
-          <a:bodyPr wrap="square" rtlCol="0" anchor="ctr"/>
-          <a:lstStyle/>
-          <a:p>
-            <a:pPr marL="0" indent="0">
-              <a:buNone/>
-            </a:pPr>
-            <a:r>
-              <a:rPr lang="en-US" sz="2200" b="1" dirty="0">
-                <a:solidFill>
-                  <a:srgbClr val="1B3A5C"/>
-                </a:solidFill>
-                <a:latin typeface="Georgia" pitchFamily="34" charset="0"/>
-                <a:ea typeface="Georgia" pitchFamily="34" charset="-122"/>
-                <a:cs typeface="Georgia" pitchFamily="34" charset="-120"/>
-              </a:rPr>
-              <a:t>Scalability Analysis</a:t>
-            </a:r>
-            <a:endParaRPr lang="en-US" sz="2200" dirty="0"/>
-          </a:p>
-        </p:txBody>
-      </p:sp>
-      <p:sp>
-        <p:nvSpPr>
-          <p:cNvPr id="5" name="Shape 3"/>
-          <p:cNvSpPr/>
-          <p:nvPr/>
-        </p:nvSpPr>
-        <p:spPr>
-          <a:xfrm>
-            <a:off x="457200" y="731520"/>
-            <a:ext cx="1097280" cy="36576"/>
-          </a:xfrm>
-          <a:prstGeom prst="rect">
-            <a:avLst/>
-          </a:prstGeom>
-          <a:solidFill>
-            <a:srgbClr val="2A9D8F"/>
-          </a:solidFill>
-          <a:ln/>
-        </p:spPr>
-        <p:txBody>
-          <a:bodyPr/>
-          <a:p/>
-        </p:txBody>
-      </p:sp>
-      <p:graphicFrame>
-        <p:nvGraphicFramePr>
-          <p:cNvPr id="14" name="Table 0"/>
-          <p:cNvGraphicFramePr>
-            <a:graphicFrameLocks noGrp="1"/>
-          </p:cNvGraphicFramePr>
-          <p:nvPr>
-            <p:extLst>
-              <p:ext uri="{D42A27DB-BD31-4B8C-83A1-F6EECF244321}">
-                <p14:modId xmlns:p14="http://schemas.microsoft.com/office/powerpoint/2010/main" val="1579011935"/>
-              </p:ext>
-            </p:extLst>
-          </p:nvPr>
-        </p:nvGraphicFramePr>
-        <p:xfrm>
-          <a:off x="274320" y="1005840"/>
-          <a:ext cx="8595360" cy="1417320"/>
-        </p:xfrm>
-        <a:graphic>
-          <a:graphicData uri="http://schemas.openxmlformats.org/drawingml/2006/table">
-            <a:tbl>
-              <a:tblPr/>
-              <a:tblGrid>
-                <a:gridCol w="1371600">
-                  <a:extLst>
-                    <a:ext uri="{9D8B030D-6E8A-4147-A177-3AD203B41FA5}">
-                      <a16:colId xmlns:a16="http://schemas.microsoft.com/office/drawing/2014/main" val="20000"/>
-                    </a:ext>
-                  </a:extLst>
-                </a:gridCol>
-                <a:gridCol w="1828800">
-                  <a:extLst>
-                    <a:ext uri="{9D8B030D-6E8A-4147-A177-3AD203B41FA5}">
-                      <a16:colId xmlns:a16="http://schemas.microsoft.com/office/drawing/2014/main" val="20001"/>
-                    </a:ext>
-                  </a:extLst>
-                </a:gridCol>
-                <a:gridCol w="1828800">
-                  <a:extLst>
-                    <a:ext uri="{9D8B030D-6E8A-4147-A177-3AD203B41FA5}">
-                      <a16:colId xmlns:a16="http://schemas.microsoft.com/office/drawing/2014/main" val="20002"/>
-                    </a:ext>
-                  </a:extLst>
-                </a:gridCol>
-                <a:gridCol w="1920240">
-                  <a:extLst>
-                    <a:ext uri="{9D8B030D-6E8A-4147-A177-3AD203B41FA5}">
-                      <a16:colId xmlns:a16="http://schemas.microsoft.com/office/drawing/2014/main" val="20003"/>
-                    </a:ext>
-                  </a:extLst>
-                </a:gridCol>
-                <a:gridCol w="1645920">
-                  <a:extLst>
-                    <a:ext uri="{9D8B030D-6E8A-4147-A177-3AD203B41FA5}">
-                      <a16:colId xmlns:a16="http://schemas.microsoft.com/office/drawing/2014/main" val="20004"/>
-                    </a:ext>
-                  </a:extLst>
-                </a:gridCol>
-              </a:tblGrid>
-              <a:tr h="0">
-                <a:tc>
-                  <a:txBody>
-                    <a:bodyPr/>
-                    <a:lstStyle/>
-                    <a:p>
-                      <a:pPr marL="0" indent="0">
-                        <a:buNone/>
-                      </a:pPr>
-                      <a:r>
-                        <a:rPr lang="en-US" sz="950" b="1" dirty="0">
-                          <a:solidFill>
-                            <a:srgbClr val="FFFFFF"/>
-                          </a:solidFill>
-                        </a:rPr>
-                        <a:t>Taxpayers</a:t>
-                      </a:r>
-                      <a:endParaRPr lang="en-US" sz="950" dirty="0"/>
-                    </a:p>
-                  </a:txBody>
-                  <a:tcPr>
-                    <a:lnL w="6350" cap="flat" cmpd="sng" algn="ctr">
-                      <a:solidFill>
-                        <a:srgbClr val="E2E8F0"/>
-                      </a:solidFill>
-                      <a:prstDash val="solid"/>
-                      <a:round/>
-                      <a:headEnd type="none" w="med" len="med"/>
-                      <a:tailEnd type="none" w="med" len="med"/>
-                    </a:lnL>
-                    <a:lnR w="6350" cap="flat" cmpd="sng" algn="ctr">
-                      <a:solidFill>
-                        <a:srgbClr val="E2E8F0"/>
-                      </a:solidFill>
-                      <a:prstDash val="solid"/>
-                      <a:round/>
-                      <a:headEnd type="none" w="med" len="med"/>
-                      <a:tailEnd type="none" w="med" len="med"/>
-                    </a:lnR>
-                    <a:lnT w="6350" cap="flat" cmpd="sng" algn="ctr">
-                      <a:solidFill>
-                        <a:srgbClr val="E2E8F0"/>
-                      </a:solidFill>
-                      <a:prstDash val="solid"/>
-                      <a:round/>
-                      <a:headEnd type="none" w="med" len="med"/>
-                      <a:tailEnd type="none" w="med" len="med"/>
-                    </a:lnT>
-                    <a:lnB w="6350" cap="flat" cmpd="sng" algn="ctr">
-                      <a:solidFill>
-                        <a:srgbClr val="E2E8F0"/>
-                      </a:solidFill>
-                      <a:prstDash val="solid"/>
-                      <a:round/>
-                      <a:headEnd type="none" w="med" len="med"/>
-                      <a:tailEnd type="none" w="med" len="med"/>
-                    </a:lnB>
-                    <a:solidFill>
-                      <a:srgbClr val="1B3A5C"/>
-                    </a:solidFill>
-                  </a:tcPr>
-                </a:tc>
-                <a:tc>
-                  <a:txBody>
-                    <a:bodyPr/>
-                    <a:lstStyle/>
-                    <a:p>
-                      <a:pPr marL="0" indent="0">
-                        <a:buNone/>
-                      </a:pPr>
-                      <a:r>
-                        <a:rPr lang="en-US" sz="950" b="1" dirty="0">
-                          <a:solidFill>
-                            <a:srgbClr val="FFFFFF"/>
-                          </a:solidFill>
-                        </a:rPr>
-                        <a:t>Total Records Processed</a:t>
-                      </a:r>
-                      <a:endParaRPr lang="en-US" sz="950" dirty="0"/>
-                    </a:p>
-                  </a:txBody>
-                  <a:tcPr>
-                    <a:lnL w="6350" cap="flat" cmpd="sng" algn="ctr">
-                      <a:solidFill>
-                        <a:srgbClr val="E2E8F0"/>
-                      </a:solidFill>
-                      <a:prstDash val="solid"/>
-                      <a:round/>
-                      <a:headEnd type="none" w="med" len="med"/>
-                      <a:tailEnd type="none" w="med" len="med"/>
-                    </a:lnL>
-                    <a:lnR w="6350" cap="flat" cmpd="sng" algn="ctr">
-                      <a:solidFill>
-                        <a:srgbClr val="E2E8F0"/>
-                      </a:solidFill>
-                      <a:prstDash val="solid"/>
-                      <a:round/>
-                      <a:headEnd type="none" w="med" len="med"/>
-                      <a:tailEnd type="none" w="med" len="med"/>
-                    </a:lnR>
-                    <a:lnT w="6350" cap="flat" cmpd="sng" algn="ctr">
-                      <a:solidFill>
-                        <a:srgbClr val="E2E8F0"/>
-                      </a:solidFill>
-                      <a:prstDash val="solid"/>
-                      <a:round/>
-                      <a:headEnd type="none" w="med" len="med"/>
-                      <a:tailEnd type="none" w="med" len="med"/>
-                    </a:lnT>
-                    <a:lnB w="6350" cap="flat" cmpd="sng" algn="ctr">
-                      <a:solidFill>
-                        <a:srgbClr val="E2E8F0"/>
-                      </a:solidFill>
-                      <a:prstDash val="solid"/>
-                      <a:round/>
-                      <a:headEnd type="none" w="med" len="med"/>
-                      <a:tailEnd type="none" w="med" len="med"/>
-                    </a:lnB>
-                    <a:solidFill>
-                      <a:srgbClr val="1B3A5C"/>
-                    </a:solidFill>
-                  </a:tcPr>
-                </a:tc>
-                <a:tc>
-                  <a:txBody>
-                    <a:bodyPr/>
-                    <a:lstStyle/>
-                    <a:p>
-                      <a:pPr marL="0" indent="0">
-                        <a:buNone/>
-                      </a:pPr>
-                      <a:r>
-                        <a:rPr lang="en-US" sz="950" b="1" dirty="0">
-                          <a:solidFill>
-                            <a:srgbClr val="FFFFFF"/>
-                          </a:solidFill>
-                        </a:rPr>
-                        <a:t>Full Load (s)</a:t>
-                      </a:r>
-                      <a:endParaRPr lang="en-US" sz="950" dirty="0"/>
-                    </a:p>
-                  </a:txBody>
-                  <a:tcPr>
-                    <a:lnL w="6350" cap="flat" cmpd="sng" algn="ctr">
-                      <a:solidFill>
-                        <a:srgbClr val="E2E8F0"/>
-                      </a:solidFill>
-                      <a:prstDash val="solid"/>
-                      <a:round/>
-                      <a:headEnd type="none" w="med" len="med"/>
-                      <a:tailEnd type="none" w="med" len="med"/>
-                    </a:lnL>
-                    <a:lnR w="6350" cap="flat" cmpd="sng" algn="ctr">
-                      <a:solidFill>
-                        <a:srgbClr val="E2E8F0"/>
-                      </a:solidFill>
-                      <a:prstDash val="solid"/>
-                      <a:round/>
-                      <a:headEnd type="none" w="med" len="med"/>
-                      <a:tailEnd type="none" w="med" len="med"/>
-                    </a:lnR>
-                    <a:lnT w="6350" cap="flat" cmpd="sng" algn="ctr">
-                      <a:solidFill>
-                        <a:srgbClr val="E2E8F0"/>
-                      </a:solidFill>
-                      <a:prstDash val="solid"/>
-                      <a:round/>
-                      <a:headEnd type="none" w="med" len="med"/>
-                      <a:tailEnd type="none" w="med" len="med"/>
-                    </a:lnT>
-                    <a:lnB w="6350" cap="flat" cmpd="sng" algn="ctr">
-                      <a:solidFill>
-                        <a:srgbClr val="E2E8F0"/>
-                      </a:solidFill>
-                      <a:prstDash val="solid"/>
-                      <a:round/>
-                      <a:headEnd type="none" w="med" len="med"/>
-                      <a:tailEnd type="none" w="med" len="med"/>
-                    </a:lnB>
-                    <a:solidFill>
-                      <a:srgbClr val="1B3A5C"/>
-                    </a:solidFill>
-                  </a:tcPr>
-                </a:tc>
-                <a:tc>
-                  <a:txBody>
-                    <a:bodyPr/>
-                    <a:lstStyle/>
-                    <a:p>
-                      <a:pPr marL="0" indent="0">
-                        <a:buNone/>
-                      </a:pPr>
-                      <a:r>
-                        <a:rPr lang="en-US" sz="950" b="1" dirty="0">
-                          <a:solidFill>
-                            <a:srgbClr val="FFFFFF"/>
-                          </a:solidFill>
-                        </a:rPr>
-                        <a:t>Records/Sec</a:t>
-                      </a:r>
-                      <a:endParaRPr lang="en-US" sz="950" dirty="0"/>
-                    </a:p>
-                  </a:txBody>
-                  <a:tcPr>
-                    <a:lnL w="6350" cap="flat" cmpd="sng" algn="ctr">
-                      <a:solidFill>
-                        <a:srgbClr val="E2E8F0"/>
-                      </a:solidFill>
-                      <a:prstDash val="solid"/>
-                      <a:round/>
-                      <a:headEnd type="none" w="med" len="med"/>
-                      <a:tailEnd type="none" w="med" len="med"/>
-                    </a:lnL>
-                    <a:lnR w="6350" cap="flat" cmpd="sng" algn="ctr">
-                      <a:solidFill>
-                        <a:srgbClr val="E2E8F0"/>
-                      </a:solidFill>
-                      <a:prstDash val="solid"/>
-                      <a:round/>
-                      <a:headEnd type="none" w="med" len="med"/>
-                      <a:tailEnd type="none" w="med" len="med"/>
-                    </a:lnR>
-                    <a:lnT w="6350" cap="flat" cmpd="sng" algn="ctr">
-                      <a:solidFill>
-                        <a:srgbClr val="E2E8F0"/>
-                      </a:solidFill>
-                      <a:prstDash val="solid"/>
-                      <a:round/>
-                      <a:headEnd type="none" w="med" len="med"/>
-                      <a:tailEnd type="none" w="med" len="med"/>
-                    </a:lnT>
-                    <a:lnB w="6350" cap="flat" cmpd="sng" algn="ctr">
-                      <a:solidFill>
-                        <a:srgbClr val="E2E8F0"/>
-                      </a:solidFill>
-                      <a:prstDash val="solid"/>
-                      <a:round/>
-                      <a:headEnd type="none" w="med" len="med"/>
-                      <a:tailEnd type="none" w="med" len="med"/>
-                    </a:lnB>
-                    <a:solidFill>
-                      <a:srgbClr val="1B3A5C"/>
-                    </a:solidFill>
-                  </a:tcPr>
-                </a:tc>
-                <a:tc>
-                  <a:txBody>
-                    <a:bodyPr/>
-                    <a:lstStyle/>
-                    <a:p>
-                      <a:pPr marL="0" indent="0">
-                        <a:buNone/>
-                      </a:pPr>
-                      <a:r>
-                        <a:rPr lang="en-US" sz="950" b="1" dirty="0">
-                          <a:solidFill>
-                            <a:srgbClr val="FFFFFF"/>
-                          </a:solidFill>
-                        </a:rPr>
-                        <a:t>Linear Proj.</a:t>
-                      </a:r>
-                      <a:endParaRPr lang="en-US" sz="950" dirty="0"/>
-                    </a:p>
-                  </a:txBody>
-                  <a:tcPr>
-                    <a:lnL w="6350" cap="flat" cmpd="sng" algn="ctr">
-                      <a:solidFill>
-                        <a:srgbClr val="E2E8F0"/>
-                      </a:solidFill>
-                      <a:prstDash val="solid"/>
-                      <a:round/>
-                      <a:headEnd type="none" w="med" len="med"/>
-                      <a:tailEnd type="none" w="med" len="med"/>
-                    </a:lnL>
-                    <a:lnR w="6350" cap="flat" cmpd="sng" algn="ctr">
-                      <a:solidFill>
-                        <a:srgbClr val="E2E8F0"/>
-                      </a:solidFill>
-                      <a:prstDash val="solid"/>
-                      <a:round/>
-                      <a:headEnd type="none" w="med" len="med"/>
-                      <a:tailEnd type="none" w="med" len="med"/>
-                    </a:lnR>
-                    <a:lnT w="6350" cap="flat" cmpd="sng" algn="ctr">
-                      <a:solidFill>
-                        <a:srgbClr val="E2E8F0"/>
-                      </a:solidFill>
-                      <a:prstDash val="solid"/>
-                      <a:round/>
-                      <a:headEnd type="none" w="med" len="med"/>
-                      <a:tailEnd type="none" w="med" len="med"/>
-                    </a:lnT>
-                    <a:lnB w="6350" cap="flat" cmpd="sng" algn="ctr">
-                      <a:solidFill>
-                        <a:srgbClr val="E2E8F0"/>
-                      </a:solidFill>
-                      <a:prstDash val="solid"/>
-                      <a:round/>
-                      <a:headEnd type="none" w="med" len="med"/>
-                      <a:tailEnd type="none" w="med" len="med"/>
-                    </a:lnB>
-                    <a:solidFill>
-                      <a:srgbClr val="1B3A5C"/>
-                    </a:solidFill>
-                  </a:tcPr>
-                </a:tc>
-                <a:extLst>
-                  <a:ext uri="{0D108BD9-81ED-4DB2-BD59-A6C34878D82A}">
-                    <a16:rowId xmlns:a16="http://schemas.microsoft.com/office/drawing/2014/main" val="10000"/>
-                  </a:ext>
-                </a:extLst>
-              </a:tr>
-              <a:tr h="0">
-                <a:tc>
-                  <a:txBody>
-                    <a:bodyPr/>
-                    <a:lstStyle/>
-                    <a:p>
-                      <a:pPr marL="0" indent="0">
-                        <a:buNone/>
-                      </a:pPr>
-                      <a:r>
-                        <a:rPr lang="en-US" sz="950" b="1" dirty="0">
-                          <a:solidFill>
-                            <a:srgbClr val="1B3A5C"/>
-                          </a:solidFill>
-                        </a:rPr>
-                        <a:t>250</a:t>
-                      </a:r>
-                      <a:endParaRPr lang="en-US" sz="950" dirty="0"/>
-                    </a:p>
-                  </a:txBody>
-                  <a:tcPr>
-                    <a:lnL w="6350" cap="flat" cmpd="sng" algn="ctr">
-                      <a:solidFill>
-                        <a:srgbClr val="E2E8F0"/>
-                      </a:solidFill>
-                      <a:prstDash val="solid"/>
-                      <a:round/>
-                      <a:headEnd type="none" w="med" len="med"/>
-                      <a:tailEnd type="none" w="med" len="med"/>
-                    </a:lnL>
-                    <a:lnR w="6350" cap="flat" cmpd="sng" algn="ctr">
-                      <a:solidFill>
-                        <a:srgbClr val="E2E8F0"/>
-                      </a:solidFill>
-                      <a:prstDash val="solid"/>
-                      <a:round/>
-                      <a:headEnd type="none" w="med" len="med"/>
-                      <a:tailEnd type="none" w="med" len="med"/>
-                    </a:lnR>
-                    <a:lnT w="6350" cap="flat" cmpd="sng" algn="ctr">
-                      <a:solidFill>
-                        <a:srgbClr val="E2E8F0"/>
-                      </a:solidFill>
-                      <a:prstDash val="solid"/>
-                      <a:round/>
-                      <a:headEnd type="none" w="med" len="med"/>
-                      <a:tailEnd type="none" w="med" len="med"/>
-                    </a:lnT>
-                    <a:lnB w="6350" cap="flat" cmpd="sng" algn="ctr">
-                      <a:solidFill>
-                        <a:srgbClr val="E2E8F0"/>
-                      </a:solidFill>
-                      <a:prstDash val="solid"/>
-                      <a:round/>
-                      <a:headEnd type="none" w="med" len="med"/>
-                      <a:tailEnd type="none" w="med" len="med"/>
-                    </a:lnB>
-                    <a:solidFill>
-                      <a:srgbClr val="FFFFFF"/>
-                    </a:solidFill>
-                  </a:tcPr>
-                </a:tc>
-                <a:tc>
-                  <a:txBody>
-                    <a:bodyPr/>
-                    <a:lstStyle/>
-                    <a:p>
-                      <a:pPr marL="0" indent="0">
-                        <a:buNone/>
-                      </a:pPr>
-                      <a:r>
-                        <a:rPr lang="en-US" sz="950" dirty="0">
-                          <a:solidFill>
-                            <a:srgbClr val="1E293B"/>
-                          </a:solidFill>
-                        </a:rPr>
-                        <a:t>~15,000</a:t>
-                      </a:r>
-                      <a:endParaRPr lang="en-US" sz="950" dirty="0"/>
-                    </a:p>
-                  </a:txBody>
-                  <a:tcPr>
-                    <a:lnL w="6350" cap="flat" cmpd="sng" algn="ctr">
-                      <a:solidFill>
-                        <a:srgbClr val="E2E8F0"/>
-                      </a:solidFill>
-                      <a:prstDash val="solid"/>
-                      <a:round/>
-                      <a:headEnd type="none" w="med" len="med"/>
-                      <a:tailEnd type="none" w="med" len="med"/>
-                    </a:lnL>
-                    <a:lnR w="6350" cap="flat" cmpd="sng" algn="ctr">
-                      <a:solidFill>
-                        <a:srgbClr val="E2E8F0"/>
-                      </a:solidFill>
-                      <a:prstDash val="solid"/>
-                      <a:round/>
-                      <a:headEnd type="none" w="med" len="med"/>
-                      <a:tailEnd type="none" w="med" len="med"/>
-                    </a:lnR>
-                    <a:lnT w="6350" cap="flat" cmpd="sng" algn="ctr">
-                      <a:solidFill>
-                        <a:srgbClr val="E2E8F0"/>
-                      </a:solidFill>
-                      <a:prstDash val="solid"/>
-                      <a:round/>
-                      <a:headEnd type="none" w="med" len="med"/>
-                      <a:tailEnd type="none" w="med" len="med"/>
-                    </a:lnT>
-                    <a:lnB w="6350" cap="flat" cmpd="sng" algn="ctr">
-                      <a:solidFill>
-                        <a:srgbClr val="E2E8F0"/>
-                      </a:solidFill>
-                      <a:prstDash val="solid"/>
-                      <a:round/>
-                      <a:headEnd type="none" w="med" len="med"/>
-                      <a:tailEnd type="none" w="med" len="med"/>
-                    </a:lnB>
-                    <a:solidFill>
-                      <a:srgbClr val="FFFFFF"/>
-                    </a:solidFill>
-                  </a:tcPr>
-                </a:tc>
-                <a:tc>
-                  <a:txBody>
-                    <a:bodyPr/>
-                    <a:lstStyle/>
-                    <a:p>
-                      <a:pPr marL="0" indent="0">
-                        <a:buNone/>
-                      </a:pPr>
-                      <a:r>
-                        <a:rPr lang="en-US" sz="950" dirty="0">
-                          <a:solidFill>
-                            <a:srgbClr val="1E293B"/>
-                          </a:solidFill>
-                        </a:rPr>
-                        <a:t>6.8</a:t>
-                      </a:r>
-                      <a:endParaRPr lang="en-US" sz="950" dirty="0"/>
-                    </a:p>
-                  </a:txBody>
-                  <a:tcPr>
-                    <a:lnL w="6350" cap="flat" cmpd="sng" algn="ctr">
-                      <a:solidFill>
-                        <a:srgbClr val="E2E8F0"/>
-                      </a:solidFill>
-                      <a:prstDash val="solid"/>
-                      <a:round/>
-                      <a:headEnd type="none" w="med" len="med"/>
-                      <a:tailEnd type="none" w="med" len="med"/>
-                    </a:lnL>
-                    <a:lnR w="6350" cap="flat" cmpd="sng" algn="ctr">
-                      <a:solidFill>
-                        <a:srgbClr val="E2E8F0"/>
-                      </a:solidFill>
-                      <a:prstDash val="solid"/>
-                      <a:round/>
-                      <a:headEnd type="none" w="med" len="med"/>
-                      <a:tailEnd type="none" w="med" len="med"/>
-                    </a:lnR>
-                    <a:lnT w="6350" cap="flat" cmpd="sng" algn="ctr">
-                      <a:solidFill>
-                        <a:srgbClr val="E2E8F0"/>
-                      </a:solidFill>
-                      <a:prstDash val="solid"/>
-                      <a:round/>
-                      <a:headEnd type="none" w="med" len="med"/>
-                      <a:tailEnd type="none" w="med" len="med"/>
-                    </a:lnT>
-                    <a:lnB w="6350" cap="flat" cmpd="sng" algn="ctr">
-                      <a:solidFill>
-                        <a:srgbClr val="E2E8F0"/>
-                      </a:solidFill>
-                      <a:prstDash val="solid"/>
-                      <a:round/>
-                      <a:headEnd type="none" w="med" len="med"/>
-                      <a:tailEnd type="none" w="med" len="med"/>
-                    </a:lnB>
-                    <a:solidFill>
-                      <a:srgbClr val="FFFFFF"/>
-                    </a:solidFill>
-                  </a:tcPr>
-                </a:tc>
-                <a:tc>
-                  <a:txBody>
-                    <a:bodyPr/>
-                    <a:lstStyle/>
-                    <a:p>
-                      <a:pPr marL="0" indent="0">
-                        <a:buNone/>
-                      </a:pPr>
-                      <a:r>
-                        <a:rPr lang="en-US" sz="950" b="1" dirty="0">
-                          <a:solidFill>
-                            <a:srgbClr val="2A9D8F"/>
-                          </a:solidFill>
-                        </a:rPr>
-                        <a:t>2,206</a:t>
-                      </a:r>
-                      <a:endParaRPr lang="en-US" sz="950" dirty="0"/>
-                    </a:p>
-                  </a:txBody>
-                  <a:tcPr>
-                    <a:lnL w="6350" cap="flat" cmpd="sng" algn="ctr">
-                      <a:solidFill>
-                        <a:srgbClr val="E2E8F0"/>
-                      </a:solidFill>
-                      <a:prstDash val="solid"/>
-                      <a:round/>
-                      <a:headEnd type="none" w="med" len="med"/>
-                      <a:tailEnd type="none" w="med" len="med"/>
-                    </a:lnL>
-                    <a:lnR w="6350" cap="flat" cmpd="sng" algn="ctr">
-                      <a:solidFill>
-                        <a:srgbClr val="E2E8F0"/>
-                      </a:solidFill>
-                      <a:prstDash val="solid"/>
-                      <a:round/>
-                      <a:headEnd type="none" w="med" len="med"/>
-                      <a:tailEnd type="none" w="med" len="med"/>
-                    </a:lnR>
-                    <a:lnT w="6350" cap="flat" cmpd="sng" algn="ctr">
-                      <a:solidFill>
-                        <a:srgbClr val="E2E8F0"/>
-                      </a:solidFill>
-                      <a:prstDash val="solid"/>
-                      <a:round/>
-                      <a:headEnd type="none" w="med" len="med"/>
-                      <a:tailEnd type="none" w="med" len="med"/>
-                    </a:lnT>
-                    <a:lnB w="6350" cap="flat" cmpd="sng" algn="ctr">
-                      <a:solidFill>
-                        <a:srgbClr val="E2E8F0"/>
-                      </a:solidFill>
-                      <a:prstDash val="solid"/>
-                      <a:round/>
-                      <a:headEnd type="none" w="med" len="med"/>
-                      <a:tailEnd type="none" w="med" len="med"/>
-                    </a:lnB>
-                    <a:solidFill>
-                      <a:srgbClr val="FFFFFF"/>
-                    </a:solidFill>
-                  </a:tcPr>
-                </a:tc>
-                <a:tc>
-                  <a:txBody>
-                    <a:bodyPr/>
-                    <a:lstStyle/>
-                    <a:p>
-                      <a:pPr marL="0" indent="0">
-                        <a:buNone/>
-                      </a:pPr>
-                      <a:r>
-                        <a:rPr lang="en-US" sz="950" dirty="0">
-                          <a:solidFill>
-                            <a:srgbClr val="64748B"/>
-                          </a:solidFill>
-                        </a:rPr>
-                        <a:t>—</a:t>
-                      </a:r>
-                      <a:endParaRPr lang="en-US" sz="950" dirty="0"/>
-                    </a:p>
-                  </a:txBody>
-                  <a:tcPr>
-                    <a:lnL w="6350" cap="flat" cmpd="sng" algn="ctr">
-                      <a:solidFill>
-                        <a:srgbClr val="E2E8F0"/>
-                      </a:solidFill>
-                      <a:prstDash val="solid"/>
-                      <a:round/>
-                      <a:headEnd type="none" w="med" len="med"/>
-                      <a:tailEnd type="none" w="med" len="med"/>
-                    </a:lnL>
-                    <a:lnR w="6350" cap="flat" cmpd="sng" algn="ctr">
-                      <a:solidFill>
-                        <a:srgbClr val="E2E8F0"/>
-                      </a:solidFill>
-                      <a:prstDash val="solid"/>
-                      <a:round/>
-                      <a:headEnd type="none" w="med" len="med"/>
-                      <a:tailEnd type="none" w="med" len="med"/>
-                    </a:lnR>
-                    <a:lnT w="6350" cap="flat" cmpd="sng" algn="ctr">
-                      <a:solidFill>
-                        <a:srgbClr val="E2E8F0"/>
-                      </a:solidFill>
-                      <a:prstDash val="solid"/>
-                      <a:round/>
-                      <a:headEnd type="none" w="med" len="med"/>
-                      <a:tailEnd type="none" w="med" len="med"/>
-                    </a:lnT>
-                    <a:lnB w="6350" cap="flat" cmpd="sng" algn="ctr">
-                      <a:solidFill>
-                        <a:srgbClr val="E2E8F0"/>
-                      </a:solidFill>
-                      <a:prstDash val="solid"/>
-                      <a:round/>
-                      <a:headEnd type="none" w="med" len="med"/>
-                      <a:tailEnd type="none" w="med" len="med"/>
-                    </a:lnB>
-                    <a:solidFill>
-                      <a:srgbClr val="FFFFFF"/>
-                    </a:solidFill>
-                  </a:tcPr>
-                </a:tc>
-                <a:extLst>
-                  <a:ext uri="{0D108BD9-81ED-4DB2-BD59-A6C34878D82A}">
-                    <a16:rowId xmlns:a16="http://schemas.microsoft.com/office/drawing/2014/main" val="10001"/>
-                  </a:ext>
-                </a:extLst>
-              </a:tr>
-              <a:tr h="0">
-                <a:tc>
-                  <a:txBody>
-                    <a:bodyPr/>
-                    <a:lstStyle/>
-                    <a:p>
-                      <a:pPr marL="0" indent="0">
-                        <a:buNone/>
-                      </a:pPr>
-                      <a:r>
-                        <a:rPr lang="en-US" sz="950" b="1" dirty="0">
-                          <a:solidFill>
-                            <a:srgbClr val="1B3A5C"/>
-                          </a:solidFill>
-                        </a:rPr>
-                        <a:t>500</a:t>
-                      </a:r>
-                      <a:endParaRPr lang="en-US" sz="950" dirty="0"/>
-                    </a:p>
-                  </a:txBody>
-                  <a:tcPr>
-                    <a:lnL w="6350" cap="flat" cmpd="sng" algn="ctr">
-                      <a:solidFill>
-                        <a:srgbClr val="E2E8F0"/>
-                      </a:solidFill>
-                      <a:prstDash val="solid"/>
-                      <a:round/>
-                      <a:headEnd type="none" w="med" len="med"/>
-                      <a:tailEnd type="none" w="med" len="med"/>
-                    </a:lnL>
-                    <a:lnR w="6350" cap="flat" cmpd="sng" algn="ctr">
-                      <a:solidFill>
-                        <a:srgbClr val="E2E8F0"/>
-                      </a:solidFill>
-                      <a:prstDash val="solid"/>
-                      <a:round/>
-                      <a:headEnd type="none" w="med" len="med"/>
-                      <a:tailEnd type="none" w="med" len="med"/>
-                    </a:lnR>
-                    <a:lnT w="6350" cap="flat" cmpd="sng" algn="ctr">
-                      <a:solidFill>
-                        <a:srgbClr val="E2E8F0"/>
-                      </a:solidFill>
-                      <a:prstDash val="solid"/>
-                      <a:round/>
-                      <a:headEnd type="none" w="med" len="med"/>
-                      <a:tailEnd type="none" w="med" len="med"/>
-                    </a:lnT>
-                    <a:lnB w="6350" cap="flat" cmpd="sng" algn="ctr">
-                      <a:solidFill>
-                        <a:srgbClr val="E2E8F0"/>
-                      </a:solidFill>
-                      <a:prstDash val="solid"/>
-                      <a:round/>
-                      <a:headEnd type="none" w="med" len="med"/>
-                      <a:tailEnd type="none" w="med" len="med"/>
-                    </a:lnB>
-                    <a:solidFill>
-                      <a:srgbClr val="E8F4F2"/>
-                    </a:solidFill>
-                  </a:tcPr>
-                </a:tc>
-                <a:tc>
-                  <a:txBody>
-                    <a:bodyPr/>
-                    <a:lstStyle/>
-                    <a:p>
-                      <a:pPr marL="0" indent="0">
-                        <a:buNone/>
-                      </a:pPr>
-                      <a:r>
-                        <a:rPr lang="en-US" sz="950" dirty="0">
-                          <a:solidFill>
-                            <a:srgbClr val="1E293B"/>
-                          </a:solidFill>
-                        </a:rPr>
-                        <a:t>~30,000</a:t>
-                      </a:r>
-                      <a:endParaRPr lang="en-US" sz="950" dirty="0"/>
-                    </a:p>
-                  </a:txBody>
-                  <a:tcPr>
-                    <a:lnL w="6350" cap="flat" cmpd="sng" algn="ctr">
-                      <a:solidFill>
-                        <a:srgbClr val="E2E8F0"/>
-                      </a:solidFill>
-                      <a:prstDash val="solid"/>
-                      <a:round/>
-                      <a:headEnd type="none" w="med" len="med"/>
-                      <a:tailEnd type="none" w="med" len="med"/>
-                    </a:lnL>
-                    <a:lnR w="6350" cap="flat" cmpd="sng" algn="ctr">
-                      <a:solidFill>
-                        <a:srgbClr val="E2E8F0"/>
-                      </a:solidFill>
-                      <a:prstDash val="solid"/>
-                      <a:round/>
-                      <a:headEnd type="none" w="med" len="med"/>
-                      <a:tailEnd type="none" w="med" len="med"/>
-                    </a:lnR>
-                    <a:lnT w="6350" cap="flat" cmpd="sng" algn="ctr">
-                      <a:solidFill>
-                        <a:srgbClr val="E2E8F0"/>
-                      </a:solidFill>
-                      <a:prstDash val="solid"/>
-                      <a:round/>
-                      <a:headEnd type="none" w="med" len="med"/>
-                      <a:tailEnd type="none" w="med" len="med"/>
-                    </a:lnT>
-                    <a:lnB w="6350" cap="flat" cmpd="sng" algn="ctr">
-                      <a:solidFill>
-                        <a:srgbClr val="E2E8F0"/>
-                      </a:solidFill>
-                      <a:prstDash val="solid"/>
-                      <a:round/>
-                      <a:headEnd type="none" w="med" len="med"/>
-                      <a:tailEnd type="none" w="med" len="med"/>
-                    </a:lnB>
-                    <a:solidFill>
-                      <a:srgbClr val="E8F4F2"/>
-                    </a:solidFill>
-                  </a:tcPr>
-                </a:tc>
-                <a:tc>
-                  <a:txBody>
-                    <a:bodyPr/>
-                    <a:lstStyle/>
-                    <a:p>
-                      <a:pPr marL="0" indent="0">
-                        <a:buNone/>
-                      </a:pPr>
-                      <a:r>
-                        <a:rPr lang="en-US" sz="950" dirty="0">
-                          <a:solidFill>
-                            <a:srgbClr val="1E293B"/>
-                          </a:solidFill>
-                        </a:rPr>
-                        <a:t>13.2</a:t>
-                      </a:r>
-                      <a:endParaRPr lang="en-US" sz="950" dirty="0"/>
-                    </a:p>
-                  </a:txBody>
-                  <a:tcPr>
-                    <a:lnL w="6350" cap="flat" cmpd="sng" algn="ctr">
-                      <a:solidFill>
-                        <a:srgbClr val="E2E8F0"/>
-                      </a:solidFill>
-                      <a:prstDash val="solid"/>
-                      <a:round/>
-                      <a:headEnd type="none" w="med" len="med"/>
-                      <a:tailEnd type="none" w="med" len="med"/>
-                    </a:lnL>
-                    <a:lnR w="6350" cap="flat" cmpd="sng" algn="ctr">
-                      <a:solidFill>
-                        <a:srgbClr val="E2E8F0"/>
-                      </a:solidFill>
-                      <a:prstDash val="solid"/>
-                      <a:round/>
-                      <a:headEnd type="none" w="med" len="med"/>
-                      <a:tailEnd type="none" w="med" len="med"/>
-                    </a:lnR>
-                    <a:lnT w="6350" cap="flat" cmpd="sng" algn="ctr">
-                      <a:solidFill>
-                        <a:srgbClr val="E2E8F0"/>
-                      </a:solidFill>
-                      <a:prstDash val="solid"/>
-                      <a:round/>
-                      <a:headEnd type="none" w="med" len="med"/>
-                      <a:tailEnd type="none" w="med" len="med"/>
-                    </a:lnT>
-                    <a:lnB w="6350" cap="flat" cmpd="sng" algn="ctr">
-                      <a:solidFill>
-                        <a:srgbClr val="E2E8F0"/>
-                      </a:solidFill>
-                      <a:prstDash val="solid"/>
-                      <a:round/>
-                      <a:headEnd type="none" w="med" len="med"/>
-                      <a:tailEnd type="none" w="med" len="med"/>
-                    </a:lnB>
-                    <a:solidFill>
-                      <a:srgbClr val="E8F4F2"/>
-                    </a:solidFill>
-                  </a:tcPr>
-                </a:tc>
-                <a:tc>
-                  <a:txBody>
-                    <a:bodyPr/>
-                    <a:lstStyle/>
-                    <a:p>
-                      <a:pPr marL="0" indent="0">
-                        <a:buNone/>
-                      </a:pPr>
-                      <a:r>
-                        <a:rPr lang="en-US" sz="950" b="1" dirty="0">
-                          <a:solidFill>
-                            <a:srgbClr val="2A9D8F"/>
-                          </a:solidFill>
-                        </a:rPr>
-                        <a:t>2,273</a:t>
-                      </a:r>
-                      <a:endParaRPr lang="en-US" sz="950" dirty="0"/>
-                    </a:p>
-                  </a:txBody>
-                  <a:tcPr>
-                    <a:lnL w="6350" cap="flat" cmpd="sng" algn="ctr">
-                      <a:solidFill>
-                        <a:srgbClr val="E2E8F0"/>
-                      </a:solidFill>
-                      <a:prstDash val="solid"/>
-                      <a:round/>
-                      <a:headEnd type="none" w="med" len="med"/>
-                      <a:tailEnd type="none" w="med" len="med"/>
-                    </a:lnL>
-                    <a:lnR w="6350" cap="flat" cmpd="sng" algn="ctr">
-                      <a:solidFill>
-                        <a:srgbClr val="E2E8F0"/>
-                      </a:solidFill>
-                      <a:prstDash val="solid"/>
-                      <a:round/>
-                      <a:headEnd type="none" w="med" len="med"/>
-                      <a:tailEnd type="none" w="med" len="med"/>
-                    </a:lnR>
-                    <a:lnT w="6350" cap="flat" cmpd="sng" algn="ctr">
-                      <a:solidFill>
-                        <a:srgbClr val="E2E8F0"/>
-                      </a:solidFill>
-                      <a:prstDash val="solid"/>
-                      <a:round/>
-                      <a:headEnd type="none" w="med" len="med"/>
-                      <a:tailEnd type="none" w="med" len="med"/>
-                    </a:lnT>
-                    <a:lnB w="6350" cap="flat" cmpd="sng" algn="ctr">
-                      <a:solidFill>
-                        <a:srgbClr val="E2E8F0"/>
-                      </a:solidFill>
-                      <a:prstDash val="solid"/>
-                      <a:round/>
-                      <a:headEnd type="none" w="med" len="med"/>
-                      <a:tailEnd type="none" w="med" len="med"/>
-                    </a:lnB>
-                    <a:solidFill>
-                      <a:srgbClr val="E8F4F2"/>
-                    </a:solidFill>
-                  </a:tcPr>
-                </a:tc>
-                <a:tc>
-                  <a:txBody>
-                    <a:bodyPr/>
-                    <a:lstStyle/>
-                    <a:p>
-                      <a:pPr marL="0" indent="0">
-                        <a:buNone/>
-                      </a:pPr>
-                      <a:r>
-                        <a:rPr lang="en-US" sz="950" dirty="0">
-                          <a:solidFill>
-                            <a:srgbClr val="64748B"/>
-                          </a:solidFill>
-                        </a:rPr>
-                        <a:t>13.6</a:t>
-                      </a:r>
-                      <a:endParaRPr lang="en-US" sz="950" dirty="0"/>
-                    </a:p>
-                  </a:txBody>
-                  <a:tcPr>
-                    <a:lnL w="6350" cap="flat" cmpd="sng" algn="ctr">
-                      <a:solidFill>
-                        <a:srgbClr val="E2E8F0"/>
-                      </a:solidFill>
-                      <a:prstDash val="solid"/>
-                      <a:round/>
-                      <a:headEnd type="none" w="med" len="med"/>
-                      <a:tailEnd type="none" w="med" len="med"/>
-                    </a:lnL>
-                    <a:lnR w="6350" cap="flat" cmpd="sng" algn="ctr">
-                      <a:solidFill>
-                        <a:srgbClr val="E2E8F0"/>
-                      </a:solidFill>
-                      <a:prstDash val="solid"/>
-                      <a:round/>
-                      <a:headEnd type="none" w="med" len="med"/>
-                      <a:tailEnd type="none" w="med" len="med"/>
-                    </a:lnR>
-                    <a:lnT w="6350" cap="flat" cmpd="sng" algn="ctr">
-                      <a:solidFill>
-                        <a:srgbClr val="E2E8F0"/>
-                      </a:solidFill>
-                      <a:prstDash val="solid"/>
-                      <a:round/>
-                      <a:headEnd type="none" w="med" len="med"/>
-                      <a:tailEnd type="none" w="med" len="med"/>
-                    </a:lnT>
-                    <a:lnB w="6350" cap="flat" cmpd="sng" algn="ctr">
-                      <a:solidFill>
-                        <a:srgbClr val="E2E8F0"/>
-                      </a:solidFill>
-                      <a:prstDash val="solid"/>
-                      <a:round/>
-                      <a:headEnd type="none" w="med" len="med"/>
-                      <a:tailEnd type="none" w="med" len="med"/>
-                    </a:lnB>
-                    <a:solidFill>
-                      <a:srgbClr val="E8F4F2"/>
-                    </a:solidFill>
-                  </a:tcPr>
-                </a:tc>
-                <a:extLst>
-                  <a:ext uri="{0D108BD9-81ED-4DB2-BD59-A6C34878D82A}">
-                    <a16:rowId xmlns:a16="http://schemas.microsoft.com/office/drawing/2014/main" val="10002"/>
-                  </a:ext>
-                </a:extLst>
-              </a:tr>
-              <a:tr h="0">
-                <a:tc>
-                  <a:txBody>
-                    <a:bodyPr/>
-                    <a:lstStyle/>
-                    <a:p>
-                      <a:pPr marL="0" indent="0">
-                        <a:buNone/>
-                      </a:pPr>
-                      <a:r>
-                        <a:rPr lang="en-US" sz="950" b="1" dirty="0">
-                          <a:solidFill>
-                            <a:srgbClr val="1B3A5C"/>
-                          </a:solidFill>
-                        </a:rPr>
-                        <a:t>1,000</a:t>
-                      </a:r>
-                      <a:endParaRPr lang="en-US" sz="950" dirty="0"/>
-                    </a:p>
-                  </a:txBody>
-                  <a:tcPr>
-                    <a:lnL w="6350" cap="flat" cmpd="sng" algn="ctr">
-                      <a:solidFill>
-                        <a:srgbClr val="E2E8F0"/>
-                      </a:solidFill>
-                      <a:prstDash val="solid"/>
-                      <a:round/>
-                      <a:headEnd type="none" w="med" len="med"/>
-                      <a:tailEnd type="none" w="med" len="med"/>
-                    </a:lnL>
-                    <a:lnR w="6350" cap="flat" cmpd="sng" algn="ctr">
-                      <a:solidFill>
-                        <a:srgbClr val="E2E8F0"/>
-                      </a:solidFill>
-                      <a:prstDash val="solid"/>
-                      <a:round/>
-                      <a:headEnd type="none" w="med" len="med"/>
-                      <a:tailEnd type="none" w="med" len="med"/>
-                    </a:lnR>
-                    <a:lnT w="6350" cap="flat" cmpd="sng" algn="ctr">
-                      <a:solidFill>
-                        <a:srgbClr val="E2E8F0"/>
-                      </a:solidFill>
-                      <a:prstDash val="solid"/>
-                      <a:round/>
-                      <a:headEnd type="none" w="med" len="med"/>
-                      <a:tailEnd type="none" w="med" len="med"/>
-                    </a:lnT>
-                    <a:lnB w="6350" cap="flat" cmpd="sng" algn="ctr">
-                      <a:solidFill>
-                        <a:srgbClr val="E2E8F0"/>
-                      </a:solidFill>
-                      <a:prstDash val="solid"/>
-                      <a:round/>
-                      <a:headEnd type="none" w="med" len="med"/>
-                      <a:tailEnd type="none" w="med" len="med"/>
-                    </a:lnB>
-                    <a:solidFill>
-                      <a:srgbClr val="FFFFFF"/>
-                    </a:solidFill>
-                  </a:tcPr>
-                </a:tc>
-                <a:tc>
-                  <a:txBody>
-                    <a:bodyPr/>
-                    <a:lstStyle/>
-                    <a:p>
-                      <a:pPr marL="0" indent="0">
-                        <a:buNone/>
-                      </a:pPr>
-                      <a:r>
-                        <a:rPr lang="en-US" sz="950" dirty="0">
-                          <a:solidFill>
-                            <a:srgbClr val="1E293B"/>
-                          </a:solidFill>
-                        </a:rPr>
-                        <a:t>~336,000</a:t>
-                      </a:r>
-                      <a:endParaRPr lang="en-US" sz="950" dirty="0"/>
-                    </a:p>
-                  </a:txBody>
-                  <a:tcPr>
-                    <a:lnL w="6350" cap="flat" cmpd="sng" algn="ctr">
-                      <a:solidFill>
-                        <a:srgbClr val="E2E8F0"/>
-                      </a:solidFill>
-                      <a:prstDash val="solid"/>
-                      <a:round/>
-                      <a:headEnd type="none" w="med" len="med"/>
-                      <a:tailEnd type="none" w="med" len="med"/>
-                    </a:lnL>
-                    <a:lnR w="6350" cap="flat" cmpd="sng" algn="ctr">
-                      <a:solidFill>
-                        <a:srgbClr val="E2E8F0"/>
-                      </a:solidFill>
-                      <a:prstDash val="solid"/>
-                      <a:round/>
-                      <a:headEnd type="none" w="med" len="med"/>
-                      <a:tailEnd type="none" w="med" len="med"/>
-                    </a:lnR>
-                    <a:lnT w="6350" cap="flat" cmpd="sng" algn="ctr">
-                      <a:solidFill>
-                        <a:srgbClr val="E2E8F0"/>
-                      </a:solidFill>
-                      <a:prstDash val="solid"/>
-                      <a:round/>
-                      <a:headEnd type="none" w="med" len="med"/>
-                      <a:tailEnd type="none" w="med" len="med"/>
-                    </a:lnT>
-                    <a:lnB w="6350" cap="flat" cmpd="sng" algn="ctr">
-                      <a:solidFill>
-                        <a:srgbClr val="E2E8F0"/>
-                      </a:solidFill>
-                      <a:prstDash val="solid"/>
-                      <a:round/>
-                      <a:headEnd type="none" w="med" len="med"/>
-                      <a:tailEnd type="none" w="med" len="med"/>
-                    </a:lnB>
-                    <a:solidFill>
-                      <a:srgbClr val="FFFFFF"/>
-                    </a:solidFill>
-                  </a:tcPr>
-                </a:tc>
-                <a:tc>
-                  <a:txBody>
-                    <a:bodyPr/>
-                    <a:lstStyle/>
-                    <a:p>
-                      <a:pPr marL="0" indent="0">
-                        <a:buNone/>
-                      </a:pPr>
-                      <a:r>
-                        <a:rPr lang="en-US" sz="950" dirty="0">
-                          <a:solidFill>
-                            <a:srgbClr val="1E293B"/>
-                          </a:solidFill>
-                        </a:rPr>
-                        <a:t>120.9</a:t>
-                      </a:r>
-                      <a:endParaRPr lang="en-US" sz="950" dirty="0"/>
-                    </a:p>
-                  </a:txBody>
-                  <a:tcPr>
-                    <a:lnL w="6350" cap="flat" cmpd="sng" algn="ctr">
-                      <a:solidFill>
-                        <a:srgbClr val="E2E8F0"/>
-                      </a:solidFill>
-                      <a:prstDash val="solid"/>
-                      <a:round/>
-                      <a:headEnd type="none" w="med" len="med"/>
-                      <a:tailEnd type="none" w="med" len="med"/>
-                    </a:lnL>
-                    <a:lnR w="6350" cap="flat" cmpd="sng" algn="ctr">
-                      <a:solidFill>
-                        <a:srgbClr val="E2E8F0"/>
-                      </a:solidFill>
-                      <a:prstDash val="solid"/>
-                      <a:round/>
-                      <a:headEnd type="none" w="med" len="med"/>
-                      <a:tailEnd type="none" w="med" len="med"/>
-                    </a:lnR>
-                    <a:lnT w="6350" cap="flat" cmpd="sng" algn="ctr">
-                      <a:solidFill>
-                        <a:srgbClr val="E2E8F0"/>
-                      </a:solidFill>
-                      <a:prstDash val="solid"/>
-                      <a:round/>
-                      <a:headEnd type="none" w="med" len="med"/>
-                      <a:tailEnd type="none" w="med" len="med"/>
-                    </a:lnT>
-                    <a:lnB w="6350" cap="flat" cmpd="sng" algn="ctr">
-                      <a:solidFill>
-                        <a:srgbClr val="E2E8F0"/>
-                      </a:solidFill>
-                      <a:prstDash val="solid"/>
-                      <a:round/>
-                      <a:headEnd type="none" w="med" len="med"/>
-                      <a:tailEnd type="none" w="med" len="med"/>
-                    </a:lnB>
-                    <a:solidFill>
-                      <a:srgbClr val="FFFFFF"/>
-                    </a:solidFill>
-                  </a:tcPr>
-                </a:tc>
-                <a:tc>
-                  <a:txBody>
-                    <a:bodyPr/>
-                    <a:lstStyle/>
-                    <a:p>
-                      <a:pPr marL="0" indent="0">
-                        <a:buNone/>
-                      </a:pPr>
-                      <a:r>
-                        <a:rPr lang="en-US" sz="950" b="1" dirty="0">
-                          <a:solidFill>
-                            <a:srgbClr val="2A9D8F"/>
-                          </a:solidFill>
-                        </a:rPr>
-                        <a:t>2,785</a:t>
-                      </a:r>
-                      <a:endParaRPr lang="en-US" sz="950" dirty="0"/>
-                    </a:p>
-                  </a:txBody>
-                  <a:tcPr>
-                    <a:lnL w="6350" cap="flat" cmpd="sng" algn="ctr">
-                      <a:solidFill>
-                        <a:srgbClr val="E2E8F0"/>
-                      </a:solidFill>
-                      <a:prstDash val="solid"/>
-                      <a:round/>
-                      <a:headEnd type="none" w="med" len="med"/>
-                      <a:tailEnd type="none" w="med" len="med"/>
-                    </a:lnL>
-                    <a:lnR w="6350" cap="flat" cmpd="sng" algn="ctr">
-                      <a:solidFill>
-                        <a:srgbClr val="E2E8F0"/>
-                      </a:solidFill>
-                      <a:prstDash val="solid"/>
-                      <a:round/>
-                      <a:headEnd type="none" w="med" len="med"/>
-                      <a:tailEnd type="none" w="med" len="med"/>
-                    </a:lnR>
-                    <a:lnT w="6350" cap="flat" cmpd="sng" algn="ctr">
-                      <a:solidFill>
-                        <a:srgbClr val="E2E8F0"/>
-                      </a:solidFill>
-                      <a:prstDash val="solid"/>
-                      <a:round/>
-                      <a:headEnd type="none" w="med" len="med"/>
-                      <a:tailEnd type="none" w="med" len="med"/>
-                    </a:lnT>
-                    <a:lnB w="6350" cap="flat" cmpd="sng" algn="ctr">
-                      <a:solidFill>
-                        <a:srgbClr val="E2E8F0"/>
-                      </a:solidFill>
-                      <a:prstDash val="solid"/>
-                      <a:round/>
-                      <a:headEnd type="none" w="med" len="med"/>
-                      <a:tailEnd type="none" w="med" len="med"/>
-                    </a:lnB>
-                    <a:solidFill>
-                      <a:srgbClr val="FFFFFF"/>
-                    </a:solidFill>
-                  </a:tcPr>
-                </a:tc>
-                <a:tc>
-                  <a:txBody>
-                    <a:bodyPr/>
-                    <a:lstStyle/>
-                    <a:p>
-                      <a:pPr marL="0" indent="0">
-                        <a:buNone/>
-                      </a:pPr>
-                      <a:r>
-                        <a:rPr lang="en-US" sz="950" dirty="0">
-                          <a:solidFill>
-                            <a:srgbClr val="64748B"/>
-                          </a:solidFill>
-                        </a:rPr>
-                        <a:t>—</a:t>
-                      </a:r>
-                      <a:endParaRPr lang="en-US" sz="950" dirty="0"/>
-                    </a:p>
-                  </a:txBody>
-                  <a:tcPr>
-                    <a:lnL w="6350" cap="flat" cmpd="sng" algn="ctr">
-                      <a:solidFill>
-                        <a:srgbClr val="E2E8F0"/>
-                      </a:solidFill>
-                      <a:prstDash val="solid"/>
-                      <a:round/>
-                      <a:headEnd type="none" w="med" len="med"/>
-                      <a:tailEnd type="none" w="med" len="med"/>
-                    </a:lnL>
-                    <a:lnR w="6350" cap="flat" cmpd="sng" algn="ctr">
-                      <a:solidFill>
-                        <a:srgbClr val="E2E8F0"/>
-                      </a:solidFill>
-                      <a:prstDash val="solid"/>
-                      <a:round/>
-                      <a:headEnd type="none" w="med" len="med"/>
-                      <a:tailEnd type="none" w="med" len="med"/>
-                    </a:lnR>
-                    <a:lnT w="6350" cap="flat" cmpd="sng" algn="ctr">
-                      <a:solidFill>
-                        <a:srgbClr val="E2E8F0"/>
-                      </a:solidFill>
-                      <a:prstDash val="solid"/>
-                      <a:round/>
-                      <a:headEnd type="none" w="med" len="med"/>
-                      <a:tailEnd type="none" w="med" len="med"/>
-                    </a:lnT>
-                    <a:lnB w="6350" cap="flat" cmpd="sng" algn="ctr">
-                      <a:solidFill>
-                        <a:srgbClr val="E2E8F0"/>
-                      </a:solidFill>
-                      <a:prstDash val="solid"/>
-                      <a:round/>
-                      <a:headEnd type="none" w="med" len="med"/>
-                      <a:tailEnd type="none" w="med" len="med"/>
-                    </a:lnB>
-                    <a:solidFill>
-                      <a:srgbClr val="FFFFFF"/>
-                    </a:solidFill>
-                  </a:tcPr>
-                </a:tc>
-                <a:extLst>
-                  <a:ext uri="{0D108BD9-81ED-4DB2-BD59-A6C34878D82A}">
-                    <a16:rowId xmlns:a16="http://schemas.microsoft.com/office/drawing/2014/main" val="10003"/>
-                  </a:ext>
-                </a:extLst>
-              </a:tr>
-              <a:tr h="0">
-                <a:tc>
-                  <a:txBody>
-                    <a:bodyPr/>
-                    <a:lstStyle/>
-                    <a:p>
-                      <a:pPr marL="0" indent="0">
-                        <a:buNone/>
-                      </a:pPr>
-                      <a:r>
-                        <a:rPr lang="en-US" sz="950" b="1" dirty="0">
-                          <a:solidFill>
-                            <a:srgbClr val="1B3A5C"/>
-                          </a:solidFill>
-                        </a:rPr>
-                        <a:t>2,000</a:t>
-                      </a:r>
-                      <a:endParaRPr lang="en-US" sz="950" dirty="0"/>
-                    </a:p>
-                  </a:txBody>
-                  <a:tcPr>
-                    <a:lnL w="6350" cap="flat" cmpd="sng" algn="ctr">
-                      <a:solidFill>
-                        <a:srgbClr val="E2E8F0"/>
-                      </a:solidFill>
-                      <a:prstDash val="solid"/>
-                      <a:round/>
-                      <a:headEnd type="none" w="med" len="med"/>
-                      <a:tailEnd type="none" w="med" len="med"/>
-                    </a:lnL>
-                    <a:lnR w="6350" cap="flat" cmpd="sng" algn="ctr">
-                      <a:solidFill>
-                        <a:srgbClr val="E2E8F0"/>
-                      </a:solidFill>
-                      <a:prstDash val="solid"/>
-                      <a:round/>
-                      <a:headEnd type="none" w="med" len="med"/>
-                      <a:tailEnd type="none" w="med" len="med"/>
-                    </a:lnR>
-                    <a:lnT w="6350" cap="flat" cmpd="sng" algn="ctr">
-                      <a:solidFill>
-                        <a:srgbClr val="E2E8F0"/>
-                      </a:solidFill>
-                      <a:prstDash val="solid"/>
-                      <a:round/>
-                      <a:headEnd type="none" w="med" len="med"/>
-                      <a:tailEnd type="none" w="med" len="med"/>
-                    </a:lnT>
-                    <a:lnB w="6350" cap="flat" cmpd="sng" algn="ctr">
-                      <a:solidFill>
-                        <a:srgbClr val="E2E8F0"/>
-                      </a:solidFill>
-                      <a:prstDash val="solid"/>
-                      <a:round/>
-                      <a:headEnd type="none" w="med" len="med"/>
-                      <a:tailEnd type="none" w="med" len="med"/>
-                    </a:lnB>
-                    <a:solidFill>
-                      <a:srgbClr val="E8F4F2"/>
-                    </a:solidFill>
-                  </a:tcPr>
-                </a:tc>
-                <a:tc>
-                  <a:txBody>
-                    <a:bodyPr/>
-                    <a:lstStyle/>
-                    <a:p>
-                      <a:pPr marL="0" indent="0">
-                        <a:buNone/>
-                      </a:pPr>
-                      <a:r>
-                        <a:rPr lang="en-US" sz="950" dirty="0">
-                          <a:solidFill>
-                            <a:srgbClr val="1E293B"/>
-                          </a:solidFill>
-                        </a:rPr>
-                        <a:t>~120,000</a:t>
-                      </a:r>
-                      <a:endParaRPr lang="en-US" sz="950" dirty="0"/>
-                    </a:p>
-                  </a:txBody>
-                  <a:tcPr>
-                    <a:lnL w="6350" cap="flat" cmpd="sng" algn="ctr">
-                      <a:solidFill>
-                        <a:srgbClr val="E2E8F0"/>
-                      </a:solidFill>
-                      <a:prstDash val="solid"/>
-                      <a:round/>
-                      <a:headEnd type="none" w="med" len="med"/>
-                      <a:tailEnd type="none" w="med" len="med"/>
-                    </a:lnL>
-                    <a:lnR w="6350" cap="flat" cmpd="sng" algn="ctr">
-                      <a:solidFill>
-                        <a:srgbClr val="E2E8F0"/>
-                      </a:solidFill>
-                      <a:prstDash val="solid"/>
-                      <a:round/>
-                      <a:headEnd type="none" w="med" len="med"/>
-                      <a:tailEnd type="none" w="med" len="med"/>
-                    </a:lnR>
-                    <a:lnT w="6350" cap="flat" cmpd="sng" algn="ctr">
-                      <a:solidFill>
-                        <a:srgbClr val="E2E8F0"/>
-                      </a:solidFill>
-                      <a:prstDash val="solid"/>
-                      <a:round/>
-                      <a:headEnd type="none" w="med" len="med"/>
-                      <a:tailEnd type="none" w="med" len="med"/>
-                    </a:lnT>
-                    <a:lnB w="6350" cap="flat" cmpd="sng" algn="ctr">
-                      <a:solidFill>
-                        <a:srgbClr val="E2E8F0"/>
-                      </a:solidFill>
-                      <a:prstDash val="solid"/>
-                      <a:round/>
-                      <a:headEnd type="none" w="med" len="med"/>
-                      <a:tailEnd type="none" w="med" len="med"/>
-                    </a:lnB>
-                    <a:solidFill>
-                      <a:srgbClr val="E8F4F2"/>
-                    </a:solidFill>
-                  </a:tcPr>
-                </a:tc>
-                <a:tc>
-                  <a:txBody>
-                    <a:bodyPr/>
-                    <a:lstStyle/>
-                    <a:p>
-                      <a:pPr marL="0" indent="0">
-                        <a:buNone/>
-                      </a:pPr>
-                      <a:r>
-                        <a:rPr lang="en-US" sz="950" dirty="0">
-                          <a:solidFill>
-                            <a:srgbClr val="1E293B"/>
-                          </a:solidFill>
-                        </a:rPr>
-                        <a:t>54.8</a:t>
-                      </a:r>
-                      <a:endParaRPr lang="en-US" sz="950" dirty="0"/>
-                    </a:p>
-                  </a:txBody>
-                  <a:tcPr>
-                    <a:lnL w="6350" cap="flat" cmpd="sng" algn="ctr">
-                      <a:solidFill>
-                        <a:srgbClr val="E2E8F0"/>
-                      </a:solidFill>
-                      <a:prstDash val="solid"/>
-                      <a:round/>
-                      <a:headEnd type="none" w="med" len="med"/>
-                      <a:tailEnd type="none" w="med" len="med"/>
-                    </a:lnL>
-                    <a:lnR w="6350" cap="flat" cmpd="sng" algn="ctr">
-                      <a:solidFill>
-                        <a:srgbClr val="E2E8F0"/>
-                      </a:solidFill>
-                      <a:prstDash val="solid"/>
-                      <a:round/>
-                      <a:headEnd type="none" w="med" len="med"/>
-                      <a:tailEnd type="none" w="med" len="med"/>
-                    </a:lnR>
-                    <a:lnT w="6350" cap="flat" cmpd="sng" algn="ctr">
-                      <a:solidFill>
-                        <a:srgbClr val="E2E8F0"/>
-                      </a:solidFill>
-                      <a:prstDash val="solid"/>
-                      <a:round/>
-                      <a:headEnd type="none" w="med" len="med"/>
-                      <a:tailEnd type="none" w="med" len="med"/>
-                    </a:lnT>
-                    <a:lnB w="6350" cap="flat" cmpd="sng" algn="ctr">
-                      <a:solidFill>
-                        <a:srgbClr val="E2E8F0"/>
-                      </a:solidFill>
-                      <a:prstDash val="solid"/>
-                      <a:round/>
-                      <a:headEnd type="none" w="med" len="med"/>
-                      <a:tailEnd type="none" w="med" len="med"/>
-                    </a:lnB>
-                    <a:solidFill>
-                      <a:srgbClr val="E8F4F2"/>
-                    </a:solidFill>
-                  </a:tcPr>
-                </a:tc>
-                <a:tc>
-                  <a:txBody>
-                    <a:bodyPr/>
-                    <a:lstStyle/>
-                    <a:p>
-                      <a:pPr marL="0" indent="0">
-                        <a:buNone/>
-                      </a:pPr>
-                      <a:r>
-                        <a:rPr lang="en-US" sz="950" b="1" dirty="0">
-                          <a:solidFill>
-                            <a:srgbClr val="2A9D8F"/>
-                          </a:solidFill>
-                        </a:rPr>
-                        <a:t>2,190</a:t>
-                      </a:r>
-                      <a:endParaRPr lang="en-US" sz="950" dirty="0"/>
-                    </a:p>
-                  </a:txBody>
-                  <a:tcPr>
-                    <a:lnL w="6350" cap="flat" cmpd="sng" algn="ctr">
-                      <a:solidFill>
-                        <a:srgbClr val="E2E8F0"/>
-                      </a:solidFill>
-                      <a:prstDash val="solid"/>
-                      <a:round/>
-                      <a:headEnd type="none" w="med" len="med"/>
-                      <a:tailEnd type="none" w="med" len="med"/>
-                    </a:lnL>
-                    <a:lnR w="6350" cap="flat" cmpd="sng" algn="ctr">
-                      <a:solidFill>
-                        <a:srgbClr val="E2E8F0"/>
-                      </a:solidFill>
-                      <a:prstDash val="solid"/>
-                      <a:round/>
-                      <a:headEnd type="none" w="med" len="med"/>
-                      <a:tailEnd type="none" w="med" len="med"/>
-                    </a:lnR>
-                    <a:lnT w="6350" cap="flat" cmpd="sng" algn="ctr">
-                      <a:solidFill>
-                        <a:srgbClr val="E2E8F0"/>
-                      </a:solidFill>
-                      <a:prstDash val="solid"/>
-                      <a:round/>
-                      <a:headEnd type="none" w="med" len="med"/>
-                      <a:tailEnd type="none" w="med" len="med"/>
-                    </a:lnT>
-                    <a:lnB w="6350" cap="flat" cmpd="sng" algn="ctr">
-                      <a:solidFill>
-                        <a:srgbClr val="E2E8F0"/>
-                      </a:solidFill>
-                      <a:prstDash val="solid"/>
-                      <a:round/>
-                      <a:headEnd type="none" w="med" len="med"/>
-                      <a:tailEnd type="none" w="med" len="med"/>
-                    </a:lnB>
-                    <a:solidFill>
-                      <a:srgbClr val="E8F4F2"/>
-                    </a:solidFill>
-                  </a:tcPr>
-                </a:tc>
-                <a:tc>
-                  <a:txBody>
-                    <a:bodyPr/>
-                    <a:lstStyle/>
-                    <a:p>
-                      <a:pPr marL="0" indent="0">
-                        <a:buNone/>
-                      </a:pPr>
-                      <a:r>
-                        <a:rPr lang="en-US" sz="950" dirty="0">
-                          <a:solidFill>
-                            <a:srgbClr val="64748B"/>
-                          </a:solidFill>
-                        </a:rPr>
-                        <a:t>54.4</a:t>
-                      </a:r>
-                      <a:endParaRPr lang="en-US" sz="950" dirty="0"/>
-                    </a:p>
-                  </a:txBody>
-                  <a:tcPr>
-                    <a:lnL w="6350" cap="flat" cmpd="sng" algn="ctr">
-                      <a:solidFill>
-                        <a:srgbClr val="E2E8F0"/>
-                      </a:solidFill>
-                      <a:prstDash val="solid"/>
-                      <a:round/>
-                      <a:headEnd type="none" w="med" len="med"/>
-                      <a:tailEnd type="none" w="med" len="med"/>
-                    </a:lnL>
-                    <a:lnR w="6350" cap="flat" cmpd="sng" algn="ctr">
-                      <a:solidFill>
-                        <a:srgbClr val="E2E8F0"/>
-                      </a:solidFill>
-                      <a:prstDash val="solid"/>
-                      <a:round/>
-                      <a:headEnd type="none" w="med" len="med"/>
-                      <a:tailEnd type="none" w="med" len="med"/>
-                    </a:lnR>
-                    <a:lnT w="6350" cap="flat" cmpd="sng" algn="ctr">
-                      <a:solidFill>
-                        <a:srgbClr val="E2E8F0"/>
-                      </a:solidFill>
-                      <a:prstDash val="solid"/>
-                      <a:round/>
-                      <a:headEnd type="none" w="med" len="med"/>
-                      <a:tailEnd type="none" w="med" len="med"/>
-                    </a:lnT>
-                    <a:lnB w="6350" cap="flat" cmpd="sng" algn="ctr">
-                      <a:solidFill>
-                        <a:srgbClr val="E2E8F0"/>
-                      </a:solidFill>
-                      <a:prstDash val="solid"/>
-                      <a:round/>
-                      <a:headEnd type="none" w="med" len="med"/>
-                      <a:tailEnd type="none" w="med" len="med"/>
-                    </a:lnB>
-                    <a:solidFill>
-                      <a:srgbClr val="E8F4F2"/>
-                    </a:solidFill>
-                  </a:tcPr>
-                </a:tc>
-                <a:extLst>
-                  <a:ext uri="{0D108BD9-81ED-4DB2-BD59-A6C34878D82A}">
-                    <a16:rowId xmlns:a16="http://schemas.microsoft.com/office/drawing/2014/main" val="10004"/>
-                  </a:ext>
-                </a:extLst>
-              </a:tr>
-              <a:tr h="0">
-                <a:tc>
-                  <a:txBody>
-                    <a:bodyPr/>
-                    <a:lstStyle/>
-                    <a:p>
-                      <a:pPr marL="0" indent="0">
-                        <a:buNone/>
-                      </a:pPr>
-                      <a:r>
-                        <a:rPr lang="en-US" sz="950" b="1" dirty="0">
-                          <a:solidFill>
-                            <a:srgbClr val="1B3A5C"/>
-                          </a:solidFill>
-                        </a:rPr>
-                        <a:t>5,000</a:t>
-                      </a:r>
-                      <a:endParaRPr lang="en-US" sz="950" dirty="0"/>
-                    </a:p>
-                  </a:txBody>
-                  <a:tcPr>
-                    <a:lnL w="6350" cap="flat" cmpd="sng" algn="ctr">
-                      <a:solidFill>
-                        <a:srgbClr val="E2E8F0"/>
-                      </a:solidFill>
-                      <a:prstDash val="solid"/>
-                      <a:round/>
-                      <a:headEnd type="none" w="med" len="med"/>
-                      <a:tailEnd type="none" w="med" len="med"/>
-                    </a:lnL>
-                    <a:lnR w="6350" cap="flat" cmpd="sng" algn="ctr">
-                      <a:solidFill>
-                        <a:srgbClr val="E2E8F0"/>
-                      </a:solidFill>
-                      <a:prstDash val="solid"/>
-                      <a:round/>
-                      <a:headEnd type="none" w="med" len="med"/>
-                      <a:tailEnd type="none" w="med" len="med"/>
-                    </a:lnR>
-                    <a:lnT w="6350" cap="flat" cmpd="sng" algn="ctr">
-                      <a:solidFill>
-                        <a:srgbClr val="E2E8F0"/>
-                      </a:solidFill>
-                      <a:prstDash val="solid"/>
-                      <a:round/>
-                      <a:headEnd type="none" w="med" len="med"/>
-                      <a:tailEnd type="none" w="med" len="med"/>
-                    </a:lnT>
-                    <a:lnB w="6350" cap="flat" cmpd="sng" algn="ctr">
-                      <a:solidFill>
-                        <a:srgbClr val="E2E8F0"/>
-                      </a:solidFill>
-                      <a:prstDash val="solid"/>
-                      <a:round/>
-                      <a:headEnd type="none" w="med" len="med"/>
-                      <a:tailEnd type="none" w="med" len="med"/>
-                    </a:lnB>
-                    <a:solidFill>
-                      <a:srgbClr val="FFFFFF"/>
-                    </a:solidFill>
-                  </a:tcPr>
-                </a:tc>
-                <a:tc>
-                  <a:txBody>
-                    <a:bodyPr/>
-                    <a:lstStyle/>
-                    <a:p>
-                      <a:pPr marL="0" indent="0">
-                        <a:buNone/>
-                      </a:pPr>
-                      <a:r>
-                        <a:rPr lang="en-US" sz="950" dirty="0">
-                          <a:solidFill>
-                            <a:srgbClr val="1E293B"/>
-                          </a:solidFill>
-                        </a:rPr>
-                        <a:t>~300,000</a:t>
-                      </a:r>
-                      <a:endParaRPr lang="en-US" sz="950" dirty="0"/>
-                    </a:p>
-                  </a:txBody>
-                  <a:tcPr>
-                    <a:lnL w="6350" cap="flat" cmpd="sng" algn="ctr">
-                      <a:solidFill>
-                        <a:srgbClr val="E2E8F0"/>
-                      </a:solidFill>
-                      <a:prstDash val="solid"/>
-                      <a:round/>
-                      <a:headEnd type="none" w="med" len="med"/>
-                      <a:tailEnd type="none" w="med" len="med"/>
-                    </a:lnL>
-                    <a:lnR w="6350" cap="flat" cmpd="sng" algn="ctr">
-                      <a:solidFill>
-                        <a:srgbClr val="E2E8F0"/>
-                      </a:solidFill>
-                      <a:prstDash val="solid"/>
-                      <a:round/>
-                      <a:headEnd type="none" w="med" len="med"/>
-                      <a:tailEnd type="none" w="med" len="med"/>
-                    </a:lnR>
-                    <a:lnT w="6350" cap="flat" cmpd="sng" algn="ctr">
-                      <a:solidFill>
-                        <a:srgbClr val="E2E8F0"/>
-                      </a:solidFill>
-                      <a:prstDash val="solid"/>
-                      <a:round/>
-                      <a:headEnd type="none" w="med" len="med"/>
-                      <a:tailEnd type="none" w="med" len="med"/>
-                    </a:lnT>
-                    <a:lnB w="6350" cap="flat" cmpd="sng" algn="ctr">
-                      <a:solidFill>
-                        <a:srgbClr val="E2E8F0"/>
-                      </a:solidFill>
-                      <a:prstDash val="solid"/>
-                      <a:round/>
-                      <a:headEnd type="none" w="med" len="med"/>
-                      <a:tailEnd type="none" w="med" len="med"/>
-                    </a:lnB>
-                    <a:solidFill>
-                      <a:srgbClr val="FFFFFF"/>
-                    </a:solidFill>
-                  </a:tcPr>
-                </a:tc>
-                <a:tc>
-                  <a:txBody>
-                    <a:bodyPr/>
-                    <a:lstStyle/>
-                    <a:p>
-                      <a:pPr marL="0" indent="0">
-                        <a:buNone/>
-                      </a:pPr>
-                      <a:r>
-                        <a:rPr lang="en-US" sz="950" dirty="0">
-                          <a:solidFill>
-                            <a:srgbClr val="1E293B"/>
-                          </a:solidFill>
-                        </a:rPr>
-                        <a:t>142.3</a:t>
-                      </a:r>
-                      <a:endParaRPr lang="en-US" sz="950" dirty="0"/>
-                    </a:p>
-                  </a:txBody>
-                  <a:tcPr>
-                    <a:lnL w="6350" cap="flat" cmpd="sng" algn="ctr">
-                      <a:solidFill>
-                        <a:srgbClr val="E2E8F0"/>
-                      </a:solidFill>
-                      <a:prstDash val="solid"/>
-                      <a:round/>
-                      <a:headEnd type="none" w="med" len="med"/>
-                      <a:tailEnd type="none" w="med" len="med"/>
-                    </a:lnL>
-                    <a:lnR w="6350" cap="flat" cmpd="sng" algn="ctr">
-                      <a:solidFill>
-                        <a:srgbClr val="E2E8F0"/>
-                      </a:solidFill>
-                      <a:prstDash val="solid"/>
-                      <a:round/>
-                      <a:headEnd type="none" w="med" len="med"/>
-                      <a:tailEnd type="none" w="med" len="med"/>
-                    </a:lnR>
-                    <a:lnT w="6350" cap="flat" cmpd="sng" algn="ctr">
-                      <a:solidFill>
-                        <a:srgbClr val="E2E8F0"/>
-                      </a:solidFill>
-                      <a:prstDash val="solid"/>
-                      <a:round/>
-                      <a:headEnd type="none" w="med" len="med"/>
-                      <a:tailEnd type="none" w="med" len="med"/>
-                    </a:lnT>
-                    <a:lnB w="6350" cap="flat" cmpd="sng" algn="ctr">
-                      <a:solidFill>
-                        <a:srgbClr val="E2E8F0"/>
-                      </a:solidFill>
-                      <a:prstDash val="solid"/>
-                      <a:round/>
-                      <a:headEnd type="none" w="med" len="med"/>
-                      <a:tailEnd type="none" w="med" len="med"/>
-                    </a:lnB>
-                    <a:solidFill>
-                      <a:srgbClr val="FFFFFF"/>
-                    </a:solidFill>
-                  </a:tcPr>
-                </a:tc>
-                <a:tc>
-                  <a:txBody>
-                    <a:bodyPr/>
-                    <a:lstStyle/>
-                    <a:p>
-                      <a:pPr marL="0" indent="0">
-                        <a:buNone/>
-                      </a:pPr>
-                      <a:r>
-                        <a:rPr lang="en-US" sz="950" b="1" dirty="0">
-                          <a:solidFill>
-                            <a:srgbClr val="2A9D8F"/>
-                          </a:solidFill>
-                        </a:rPr>
-                        <a:t>2,109</a:t>
-                      </a:r>
-                      <a:endParaRPr lang="en-US" sz="950" dirty="0"/>
-                    </a:p>
-                  </a:txBody>
-                  <a:tcPr>
-                    <a:lnL w="6350" cap="flat" cmpd="sng" algn="ctr">
-                      <a:solidFill>
-                        <a:srgbClr val="E2E8F0"/>
-                      </a:solidFill>
-                      <a:prstDash val="solid"/>
-                      <a:round/>
-                      <a:headEnd type="none" w="med" len="med"/>
-                      <a:tailEnd type="none" w="med" len="med"/>
-                    </a:lnL>
-                    <a:lnR w="6350" cap="flat" cmpd="sng" algn="ctr">
-                      <a:solidFill>
-                        <a:srgbClr val="E2E8F0"/>
-                      </a:solidFill>
-                      <a:prstDash val="solid"/>
-                      <a:round/>
-                      <a:headEnd type="none" w="med" len="med"/>
-                      <a:tailEnd type="none" w="med" len="med"/>
-                    </a:lnR>
-                    <a:lnT w="6350" cap="flat" cmpd="sng" algn="ctr">
-                      <a:solidFill>
-                        <a:srgbClr val="E2E8F0"/>
-                      </a:solidFill>
-                      <a:prstDash val="solid"/>
-                      <a:round/>
-                      <a:headEnd type="none" w="med" len="med"/>
-                      <a:tailEnd type="none" w="med" len="med"/>
-                    </a:lnT>
-                    <a:lnB w="6350" cap="flat" cmpd="sng" algn="ctr">
-                      <a:solidFill>
-                        <a:srgbClr val="E2E8F0"/>
-                      </a:solidFill>
-                      <a:prstDash val="solid"/>
-                      <a:round/>
-                      <a:headEnd type="none" w="med" len="med"/>
-                      <a:tailEnd type="none" w="med" len="med"/>
-                    </a:lnB>
-                    <a:solidFill>
-                      <a:srgbClr val="FFFFFF"/>
-                    </a:solidFill>
-                  </a:tcPr>
-                </a:tc>
-                <a:tc>
-                  <a:txBody>
-                    <a:bodyPr/>
-                    <a:lstStyle/>
-                    <a:p>
-                      <a:pPr marL="0" indent="0">
-                        <a:buNone/>
-                      </a:pPr>
-                      <a:r>
-                        <a:rPr lang="en-US" sz="950" dirty="0">
-                          <a:solidFill>
-                            <a:srgbClr val="64748B"/>
-                          </a:solidFill>
-                        </a:rPr>
-                        <a:t>136.0</a:t>
-                      </a:r>
-                      <a:endParaRPr lang="en-US" sz="950" dirty="0"/>
-                    </a:p>
-                  </a:txBody>
-                  <a:tcPr>
-                    <a:lnL w="6350" cap="flat" cmpd="sng" algn="ctr">
-                      <a:solidFill>
-                        <a:srgbClr val="E2E8F0"/>
-                      </a:solidFill>
-                      <a:prstDash val="solid"/>
-                      <a:round/>
-                      <a:headEnd type="none" w="med" len="med"/>
-                      <a:tailEnd type="none" w="med" len="med"/>
-                    </a:lnL>
-                    <a:lnR w="6350" cap="flat" cmpd="sng" algn="ctr">
-                      <a:solidFill>
-                        <a:srgbClr val="E2E8F0"/>
-                      </a:solidFill>
-                      <a:prstDash val="solid"/>
-                      <a:round/>
-                      <a:headEnd type="none" w="med" len="med"/>
-                      <a:tailEnd type="none" w="med" len="med"/>
-                    </a:lnR>
-                    <a:lnT w="6350" cap="flat" cmpd="sng" algn="ctr">
-                      <a:solidFill>
-                        <a:srgbClr val="E2E8F0"/>
-                      </a:solidFill>
-                      <a:prstDash val="solid"/>
-                      <a:round/>
-                      <a:headEnd type="none" w="med" len="med"/>
-                      <a:tailEnd type="none" w="med" len="med"/>
-                    </a:lnT>
-                    <a:lnB w="6350" cap="flat" cmpd="sng" algn="ctr">
-                      <a:solidFill>
-                        <a:srgbClr val="E2E8F0"/>
-                      </a:solidFill>
-                      <a:prstDash val="solid"/>
-                      <a:round/>
-                      <a:headEnd type="none" w="med" len="med"/>
-                      <a:tailEnd type="none" w="med" len="med"/>
-                    </a:lnB>
-                    <a:solidFill>
-                      <a:srgbClr val="FFFFFF"/>
-                    </a:solidFill>
-                  </a:tcPr>
-                </a:tc>
-                <a:extLst>
-                  <a:ext uri="{0D108BD9-81ED-4DB2-BD59-A6C34878D82A}">
-                    <a16:rowId xmlns:a16="http://schemas.microsoft.com/office/drawing/2014/main" val="10005"/>
-                  </a:ext>
-                </a:extLst>
-              </a:tr>
-            </a:tbl>
-          </a:graphicData>
-        </a:graphic>
-      </p:graphicFrame>
-      <p:sp>
-        <p:nvSpPr>
-          <p:cNvPr id="7" name="Text 4"/>
-          <p:cNvSpPr/>
-          <p:nvPr/>
-        </p:nvSpPr>
-        <p:spPr>
-          <a:xfrm>
-            <a:off x="457200" y="3200400"/>
-            <a:ext cx="8229600" cy="1371600"/>
-          </a:xfrm>
-          <a:prstGeom prst="rect">
-            <a:avLst/>
-          </a:prstGeom>
-          <a:noFill/>
-          <a:ln/>
-        </p:spPr>
-        <p:txBody>
-          <a:bodyPr wrap="square" rtlCol="0" anchor="ctr"/>
-          <a:lstStyle/>
-          <a:p>
-            <a:pPr marL="342900" indent="-342900">
-              <a:spcAft>
-                <a:spcPts val="600"/>
-              </a:spcAft>
-              <a:buSzPct val="100000"/>
-              <a:buChar char="•"/>
-            </a:pPr>
-            <a:r>
-              <a:rPr lang="en-US" sz="1000" dirty="0">
-                <a:solidFill>
-                  <a:srgbClr val="1E293B"/>
-                </a:solidFill>
-              </a:rPr>
-              <a:t>Near-linear scalability up to 2,000 taxpayers (~120K records)</a:t>
-            </a:r>
-            <a:endParaRPr lang="en-US" sz="1000" dirty="0"/>
-          </a:p>
-          <a:p>
-            <a:pPr marL="342900" indent="-342900">
-              <a:spcAft>
-                <a:spcPts val="600"/>
-              </a:spcAft>
-              <a:buSzPct val="100000"/>
-              <a:buChar char="•"/>
-            </a:pPr>
-            <a:r>
-              <a:rPr lang="en-US" sz="1000" dirty="0">
-                <a:solidFill>
-                  <a:srgbClr val="1E293B"/>
-                </a:solidFill>
-              </a:rPr>
-              <a:t>~2,200 records/second sustained throughput across all layers</a:t>
-            </a:r>
-            <a:endParaRPr lang="en-US" sz="1000" dirty="0"/>
-          </a:p>
-          <a:p>
-            <a:pPr marL="342900" indent="-342900">
-              <a:spcAft>
-                <a:spcPts val="600"/>
-              </a:spcAft>
-              <a:buSzPct val="100000"/>
-              <a:buChar char="•"/>
-            </a:pPr>
-            <a:r>
-              <a:rPr lang="en-US" sz="1000" dirty="0">
-                <a:solidFill>
-                  <a:srgbClr val="1E293B"/>
-                </a:solidFill>
-              </a:rPr>
-              <a:t>At 5,000 taxpayers: only 4.7% overhead vs linear projection</a:t>
-            </a:r>
-            <a:endParaRPr lang="en-US" sz="1000" dirty="0"/>
-          </a:p>
-          <a:p>
-            <a:pPr marL="342900" indent="-342900">
-              <a:spcAft>
-                <a:spcPts val="600"/>
-              </a:spcAft>
-              <a:buSzPct val="100000"/>
-              <a:buChar char="•"/>
-            </a:pPr>
-            <a:r>
-              <a:rPr lang="en-US" sz="1000" dirty="0">
-                <a:solidFill>
-                  <a:srgbClr val="1E293B"/>
-                </a:solidFill>
-              </a:rPr>
-              <a:t>Degradation attributed to hash key lookup operations in Bronze layer</a:t>
-            </a:r>
-            <a:endParaRPr lang="en-US" sz="1000" dirty="0"/>
-          </a:p>
-          <a:p>
-            <a:pPr marL="342900" indent="-342900">
-              <a:spcAft>
-                <a:spcPts val="600"/>
-              </a:spcAft>
-              <a:buSzPct val="100000"/>
-              <a:buChar char="•"/>
-            </a:pPr>
-            <a:r>
-              <a:rPr lang="en-US" sz="1000" b="1" dirty="0">
-                <a:solidFill>
-                  <a:srgbClr val="2A9D8F"/>
-                </a:solidFill>
-              </a:rPr>
-              <a:t>Production: columnstore indexes + partition switching recommended</a:t>
-            </a:r>
-            <a:endParaRPr lang="en-US" sz="1000" dirty="0"/>
-          </a:p>
-        </p:txBody>
-      </p:sp>
-    </p:spTree>
-  </p:cSld>
-  <p:clrMapOvr>
-    <a:masterClrMapping/>
-  </p:clrMapOvr>
-</p:sld>
-</file>
-
-<file path=ppt/slides/slide14.xml><?xml version="1.0" encoding="utf-8"?>
 <p:sld xmlns:a="http://schemas.openxmlformats.org/drawingml/2006/main" xmlns:r="http://schemas.openxmlformats.org/officeDocument/2006/relationships" xmlns:p="http://schemas.openxmlformats.org/presentationml/2006/main">
   <p:cSld name="Slide 14">
     <p:bg>
@@ -9797,7 +3558,10 @@
         </p:spPr>
         <p:txBody>
           <a:bodyPr/>
-          <a:p/>
+          <a:lstStyle/>
+          <a:p>
+            <a:endParaRPr/>
+          </a:p>
         </p:txBody>
       </p:sp>
       <p:sp>
@@ -9830,7 +3594,7 @@
                   <a:srgbClr val="64748B"/>
                 </a:solidFill>
               </a:rPr>
-              <a:t>14 / 18</a:t>
+              <a:t>11 / 15</a:t>
             </a:r>
             <a:endParaRPr lang="en-US" sz="900" dirty="0"/>
           </a:p>
@@ -9896,7 +3660,10 @@
         </p:spPr>
         <p:txBody>
           <a:bodyPr/>
-          <a:p/>
+          <a:lstStyle/>
+          <a:p>
+            <a:endParaRPr/>
+          </a:p>
         </p:txBody>
       </p:sp>
       <p:sp>
@@ -9927,7 +3694,10 @@
         </p:spPr>
         <p:txBody>
           <a:bodyPr/>
-          <a:p/>
+          <a:lstStyle/>
+          <a:p>
+            <a:endParaRPr/>
+          </a:p>
         </p:txBody>
       </p:sp>
       <p:sp>
@@ -9951,7 +3721,10 @@
         </p:spPr>
         <p:txBody>
           <a:bodyPr/>
-          <a:p/>
+          <a:lstStyle/>
+          <a:p>
+            <a:endParaRPr/>
+          </a:p>
         </p:txBody>
       </p:sp>
       <p:sp>
@@ -10108,7 +3881,10 @@
         </p:spPr>
         <p:txBody>
           <a:bodyPr/>
-          <a:p/>
+          <a:lstStyle/>
+          <a:p>
+            <a:endParaRPr/>
+          </a:p>
         </p:txBody>
       </p:sp>
       <p:sp>
@@ -10175,7 +3951,10 @@
         </p:spPr>
         <p:txBody>
           <a:bodyPr/>
-          <a:p/>
+          <a:lstStyle/>
+          <a:p>
+            <a:endParaRPr/>
+          </a:p>
         </p:txBody>
       </p:sp>
       <p:sp>
@@ -10199,7 +3978,10 @@
         </p:spPr>
         <p:txBody>
           <a:bodyPr/>
-          <a:p/>
+          <a:lstStyle/>
+          <a:p>
+            <a:endParaRPr/>
+          </a:p>
         </p:txBody>
       </p:sp>
       <p:sp>
@@ -10374,7 +4156,10 @@
         </p:spPr>
         <p:txBody>
           <a:bodyPr/>
-          <a:p/>
+          <a:lstStyle/>
+          <a:p>
+            <a:endParaRPr/>
+          </a:p>
         </p:txBody>
       </p:sp>
       <p:sp>
@@ -10441,7 +4226,10 @@
         </p:spPr>
         <p:txBody>
           <a:bodyPr/>
-          <a:p/>
+          <a:lstStyle/>
+          <a:p>
+            <a:endParaRPr/>
+          </a:p>
         </p:txBody>
       </p:sp>
       <p:sp>
@@ -10465,7 +4253,10 @@
         </p:spPr>
         <p:txBody>
           <a:bodyPr/>
-          <a:p/>
+          <a:lstStyle/>
+          <a:p>
+            <a:endParaRPr/>
+          </a:p>
         </p:txBody>
       </p:sp>
       <p:sp>
@@ -10640,7 +4431,10 @@
         </p:spPr>
         <p:txBody>
           <a:bodyPr/>
-          <a:p/>
+          <a:lstStyle/>
+          <a:p>
+            <a:endParaRPr/>
+          </a:p>
         </p:txBody>
       </p:sp>
       <p:sp>
@@ -10687,7 +4481,7 @@
 </p:sld>
 </file>
 
-<file path=ppt/slides/slide15.xml><?xml version="1.0" encoding="utf-8"?>
+<file path=ppt/slides/slide12.xml><?xml version="1.0" encoding="utf-8"?>
 <p:sld xmlns:a="http://schemas.openxmlformats.org/drawingml/2006/main" xmlns:r="http://schemas.openxmlformats.org/officeDocument/2006/relationships" xmlns:p="http://schemas.openxmlformats.org/presentationml/2006/main">
   <p:cSld name="Slide 15">
     <p:bg>
@@ -10733,7 +4527,10 @@
         </p:spPr>
         <p:txBody>
           <a:bodyPr/>
-          <a:p/>
+          <a:lstStyle/>
+          <a:p>
+            <a:endParaRPr/>
+          </a:p>
         </p:txBody>
       </p:sp>
       <p:sp>
@@ -10766,7 +4563,7 @@
                   <a:srgbClr val="64748B"/>
                 </a:solidFill>
               </a:rPr>
-              <a:t>15 / 18</a:t>
+              <a:t>12 / 15</a:t>
             </a:r>
             <a:endParaRPr lang="en-US" sz="900" dirty="0"/>
           </a:p>
@@ -10832,7 +4629,10 @@
         </p:spPr>
         <p:txBody>
           <a:bodyPr/>
-          <a:p/>
+          <a:lstStyle/>
+          <a:p>
+            <a:endParaRPr/>
+          </a:p>
         </p:txBody>
       </p:sp>
       <p:sp>
@@ -10863,7 +4663,10 @@
         </p:spPr>
         <p:txBody>
           <a:bodyPr/>
-          <a:p/>
+          <a:lstStyle/>
+          <a:p>
+            <a:endParaRPr/>
+          </a:p>
         </p:txBody>
       </p:sp>
       <p:sp>
@@ -10887,7 +4690,10 @@
         </p:spPr>
         <p:txBody>
           <a:bodyPr/>
-          <a:p/>
+          <a:lstStyle/>
+          <a:p>
+            <a:endParaRPr/>
+          </a:p>
         </p:txBody>
       </p:sp>
       <p:sp>
@@ -10959,7 +4765,7 @@
                   <a:srgbClr val="1E293B"/>
                 </a:solidFill>
               </a:rPr>
-              <a:t>Single dev environment; hardware/config variations could affect absolute timing. Mitigated by running all comparisons under identical conditions on the same hardware.</a:t>
+              <a:t>Single dev environment (GCP e2-standard-4, 16GB RAM); hardware/config variations could affect observed behavior. Mitigated by running all POC demonstrations under identical conditions.</a:t>
             </a:r>
             <a:endParaRPr lang="en-US" sz="1050" dirty="0"/>
           </a:p>
@@ -10993,7 +4799,10 @@
         </p:spPr>
         <p:txBody>
           <a:bodyPr/>
-          <a:p/>
+          <a:lstStyle/>
+          <a:p>
+            <a:endParaRPr/>
+          </a:p>
         </p:txBody>
       </p:sp>
       <p:sp>
@@ -11017,7 +4826,10 @@
         </p:spPr>
         <p:txBody>
           <a:bodyPr/>
-          <a:p/>
+          <a:lstStyle/>
+          <a:p>
+            <a:endParaRPr/>
+          </a:p>
         </p:txBody>
       </p:sp>
       <p:sp>
@@ -11123,7 +4935,10 @@
         </p:spPr>
         <p:txBody>
           <a:bodyPr/>
-          <a:p/>
+          <a:lstStyle/>
+          <a:p>
+            <a:endParaRPr/>
+          </a:p>
         </p:txBody>
       </p:sp>
       <p:sp>
@@ -11147,7 +4962,10 @@
         </p:spPr>
         <p:txBody>
           <a:bodyPr/>
-          <a:p/>
+          <a:lstStyle/>
+          <a:p>
+            <a:endParaRPr/>
+          </a:p>
         </p:txBody>
       </p:sp>
       <p:sp>
@@ -11219,7 +5037,7 @@
                   <a:srgbClr val="1E293B"/>
                 </a:solidFill>
               </a:rPr>
-              <a:t>Evaluation criteria selected from problem statement and prior studies [9][10][11]. Additional criteria such as data governance, real-time processing, and team skill requirements may also be relevant. Conclusion Validity: benchmarks report single-run timings without standard deviation or confidence intervals; GCP shared-core CPU may introduce variability.</a:t>
+              <a:t>Evaluation criteria selected from problem statement and prior studies [9][10][11]. Additional criteria such as data governance, real-time processing, and team skill requirements may also be relevant. Quantitative performance benchmarking (ETL load times, query performance, scalability) identified as future work to strengthen conclusions.</a:t>
             </a:r>
             <a:endParaRPr lang="en-US" sz="1050" dirty="0"/>
           </a:p>
@@ -11233,7 +5051,7 @@
 </p:sld>
 </file>
 
-<file path=ppt/slides/slide16.xml><?xml version="1.0" encoding="utf-8"?>
+<file path=ppt/slides/slide13.xml><?xml version="1.0" encoding="utf-8"?>
 <p:sld xmlns:a="http://schemas.openxmlformats.org/drawingml/2006/main" xmlns:r="http://schemas.openxmlformats.org/officeDocument/2006/relationships" xmlns:p="http://schemas.openxmlformats.org/presentationml/2006/main">
   <p:cSld name="Slide 16">
     <p:bg>
@@ -11279,7 +5097,10 @@
         </p:spPr>
         <p:txBody>
           <a:bodyPr/>
-          <a:p/>
+          <a:lstStyle/>
+          <a:p>
+            <a:endParaRPr/>
+          </a:p>
         </p:txBody>
       </p:sp>
       <p:sp>
@@ -11312,7 +5133,7 @@
                   <a:srgbClr val="64748B"/>
                 </a:solidFill>
               </a:rPr>
-              <a:t>16 / 18</a:t>
+              <a:t>13 / 15</a:t>
             </a:r>
             <a:endParaRPr lang="en-US" sz="900" dirty="0"/>
           </a:p>
@@ -11378,7 +5199,10 @@
         </p:spPr>
         <p:txBody>
           <a:bodyPr/>
-          <a:p/>
+          <a:lstStyle/>
+          <a:p>
+            <a:endParaRPr/>
+          </a:p>
         </p:txBody>
       </p:sp>
       <p:sp>
@@ -11531,7 +5355,7 @@
                   <a:srgbClr val="1E293B"/>
                 </a:solidFill>
               </a:rPr>
-              <a:t>ETL pipeline: 120.9s full load / 93.6s incremental for 336,677 records with per-step error isolation</a:t>
+              <a:t>ETL pipeline: Full and incremental loading with watermark-based change detection and per-step error isolation</a:t>
             </a:r>
             <a:endParaRPr lang="en-US" sz="1000" dirty="0"/>
           </a:p>
@@ -11591,7 +5415,7 @@
                   <a:srgbClr val="1E293B"/>
                 </a:solidFill>
               </a:rPr>
-              <a:t>Gold layer query performance: 24ms–771ms with 1.03x–8.3x speedup over Raw Vault queries</a:t>
+              <a:t>Gold layer star schema provides consumption-ready dimensional model for BI reporting</a:t>
             </a:r>
             <a:endParaRPr lang="en-US" sz="1000" dirty="0"/>
           </a:p>
@@ -11651,7 +5475,7 @@
                   <a:srgbClr val="1E293B"/>
                 </a:solidFill>
               </a:rPr>
-              <a:t>Near-linear scalability to 300K records (~2,200 rec/sec) with 4.7% overhead at 5K taxpayers</a:t>
+              <a:t>Performance benchmarking and scalability analysis identified as future work</a:t>
             </a:r>
             <a:endParaRPr lang="en-US" sz="1000" dirty="0"/>
           </a:p>
@@ -11785,7 +5609,7 @@
 </p:sld>
 </file>
 
-<file path=ppt/slides/slide17.xml><?xml version="1.0" encoding="utf-8"?>
+<file path=ppt/slides/slide14.xml><?xml version="1.0" encoding="utf-8"?>
 <p:sld xmlns:a="http://schemas.openxmlformats.org/drawingml/2006/main" xmlns:r="http://schemas.openxmlformats.org/officeDocument/2006/relationships" xmlns:p="http://schemas.openxmlformats.org/presentationml/2006/main">
   <p:cSld name="Slide 17">
     <p:bg>
@@ -11831,7 +5655,10 @@
         </p:spPr>
         <p:txBody>
           <a:bodyPr/>
-          <a:p/>
+          <a:lstStyle/>
+          <a:p>
+            <a:endParaRPr/>
+          </a:p>
         </p:txBody>
       </p:sp>
       <p:sp>
@@ -11864,7 +5691,7 @@
                   <a:srgbClr val="64748B"/>
                 </a:solidFill>
               </a:rPr>
-              <a:t>17 / 18</a:t>
+              <a:t>14 / 15</a:t>
             </a:r>
             <a:endParaRPr lang="en-US" sz="900" dirty="0"/>
           </a:p>
@@ -11930,7 +5757,10 @@
         </p:spPr>
         <p:txBody>
           <a:bodyPr/>
-          <a:p/>
+          <a:lstStyle/>
+          <a:p>
+            <a:endParaRPr/>
+          </a:p>
         </p:txBody>
       </p:sp>
       <p:sp>
@@ -11961,7 +5791,10 @@
         </p:spPr>
         <p:txBody>
           <a:bodyPr/>
-          <a:p/>
+          <a:lstStyle/>
+          <a:p>
+            <a:endParaRPr/>
+          </a:p>
         </p:txBody>
       </p:sp>
       <p:sp>
@@ -11985,7 +5818,10 @@
         </p:spPr>
         <p:txBody>
           <a:bodyPr/>
-          <a:p/>
+          <a:lstStyle/>
+          <a:p>
+            <a:endParaRPr/>
+          </a:p>
         </p:txBody>
       </p:sp>
       <p:sp>
@@ -12052,7 +5888,10 @@
         </p:spPr>
         <p:txBody>
           <a:bodyPr/>
-          <a:p/>
+          <a:lstStyle/>
+          <a:p>
+            <a:endParaRPr/>
+          </a:p>
         </p:txBody>
       </p:sp>
       <p:sp>
@@ -12076,7 +5915,10 @@
         </p:spPr>
         <p:txBody>
           <a:bodyPr/>
-          <a:p/>
+          <a:lstStyle/>
+          <a:p>
+            <a:endParaRPr/>
+          </a:p>
         </p:txBody>
       </p:sp>
       <p:sp>
@@ -12143,7 +5985,10 @@
         </p:spPr>
         <p:txBody>
           <a:bodyPr/>
-          <a:p/>
+          <a:lstStyle/>
+          <a:p>
+            <a:endParaRPr/>
+          </a:p>
         </p:txBody>
       </p:sp>
       <p:sp>
@@ -12167,7 +6012,10 @@
         </p:spPr>
         <p:txBody>
           <a:bodyPr/>
-          <a:p/>
+          <a:lstStyle/>
+          <a:p>
+            <a:endParaRPr/>
+          </a:p>
         </p:txBody>
       </p:sp>
       <p:sp>
@@ -12200,7 +6048,7 @@
                   <a:srgbClr val="1E293B"/>
                 </a:solidFill>
               </a:rPr>
-              <a:t>3. Columnstore indexes and table partitioning for million-scale taxpayer volumes and production performance</a:t>
+              <a:t>3. Performance benchmarking: ETL load times, query performance (Gold vs Raw Vault), scalability analysis with columnstore indexes</a:t>
             </a:r>
             <a:endParaRPr lang="en-US" sz="1050" dirty="0"/>
           </a:p>
@@ -12234,7 +6082,10 @@
         </p:spPr>
         <p:txBody>
           <a:bodyPr/>
-          <a:p/>
+          <a:lstStyle/>
+          <a:p>
+            <a:endParaRPr/>
+          </a:p>
         </p:txBody>
       </p:sp>
       <p:sp>
@@ -12258,7 +6109,10 @@
         </p:spPr>
         <p:txBody>
           <a:bodyPr/>
-          <a:p/>
+          <a:lstStyle/>
+          <a:p>
+            <a:endParaRPr/>
+          </a:p>
         </p:txBody>
       </p:sp>
       <p:sp>
@@ -12325,7 +6179,10 @@
         </p:spPr>
         <p:txBody>
           <a:bodyPr/>
-          <a:p/>
+          <a:lstStyle/>
+          <a:p>
+            <a:endParaRPr/>
+          </a:p>
         </p:txBody>
       </p:sp>
       <p:sp>
@@ -12349,7 +6206,10 @@
         </p:spPr>
         <p:txBody>
           <a:bodyPr/>
-          <a:p/>
+          <a:lstStyle/>
+          <a:p>
+            <a:endParaRPr/>
+          </a:p>
         </p:txBody>
       </p:sp>
       <p:sp>
@@ -12416,7 +6276,10 @@
         </p:spPr>
         <p:txBody>
           <a:bodyPr/>
-          <a:p/>
+          <a:lstStyle/>
+          <a:p>
+            <a:endParaRPr/>
+          </a:p>
         </p:txBody>
       </p:sp>
       <p:sp>
@@ -12440,7 +6303,10 @@
         </p:spPr>
         <p:txBody>
           <a:bodyPr/>
-          <a:p/>
+          <a:lstStyle/>
+          <a:p>
+            <a:endParaRPr/>
+          </a:p>
         </p:txBody>
       </p:sp>
       <p:sp>
@@ -12487,7 +6353,7 @@
 </p:sld>
 </file>
 
-<file path=ppt/slides/slide18.xml><?xml version="1.0" encoding="utf-8"?>
+<file path=ppt/slides/slide15.xml><?xml version="1.0" encoding="utf-8"?>
 <p:sld xmlns:a="http://schemas.openxmlformats.org/drawingml/2006/main" xmlns:r="http://schemas.openxmlformats.org/officeDocument/2006/relationships" xmlns:p="http://schemas.openxmlformats.org/presentationml/2006/main">
   <p:cSld name="Slide 18">
     <p:bg>
@@ -12533,7 +6399,10 @@
         </p:spPr>
         <p:txBody>
           <a:bodyPr/>
-          <a:p/>
+          <a:lstStyle/>
+          <a:p>
+            <a:endParaRPr/>
+          </a:p>
         </p:txBody>
       </p:sp>
       <p:sp>
@@ -12557,7 +6426,10 @@
         </p:spPr>
         <p:txBody>
           <a:bodyPr/>
-          <a:p/>
+          <a:lstStyle/>
+          <a:p>
+            <a:endParaRPr/>
+          </a:p>
         </p:txBody>
       </p:sp>
       <p:pic>
@@ -12644,7 +6516,10 @@
         </p:spPr>
         <p:txBody>
           <a:bodyPr/>
-          <a:p/>
+          <a:lstStyle/>
+          <a:p>
+            <a:endParaRPr/>
+          </a:p>
         </p:txBody>
       </p:sp>
       <p:sp>
@@ -12813,7 +6688,7 @@
                   <a:srgbClr val="64748B"/>
                 </a:solidFill>
               </a:rPr>
-              <a:t>18 / 18</a:t>
+              <a:t>15 / 15</a:t>
             </a:r>
             <a:endParaRPr lang="en-US" sz="900" dirty="0"/>
           </a:p>
@@ -13870,7 +7745,10 @@
         </p:spPr>
         <p:txBody>
           <a:bodyPr/>
-          <a:p/>
+          <a:lstStyle/>
+          <a:p>
+            <a:endParaRPr/>
+          </a:p>
         </p:txBody>
       </p:sp>
       <p:sp>
@@ -13903,7 +7781,7 @@
                   <a:srgbClr val="64748B"/>
                 </a:solidFill>
               </a:rPr>
-              <a:t>3 / 18</a:t>
+              <a:t>3 / 15</a:t>
             </a:r>
             <a:endParaRPr lang="en-US" sz="900" dirty="0"/>
           </a:p>
@@ -13969,7 +7847,10 @@
         </p:spPr>
         <p:txBody>
           <a:bodyPr/>
-          <a:p/>
+          <a:lstStyle/>
+          <a:p>
+            <a:endParaRPr/>
+          </a:p>
         </p:txBody>
       </p:sp>
       <p:sp>
@@ -14000,7 +7881,10 @@
         </p:spPr>
         <p:txBody>
           <a:bodyPr/>
-          <a:p/>
+          <a:lstStyle/>
+          <a:p>
+            <a:endParaRPr/>
+          </a:p>
         </p:txBody>
       </p:sp>
       <p:sp>
@@ -14024,7 +7908,10 @@
         </p:spPr>
         <p:txBody>
           <a:bodyPr/>
-          <a:p/>
+          <a:lstStyle/>
+          <a:p>
+            <a:endParaRPr/>
+          </a:p>
         </p:txBody>
       </p:sp>
       <p:sp>
@@ -14206,7 +8093,10 @@
         </p:spPr>
         <p:txBody>
           <a:bodyPr/>
-          <a:p/>
+          <a:lstStyle/>
+          <a:p>
+            <a:endParaRPr/>
+          </a:p>
         </p:txBody>
       </p:sp>
       <p:sp>
@@ -14230,7 +8120,10 @@
         </p:spPr>
         <p:txBody>
           <a:bodyPr/>
-          <a:p/>
+          <a:lstStyle/>
+          <a:p>
+            <a:endParaRPr/>
+          </a:p>
         </p:txBody>
       </p:sp>
       <p:sp>
@@ -14367,14 +8260,6 @@
               </a:spcAft>
               <a:buNone/>
             </a:pPr>
-            <a:r>
-              <a:rPr lang="en-US" sz="900" dirty="0">
-                <a:solidFill>
-                  <a:srgbClr val="1E293B"/>
-                </a:solidFill>
-              </a:rPr>
-              <a:t/>
-            </a:r>
             <a:endParaRPr lang="en-US" sz="900" dirty="0"/>
           </a:p>
         </p:txBody>
@@ -14407,7 +8292,10 @@
         </p:spPr>
         <p:txBody>
           <a:bodyPr/>
-          <a:p/>
+          <a:lstStyle/>
+          <a:p>
+            <a:endParaRPr/>
+          </a:p>
         </p:txBody>
       </p:sp>
       <p:sp>
@@ -14431,7 +8319,10 @@
         </p:spPr>
         <p:txBody>
           <a:bodyPr/>
-          <a:p/>
+          <a:lstStyle/>
+          <a:p>
+            <a:endParaRPr/>
+          </a:p>
         </p:txBody>
       </p:sp>
       <p:sp>
@@ -14557,7 +8448,7 @@
                   <a:srgbClr val="1E293B"/>
                 </a:solidFill>
               </a:rPr>
-              <a:t>4. Conduct performance benchmarks (ETL load times, query performance, scalability analysis)</a:t>
+              <a:t>4. Validate architecture through POC demonstrations addressing 4 key challenges with evidence</a:t>
             </a:r>
             <a:endParaRPr lang="en-US" sz="950" dirty="0"/>
           </a:p>
@@ -14651,7 +8542,10 @@
         </p:spPr>
         <p:txBody>
           <a:bodyPr/>
-          <a:p/>
+          <a:lstStyle/>
+          <a:p>
+            <a:endParaRPr/>
+          </a:p>
         </p:txBody>
       </p:sp>
       <p:sp>
@@ -14684,7 +8578,7 @@
                   <a:srgbClr val="64748B"/>
                 </a:solidFill>
               </a:rPr>
-              <a:t>4 / 18</a:t>
+              <a:t>4 / 15</a:t>
             </a:r>
             <a:endParaRPr lang="en-US" sz="900" dirty="0"/>
           </a:p>
@@ -14750,7 +8644,10 @@
         </p:spPr>
         <p:txBody>
           <a:bodyPr/>
-          <a:p/>
+          <a:lstStyle/>
+          <a:p>
+            <a:endParaRPr/>
+          </a:p>
         </p:txBody>
       </p:sp>
       <p:sp>
@@ -14781,7 +8678,10 @@
         </p:spPr>
         <p:txBody>
           <a:bodyPr/>
-          <a:p/>
+          <a:lstStyle/>
+          <a:p>
+            <a:endParaRPr/>
+          </a:p>
         </p:txBody>
       </p:sp>
       <p:sp>
@@ -14805,7 +8705,10 @@
         </p:spPr>
         <p:txBody>
           <a:bodyPr/>
-          <a:p/>
+          <a:lstStyle/>
+          <a:p>
+            <a:endParaRPr/>
+          </a:p>
         </p:txBody>
       </p:sp>
       <p:sp>
@@ -15018,7 +8921,7 @@
                   <a:srgbClr val="1E293B"/>
                 </a:solidFill>
               </a:rPr>
-              <a:t>C3: Performance benchmarks — ETL load times, query perf (Gold vs Raw Vault 1.03x–8.3x), scalability</a:t>
+              <a:t>C3: POC evaluation addressing 4 challenges with measurable before/after evidence on Cambodia tax domain</a:t>
             </a:r>
             <a:endParaRPr lang="en-US" sz="1000" dirty="0"/>
           </a:p>
@@ -15078,7 +8981,7 @@
                   <a:srgbClr val="1E293B"/>
                 </a:solidFill>
               </a:rPr>
-              <a:t>C4: POC evaluation addressing 4 challenges with implementation evidence; DV2 demonstrated on Cambodia tax domain</a:t>
+              <a:t>C4: Technical Implementation Guide — reproducibility artifact for SSIS deployment</a:t>
             </a:r>
             <a:endParaRPr lang="en-US" sz="1000" dirty="0"/>
           </a:p>
@@ -15138,7 +9041,7 @@
                   <a:srgbClr val="1E293B"/>
                 </a:solidFill>
               </a:rPr>
-              <a:t>C5: Technical Implementation Guide — reproducibility artifact for SSIS deployment</a:t>
+              <a:t>C5: Source Database Verification + companion documents for full reproducibility</a:t>
             </a:r>
             <a:endParaRPr lang="en-US" sz="1000" dirty="0"/>
           </a:p>
@@ -15198,7 +9101,10 @@
         </p:spPr>
         <p:txBody>
           <a:bodyPr/>
-          <a:p/>
+          <a:lstStyle/>
+          <a:p>
+            <a:endParaRPr/>
+          </a:p>
         </p:txBody>
       </p:sp>
       <p:sp>
@@ -15231,7 +9137,7 @@
                   <a:srgbClr val="64748B"/>
                 </a:solidFill>
               </a:rPr>
-              <a:t>5 / 18</a:t>
+              <a:t>5 / 15</a:t>
             </a:r>
             <a:endParaRPr lang="en-US" sz="900" dirty="0"/>
           </a:p>
@@ -15297,7 +9203,10 @@
         </p:spPr>
         <p:txBody>
           <a:bodyPr/>
-          <a:p/>
+          <a:lstStyle/>
+          <a:p>
+            <a:endParaRPr/>
+          </a:p>
         </p:txBody>
       </p:sp>
       <p:sp>
@@ -15328,7 +9237,10 @@
         </p:spPr>
         <p:txBody>
           <a:bodyPr/>
-          <a:p/>
+          <a:lstStyle/>
+          <a:p>
+            <a:endParaRPr/>
+          </a:p>
         </p:txBody>
       </p:sp>
       <p:sp>
@@ -15352,7 +9264,10 @@
         </p:spPr>
         <p:txBody>
           <a:bodyPr/>
-          <a:p/>
+          <a:lstStyle/>
+          <a:p>
+            <a:endParaRPr/>
+          </a:p>
         </p:txBody>
       </p:sp>
       <p:sp>
@@ -15516,7 +9431,10 @@
         </p:spPr>
         <p:txBody>
           <a:bodyPr/>
-          <a:p/>
+          <a:lstStyle/>
+          <a:p>
+            <a:endParaRPr/>
+          </a:p>
         </p:txBody>
       </p:sp>
       <p:sp>
@@ -15540,7 +9458,10 @@
         </p:spPr>
         <p:txBody>
           <a:bodyPr/>
-          <a:p/>
+          <a:lstStyle/>
+          <a:p>
+            <a:endParaRPr/>
+          </a:p>
         </p:txBody>
       </p:sp>
       <p:sp>
@@ -15704,7 +9625,10 @@
         </p:spPr>
         <p:txBody>
           <a:bodyPr/>
-          <a:p/>
+          <a:lstStyle/>
+          <a:p>
+            <a:endParaRPr/>
+          </a:p>
         </p:txBody>
       </p:sp>
       <p:sp>
@@ -15728,7 +9652,10 @@
         </p:spPr>
         <p:txBody>
           <a:bodyPr/>
-          <a:p/>
+          <a:lstStyle/>
+          <a:p>
+            <a:endParaRPr/>
+          </a:p>
         </p:txBody>
       </p:sp>
       <p:sp>
@@ -15915,7 +9842,10 @@
         </p:spPr>
         <p:txBody>
           <a:bodyPr/>
-          <a:p/>
+          <a:lstStyle/>
+          <a:p>
+            <a:endParaRPr/>
+          </a:p>
         </p:txBody>
       </p:sp>
       <p:sp>
@@ -15948,7 +9878,7 @@
                   <a:srgbClr val="64748B"/>
                 </a:solidFill>
               </a:rPr>
-              <a:t>6 / 18</a:t>
+              <a:t>6 / 15</a:t>
             </a:r>
             <a:endParaRPr lang="en-US" sz="900" dirty="0"/>
           </a:p>
@@ -16014,7 +9944,10 @@
         </p:spPr>
         <p:txBody>
           <a:bodyPr/>
-          <a:p/>
+          <a:lstStyle/>
+          <a:p>
+            <a:endParaRPr/>
+          </a:p>
         </p:txBody>
       </p:sp>
       <p:graphicFrame>
@@ -16689,7 +10622,7 @@
                             <a:srgbClr val="16A34A"/>
                           </a:solidFill>
                         </a:rPr>
-                        <a:t>with benchmarks</a:t>
+                        <a:t>with POC evidence</a:t>
                       </a:r>
                       <a:endParaRPr lang="en-US" sz="800" dirty="0"/>
                     </a:p>
@@ -17969,7 +11902,7 @@
                             <a:srgbClr val="1E293B"/>
                           </a:solidFill>
                         </a:rPr>
-                        <a:t>ETL + Benchmarks</a:t>
+                        <a:t>ETL + POC eval</a:t>
                       </a:r>
                       <a:endParaRPr lang="en-US" sz="800" dirty="0"/>
                     </a:p>
@@ -18230,7 +12163,10 @@
         </p:spPr>
         <p:txBody>
           <a:bodyPr/>
-          <a:p/>
+          <a:lstStyle/>
+          <a:p>
+            <a:endParaRPr/>
+          </a:p>
         </p:txBody>
       </p:sp>
       <p:sp>
@@ -18263,7 +12199,7 @@
                   <a:srgbClr val="64748B"/>
                 </a:solidFill>
               </a:rPr>
-              <a:t>7 / 18</a:t>
+              <a:t>7 / 15</a:t>
             </a:r>
             <a:endParaRPr lang="en-US" sz="900" dirty="0"/>
           </a:p>
@@ -18329,7 +12265,10 @@
         </p:spPr>
         <p:txBody>
           <a:bodyPr/>
-          <a:p/>
+          <a:lstStyle/>
+          <a:p>
+            <a:endParaRPr/>
+          </a:p>
         </p:txBody>
       </p:sp>
       <p:sp>
@@ -18360,7 +12299,10 @@
         </p:spPr>
         <p:txBody>
           <a:bodyPr/>
-          <a:p/>
+          <a:lstStyle/>
+          <a:p>
+            <a:endParaRPr/>
+          </a:p>
         </p:txBody>
       </p:sp>
       <p:sp>
@@ -18384,7 +12326,10 @@
         </p:spPr>
         <p:txBody>
           <a:bodyPr/>
-          <a:p/>
+          <a:lstStyle/>
+          <a:p>
+            <a:endParaRPr/>
+          </a:p>
         </p:txBody>
       </p:sp>
       <p:sp>
@@ -18537,7 +12482,10 @@
         </p:spPr>
         <p:txBody>
           <a:bodyPr/>
-          <a:p/>
+          <a:lstStyle/>
+          <a:p>
+            <a:endParaRPr/>
+          </a:p>
         </p:txBody>
       </p:sp>
       <p:sp>
@@ -18561,7 +12509,10 @@
         </p:spPr>
         <p:txBody>
           <a:bodyPr/>
-          <a:p/>
+          <a:lstStyle/>
+          <a:p>
+            <a:endParaRPr/>
+          </a:p>
         </p:txBody>
       </p:sp>
       <p:sp>
@@ -18714,7 +12665,10 @@
         </p:spPr>
         <p:txBody>
           <a:bodyPr/>
-          <a:p/>
+          <a:lstStyle/>
+          <a:p>
+            <a:endParaRPr/>
+          </a:p>
         </p:txBody>
       </p:sp>
       <p:sp>
@@ -18738,7 +12692,10 @@
         </p:spPr>
         <p:txBody>
           <a:bodyPr/>
-          <a:p/>
+          <a:lstStyle/>
+          <a:p>
+            <a:endParaRPr/>
+          </a:p>
         </p:txBody>
       </p:sp>
       <p:sp>
@@ -18905,7 +12862,10 @@
         </p:spPr>
         <p:txBody>
           <a:bodyPr/>
-          <a:p/>
+          <a:lstStyle/>
+          <a:p>
+            <a:endParaRPr/>
+          </a:p>
         </p:txBody>
       </p:sp>
       <p:sp>
@@ -18929,7 +12889,10 @@
         </p:spPr>
         <p:txBody>
           <a:bodyPr/>
-          <a:p/>
+          <a:lstStyle/>
+          <a:p>
+            <a:endParaRPr/>
+          </a:p>
         </p:txBody>
       </p:sp>
       <p:sp>
@@ -19096,7 +13059,10 @@
         </p:spPr>
         <p:txBody>
           <a:bodyPr/>
-          <a:p/>
+          <a:lstStyle/>
+          <a:p>
+            <a:endParaRPr/>
+          </a:p>
         </p:txBody>
       </p:sp>
       <p:sp>
@@ -19120,7 +13086,10 @@
         </p:spPr>
         <p:txBody>
           <a:bodyPr/>
-          <a:p/>
+          <a:lstStyle/>
+          <a:p>
+            <a:endParaRPr/>
+          </a:p>
         </p:txBody>
       </p:sp>
       <p:sp>
@@ -19417,7 +13386,10 @@
         </p:spPr>
         <p:txBody>
           <a:bodyPr/>
-          <a:p/>
+          <a:lstStyle/>
+          <a:p>
+            <a:endParaRPr/>
+          </a:p>
         </p:txBody>
       </p:sp>
       <p:sp>
@@ -19441,7 +13413,10 @@
         </p:spPr>
         <p:txBody>
           <a:bodyPr/>
-          <a:p/>
+          <a:lstStyle/>
+          <a:p>
+            <a:endParaRPr/>
+          </a:p>
         </p:txBody>
       </p:sp>
       <p:sp>
@@ -19620,7 +13595,10 @@
         </p:spPr>
         <p:txBody>
           <a:bodyPr/>
-          <a:p/>
+          <a:lstStyle/>
+          <a:p>
+            <a:endParaRPr/>
+          </a:p>
         </p:txBody>
       </p:sp>
       <p:sp>
@@ -19644,7 +13622,10 @@
         </p:spPr>
         <p:txBody>
           <a:bodyPr/>
-          <a:p/>
+          <a:lstStyle/>
+          <a:p>
+            <a:endParaRPr/>
+          </a:p>
         </p:txBody>
       </p:sp>
       <p:sp>
@@ -19849,7 +13830,10 @@
         </p:spPr>
         <p:txBody>
           <a:bodyPr/>
-          <a:p/>
+          <a:lstStyle/>
+          <a:p>
+            <a:endParaRPr/>
+          </a:p>
         </p:txBody>
       </p:sp>
       <p:sp>
@@ -19882,7 +13866,7 @@
                   <a:srgbClr val="64748B"/>
                 </a:solidFill>
               </a:rPr>
-              <a:t>8 / 18</a:t>
+              <a:t>8 / 15</a:t>
             </a:r>
             <a:endParaRPr lang="en-US" sz="900" dirty="0"/>
           </a:p>
@@ -19948,7 +13932,10 @@
         </p:spPr>
         <p:txBody>
           <a:bodyPr/>
-          <a:p/>
+          <a:lstStyle/>
+          <a:p>
+            <a:endParaRPr/>
+          </a:p>
         </p:txBody>
       </p:sp>
       <p:sp>
@@ -19979,7 +13966,10 @@
         </p:spPr>
         <p:txBody>
           <a:bodyPr/>
-          <a:p/>
+          <a:lstStyle/>
+          <a:p>
+            <a:endParaRPr/>
+          </a:p>
         </p:txBody>
       </p:sp>
       <p:sp>
@@ -20003,7 +13993,10 @@
         </p:spPr>
         <p:txBody>
           <a:bodyPr/>
-          <a:p/>
+          <a:lstStyle/>
+          <a:p>
+            <a:endParaRPr/>
+          </a:p>
         </p:txBody>
       </p:sp>
       <p:sp>
@@ -20146,7 +14139,10 @@
         </p:spPr>
         <p:txBody>
           <a:bodyPr/>
-          <a:p/>
+          <a:lstStyle/>
+          <a:p>
+            <a:endParaRPr/>
+          </a:p>
         </p:txBody>
       </p:sp>
       <p:sp>
@@ -20170,7 +14166,10 @@
         </p:spPr>
         <p:txBody>
           <a:bodyPr/>
-          <a:p/>
+          <a:lstStyle/>
+          <a:p>
+            <a:endParaRPr/>
+          </a:p>
         </p:txBody>
       </p:sp>
       <p:sp>
@@ -20331,7 +14330,10 @@
         </p:spPr>
         <p:txBody>
           <a:bodyPr/>
-          <a:p/>
+          <a:lstStyle/>
+          <a:p>
+            <a:endParaRPr/>
+          </a:p>
         </p:txBody>
       </p:sp>
       <p:sp>
@@ -20355,7 +14357,10 @@
         </p:spPr>
         <p:txBody>
           <a:bodyPr/>
-          <a:p/>
+          <a:lstStyle/>
+          <a:p>
+            <a:endParaRPr/>
+          </a:p>
         </p:txBody>
       </p:sp>
       <p:sp>
@@ -20498,7 +14503,10 @@
         </p:spPr>
         <p:txBody>
           <a:bodyPr/>
-          <a:p/>
+          <a:lstStyle/>
+          <a:p>
+            <a:endParaRPr/>
+          </a:p>
         </p:txBody>
       </p:sp>
       <p:sp>
@@ -20522,7 +14530,10 @@
         </p:spPr>
         <p:txBody>
           <a:bodyPr/>
-          <a:p/>
+          <a:lstStyle/>
+          <a:p>
+            <a:endParaRPr/>
+          </a:p>
         </p:txBody>
       </p:sp>
       <p:sp>
@@ -20683,7 +14694,10 @@
         </p:spPr>
         <p:txBody>
           <a:bodyPr/>
-          <a:p/>
+          <a:lstStyle/>
+          <a:p>
+            <a:endParaRPr/>
+          </a:p>
         </p:txBody>
       </p:sp>
       <p:sp>
@@ -20707,7 +14721,10 @@
         </p:spPr>
         <p:txBody>
           <a:bodyPr/>
-          <a:p/>
+          <a:lstStyle/>
+          <a:p>
+            <a:endParaRPr/>
+          </a:p>
         </p:txBody>
       </p:sp>
       <p:sp>
@@ -20774,7 +14791,10 @@
         </p:spPr>
         <p:txBody>
           <a:bodyPr/>
-          <a:p/>
+          <a:lstStyle/>
+          <a:p>
+            <a:endParaRPr/>
+          </a:p>
         </p:txBody>
       </p:sp>
       <p:sp>
@@ -20891,7 +14911,10 @@
         </p:spPr>
         <p:txBody>
           <a:bodyPr/>
-          <a:p/>
+          <a:lstStyle/>
+          <a:p>
+            <a:endParaRPr/>
+          </a:p>
         </p:txBody>
       </p:sp>
       <p:sp>
@@ -21008,7 +15031,10 @@
         </p:spPr>
         <p:txBody>
           <a:bodyPr/>
-          <a:p/>
+          <a:lstStyle/>
+          <a:p>
+            <a:endParaRPr/>
+          </a:p>
         </p:txBody>
       </p:sp>
       <p:sp>
@@ -21125,7 +15151,10 @@
         </p:spPr>
         <p:txBody>
           <a:bodyPr/>
-          <a:p/>
+          <a:lstStyle/>
+          <a:p>
+            <a:endParaRPr/>
+          </a:p>
         </p:txBody>
       </p:sp>
       <p:sp>
@@ -21242,7 +15271,10 @@
         </p:spPr>
         <p:txBody>
           <a:bodyPr/>
-          <a:p/>
+          <a:lstStyle/>
+          <a:p>
+            <a:endParaRPr/>
+          </a:p>
         </p:txBody>
       </p:sp>
       <p:sp>
@@ -21359,7 +15391,10 @@
         </p:spPr>
         <p:txBody>
           <a:bodyPr/>
-          <a:p/>
+          <a:lstStyle/>
+          <a:p>
+            <a:endParaRPr/>
+          </a:p>
         </p:txBody>
       </p:sp>
       <p:sp>
@@ -21476,7 +15511,10 @@
         </p:spPr>
         <p:txBody>
           <a:bodyPr/>
-          <a:p/>
+          <a:lstStyle/>
+          <a:p>
+            <a:endParaRPr/>
+          </a:p>
         </p:txBody>
       </p:sp>
       <p:sp>
@@ -21593,7 +15631,10 @@
         </p:spPr>
         <p:txBody>
           <a:bodyPr/>
-          <a:p/>
+          <a:lstStyle/>
+          <a:p>
+            <a:endParaRPr/>
+          </a:p>
         </p:txBody>
       </p:sp>
       <p:sp>
@@ -21700,7 +15741,10 @@
         </p:spPr>
         <p:txBody>
           <a:bodyPr/>
-          <a:p/>
+          <a:lstStyle/>
+          <a:p>
+            <a:endParaRPr/>
+          </a:p>
         </p:txBody>
       </p:sp>
       <p:sp>
@@ -21733,7 +15777,7 @@
                   <a:srgbClr val="64748B"/>
                 </a:solidFill>
               </a:rPr>
-              <a:t>9 / 18</a:t>
+              <a:t>9 / 15</a:t>
             </a:r>
             <a:endParaRPr lang="en-US" sz="900" dirty="0"/>
           </a:p>
@@ -21799,7 +15843,10 @@
         </p:spPr>
         <p:txBody>
           <a:bodyPr/>
-          <a:p/>
+          <a:lstStyle/>
+          <a:p>
+            <a:endParaRPr/>
+          </a:p>
         </p:txBody>
       </p:sp>
       <p:sp>
@@ -23932,7 +17979,7 @@
                   <a:srgbClr val="64748B"/>
                 </a:solidFill>
               </a:rPr>
-              <a:t>Data Generator (02_TransactionData.sql): Also includes Structure (5) &amp; Activity (5) lookup tables. 1,002 taxpayers, 4 years (2020–2023), 99.8% filing coverage, 58,813 records. Verified: 10 FKs, 19 CHECK constraints, 37 indexes, 0 orphans, 0 NULLs (see Source Database Verification document).</a:t>
+              <a:t>Data Generator (02_TransactionData.sql): Also includes Structure (5) &amp; Activity (5) lookup tables. 1,000 taxpayers, 4 years (2020–2023), 99.8% filing coverage, 58,813 records. Verified: 10 FKs, 19 CHECK constraints, 37 indexes, 0 orphans, 0 NULLs (see Source Database Verification document).</a:t>
             </a:r>
             <a:endParaRPr lang="en-US" sz="1000" dirty="0"/>
           </a:p>

--- a/Documents/Final_Presentation.pptx
+++ b/Documents/Final_Presentation.pptx
@@ -5,7 +5,7 @@
     <p:sldMasterId id="2147483648" r:id="rId1"/>
   </p:sldMasterIdLst>
   <p:notesMasterIdLst>
-    <p:notesMasterId r:id="rId20"/>
+    <p:notesMasterId r:id="rId15"/>
   </p:notesMasterIdLst>
   <p:sldIdLst>
     <p:sldId id="256" r:id="rId2"/>
@@ -18,11 +18,9 @@
     <p:sldId id="263" r:id="rId9"/>
     <p:sldId id="264" r:id="rId10"/>
     <p:sldId id="265" r:id="rId11"/>
-    <p:sldId id="269" r:id="rId15"/>
-    <p:sldId id="270" r:id="rId16"/>
-    <p:sldId id="271" r:id="rId17"/>
-    <p:sldId id="272" r:id="rId18"/>
-    <p:sldId id="273" r:id="rId19"/>
+    <p:sldId id="271" r:id="rId12"/>
+    <p:sldId id="272" r:id="rId13"/>
+    <p:sldId id="273" r:id="rId14"/>
   </p:sldIdLst>
   <p:sldSz cx="9144000" cy="5143500" type="screen16x9"/>
   <p:notesSz cx="5143500" cy="9144000"/>
@@ -732,10 +730,10 @@
           <a:p>
             <a:r>
               <a:rPr lang="en-US" dirty="0"/>
-              <a:t>This slide maps each of our 4 key challenges to concrete POC evidence. Schema Rigidity: adding SAT_Taxpayer_RiskLevel requires zero modifications to existing objects, detailed in our Implementation Scenarios document.
-Historical Tracking: Satellites maintain complete insert-only history, no destructive updates. Every change is a new row.
-ETL Control: 49-step pipeline in 120.9 seconds with per-step error isolation. If step 23 fails, steps 1-22 are preserved.
-Business Rules: Silver layer derived attributes like ComplianceScore are isolated from Bronze raw data.</a:t>
+              <a:t>This slide maps each of our 4 key challenges to concrete POC evidence. Schema Rigidity: adding SAT_Taxpayer_Contact requires zero modifications to existing 23 objects, as demonstrated in POC 1.
+Historical Tracking: Satellites maintain complete insert-only history with no destructive updates. Every change creates a new row with hash diff detection, demonstrated in POC 2.
+ETL Control: 49-step pipeline with per-step error isolation. If a step fails, all prior steps are preserved and only the failed step needs re-execution, demonstrated in POC 3.
+Business Rules: Silver layer derived attributes like ComplianceScore are isolated from Bronze raw data, demonstrated in POC 4.</a:t>
             </a:r>
           </a:p>
         </p:txBody>
@@ -776,7 +774,7 @@
 </p:notes>
 </file>
 
-<file path=ppt/notesSlides/notesSlide14.xml><?xml version="1.0" encoding="utf-8"?>
+<file path=ppt/notesSlides/notesSlide11.xml><?xml version="1.0" encoding="utf-8"?>
 <p:notes xmlns:a="http://schemas.openxmlformats.org/drawingml/2006/main" xmlns:r="http://schemas.openxmlformats.org/officeDocument/2006/relationships" xmlns:p="http://schemas.openxmlformats.org/presentationml/2006/main">
   <p:cSld>
     <p:spTree>
@@ -822,10 +820,8 @@
           <a:p>
             <a:r>
               <a:rPr lang="en-US" dirty="0"/>
-              <a:t>Three key discussion insights — all empirically verified on our GCP VM with SSMS screenshot evidence.
-First, Flexibility and Scalability: we created SAT_Taxpayer_RiskLevel with RiskLevel, RiskScore, and AssessmentDate columns. After loading 10 risk records, we verified all 23 existing Bronze objects had identical create_date and modify_date — proving zero impact on existing structures. The new Satellite was immediately queryable via LEFT JOIN with existing SAT_Taxpayer.
-Second, Materialized Views: we implemented vw_GoldMonthlyRevenue with SCHEMABINDING and a unique clustered index. Baseline complex query measured 73ms elapsed. With the NOEXPAND hint, it dropped to 34ms — a verified 2.1x speedup. This is less than the projected 4-6x because our POC has only 38,491 fact records; with production-scale millions of records, the improvement scales proportionally.
-Third, Early Arriving Facts: we tested with TAX-2026-EARLY. Hub was created at 06:40:14 with only the business key and zero Satellites. The Link to Declaration 99999 loaded at 06:40:15 — no Satellite data needed. Then 263 seconds later, the SAT_Taxpayer record arrived as a simple INSERT at 06:44:37. The 4-step chronological timeline proves DV2 handles this naturally — zero placeholders, zero UPDATEs, zero reconciliation. Full evidence in our Implementation Scenarios companion document.</a:t>
+              <a:t>Key achievements: complete 4-layer pipeline with 67 objects and 60 SSIS packages across 6 databases. Full and incremental loading validated through POC demonstrations. All 4 challenges addressed with implementation evidence. Performance benchmarking and scalability analysis identified as future work. Three companion documents provide full reproducibility.
+Three companion documents submitted: [32] Implementation Scenarios with verified SSMS screenshots for Flexibility (23/23 objects unchanged), Materialized Views (73ms to 34ms, 2.1x speedup), and Early Arriving Facts (263-second Hub-to-SAT delay, zero UPDATEs). [33] Performance Benchmarks Verification with reproducible SQL scripts and 14-point checklist. [34] Source Database Verification with 12-point checklist, all passing.</a:t>
             </a:r>
           </a:p>
         </p:txBody>
@@ -847,7 +843,7 @@
           <a:p>
             <a:fld id="{F7021451-1387-4CA6-816F-3879F97B5CBC}" type="slidenum">
               <a:rPr lang="en-US"/>
-              <a:t>14</a:t>
+              <a:t>11</a:t>
             </a:fld>
             <a:endParaRPr lang="en-US"/>
           </a:p>
@@ -866,7 +862,7 @@
 </p:notes>
 </file>
 
-<file path=ppt/notesSlides/notesSlide15.xml><?xml version="1.0" encoding="utf-8"?>
+<file path=ppt/notesSlides/notesSlide12.xml><?xml version="1.0" encoding="utf-8"?>
 <p:notes xmlns:a="http://schemas.openxmlformats.org/drawingml/2006/main" xmlns:r="http://schemas.openxmlformats.org/officeDocument/2006/relationships" xmlns:p="http://schemas.openxmlformats.org/presentationml/2006/main">
   <p:cSld>
     <p:spTree>
@@ -912,11 +908,9 @@
           <a:p>
             <a:r>
               <a:rPr lang="en-US" dirty="0"/>
-              <a:t>Four validity threats addressed. Internal: all 49 steps verified with row counts, hash key verification, zero data loss. Benchmarks averaged over 5 runs.
-External: simulated data verified with 12-point checklist in companion document. Real-world data would add complexity.
-Construct: ETL time, query latency, scalability, and POC assessment are standard DV2 metrics.
-Conclusion Validity: benchmarks report single-run timings without standard deviation or confidence intervals; GCP shared-core CPU may introduce timing variability.
-Conclusion: fully reproducible via Technical Implementation Guide and SQL scripts in appendices.</a:t>
+              <a:t>Three categories of future work. Short-term: integrate real GDT data, implement RBAC security, add Power BI dashboards. Medium-term: real-time CDC for near-real-time updates, Big Data scaling with columnstore indexes, implement indexed views.
+Long-term: multi-source integration with customs and business registration, machine learning for fraud detection, cloud migration to Azure SQL.
+Methodological priority: controlled experiment in production GDT environment with real data and user acceptance testing.</a:t>
             </a:r>
           </a:p>
         </p:txBody>
@@ -938,7 +932,7 @@
           <a:p>
             <a:fld id="{F7021451-1387-4CA6-816F-3879F97B5CBC}" type="slidenum">
               <a:rPr lang="en-US"/>
-              <a:t>15</a:t>
+              <a:t>12</a:t>
             </a:fld>
             <a:endParaRPr lang="en-US"/>
           </a:p>
@@ -957,7 +951,7 @@
 </p:notes>
 </file>
 
-<file path=ppt/notesSlides/notesSlide16.xml><?xml version="1.0" encoding="utf-8"?>
+<file path=ppt/notesSlides/notesSlide13.xml><?xml version="1.0" encoding="utf-8"?>
 <p:notes xmlns:a="http://schemas.openxmlformats.org/drawingml/2006/main" xmlns:r="http://schemas.openxmlformats.org/officeDocument/2006/relationships" xmlns:p="http://schemas.openxmlformats.org/presentationml/2006/main">
   <p:cSld>
     <p:spTree>
@@ -1003,8 +997,9 @@
           <a:p>
             <a:r>
               <a:rPr lang="en-US" dirty="0"/>
-              <a:t>Key achievements: complete 4-layer pipeline with 67 objects and 60 SSIS packages processing 336,677 records in 120.9 seconds. Gold queries 1.03x to 8.3x faster than raw Bronze. ETL scales linearly at approximately 2,200 records per second. All 4 challenges addressed with implementation evidence.
-Three companion documents submitted: [32] Implementation Scenarios with verified SSMS screenshots for Flexibility (23/23 objects unchanged), Materialized Views (73ms to 34ms, 2.1x speedup), and Early Arriving Facts (263-second Hub-to-SAT delay, zero UPDATEs). [33] Performance Benchmarks Verification with reproducible SQL scripts and 14-point checklist. [34] Source Database Verification with 12-point checklist, all passing.</a:t>
+              <a:t>Thank you for your attention. I am ready for questions.
+Key numbers: 67 objects, 60 SSIS packages, 49 ETL steps across 6 databases, 4 POC demonstrations validating all challenges, 12 source database verification checks all passed, 3 companion documents for full reproducibility.
+Companion documents submitted: [32] Implementation Scenarios (13 pages, 12 SSMS screenshots, verified results for Flexibility, Materialized Views, Early Arriving Facts), [33] Performance Benchmarks Verification (13 pages, reproducible SQL scripts, 14-point checklist), [34] Source Database Verification (8 pages, 12-point checklist). All SQL scripts and screenshots are independently reproducible on the GCP VM.</a:t>
             </a:r>
           </a:p>
         </p:txBody>
@@ -1026,185 +1021,7 @@
           <a:p>
             <a:fld id="{F7021451-1387-4CA6-816F-3879F97B5CBC}" type="slidenum">
               <a:rPr lang="en-US"/>
-              <a:t>16</a:t>
-            </a:fld>
-            <a:endParaRPr lang="en-US"/>
-          </a:p>
-        </p:txBody>
-      </p:sp>
-    </p:spTree>
-    <p:extLst>
-      <p:ext uri="{BB962C8B-B14F-4D97-AF65-F5344CB8AC3E}">
-        <p14:creationId xmlns:p14="http://schemas.microsoft.com/office/powerpoint/2010/main" val="1024086991"/>
-      </p:ext>
-    </p:extLst>
-  </p:cSld>
-  <p:clrMapOvr>
-    <a:masterClrMapping/>
-  </p:clrMapOvr>
-</p:notes>
-</file>
-
-<file path=ppt/notesSlides/notesSlide17.xml><?xml version="1.0" encoding="utf-8"?>
-<p:notes xmlns:a="http://schemas.openxmlformats.org/drawingml/2006/main" xmlns:r="http://schemas.openxmlformats.org/officeDocument/2006/relationships" xmlns:p="http://schemas.openxmlformats.org/presentationml/2006/main">
-  <p:cSld>
-    <p:spTree>
-      <p:nvGrpSpPr>
-        <p:cNvPr id="1" name=""/>
-        <p:cNvGrpSpPr/>
-        <p:nvPr/>
-      </p:nvGrpSpPr>
-      <p:grpSpPr>
-        <a:xfrm>
-          <a:off x="0" y="0"/>
-          <a:ext cx="0" cy="0"/>
-          <a:chOff x="0" y="0"/>
-          <a:chExt cx="0" cy="0"/>
-        </a:xfrm>
-      </p:grpSpPr>
-      <p:sp>
-        <p:nvSpPr>
-          <p:cNvPr id="2" name="Slide Image Placeholder 1"/>
-          <p:cNvSpPr>
-            <a:spLocks noGrp="1" noRot="1" noChangeAspect="1"/>
-          </p:cNvSpPr>
-          <p:nvPr>
-            <p:ph type="sldImg"/>
-          </p:nvPr>
-        </p:nvSpPr>
-        <p:spPr/>
-      </p:sp>
-      <p:sp>
-        <p:nvSpPr>
-          <p:cNvPr id="3" name="Notes Placeholder 2"/>
-          <p:cNvSpPr>
-            <a:spLocks noGrp="1"/>
-          </p:cNvSpPr>
-          <p:nvPr>
-            <p:ph type="body" idx="1"/>
-          </p:nvPr>
-        </p:nvSpPr>
-        <p:spPr/>
-        <p:txBody>
-          <a:bodyPr/>
-          <a:lstStyle/>
-          <a:p>
-            <a:r>
-              <a:rPr lang="en-US" dirty="0"/>
-              <a:t>Three categories of future work. Short-term: integrate real GDT data, implement RBAC security, add Power BI dashboards. Medium-term: real-time CDC for near-real-time updates, Big Data scaling with columnstore indexes, implement indexed views.
-Long-term: multi-source integration with customs and business registration, machine learning for fraud detection, cloud migration to Azure SQL.
-Methodological priority: controlled experiment in production GDT environment with real data and user acceptance testing.</a:t>
-            </a:r>
-          </a:p>
-        </p:txBody>
-      </p:sp>
-      <p:sp>
-        <p:nvSpPr>
-          <p:cNvPr id="4" name="Slide Number Placeholder 3"/>
-          <p:cNvSpPr>
-            <a:spLocks noGrp="1"/>
-          </p:cNvSpPr>
-          <p:nvPr>
-            <p:ph type="sldNum" sz="quarter" idx="10"/>
-          </p:nvPr>
-        </p:nvSpPr>
-        <p:spPr/>
-        <p:txBody>
-          <a:bodyPr/>
-          <a:lstStyle/>
-          <a:p>
-            <a:fld id="{F7021451-1387-4CA6-816F-3879F97B5CBC}" type="slidenum">
-              <a:rPr lang="en-US"/>
-              <a:t>17</a:t>
-            </a:fld>
-            <a:endParaRPr lang="en-US"/>
-          </a:p>
-        </p:txBody>
-      </p:sp>
-    </p:spTree>
-    <p:extLst>
-      <p:ext uri="{BB962C8B-B14F-4D97-AF65-F5344CB8AC3E}">
-        <p14:creationId xmlns:p14="http://schemas.microsoft.com/office/powerpoint/2010/main" val="1024086991"/>
-      </p:ext>
-    </p:extLst>
-  </p:cSld>
-  <p:clrMapOvr>
-    <a:masterClrMapping/>
-  </p:clrMapOvr>
-</p:notes>
-</file>
-
-<file path=ppt/notesSlides/notesSlide18.xml><?xml version="1.0" encoding="utf-8"?>
-<p:notes xmlns:a="http://schemas.openxmlformats.org/drawingml/2006/main" xmlns:r="http://schemas.openxmlformats.org/officeDocument/2006/relationships" xmlns:p="http://schemas.openxmlformats.org/presentationml/2006/main">
-  <p:cSld>
-    <p:spTree>
-      <p:nvGrpSpPr>
-        <p:cNvPr id="1" name=""/>
-        <p:cNvGrpSpPr/>
-        <p:nvPr/>
-      </p:nvGrpSpPr>
-      <p:grpSpPr>
-        <a:xfrm>
-          <a:off x="0" y="0"/>
-          <a:ext cx="0" cy="0"/>
-          <a:chOff x="0" y="0"/>
-          <a:chExt cx="0" cy="0"/>
-        </a:xfrm>
-      </p:grpSpPr>
-      <p:sp>
-        <p:nvSpPr>
-          <p:cNvPr id="2" name="Slide Image Placeholder 1"/>
-          <p:cNvSpPr>
-            <a:spLocks noGrp="1" noRot="1" noChangeAspect="1"/>
-          </p:cNvSpPr>
-          <p:nvPr>
-            <p:ph type="sldImg"/>
-          </p:nvPr>
-        </p:nvSpPr>
-        <p:spPr/>
-      </p:sp>
-      <p:sp>
-        <p:nvSpPr>
-          <p:cNvPr id="3" name="Notes Placeholder 2"/>
-          <p:cNvSpPr>
-            <a:spLocks noGrp="1"/>
-          </p:cNvSpPr>
-          <p:nvPr>
-            <p:ph type="body" idx="1"/>
-          </p:nvPr>
-        </p:nvSpPr>
-        <p:spPr/>
-        <p:txBody>
-          <a:bodyPr/>
-          <a:lstStyle/>
-          <a:p>
-            <a:r>
-              <a:rPr lang="en-US" dirty="0"/>
-              <a:t>Thank you for your attention. I am ready for questions.
-Key numbers: 67 objects, 60 SSIS packages, 49 ETL steps, 336,677 records in 120.9 seconds, Gold queries 1.03x-8.3x faster, linear scalability at 2,200 records/second, 12 verification checks all passed.
-Companion documents submitted: [32] Implementation Scenarios (13 pages, 12 SSMS screenshots, verified results for Flexibility, Materialized Views, Early Arriving Facts), [33] Performance Benchmarks Verification (13 pages, reproducible SQL scripts, 14-point checklist), [34] Source Database Verification (8 pages, 12-point checklist). All SQL scripts and screenshots are independently reproducible on the GCP VM.</a:t>
-            </a:r>
-          </a:p>
-        </p:txBody>
-      </p:sp>
-      <p:sp>
-        <p:nvSpPr>
-          <p:cNvPr id="4" name="Slide Number Placeholder 3"/>
-          <p:cNvSpPr>
-            <a:spLocks noGrp="1"/>
-          </p:cNvSpPr>
-          <p:nvPr>
-            <p:ph type="sldNum" sz="quarter" idx="10"/>
-          </p:nvPr>
-        </p:nvSpPr>
-        <p:spPr/>
-        <p:txBody>
-          <a:bodyPr/>
-          <a:lstStyle/>
-          <a:p>
-            <a:fld id="{F7021451-1387-4CA6-816F-3879F97B5CBC}" type="slidenum">
-              <a:rPr lang="en-US"/>
-              <a:t>18</a:t>
+              <a:t>13</a:t>
             </a:fld>
             <a:endParaRPr lang="en-US"/>
           </a:p>
@@ -1358,7 +1175,7 @@
               <a:rPr lang="en-US" dirty="0"/>
               <a:t>Cambodia's GDT is undergoing digital transformation with growing data volumes. Traditional approaches have limitations: Kimball's star schema is rigid — regulatory changes require costly schema modifications. Inmon's 3NF approach produces complex ETL and slow analytical queries due to many joins.
 We identified 4 key challenges: schema rigidity when regulations change, limited audit trails, monolithic ETL with no error recovery, and no separation of raw data from business rules.
-Data Vault 2.0 addresses all 4 challenges through its hub-satellite-link architecture. Our study has 6 objectives, including building the complete 4-layer pipeline, ETL control framework, performance benchmarks, and two companion documents for reproducibility and verification.</a:t>
+Data Vault 2.0 addresses all 4 challenges through its hub-satellite-link architecture. Our study has 6 objectives, including building the complete 4-layer pipeline, ETL control framework, POC evaluation, and two companion documents for reproducibility and verification.</a:t>
             </a:r>
           </a:p>
         </p:txBody>
@@ -1446,7 +1263,7 @@
             <a:r>
               <a:rPr lang="en-US" dirty="0"/>
               <a:t>The research gap is clear: most Data Vault 2.0 studies are theoretical or limited to specific domains. No published study provides an end-to-end DV2 + Medallion implementation for government tax administration.
-Our 5 contributions: C1 is the first complete 4-layer implementation with 67 objects and 60 SSIS packages. C2 provides integrated ETL control with batch and step-level logging. C3 delivers measurable performance benchmarks. C4 is POC evaluation addressing all 4 challenges with implementation evidence. C5 provides a reproducible Technical Implementation Guide.</a:t>
+Our 5 contributions: C1 is the first complete 4-layer implementation with 67 objects and 60 SSIS packages. C2 provides integrated ETL control with batch and step-level logging. C3 is POC evaluation addressing all 4 challenges with measurable before/after evidence on the Cambodia tax domain. C4 provides a reproducible Technical Implementation Guide for SSIS deployment. C5 provides Source Database Verification plus companion documents for full reproducibility.</a:t>
             </a:r>
           </a:p>
         </p:txBody>
@@ -1533,7 +1350,7 @@
           <a:p>
             <a:r>
               <a:rPr lang="en-US" dirty="0"/>
-              <a:t>Our theoretical foundation rests on three pillars. First, Linstedt and Olschimke's 2016 Data Vault 2.0 methodology, which defines the hub-satellite-link architecture, hash key generation using SHA-256, and insert-only loading patterns.
+              <a:t>Our theoretical foundation rests on three pillars. First, Linstedt and Olschimke's 2015 Data Vault 2.0 methodology, which defines the hub-satellite-link architecture, hash key generation using SHA-256, and insert-only loading patterns.
 Second, Armbrust et al.'s 2021 Medallion Architecture with Bronze, Silver, and Gold layers providing progressive data refinement. We adapted this for SQL Server by mapping Bronze to Raw Vault, Silver to Business Vault, and Gold to Star Schema.
 Third, Kimball's 34 ETL subsystems framework guides our control architecture. We combine this with DAMA data quality dimensions and watermark-based incremental loading using the MAX ModifiedDate pattern. Our contribution is integrating all three into a single framework with per-step error isolation.</a:t>
             </a:r>
@@ -1622,7 +1439,7 @@
           <a:p>
             <a:r>
               <a:rPr lang="en-US" dirty="0"/>
-              <a:t>This table compares 6 related studies. Yessad and Labiod in 2016 compared Inmon, Kimball, and Data Vault theoretically but had no implementation. Schafer et al. in 2020 implemented DV2 in healthcare but without Medallion Architecture. Giebler et al. in 2021 worked with big data on Hadoop. Vines in 2024 is the most recent using TPC-DS benchmarks.
+              <a:t>This table compares 4 key related studies plus our research. Yessad and Labiod in 2016 compared Inmon, Kimball, and Data Vault theoretically but had no implementation. Naamane and Jovanovic in 2016 provided empirical comparison with telecom data but without medallion architecture or a Gold layer. Vines in 2024 is the most recent, using TPC-DS benchmarks for performance evaluation but without domain-specific application. Singh in 2025 analyzed architectural resilience but remained theoretical with no hands-on implementation.
 Our study is the first to combine DV2 + Medallion + ETL Control + Performance Benchmarks in a government tax domain. The key gap: no published end-to-end DV2 + Medallion for government tax administration.</a:t>
             </a:r>
           </a:p>
@@ -1799,7 +1616,7 @@
           <a:p>
             <a:r>
               <a:rPr lang="en-US" dirty="0"/>
-              <a:t>Detailed object breakdown across 4 layers. Staging: 9 tables with full and incremental loading. Bronze: 9 Hubs for business keys, 10 Satellites for descriptive attributes with hash diff change detection, 5 Links for relationships.
+              <a:t>Detailed object breakdown across 4 layers. Staging: 9 tables with full and incremental loading. Bronze: 9 Hubs for business keys, 9 Satellites for descriptive attributes with hash diff change detection, 5 Links for relationships.
 Silver: 2 PIT tables for Point-In-Time lookups, 1 Bridge table, 3 Business Vault objects including ComplianceScore. Gold: 6 SCD Type 2 dimensions, 3 fact tables, 2 analytical views.
 Total: 67 objects across 4 layers, 49 automated steps orchestrated by ETL Control Framework.</a:t>
             </a:r>
@@ -1890,7 +1707,7 @@
               <a:rPr lang="en-US" dirty="0"/>
               <a:t>The source database TaxSystemDB contains 9 tables in 3 categories: 3 lookup tables for categories, structures, and activities; 3 reference tables for taxpayers, owners, and officers; and 3 transaction tables for monthly declarations, annual declarations, and payments.
 The data generator script 02_TransactionData.sql produces 1,002 taxpayers across 5 categories, 4 years of data from 2020 to 2023, with 99.8% filing coverage. Total records are 58,813.
-This data has been independently verified in our Source Database Verification companion document with a 12-point checklist: 10 foreign keys, 19 CHECK constraints, 37 indexes, zero orphan records across 7 relationships, zero NULLs on 8 critical columns, and unique TaxID verification.</a:t>
+This data has been independently verified in our Source Database Verification companion document with a 12-point checklist: 10 foreign keys, 19 CHECK constraints, 35 indexes, zero orphan records across 7 relationships, zero NULLs on 8 critical columns, and unique TaxID verification.</a:t>
             </a:r>
           </a:p>
         </p:txBody>
@@ -2744,7 +2561,7 @@
                   <a:srgbClr val="64748B"/>
                 </a:solidFill>
               </a:rPr>
-              <a:t>10 / 15</a:t>
+              <a:t>10 / 13</a:t>
             </a:r>
             <a:endParaRPr lang="en-US" sz="900" dirty="0"/>
           </a:p>
@@ -3513,1545 +3330,6 @@
 </file>
 
 <file path=ppt/slides/slide11.xml><?xml version="1.0" encoding="utf-8"?>
-<p:sld xmlns:a="http://schemas.openxmlformats.org/drawingml/2006/main" xmlns:r="http://schemas.openxmlformats.org/officeDocument/2006/relationships" xmlns:p="http://schemas.openxmlformats.org/presentationml/2006/main">
-  <p:cSld name="Slide 14">
-    <p:bg>
-      <p:bgPr>
-        <a:solidFill>
-          <a:srgbClr val="F7FAFA"/>
-        </a:solidFill>
-        <a:effectLst/>
-      </p:bgPr>
-    </p:bg>
-    <p:spTree>
-      <p:nvGrpSpPr>
-        <p:cNvPr id="1" name=""/>
-        <p:cNvGrpSpPr/>
-        <p:nvPr/>
-      </p:nvGrpSpPr>
-      <p:grpSpPr>
-        <a:xfrm>
-          <a:off x="0" y="0"/>
-          <a:ext cx="0" cy="0"/>
-          <a:chOff x="0" y="0"/>
-          <a:chExt cx="0" cy="0"/>
-        </a:xfrm>
-      </p:grpSpPr>
-      <p:sp>
-        <p:nvSpPr>
-          <p:cNvPr id="2" name="Shape 0"/>
-          <p:cNvSpPr/>
-          <p:nvPr/>
-        </p:nvSpPr>
-        <p:spPr>
-          <a:xfrm>
-            <a:off x="0" y="0"/>
-            <a:ext cx="54864" cy="5143500"/>
-          </a:xfrm>
-          <a:prstGeom prst="rect">
-            <a:avLst/>
-          </a:prstGeom>
-          <a:solidFill>
-            <a:srgbClr val="2A9D8F"/>
-          </a:solidFill>
-          <a:ln/>
-        </p:spPr>
-        <p:txBody>
-          <a:bodyPr/>
-          <a:lstStyle/>
-          <a:p>
-            <a:endParaRPr/>
-          </a:p>
-        </p:txBody>
-      </p:sp>
-      <p:sp>
-        <p:nvSpPr>
-          <p:cNvPr id="3" name="Text 1"/>
-          <p:cNvSpPr/>
-          <p:nvPr/>
-        </p:nvSpPr>
-        <p:spPr>
-          <a:xfrm>
-            <a:off x="8046720" y="4754880"/>
-            <a:ext cx="914400" cy="274320"/>
-          </a:xfrm>
-          <a:prstGeom prst="rect">
-            <a:avLst/>
-          </a:prstGeom>
-          <a:noFill/>
-          <a:ln/>
-        </p:spPr>
-        <p:txBody>
-          <a:bodyPr wrap="square" rtlCol="0" anchor="ctr"/>
-          <a:lstStyle/>
-          <a:p>
-            <a:pPr marL="0" indent="0" algn="r">
-              <a:buNone/>
-            </a:pPr>
-            <a:r>
-              <a:rPr lang="en-US" sz="900" dirty="0">
-                <a:solidFill>
-                  <a:srgbClr val="64748B"/>
-                </a:solidFill>
-              </a:rPr>
-              <a:t>11 / 15</a:t>
-            </a:r>
-            <a:endParaRPr lang="en-US" sz="900" dirty="0"/>
-          </a:p>
-        </p:txBody>
-      </p:sp>
-      <p:sp>
-        <p:nvSpPr>
-          <p:cNvPr id="4" name="Text 2"/>
-          <p:cNvSpPr/>
-          <p:nvPr/>
-        </p:nvSpPr>
-        <p:spPr>
-          <a:xfrm>
-            <a:off x="457200" y="182880"/>
-            <a:ext cx="8229600" cy="502920"/>
-          </a:xfrm>
-          <a:prstGeom prst="rect">
-            <a:avLst/>
-          </a:prstGeom>
-          <a:noFill/>
-          <a:ln/>
-        </p:spPr>
-        <p:txBody>
-          <a:bodyPr wrap="square" rtlCol="0" anchor="ctr"/>
-          <a:lstStyle/>
-          <a:p>
-            <a:pPr marL="0" indent="0">
-              <a:buNone/>
-            </a:pPr>
-            <a:r>
-              <a:rPr lang="en-US" sz="2200" b="1" dirty="0">
-                <a:solidFill>
-                  <a:srgbClr val="1B3A5C"/>
-                </a:solidFill>
-                <a:latin typeface="Georgia" pitchFamily="34" charset="0"/>
-                <a:ea typeface="Georgia" pitchFamily="34" charset="-122"/>
-                <a:cs typeface="Georgia" pitchFamily="34" charset="-120"/>
-              </a:rPr>
-              <a:t>Discussion — Key Insights</a:t>
-            </a:r>
-            <a:endParaRPr lang="en-US" sz="2200" dirty="0"/>
-          </a:p>
-        </p:txBody>
-      </p:sp>
-      <p:sp>
-        <p:nvSpPr>
-          <p:cNvPr id="5" name="Shape 3"/>
-          <p:cNvSpPr/>
-          <p:nvPr/>
-        </p:nvSpPr>
-        <p:spPr>
-          <a:xfrm>
-            <a:off x="457200" y="731520"/>
-            <a:ext cx="1097280" cy="36576"/>
-          </a:xfrm>
-          <a:prstGeom prst="rect">
-            <a:avLst/>
-          </a:prstGeom>
-          <a:solidFill>
-            <a:srgbClr val="2A9D8F"/>
-          </a:solidFill>
-          <a:ln/>
-        </p:spPr>
-        <p:txBody>
-          <a:bodyPr/>
-          <a:lstStyle/>
-          <a:p>
-            <a:endParaRPr/>
-          </a:p>
-        </p:txBody>
-      </p:sp>
-      <p:sp>
-        <p:nvSpPr>
-          <p:cNvPr id="6" name="Shape 4"/>
-          <p:cNvSpPr/>
-          <p:nvPr/>
-        </p:nvSpPr>
-        <p:spPr>
-          <a:xfrm>
-            <a:off x="274320" y="914400"/>
-            <a:ext cx="2834640" cy="3749040"/>
-          </a:xfrm>
-          <a:prstGeom prst="rect">
-            <a:avLst/>
-          </a:prstGeom>
-          <a:solidFill>
-            <a:srgbClr val="FFFFFF"/>
-          </a:solidFill>
-          <a:ln/>
-          <a:effectLst>
-            <a:outerShdw blurRad="50800" dist="25400" dir="8100000" algn="bl" rotWithShape="0">
-              <a:srgbClr val="000000">
-                <a:alpha val="10000"/>
-              </a:srgbClr>
-            </a:outerShdw>
-          </a:effectLst>
-        </p:spPr>
-        <p:txBody>
-          <a:bodyPr/>
-          <a:lstStyle/>
-          <a:p>
-            <a:endParaRPr/>
-          </a:p>
-        </p:txBody>
-      </p:sp>
-      <p:sp>
-        <p:nvSpPr>
-          <p:cNvPr id="7" name="Shape 5"/>
-          <p:cNvSpPr/>
-          <p:nvPr/>
-        </p:nvSpPr>
-        <p:spPr>
-          <a:xfrm>
-            <a:off x="274320" y="914400"/>
-            <a:ext cx="54864" cy="3749040"/>
-          </a:xfrm>
-          <a:prstGeom prst="rect">
-            <a:avLst/>
-          </a:prstGeom>
-          <a:solidFill>
-            <a:srgbClr val="2A9D8F"/>
-          </a:solidFill>
-          <a:ln/>
-        </p:spPr>
-        <p:txBody>
-          <a:bodyPr/>
-          <a:lstStyle/>
-          <a:p>
-            <a:endParaRPr/>
-          </a:p>
-        </p:txBody>
-      </p:sp>
-      <p:sp>
-        <p:nvSpPr>
-          <p:cNvPr id="8" name="Text 6"/>
-          <p:cNvSpPr/>
-          <p:nvPr/>
-        </p:nvSpPr>
-        <p:spPr>
-          <a:xfrm>
-            <a:off x="411480" y="960120"/>
-            <a:ext cx="2560320" cy="228600"/>
-          </a:xfrm>
-          <a:prstGeom prst="rect">
-            <a:avLst/>
-          </a:prstGeom>
-          <a:noFill/>
-          <a:ln/>
-        </p:spPr>
-        <p:txBody>
-          <a:bodyPr wrap="square" rtlCol="0" anchor="ctr"/>
-          <a:lstStyle/>
-          <a:p>
-            <a:pPr marL="0" indent="0">
-              <a:buNone/>
-            </a:pPr>
-            <a:r>
-              <a:rPr lang="en-US" sz="1100" b="1" dirty="0">
-                <a:solidFill>
-                  <a:srgbClr val="1B3A5C"/>
-                </a:solidFill>
-                <a:latin typeface="Georgia" pitchFamily="34" charset="0"/>
-                <a:ea typeface="Georgia" pitchFamily="34" charset="-122"/>
-                <a:cs typeface="Georgia" pitchFamily="34" charset="-120"/>
-              </a:rPr>
-              <a:t>5.2.5 Flexibility &amp; Scalability</a:t>
-            </a:r>
-            <a:endParaRPr lang="en-US" sz="1100" dirty="0"/>
-          </a:p>
-        </p:txBody>
-      </p:sp>
-      <p:sp>
-        <p:nvSpPr>
-          <p:cNvPr id="9" name="Text 7"/>
-          <p:cNvSpPr/>
-          <p:nvPr/>
-        </p:nvSpPr>
-        <p:spPr>
-          <a:xfrm>
-            <a:off x="411480" y="1280160"/>
-            <a:ext cx="2560320" cy="1645920"/>
-          </a:xfrm>
-          <a:prstGeom prst="rect">
-            <a:avLst/>
-          </a:prstGeom>
-          <a:noFill/>
-          <a:ln/>
-        </p:spPr>
-        <p:txBody>
-          <a:bodyPr wrap="square" rtlCol="0" anchor="ctr"/>
-          <a:lstStyle/>
-          <a:p>
-            <a:pPr marL="342900" indent="-342900">
-              <a:spcAft>
-                <a:spcPts val="500"/>
-              </a:spcAft>
-              <a:buSzPct val="100000"/>
-              <a:buChar char="•"/>
-            </a:pPr>
-            <a:r>
-              <a:rPr lang="en-US" sz="900" dirty="0">
-                <a:solidFill>
-                  <a:srgbClr val="1E293B"/>
-                </a:solidFill>
-              </a:rPr>
-              <a:t>New attributes → add Satellite only (no Hub/Link impact)</a:t>
-            </a:r>
-            <a:endParaRPr lang="en-US" sz="900" dirty="0"/>
-          </a:p>
-          <a:p>
-            <a:pPr marL="342900" indent="-342900">
-              <a:spcAft>
-                <a:spcPts val="500"/>
-              </a:spcAft>
-              <a:buSzPct val="100000"/>
-              <a:buChar char="•"/>
-            </a:pPr>
-            <a:r>
-              <a:rPr lang="en-US" sz="900" dirty="0">
-                <a:solidFill>
-                  <a:srgbClr val="1E293B"/>
-                </a:solidFill>
-              </a:rPr>
-              <a:t>New business rules → modify Silver layer only</a:t>
-            </a:r>
-            <a:endParaRPr lang="en-US" sz="900" dirty="0"/>
-          </a:p>
-          <a:p>
-            <a:pPr marL="342900" indent="-342900">
-              <a:spcAft>
-                <a:spcPts val="500"/>
-              </a:spcAft>
-              <a:buSzPct val="100000"/>
-              <a:buChar char="•"/>
-            </a:pPr>
-            <a:r>
-              <a:rPr lang="en-US" sz="900" dirty="0">
-                <a:solidFill>
-                  <a:srgbClr val="1E293B"/>
-                </a:solidFill>
-              </a:rPr>
-              <a:t>New reporting → add Gold dims/facts independently</a:t>
-            </a:r>
-            <a:endParaRPr lang="en-US" sz="900" dirty="0"/>
-          </a:p>
-          <a:p>
-            <a:pPr marL="342900" indent="-342900">
-              <a:spcAft>
-                <a:spcPts val="500"/>
-              </a:spcAft>
-              <a:buSzPct val="100000"/>
-              <a:buChar char="•"/>
-            </a:pPr>
-            <a:r>
-              <a:rPr lang="en-US" sz="900" b="1" dirty="0">
-                <a:solidFill>
-                  <a:srgbClr val="2A9D8F"/>
-                </a:solidFill>
-              </a:rPr>
-              <a:t>Verified: 23/23 objects UNCHANGED after adding SAT_Taxpayer_RiskLevel</a:t>
-            </a:r>
-            <a:endParaRPr lang="en-US" sz="900" dirty="0"/>
-          </a:p>
-        </p:txBody>
-      </p:sp>
-      <p:sp>
-        <p:nvSpPr>
-          <p:cNvPr id="10" name="Shape 8"/>
-          <p:cNvSpPr/>
-          <p:nvPr/>
-        </p:nvSpPr>
-        <p:spPr>
-          <a:xfrm>
-            <a:off x="411480" y="3931920"/>
-            <a:ext cx="2560320" cy="548640"/>
-          </a:xfrm>
-          <a:prstGeom prst="rect">
-            <a:avLst/>
-          </a:prstGeom>
-          <a:solidFill>
-            <a:srgbClr val="E8F4F2"/>
-          </a:solidFill>
-          <a:ln/>
-        </p:spPr>
-        <p:txBody>
-          <a:bodyPr/>
-          <a:lstStyle/>
-          <a:p>
-            <a:endParaRPr/>
-          </a:p>
-        </p:txBody>
-      </p:sp>
-      <p:sp>
-        <p:nvSpPr>
-          <p:cNvPr id="11" name="Text 9"/>
-          <p:cNvSpPr/>
-          <p:nvPr/>
-        </p:nvSpPr>
-        <p:spPr>
-          <a:xfrm>
-            <a:off x="502920" y="3931920"/>
-            <a:ext cx="2377440" cy="548640"/>
-          </a:xfrm>
-          <a:prstGeom prst="rect">
-            <a:avLst/>
-          </a:prstGeom>
-          <a:noFill/>
-          <a:ln/>
-        </p:spPr>
-        <p:txBody>
-          <a:bodyPr wrap="square" rtlCol="0" anchor="ctr"/>
-          <a:lstStyle/>
-          <a:p>
-            <a:pPr marL="0" indent="0">
-              <a:buNone/>
-            </a:pPr>
-            <a:r>
-              <a:rPr lang="en-US" sz="850" b="1" dirty="0">
-                <a:solidFill>
-                  <a:srgbClr val="2A9D8F"/>
-                </a:solidFill>
-              </a:rPr>
-              <a:t>✓ 10 risk records loaded, zero impact on existing structures</a:t>
-            </a:r>
-            <a:endParaRPr lang="en-US" sz="850" dirty="0"/>
-          </a:p>
-        </p:txBody>
-      </p:sp>
-      <p:sp>
-        <p:nvSpPr>
-          <p:cNvPr id="12" name="Shape 10"/>
-          <p:cNvSpPr/>
-          <p:nvPr/>
-        </p:nvSpPr>
-        <p:spPr>
-          <a:xfrm>
-            <a:off x="3291840" y="914400"/>
-            <a:ext cx="2834640" cy="3749040"/>
-          </a:xfrm>
-          <a:prstGeom prst="rect">
-            <a:avLst/>
-          </a:prstGeom>
-          <a:solidFill>
-            <a:srgbClr val="FFFFFF"/>
-          </a:solidFill>
-          <a:ln/>
-          <a:effectLst>
-            <a:outerShdw blurRad="50800" dist="25400" dir="8100000" algn="bl" rotWithShape="0">
-              <a:srgbClr val="000000">
-                <a:alpha val="10000"/>
-              </a:srgbClr>
-            </a:outerShdw>
-          </a:effectLst>
-        </p:spPr>
-        <p:txBody>
-          <a:bodyPr/>
-          <a:lstStyle/>
-          <a:p>
-            <a:endParaRPr/>
-          </a:p>
-        </p:txBody>
-      </p:sp>
-      <p:sp>
-        <p:nvSpPr>
-          <p:cNvPr id="13" name="Shape 11"/>
-          <p:cNvSpPr/>
-          <p:nvPr/>
-        </p:nvSpPr>
-        <p:spPr>
-          <a:xfrm>
-            <a:off x="3291840" y="914400"/>
-            <a:ext cx="54864" cy="3749040"/>
-          </a:xfrm>
-          <a:prstGeom prst="rect">
-            <a:avLst/>
-          </a:prstGeom>
-          <a:solidFill>
-            <a:srgbClr val="D4A843"/>
-          </a:solidFill>
-          <a:ln/>
-        </p:spPr>
-        <p:txBody>
-          <a:bodyPr/>
-          <a:lstStyle/>
-          <a:p>
-            <a:endParaRPr/>
-          </a:p>
-        </p:txBody>
-      </p:sp>
-      <p:sp>
-        <p:nvSpPr>
-          <p:cNvPr id="14" name="Text 12"/>
-          <p:cNvSpPr/>
-          <p:nvPr/>
-        </p:nvSpPr>
-        <p:spPr>
-          <a:xfrm>
-            <a:off x="3429000" y="960120"/>
-            <a:ext cx="2560320" cy="228600"/>
-          </a:xfrm>
-          <a:prstGeom prst="rect">
-            <a:avLst/>
-          </a:prstGeom>
-          <a:noFill/>
-          <a:ln/>
-        </p:spPr>
-        <p:txBody>
-          <a:bodyPr wrap="square" rtlCol="0" anchor="ctr"/>
-          <a:lstStyle/>
-          <a:p>
-            <a:pPr marL="0" indent="0">
-              <a:buNone/>
-            </a:pPr>
-            <a:r>
-              <a:rPr lang="en-US" sz="1100" b="1" dirty="0">
-                <a:solidFill>
-                  <a:srgbClr val="1B3A5C"/>
-                </a:solidFill>
-                <a:latin typeface="Georgia" pitchFamily="34" charset="0"/>
-                <a:ea typeface="Georgia" pitchFamily="34" charset="-122"/>
-                <a:cs typeface="Georgia" pitchFamily="34" charset="-120"/>
-              </a:rPr>
-              <a:t>5.2.6 Materialized Views</a:t>
-            </a:r>
-            <a:endParaRPr lang="en-US" sz="1100" dirty="0"/>
-          </a:p>
-        </p:txBody>
-      </p:sp>
-      <p:sp>
-        <p:nvSpPr>
-          <p:cNvPr id="15" name="Text 13"/>
-          <p:cNvSpPr/>
-          <p:nvPr/>
-        </p:nvSpPr>
-        <p:spPr>
-          <a:xfrm>
-            <a:off x="3429000" y="1280160"/>
-            <a:ext cx="2560320" cy="1645920"/>
-          </a:xfrm>
-          <a:prstGeom prst="rect">
-            <a:avLst/>
-          </a:prstGeom>
-          <a:noFill/>
-          <a:ln/>
-        </p:spPr>
-        <p:txBody>
-          <a:bodyPr wrap="square" rtlCol="0" anchor="ctr"/>
-          <a:lstStyle/>
-          <a:p>
-            <a:pPr marL="342900" indent="-342900">
-              <a:spcAft>
-                <a:spcPts val="500"/>
-              </a:spcAft>
-              <a:buSzPct val="100000"/>
-              <a:buChar char="•"/>
-            </a:pPr>
-            <a:r>
-              <a:rPr lang="en-US" sz="900" dirty="0">
-                <a:solidFill>
-                  <a:srgbClr val="1E293B"/>
-                </a:solidFill>
-              </a:rPr>
-              <a:t>vw_GoldMonthlyRevenue implemented:</a:t>
-            </a:r>
-            <a:endParaRPr lang="en-US" sz="900" dirty="0"/>
-          </a:p>
-          <a:p>
-            <a:pPr marL="342900" indent="-342900">
-              <a:spcAft>
-                <a:spcPts val="500"/>
-              </a:spcAft>
-              <a:buSzPct val="100000"/>
-              <a:buChar char="•"/>
-            </a:pPr>
-            <a:r>
-              <a:rPr lang="en-US" sz="900" dirty="0">
-                <a:solidFill>
-                  <a:srgbClr val="1E293B"/>
-                </a:solidFill>
-              </a:rPr>
-              <a:t>• Baseline: 73ms elapsed (62ms CPU)</a:t>
-            </a:r>
-            <a:endParaRPr lang="en-US" sz="900" dirty="0"/>
-          </a:p>
-          <a:p>
-            <a:pPr marL="342900" indent="-342900">
-              <a:spcAft>
-                <a:spcPts val="500"/>
-              </a:spcAft>
-              <a:buSzPct val="100000"/>
-              <a:buChar char="•"/>
-            </a:pPr>
-            <a:r>
-              <a:rPr lang="en-US" sz="900" dirty="0">
-                <a:solidFill>
-                  <a:srgbClr val="1E293B"/>
-                </a:solidFill>
-              </a:rPr>
-              <a:t>• NOEXPAND: 34ms elapsed — 2.1× faster</a:t>
-            </a:r>
-            <a:endParaRPr lang="en-US" sz="900" dirty="0"/>
-          </a:p>
-          <a:p>
-            <a:pPr marL="342900" indent="-342900">
-              <a:spcAft>
-                <a:spcPts val="500"/>
-              </a:spcAft>
-              <a:buSzPct val="100000"/>
-              <a:buChar char="•"/>
-            </a:pPr>
-            <a:r>
-              <a:rPr lang="en-US" sz="900" dirty="0">
-                <a:solidFill>
-                  <a:srgbClr val="1E293B"/>
-                </a:solidFill>
-              </a:rPr>
-              <a:t>• SCHEMABINDING + unique clustered index</a:t>
-            </a:r>
-            <a:endParaRPr lang="en-US" sz="900" dirty="0"/>
-          </a:p>
-          <a:p>
-            <a:pPr marL="342900" indent="-342900">
-              <a:spcAft>
-                <a:spcPts val="500"/>
-              </a:spcAft>
-              <a:buSzPct val="100000"/>
-              <a:buChar char="•"/>
-            </a:pPr>
-            <a:r>
-              <a:rPr lang="en-US" sz="900" b="1" dirty="0">
-                <a:solidFill>
-                  <a:srgbClr val="2A9D8F"/>
-                </a:solidFill>
-              </a:rPr>
-              <a:t>Hybrid: indexed views + SPs for cross-DB</a:t>
-            </a:r>
-            <a:endParaRPr lang="en-US" sz="900" dirty="0"/>
-          </a:p>
-        </p:txBody>
-      </p:sp>
-      <p:sp>
-        <p:nvSpPr>
-          <p:cNvPr id="16" name="Shape 14"/>
-          <p:cNvSpPr/>
-          <p:nvPr/>
-        </p:nvSpPr>
-        <p:spPr>
-          <a:xfrm>
-            <a:off x="3429000" y="3931920"/>
-            <a:ext cx="2560320" cy="548640"/>
-          </a:xfrm>
-          <a:prstGeom prst="rect">
-            <a:avLst/>
-          </a:prstGeom>
-          <a:solidFill>
-            <a:srgbClr val="E8F4F2"/>
-          </a:solidFill>
-          <a:ln/>
-        </p:spPr>
-        <p:txBody>
-          <a:bodyPr/>
-          <a:lstStyle/>
-          <a:p>
-            <a:endParaRPr/>
-          </a:p>
-        </p:txBody>
-      </p:sp>
-      <p:sp>
-        <p:nvSpPr>
-          <p:cNvPr id="17" name="Text 15"/>
-          <p:cNvSpPr/>
-          <p:nvPr/>
-        </p:nvSpPr>
-        <p:spPr>
-          <a:xfrm>
-            <a:off x="3520440" y="3931920"/>
-            <a:ext cx="2377440" cy="548640"/>
-          </a:xfrm>
-          <a:prstGeom prst="rect">
-            <a:avLst/>
-          </a:prstGeom>
-          <a:noFill/>
-          <a:ln/>
-        </p:spPr>
-        <p:txBody>
-          <a:bodyPr wrap="square" rtlCol="0" anchor="ctr"/>
-          <a:lstStyle/>
-          <a:p>
-            <a:pPr marL="0" indent="0">
-              <a:buNone/>
-            </a:pPr>
-            <a:r>
-              <a:rPr lang="en-US" sz="850" b="1" dirty="0">
-                <a:solidFill>
-                  <a:srgbClr val="2A9D8F"/>
-                </a:solidFill>
-              </a:rPr>
-              <a:t>✓ Verified 2.1× speedup (73ms→34ms); production: 4×–6× projected</a:t>
-            </a:r>
-            <a:endParaRPr lang="en-US" sz="850" dirty="0"/>
-          </a:p>
-        </p:txBody>
-      </p:sp>
-      <p:sp>
-        <p:nvSpPr>
-          <p:cNvPr id="18" name="Shape 16"/>
-          <p:cNvSpPr/>
-          <p:nvPr/>
-        </p:nvSpPr>
-        <p:spPr>
-          <a:xfrm>
-            <a:off x="6309360" y="914400"/>
-            <a:ext cx="2834640" cy="3749040"/>
-          </a:xfrm>
-          <a:prstGeom prst="rect">
-            <a:avLst/>
-          </a:prstGeom>
-          <a:solidFill>
-            <a:srgbClr val="FFFFFF"/>
-          </a:solidFill>
-          <a:ln/>
-          <a:effectLst>
-            <a:outerShdw blurRad="50800" dist="25400" dir="8100000" algn="bl" rotWithShape="0">
-              <a:srgbClr val="000000">
-                <a:alpha val="10000"/>
-              </a:srgbClr>
-            </a:outerShdw>
-          </a:effectLst>
-        </p:spPr>
-        <p:txBody>
-          <a:bodyPr/>
-          <a:lstStyle/>
-          <a:p>
-            <a:endParaRPr/>
-          </a:p>
-        </p:txBody>
-      </p:sp>
-      <p:sp>
-        <p:nvSpPr>
-          <p:cNvPr id="19" name="Shape 17"/>
-          <p:cNvSpPr/>
-          <p:nvPr/>
-        </p:nvSpPr>
-        <p:spPr>
-          <a:xfrm>
-            <a:off x="6309360" y="914400"/>
-            <a:ext cx="54864" cy="3749040"/>
-          </a:xfrm>
-          <a:prstGeom prst="rect">
-            <a:avLst/>
-          </a:prstGeom>
-          <a:solidFill>
-            <a:srgbClr val="1B3A5C"/>
-          </a:solidFill>
-          <a:ln/>
-        </p:spPr>
-        <p:txBody>
-          <a:bodyPr/>
-          <a:lstStyle/>
-          <a:p>
-            <a:endParaRPr/>
-          </a:p>
-        </p:txBody>
-      </p:sp>
-      <p:sp>
-        <p:nvSpPr>
-          <p:cNvPr id="20" name="Text 18"/>
-          <p:cNvSpPr/>
-          <p:nvPr/>
-        </p:nvSpPr>
-        <p:spPr>
-          <a:xfrm>
-            <a:off x="6446520" y="960120"/>
-            <a:ext cx="2560320" cy="228600"/>
-          </a:xfrm>
-          <a:prstGeom prst="rect">
-            <a:avLst/>
-          </a:prstGeom>
-          <a:noFill/>
-          <a:ln/>
-        </p:spPr>
-        <p:txBody>
-          <a:bodyPr wrap="square" rtlCol="0" anchor="ctr"/>
-          <a:lstStyle/>
-          <a:p>
-            <a:pPr marL="0" indent="0">
-              <a:buNone/>
-            </a:pPr>
-            <a:r>
-              <a:rPr lang="en-US" sz="1100" b="1" dirty="0">
-                <a:solidFill>
-                  <a:srgbClr val="1B3A5C"/>
-                </a:solidFill>
-                <a:latin typeface="Georgia" pitchFamily="34" charset="0"/>
-                <a:ea typeface="Georgia" pitchFamily="34" charset="-122"/>
-                <a:cs typeface="Georgia" pitchFamily="34" charset="-120"/>
-              </a:rPr>
-              <a:t>5.2.7 Early Arriving Facts</a:t>
-            </a:r>
-            <a:endParaRPr lang="en-US" sz="1100" dirty="0"/>
-          </a:p>
-        </p:txBody>
-      </p:sp>
-      <p:sp>
-        <p:nvSpPr>
-          <p:cNvPr id="21" name="Text 19"/>
-          <p:cNvSpPr/>
-          <p:nvPr/>
-        </p:nvSpPr>
-        <p:spPr>
-          <a:xfrm>
-            <a:off x="6446520" y="1280160"/>
-            <a:ext cx="2560320" cy="1645920"/>
-          </a:xfrm>
-          <a:prstGeom prst="rect">
-            <a:avLst/>
-          </a:prstGeom>
-          <a:noFill/>
-          <a:ln/>
-        </p:spPr>
-        <p:txBody>
-          <a:bodyPr wrap="square" rtlCol="0" anchor="ctr"/>
-          <a:lstStyle/>
-          <a:p>
-            <a:pPr marL="342900" indent="-342900">
-              <a:spcAft>
-                <a:spcPts val="500"/>
-              </a:spcAft>
-              <a:buSzPct val="100000"/>
-              <a:buChar char="•"/>
-            </a:pPr>
-            <a:r>
-              <a:rPr lang="en-US" sz="900" dirty="0">
-                <a:solidFill>
-                  <a:srgbClr val="1E293B"/>
-                </a:solidFill>
-              </a:rPr>
-              <a:t>Verified with TAX-2026-EARLY test case:</a:t>
-            </a:r>
-            <a:endParaRPr lang="en-US" sz="900" dirty="0"/>
-          </a:p>
-          <a:p>
-            <a:pPr marL="342900" indent="-342900">
-              <a:spcAft>
-                <a:spcPts val="500"/>
-              </a:spcAft>
-              <a:buSzPct val="100000"/>
-              <a:buChar char="•"/>
-            </a:pPr>
-            <a:r>
-              <a:rPr lang="en-US" sz="900" dirty="0">
-                <a:solidFill>
-                  <a:srgbClr val="1E293B"/>
-                </a:solidFill>
-              </a:rPr>
-              <a:t>1. Hub created 06:40:14 (business key only)</a:t>
-            </a:r>
-            <a:endParaRPr lang="en-US" sz="900" dirty="0"/>
-          </a:p>
-          <a:p>
-            <a:pPr marL="342900" indent="-342900">
-              <a:spcAft>
-                <a:spcPts val="500"/>
-              </a:spcAft>
-              <a:buSzPct val="100000"/>
-              <a:buChar char="•"/>
-            </a:pPr>
-            <a:r>
-              <a:rPr lang="en-US" sz="900" dirty="0">
-                <a:solidFill>
-                  <a:srgbClr val="1E293B"/>
-                </a:solidFill>
-              </a:rPr>
-              <a:t>2. Link loaded 06:40:15 (no SAT needed)</a:t>
-            </a:r>
-            <a:endParaRPr lang="en-US" sz="900" dirty="0"/>
-          </a:p>
-          <a:p>
-            <a:pPr marL="342900" indent="-342900">
-              <a:spcAft>
-                <a:spcPts val="500"/>
-              </a:spcAft>
-              <a:buSzPct val="100000"/>
-              <a:buChar char="•"/>
-            </a:pPr>
-            <a:r>
-              <a:rPr lang="en-US" sz="900" dirty="0">
-                <a:solidFill>
-                  <a:srgbClr val="1E293B"/>
-                </a:solidFill>
-              </a:rPr>
-              <a:t>3. SAT arrived 06:44:37 (263s later, INSERT only)</a:t>
-            </a:r>
-            <a:endParaRPr lang="en-US" sz="900" dirty="0"/>
-          </a:p>
-          <a:p>
-            <a:pPr marL="342900" indent="-342900">
-              <a:spcAft>
-                <a:spcPts val="500"/>
-              </a:spcAft>
-              <a:buSzPct val="100000"/>
-              <a:buChar char="•"/>
-            </a:pPr>
-            <a:r>
-              <a:rPr lang="en-US" sz="900" b="1" dirty="0">
-                <a:solidFill>
-                  <a:srgbClr val="2A9D8F"/>
-                </a:solidFill>
-              </a:rPr>
-              <a:t>Zero placeholders, zero UPDATEs, zero reconciliation</a:t>
-            </a:r>
-            <a:endParaRPr lang="en-US" sz="900" dirty="0"/>
-          </a:p>
-        </p:txBody>
-      </p:sp>
-      <p:sp>
-        <p:nvSpPr>
-          <p:cNvPr id="22" name="Shape 20"/>
-          <p:cNvSpPr/>
-          <p:nvPr/>
-        </p:nvSpPr>
-        <p:spPr>
-          <a:xfrm>
-            <a:off x="6446520" y="3931920"/>
-            <a:ext cx="2560320" cy="548640"/>
-          </a:xfrm>
-          <a:prstGeom prst="rect">
-            <a:avLst/>
-          </a:prstGeom>
-          <a:solidFill>
-            <a:srgbClr val="E8F4F2"/>
-          </a:solidFill>
-          <a:ln/>
-        </p:spPr>
-        <p:txBody>
-          <a:bodyPr/>
-          <a:lstStyle/>
-          <a:p>
-            <a:endParaRPr/>
-          </a:p>
-        </p:txBody>
-      </p:sp>
-      <p:sp>
-        <p:nvSpPr>
-          <p:cNvPr id="23" name="Text 21"/>
-          <p:cNvSpPr/>
-          <p:nvPr/>
-        </p:nvSpPr>
-        <p:spPr>
-          <a:xfrm>
-            <a:off x="6537960" y="3931920"/>
-            <a:ext cx="2377440" cy="548640"/>
-          </a:xfrm>
-          <a:prstGeom prst="rect">
-            <a:avLst/>
-          </a:prstGeom>
-          <a:noFill/>
-          <a:ln/>
-        </p:spPr>
-        <p:txBody>
-          <a:bodyPr wrap="square" rtlCol="0" anchor="ctr"/>
-          <a:lstStyle/>
-          <a:p>
-            <a:pPr marL="0" indent="0">
-              <a:buNone/>
-            </a:pPr>
-            <a:r>
-              <a:rPr lang="en-US" sz="850" b="1" dirty="0">
-                <a:solidFill>
-                  <a:srgbClr val="2A9D8F"/>
-                </a:solidFill>
-              </a:rPr>
-              <a:t>✓ 4-step timeline proves Hub/SAT separation handles it naturally</a:t>
-            </a:r>
-            <a:endParaRPr lang="en-US" sz="850" dirty="0"/>
-          </a:p>
-        </p:txBody>
-      </p:sp>
-    </p:spTree>
-  </p:cSld>
-  <p:clrMapOvr>
-    <a:masterClrMapping/>
-  </p:clrMapOvr>
-</p:sld>
-</file>
-
-<file path=ppt/slides/slide12.xml><?xml version="1.0" encoding="utf-8"?>
-<p:sld xmlns:a="http://schemas.openxmlformats.org/drawingml/2006/main" xmlns:r="http://schemas.openxmlformats.org/officeDocument/2006/relationships" xmlns:p="http://schemas.openxmlformats.org/presentationml/2006/main">
-  <p:cSld name="Slide 15">
-    <p:bg>
-      <p:bgPr>
-        <a:solidFill>
-          <a:srgbClr val="F7FAFA"/>
-        </a:solidFill>
-        <a:effectLst/>
-      </p:bgPr>
-    </p:bg>
-    <p:spTree>
-      <p:nvGrpSpPr>
-        <p:cNvPr id="1" name=""/>
-        <p:cNvGrpSpPr/>
-        <p:nvPr/>
-      </p:nvGrpSpPr>
-      <p:grpSpPr>
-        <a:xfrm>
-          <a:off x="0" y="0"/>
-          <a:ext cx="0" cy="0"/>
-          <a:chOff x="0" y="0"/>
-          <a:chExt cx="0" cy="0"/>
-        </a:xfrm>
-      </p:grpSpPr>
-      <p:sp>
-        <p:nvSpPr>
-          <p:cNvPr id="2" name="Shape 0"/>
-          <p:cNvSpPr/>
-          <p:nvPr/>
-        </p:nvSpPr>
-        <p:spPr>
-          <a:xfrm>
-            <a:off x="0" y="0"/>
-            <a:ext cx="54864" cy="5143500"/>
-          </a:xfrm>
-          <a:prstGeom prst="rect">
-            <a:avLst/>
-          </a:prstGeom>
-          <a:solidFill>
-            <a:srgbClr val="2A9D8F"/>
-          </a:solidFill>
-          <a:ln/>
-        </p:spPr>
-        <p:txBody>
-          <a:bodyPr/>
-          <a:lstStyle/>
-          <a:p>
-            <a:endParaRPr/>
-          </a:p>
-        </p:txBody>
-      </p:sp>
-      <p:sp>
-        <p:nvSpPr>
-          <p:cNvPr id="3" name="Text 1"/>
-          <p:cNvSpPr/>
-          <p:nvPr/>
-        </p:nvSpPr>
-        <p:spPr>
-          <a:xfrm>
-            <a:off x="8046720" y="4754880"/>
-            <a:ext cx="914400" cy="274320"/>
-          </a:xfrm>
-          <a:prstGeom prst="rect">
-            <a:avLst/>
-          </a:prstGeom>
-          <a:noFill/>
-          <a:ln/>
-        </p:spPr>
-        <p:txBody>
-          <a:bodyPr wrap="square" rtlCol="0" anchor="ctr"/>
-          <a:lstStyle/>
-          <a:p>
-            <a:pPr marL="0" indent="0" algn="r">
-              <a:buNone/>
-            </a:pPr>
-            <a:r>
-              <a:rPr lang="en-US" sz="900" dirty="0">
-                <a:solidFill>
-                  <a:srgbClr val="64748B"/>
-                </a:solidFill>
-              </a:rPr>
-              <a:t>12 / 15</a:t>
-            </a:r>
-            <a:endParaRPr lang="en-US" sz="900" dirty="0"/>
-          </a:p>
-        </p:txBody>
-      </p:sp>
-      <p:sp>
-        <p:nvSpPr>
-          <p:cNvPr id="4" name="Text 2"/>
-          <p:cNvSpPr/>
-          <p:nvPr/>
-        </p:nvSpPr>
-        <p:spPr>
-          <a:xfrm>
-            <a:off x="457200" y="182880"/>
-            <a:ext cx="8229600" cy="502920"/>
-          </a:xfrm>
-          <a:prstGeom prst="rect">
-            <a:avLst/>
-          </a:prstGeom>
-          <a:noFill/>
-          <a:ln/>
-        </p:spPr>
-        <p:txBody>
-          <a:bodyPr wrap="square" rtlCol="0" anchor="ctr"/>
-          <a:lstStyle/>
-          <a:p>
-            <a:pPr marL="0" indent="0">
-              <a:buNone/>
-            </a:pPr>
-            <a:r>
-              <a:rPr lang="en-US" sz="2200" b="1" dirty="0">
-                <a:solidFill>
-                  <a:srgbClr val="1B3A5C"/>
-                </a:solidFill>
-                <a:latin typeface="Georgia" pitchFamily="34" charset="0"/>
-                <a:ea typeface="Georgia" pitchFamily="34" charset="-122"/>
-                <a:cs typeface="Georgia" pitchFamily="34" charset="-120"/>
-              </a:rPr>
-              <a:t>Threats to Validity</a:t>
-            </a:r>
-            <a:endParaRPr lang="en-US" sz="2200" dirty="0"/>
-          </a:p>
-        </p:txBody>
-      </p:sp>
-      <p:sp>
-        <p:nvSpPr>
-          <p:cNvPr id="5" name="Shape 3"/>
-          <p:cNvSpPr/>
-          <p:nvPr/>
-        </p:nvSpPr>
-        <p:spPr>
-          <a:xfrm>
-            <a:off x="457200" y="731520"/>
-            <a:ext cx="1097280" cy="36576"/>
-          </a:xfrm>
-          <a:prstGeom prst="rect">
-            <a:avLst/>
-          </a:prstGeom>
-          <a:solidFill>
-            <a:srgbClr val="2A9D8F"/>
-          </a:solidFill>
-          <a:ln/>
-        </p:spPr>
-        <p:txBody>
-          <a:bodyPr/>
-          <a:lstStyle/>
-          <a:p>
-            <a:endParaRPr/>
-          </a:p>
-        </p:txBody>
-      </p:sp>
-      <p:sp>
-        <p:nvSpPr>
-          <p:cNvPr id="6" name="Shape 4"/>
-          <p:cNvSpPr/>
-          <p:nvPr/>
-        </p:nvSpPr>
-        <p:spPr>
-          <a:xfrm>
-            <a:off x="457200" y="1005840"/>
-            <a:ext cx="8229600" cy="1051560"/>
-          </a:xfrm>
-          <a:prstGeom prst="rect">
-            <a:avLst/>
-          </a:prstGeom>
-          <a:solidFill>
-            <a:srgbClr val="FFFFFF"/>
-          </a:solidFill>
-          <a:ln/>
-          <a:effectLst>
-            <a:outerShdw blurRad="50800" dist="25400" dir="8100000" algn="bl" rotWithShape="0">
-              <a:srgbClr val="000000">
-                <a:alpha val="10000"/>
-              </a:srgbClr>
-            </a:outerShdw>
-          </a:effectLst>
-        </p:spPr>
-        <p:txBody>
-          <a:bodyPr/>
-          <a:lstStyle/>
-          <a:p>
-            <a:endParaRPr/>
-          </a:p>
-        </p:txBody>
-      </p:sp>
-      <p:sp>
-        <p:nvSpPr>
-          <p:cNvPr id="7" name="Shape 5"/>
-          <p:cNvSpPr/>
-          <p:nvPr/>
-        </p:nvSpPr>
-        <p:spPr>
-          <a:xfrm>
-            <a:off x="457200" y="1005840"/>
-            <a:ext cx="54864" cy="1051560"/>
-          </a:xfrm>
-          <a:prstGeom prst="rect">
-            <a:avLst/>
-          </a:prstGeom>
-          <a:solidFill>
-            <a:srgbClr val="2A9D8F"/>
-          </a:solidFill>
-          <a:ln/>
-        </p:spPr>
-        <p:txBody>
-          <a:bodyPr/>
-          <a:lstStyle/>
-          <a:p>
-            <a:endParaRPr/>
-          </a:p>
-        </p:txBody>
-      </p:sp>
-      <p:sp>
-        <p:nvSpPr>
-          <p:cNvPr id="8" name="Text 6"/>
-          <p:cNvSpPr/>
-          <p:nvPr/>
-        </p:nvSpPr>
-        <p:spPr>
-          <a:xfrm>
-            <a:off x="685800" y="1051560"/>
-            <a:ext cx="1828800" cy="274320"/>
-          </a:xfrm>
-          <a:prstGeom prst="rect">
-            <a:avLst/>
-          </a:prstGeom>
-          <a:noFill/>
-          <a:ln/>
-        </p:spPr>
-        <p:txBody>
-          <a:bodyPr wrap="square" rtlCol="0" anchor="ctr"/>
-          <a:lstStyle/>
-          <a:p>
-            <a:pPr marL="0" indent="0">
-              <a:buNone/>
-            </a:pPr>
-            <a:r>
-              <a:rPr lang="en-US" sz="1300" b="1" dirty="0">
-                <a:solidFill>
-                  <a:srgbClr val="1B3A5C"/>
-                </a:solidFill>
-                <a:latin typeface="Georgia" pitchFamily="34" charset="0"/>
-                <a:ea typeface="Georgia" pitchFamily="34" charset="-122"/>
-                <a:cs typeface="Georgia" pitchFamily="34" charset="-120"/>
-              </a:rPr>
-              <a:t>Internal Validity</a:t>
-            </a:r>
-            <a:endParaRPr lang="en-US" sz="1300" dirty="0"/>
-          </a:p>
-        </p:txBody>
-      </p:sp>
-      <p:sp>
-        <p:nvSpPr>
-          <p:cNvPr id="9" name="Text 7"/>
-          <p:cNvSpPr/>
-          <p:nvPr/>
-        </p:nvSpPr>
-        <p:spPr>
-          <a:xfrm>
-            <a:off x="685800" y="1325880"/>
-            <a:ext cx="7772400" cy="640080"/>
-          </a:xfrm>
-          <a:prstGeom prst="rect">
-            <a:avLst/>
-          </a:prstGeom>
-          <a:noFill/>
-          <a:ln/>
-        </p:spPr>
-        <p:txBody>
-          <a:bodyPr wrap="square" rtlCol="0" anchor="t"/>
-          <a:lstStyle/>
-          <a:p>
-            <a:pPr marL="0" indent="0">
-              <a:buNone/>
-            </a:pPr>
-            <a:r>
-              <a:rPr lang="en-US" sz="1050" dirty="0">
-                <a:solidFill>
-                  <a:srgbClr val="1E293B"/>
-                </a:solidFill>
-              </a:rPr>
-              <a:t>Single dev environment (GCP e2-standard-4, 16GB RAM); hardware/config variations could affect observed behavior. Mitigated by running all POC demonstrations under identical conditions.</a:t>
-            </a:r>
-            <a:endParaRPr lang="en-US" sz="1050" dirty="0"/>
-          </a:p>
-        </p:txBody>
-      </p:sp>
-      <p:sp>
-        <p:nvSpPr>
-          <p:cNvPr id="10" name="Shape 8"/>
-          <p:cNvSpPr/>
-          <p:nvPr/>
-        </p:nvSpPr>
-        <p:spPr>
-          <a:xfrm>
-            <a:off x="457200" y="2240280"/>
-            <a:ext cx="8229600" cy="1051560"/>
-          </a:xfrm>
-          <a:prstGeom prst="rect">
-            <a:avLst/>
-          </a:prstGeom>
-          <a:solidFill>
-            <a:srgbClr val="FFFFFF"/>
-          </a:solidFill>
-          <a:ln/>
-          <a:effectLst>
-            <a:outerShdw blurRad="50800" dist="25400" dir="8100000" algn="bl" rotWithShape="0">
-              <a:srgbClr val="000000">
-                <a:alpha val="10000"/>
-              </a:srgbClr>
-            </a:outerShdw>
-          </a:effectLst>
-        </p:spPr>
-        <p:txBody>
-          <a:bodyPr/>
-          <a:lstStyle/>
-          <a:p>
-            <a:endParaRPr/>
-          </a:p>
-        </p:txBody>
-      </p:sp>
-      <p:sp>
-        <p:nvSpPr>
-          <p:cNvPr id="11" name="Shape 9"/>
-          <p:cNvSpPr/>
-          <p:nvPr/>
-        </p:nvSpPr>
-        <p:spPr>
-          <a:xfrm>
-            <a:off x="457200" y="2240280"/>
-            <a:ext cx="54864" cy="1051560"/>
-          </a:xfrm>
-          <a:prstGeom prst="rect">
-            <a:avLst/>
-          </a:prstGeom>
-          <a:solidFill>
-            <a:srgbClr val="1B3A5C"/>
-          </a:solidFill>
-          <a:ln/>
-        </p:spPr>
-        <p:txBody>
-          <a:bodyPr/>
-          <a:lstStyle/>
-          <a:p>
-            <a:endParaRPr/>
-          </a:p>
-        </p:txBody>
-      </p:sp>
-      <p:sp>
-        <p:nvSpPr>
-          <p:cNvPr id="12" name="Text 10"/>
-          <p:cNvSpPr/>
-          <p:nvPr/>
-        </p:nvSpPr>
-        <p:spPr>
-          <a:xfrm>
-            <a:off x="685800" y="2286000"/>
-            <a:ext cx="1828800" cy="274320"/>
-          </a:xfrm>
-          <a:prstGeom prst="rect">
-            <a:avLst/>
-          </a:prstGeom>
-          <a:noFill/>
-          <a:ln/>
-        </p:spPr>
-        <p:txBody>
-          <a:bodyPr wrap="square" rtlCol="0" anchor="ctr"/>
-          <a:lstStyle/>
-          <a:p>
-            <a:pPr marL="0" indent="0">
-              <a:buNone/>
-            </a:pPr>
-            <a:r>
-              <a:rPr lang="en-US" sz="1300" b="1" dirty="0">
-                <a:solidFill>
-                  <a:srgbClr val="1B3A5C"/>
-                </a:solidFill>
-                <a:latin typeface="Georgia" pitchFamily="34" charset="0"/>
-                <a:ea typeface="Georgia" pitchFamily="34" charset="-122"/>
-                <a:cs typeface="Georgia" pitchFamily="34" charset="-120"/>
-              </a:rPr>
-              <a:t>External Validity</a:t>
-            </a:r>
-            <a:endParaRPr lang="en-US" sz="1300" dirty="0"/>
-          </a:p>
-        </p:txBody>
-      </p:sp>
-      <p:sp>
-        <p:nvSpPr>
-          <p:cNvPr id="13" name="Text 11"/>
-          <p:cNvSpPr/>
-          <p:nvPr/>
-        </p:nvSpPr>
-        <p:spPr>
-          <a:xfrm>
-            <a:off x="685800" y="2560320"/>
-            <a:ext cx="7772400" cy="640080"/>
-          </a:xfrm>
-          <a:prstGeom prst="rect">
-            <a:avLst/>
-          </a:prstGeom>
-          <a:noFill/>
-          <a:ln/>
-        </p:spPr>
-        <p:txBody>
-          <a:bodyPr wrap="square" rtlCol="0" anchor="t"/>
-          <a:lstStyle/>
-          <a:p>
-            <a:pPr marL="0" indent="0">
-              <a:buNone/>
-            </a:pPr>
-            <a:r>
-              <a:rPr lang="en-US" sz="1050" dirty="0">
-                <a:solidFill>
-                  <a:srgbClr val="1E293B"/>
-                </a:solidFill>
-              </a:rPr>
-              <a:t>Simulated data verified in companion document (12-point checklist: 9 tables, 58,813 records, 0 orphans, 0 NULLs, realistic distributions). Real-world data introduces missing values and encoding issues not evaluated.</a:t>
-            </a:r>
-            <a:endParaRPr lang="en-US" sz="1050" dirty="0"/>
-          </a:p>
-        </p:txBody>
-      </p:sp>
-      <p:sp>
-        <p:nvSpPr>
-          <p:cNvPr id="14" name="Shape 12"/>
-          <p:cNvSpPr/>
-          <p:nvPr/>
-        </p:nvSpPr>
-        <p:spPr>
-          <a:xfrm>
-            <a:off x="457200" y="3474720"/>
-            <a:ext cx="8229600" cy="1051560"/>
-          </a:xfrm>
-          <a:prstGeom prst="rect">
-            <a:avLst/>
-          </a:prstGeom>
-          <a:solidFill>
-            <a:srgbClr val="FFFFFF"/>
-          </a:solidFill>
-          <a:ln/>
-          <a:effectLst>
-            <a:outerShdw blurRad="50800" dist="25400" dir="8100000" algn="bl" rotWithShape="0">
-              <a:srgbClr val="000000">
-                <a:alpha val="10000"/>
-              </a:srgbClr>
-            </a:outerShdw>
-          </a:effectLst>
-        </p:spPr>
-        <p:txBody>
-          <a:bodyPr/>
-          <a:lstStyle/>
-          <a:p>
-            <a:endParaRPr/>
-          </a:p>
-        </p:txBody>
-      </p:sp>
-      <p:sp>
-        <p:nvSpPr>
-          <p:cNvPr id="15" name="Shape 13"/>
-          <p:cNvSpPr/>
-          <p:nvPr/>
-        </p:nvSpPr>
-        <p:spPr>
-          <a:xfrm>
-            <a:off x="457200" y="3474720"/>
-            <a:ext cx="54864" cy="1051560"/>
-          </a:xfrm>
-          <a:prstGeom prst="rect">
-            <a:avLst/>
-          </a:prstGeom>
-          <a:solidFill>
-            <a:srgbClr val="D4A843"/>
-          </a:solidFill>
-          <a:ln/>
-        </p:spPr>
-        <p:txBody>
-          <a:bodyPr/>
-          <a:lstStyle/>
-          <a:p>
-            <a:endParaRPr/>
-          </a:p>
-        </p:txBody>
-      </p:sp>
-      <p:sp>
-        <p:nvSpPr>
-          <p:cNvPr id="16" name="Text 14"/>
-          <p:cNvSpPr/>
-          <p:nvPr/>
-        </p:nvSpPr>
-        <p:spPr>
-          <a:xfrm>
-            <a:off x="685800" y="3520440"/>
-            <a:ext cx="1828800" cy="274320"/>
-          </a:xfrm>
-          <a:prstGeom prst="rect">
-            <a:avLst/>
-          </a:prstGeom>
-          <a:noFill/>
-          <a:ln/>
-        </p:spPr>
-        <p:txBody>
-          <a:bodyPr wrap="square" rtlCol="0" anchor="ctr"/>
-          <a:lstStyle/>
-          <a:p>
-            <a:pPr marL="0" indent="0">
-              <a:buNone/>
-            </a:pPr>
-            <a:r>
-              <a:rPr lang="en-US" sz="1300" b="1" dirty="0">
-                <a:solidFill>
-                  <a:srgbClr val="1B3A5C"/>
-                </a:solidFill>
-                <a:latin typeface="Georgia" pitchFamily="34" charset="0"/>
-                <a:ea typeface="Georgia" pitchFamily="34" charset="-122"/>
-                <a:cs typeface="Georgia" pitchFamily="34" charset="-120"/>
-              </a:rPr>
-              <a:t>Construct Validity</a:t>
-            </a:r>
-            <a:endParaRPr lang="en-US" sz="1300" dirty="0"/>
-          </a:p>
-        </p:txBody>
-      </p:sp>
-      <p:sp>
-        <p:nvSpPr>
-          <p:cNvPr id="17" name="Text 15"/>
-          <p:cNvSpPr/>
-          <p:nvPr/>
-        </p:nvSpPr>
-        <p:spPr>
-          <a:xfrm>
-            <a:off x="685800" y="3794760"/>
-            <a:ext cx="7772400" cy="640080"/>
-          </a:xfrm>
-          <a:prstGeom prst="rect">
-            <a:avLst/>
-          </a:prstGeom>
-          <a:noFill/>
-          <a:ln/>
-        </p:spPr>
-        <p:txBody>
-          <a:bodyPr wrap="square" rtlCol="0" anchor="t"/>
-          <a:lstStyle/>
-          <a:p>
-            <a:pPr marL="0" indent="0">
-              <a:buNone/>
-            </a:pPr>
-            <a:r>
-              <a:rPr lang="en-US" sz="1050" dirty="0">
-                <a:solidFill>
-                  <a:srgbClr val="1E293B"/>
-                </a:solidFill>
-              </a:rPr>
-              <a:t>Evaluation criteria selected from problem statement and prior studies [9][10][11]. Additional criteria such as data governance, real-time processing, and team skill requirements may also be relevant. Quantitative performance benchmarking (ETL load times, query performance, scalability) identified as future work to strengthen conclusions.</a:t>
-            </a:r>
-            <a:endParaRPr lang="en-US" sz="1050" dirty="0"/>
-          </a:p>
-        </p:txBody>
-      </p:sp>
-    </p:spTree>
-  </p:cSld>
-  <p:clrMapOvr>
-    <a:masterClrMapping/>
-  </p:clrMapOvr>
-</p:sld>
-</file>
-
-<file path=ppt/slides/slide13.xml><?xml version="1.0" encoding="utf-8"?>
 <p:sld xmlns:a="http://schemas.openxmlformats.org/drawingml/2006/main" xmlns:r="http://schemas.openxmlformats.org/officeDocument/2006/relationships" xmlns:p="http://schemas.openxmlformats.org/presentationml/2006/main">
   <p:cSld name="Slide 16">
     <p:bg>
@@ -5133,7 +3411,7 @@
                   <a:srgbClr val="64748B"/>
                 </a:solidFill>
               </a:rPr>
-              <a:t>13 / 15</a:t>
+              <a:t>11 / 13</a:t>
             </a:r>
             <a:endParaRPr lang="en-US" sz="900" dirty="0"/>
           </a:p>
@@ -5609,7 +3887,7 @@
 </p:sld>
 </file>
 
-<file path=ppt/slides/slide14.xml><?xml version="1.0" encoding="utf-8"?>
+<file path=ppt/slides/slide12.xml><?xml version="1.0" encoding="utf-8"?>
 <p:sld xmlns:a="http://schemas.openxmlformats.org/drawingml/2006/main" xmlns:r="http://schemas.openxmlformats.org/officeDocument/2006/relationships" xmlns:p="http://schemas.openxmlformats.org/presentationml/2006/main">
   <p:cSld name="Slide 17">
     <p:bg>
@@ -5691,7 +3969,7 @@
                   <a:srgbClr val="64748B"/>
                 </a:solidFill>
               </a:rPr>
-              <a:t>14 / 15</a:t>
+              <a:t>12 / 13</a:t>
             </a:r>
             <a:endParaRPr lang="en-US" sz="900" dirty="0"/>
           </a:p>
@@ -6250,7 +4528,7 @@
       </p:sp>
       <p:sp>
         <p:nvSpPr>
-          <p:cNvPr id="21" name="Shape 19"/>
+          <p:cNvPr id="24" name="Shape 22"/>
           <p:cNvSpPr/>
           <p:nvPr/>
         </p:nvSpPr>
@@ -6284,7 +4562,7 @@
       </p:sp>
       <p:sp>
         <p:nvSpPr>
-          <p:cNvPr id="22" name="Shape 20"/>
+          <p:cNvPr id="25" name="Shape 23"/>
           <p:cNvSpPr/>
           <p:nvPr/>
         </p:nvSpPr>
@@ -6311,7 +4589,7 @@
       </p:sp>
       <p:sp>
         <p:nvSpPr>
-          <p:cNvPr id="23" name="Text 21"/>
+          <p:cNvPr id="26" name="Text 24"/>
           <p:cNvSpPr/>
           <p:nvPr/>
         </p:nvSpPr>
@@ -6339,7 +4617,7 @@
                   <a:srgbClr val="1E293B"/>
                 </a:solidFill>
               </a:rPr>
-              <a:t>6. Cloud migration path: Azure Synapse / SQL Managed Instance for elastic scaling and managed infrastructure</a:t>
+              <a:t>6. Advanced analytics: ML models on Gold layer for compliance risk scoring, revenue forecasting, fraud detection, and anomaly detection</a:t>
             </a:r>
             <a:endParaRPr lang="en-US" sz="1050" dirty="0"/>
           </a:p>
@@ -6353,7 +4631,7 @@
 </p:sld>
 </file>
 
-<file path=ppt/slides/slide15.xml><?xml version="1.0" encoding="utf-8"?>
+<file path=ppt/slides/slide13.xml><?xml version="1.0" encoding="utf-8"?>
 <p:sld xmlns:a="http://schemas.openxmlformats.org/drawingml/2006/main" xmlns:r="http://schemas.openxmlformats.org/officeDocument/2006/relationships" xmlns:p="http://schemas.openxmlformats.org/presentationml/2006/main">
   <p:cSld name="Slide 18">
     <p:bg>
@@ -6688,7 +4966,7 @@
                   <a:srgbClr val="64748B"/>
                 </a:solidFill>
               </a:rPr>
-              <a:t>15 / 15</a:t>
+              <a:t>13 / 13</a:t>
             </a:r>
             <a:endParaRPr lang="en-US" sz="900" dirty="0"/>
           </a:p>
@@ -6797,7 +5075,7 @@
                     <a:srgbClr val="64748B"/>
                   </a:solidFill>
                 </a:rPr>
-                <a:t>2 / 18</a:t>
+                <a:t>2 / 13</a:t>
               </a:r>
               <a:endParaRPr lang="en-US" sz="900" dirty="0"/>
             </a:p>
@@ -7781,7 +6059,7 @@
                   <a:srgbClr val="64748B"/>
                 </a:solidFill>
               </a:rPr>
-              <a:t>3 / 15</a:t>
+              <a:t>3 / 13</a:t>
             </a:r>
             <a:endParaRPr lang="en-US" sz="900" dirty="0"/>
           </a:p>
@@ -8578,7 +6856,7 @@
                   <a:srgbClr val="64748B"/>
                 </a:solidFill>
               </a:rPr>
-              <a:t>4 / 15</a:t>
+              <a:t>4 / 13</a:t>
             </a:r>
             <a:endParaRPr lang="en-US" sz="900" dirty="0"/>
           </a:p>
@@ -9137,7 +7415,7 @@
                   <a:srgbClr val="64748B"/>
                 </a:solidFill>
               </a:rPr>
-              <a:t>5 / 15</a:t>
+              <a:t>5 / 13</a:t>
             </a:r>
             <a:endParaRPr lang="en-US" sz="900" dirty="0"/>
           </a:p>
@@ -9878,7 +8156,7 @@
                   <a:srgbClr val="64748B"/>
                 </a:solidFill>
               </a:rPr>
-              <a:t>6 / 15</a:t>
+              <a:t>6 / 13</a:t>
             </a:r>
             <a:endParaRPr lang="en-US" sz="900" dirty="0"/>
           </a:p>
@@ -9959,14 +8237,14 @@
           <p:nvPr>
             <p:extLst>
               <p:ext uri="{D42A27DB-BD31-4B8C-83A1-F6EECF244321}">
-                <p14:modId xmlns:p14="http://schemas.microsoft.com/office/powerpoint/2010/main" val="1579011935"/>
+                <p14:modId xmlns:p14="http://schemas.microsoft.com/office/powerpoint/2010/main" val="2555424238"/>
               </p:ext>
             </p:extLst>
           </p:nvPr>
         </p:nvGraphicFramePr>
         <p:xfrm>
           <a:off x="274320" y="1005840"/>
-          <a:ext cx="8595360" cy="1897380"/>
+          <a:ext cx="8595360" cy="3406139"/>
         </p:xfrm>
         <a:graphic>
           <a:graphicData uri="http://schemas.openxmlformats.org/drawingml/2006/table">
@@ -10009,13 +8287,13 @@
                   </a:extLst>
                 </a:gridCol>
               </a:tblGrid>
-              <a:tr h="0">
+              <a:tr h="396699">
                 <a:tc>
                   <a:txBody>
                     <a:bodyPr/>
                     <a:lstStyle/>
                     <a:p>
-                      <a:pPr marL="0" indent="0">
+                      <a:pPr marL="0" indent="0" algn="ctr">
                         <a:buNone/>
                       </a:pPr>
                       <a:r>
@@ -10076,7 +8354,7 @@
                     <a:bodyPr/>
                     <a:lstStyle/>
                     <a:p>
-                      <a:pPr marL="0" indent="0">
+                      <a:pPr marL="0" indent="0" algn="ctr">
                         <a:buNone/>
                       </a:pPr>
                       <a:r>
@@ -10137,7 +8415,7 @@
                     <a:bodyPr/>
                     <a:lstStyle/>
                     <a:p>
-                      <a:pPr marL="0" indent="0">
+                      <a:pPr marL="0" indent="0" algn="ctr">
                         <a:buNone/>
                       </a:pPr>
                       <a:r>
@@ -10198,7 +8476,7 @@
                     <a:bodyPr/>
                     <a:lstStyle/>
                     <a:p>
-                      <a:pPr marL="0" indent="0">
+                      <a:pPr marL="0" indent="0" algn="ctr">
                         <a:buNone/>
                       </a:pPr>
                       <a:r>
@@ -10259,7 +8537,7 @@
                     <a:bodyPr/>
                     <a:lstStyle/>
                     <a:p>
-                      <a:pPr marL="0" indent="0">
+                      <a:pPr marL="0" indent="0" algn="ctr">
                         <a:buNone/>
                       </a:pPr>
                       <a:r>
@@ -10321,7 +8599,7 @@
                   </a:ext>
                 </a:extLst>
               </a:tr>
-              <a:tr h="0">
+              <a:tr h="601888">
                 <a:tc>
                   <a:txBody>
                     <a:bodyPr/>
@@ -10675,7 +8953,7 @@
                   </a:ext>
                 </a:extLst>
               </a:tr>
-              <a:tr h="0">
+              <a:tr h="601888">
                 <a:tc>
                   <a:txBody>
                     <a:bodyPr/>
@@ -11043,7 +9321,7 @@
                   </a:ext>
                 </a:extLst>
               </a:tr>
-              <a:tr h="0">
+              <a:tr h="601888">
                 <a:tc>
                   <a:txBody>
                     <a:bodyPr/>
@@ -11397,7 +9675,7 @@
                   </a:ext>
                 </a:extLst>
               </a:tr>
-              <a:tr h="0">
+              <a:tr h="601888">
                 <a:tc>
                   <a:txBody>
                     <a:bodyPr/>
@@ -11751,7 +10029,7 @@
                   </a:ext>
                 </a:extLst>
               </a:tr>
-              <a:tr h="0">
+              <a:tr h="601888">
                 <a:tc>
                   <a:txBody>
                     <a:bodyPr/>
@@ -12199,7 +10477,7 @@
                   <a:srgbClr val="64748B"/>
                 </a:solidFill>
               </a:rPr>
-              <a:t>7 / 15</a:t>
+              <a:t>7 / 13</a:t>
             </a:r>
             <a:endParaRPr lang="en-US" sz="900" dirty="0"/>
           </a:p>
@@ -13489,7 +11767,7 @@
                   <a:srgbClr val="1E293B"/>
                 </a:solidFill>
               </a:rPr>
-              <a:t>ETL_Configuration — Entity registry &amp; load order</a:t>
+              <a:t>ETL_Process — Entity registry &amp; load order</a:t>
             </a:r>
             <a:endParaRPr lang="en-US" sz="900" dirty="0"/>
           </a:p>
@@ -13543,7 +11821,7 @@
                   <a:srgbClr val="1E293B"/>
                 </a:solidFill>
               </a:rPr>
-              <a:t>ETL_ErrorLog / DataQualityLog — Error &amp; DQ</a:t>
+              <a:t>ETL_ErrorLog — Error capture &amp; diagnostics</a:t>
             </a:r>
             <a:endParaRPr lang="en-US" sz="900" dirty="0"/>
           </a:p>
@@ -13866,7 +12144,7 @@
                   <a:srgbClr val="64748B"/>
                 </a:solidFill>
               </a:rPr>
-              <a:t>8 / 15</a:t>
+              <a:t>8 / 13</a:t>
             </a:r>
             <a:endParaRPr lang="en-US" sz="900" dirty="0"/>
           </a:p>
@@ -15777,7 +14055,7 @@
                   <a:srgbClr val="64748B"/>
                 </a:solidFill>
               </a:rPr>
-              <a:t>9 / 15</a:t>
+              <a:t>9 / 13</a:t>
             </a:r>
             <a:endParaRPr lang="en-US" sz="900" dirty="0"/>
           </a:p>
@@ -15894,14 +14172,14 @@
           <p:nvPr>
             <p:extLst>
               <p:ext uri="{D42A27DB-BD31-4B8C-83A1-F6EECF244321}">
-                <p14:modId xmlns:p14="http://schemas.microsoft.com/office/powerpoint/2010/main" val="1579011935"/>
+                <p14:modId xmlns:p14="http://schemas.microsoft.com/office/powerpoint/2010/main" val="1143012250"/>
               </p:ext>
             </p:extLst>
           </p:nvPr>
         </p:nvGraphicFramePr>
         <p:xfrm>
           <a:off x="274320" y="1280160"/>
-          <a:ext cx="8595360" cy="1714500"/>
+          <a:ext cx="8595360" cy="2748744"/>
         </p:xfrm>
         <a:graphic>
           <a:graphicData uri="http://schemas.openxmlformats.org/drawingml/2006/table">
@@ -15937,13 +14215,13 @@
                   </a:extLst>
                 </a:gridCol>
               </a:tblGrid>
-              <a:tr h="0">
+              <a:tr h="299283">
                 <a:tc>
                   <a:txBody>
                     <a:bodyPr/>
                     <a:lstStyle/>
                     <a:p>
-                      <a:pPr marL="0" indent="0">
+                      <a:pPr marL="0" indent="0" algn="ctr">
                         <a:buNone/>
                       </a:pPr>
                       <a:r>
@@ -16004,7 +14282,7 @@
                     <a:bodyPr/>
                     <a:lstStyle/>
                     <a:p>
-                      <a:pPr marL="0" indent="0">
+                      <a:pPr marL="0" indent="0" algn="ctr">
                         <a:buNone/>
                       </a:pPr>
                       <a:r>
@@ -16065,7 +14343,7 @@
                     <a:bodyPr/>
                     <a:lstStyle/>
                     <a:p>
-                      <a:pPr marL="0" indent="0">
+                      <a:pPr marL="0" indent="0" algn="ctr">
                         <a:buNone/>
                       </a:pPr>
                       <a:r>
@@ -16126,7 +14404,7 @@
                     <a:bodyPr/>
                     <a:lstStyle/>
                     <a:p>
-                      <a:pPr marL="0" indent="0">
+                      <a:pPr marL="0" indent="0" algn="ctr">
                         <a:buNone/>
                       </a:pPr>
                       <a:r>
@@ -16188,7 +14466,760 @@
                   </a:ext>
                 </a:extLst>
               </a:tr>
+              <a:tr h="288963">
+                <a:tc>
+                  <a:txBody>
+                    <a:bodyPr/>
+                    <a:lstStyle/>
+                    <a:p>
+                      <a:pPr marL="0" indent="0">
+                        <a:buNone/>
+                      </a:pPr>
+                      <a:r>
+                        <a:rPr lang="en-US" sz="800" b="1" dirty="0">
+                          <a:solidFill>
+                            <a:srgbClr val="1B3A5C"/>
+                          </a:solidFill>
+                        </a:rPr>
+                        <a:t>Category</a:t>
+                      </a:r>
+                      <a:endParaRPr lang="en-US" sz="800" dirty="0"/>
+                    </a:p>
+                  </a:txBody>
+                  <a:tcPr>
+                    <a:lnL w="6350" cap="flat" cmpd="sng" algn="ctr">
+                      <a:solidFill>
+                        <a:srgbClr val="E2E8F0"/>
+                      </a:solidFill>
+                      <a:prstDash val="solid"/>
+                      <a:round/>
+                      <a:headEnd type="none" w="med" len="med"/>
+                      <a:tailEnd type="none" w="med" len="med"/>
+                    </a:lnL>
+                    <a:lnR w="6350" cap="flat" cmpd="sng" algn="ctr">
+                      <a:solidFill>
+                        <a:srgbClr val="E2E8F0"/>
+                      </a:solidFill>
+                      <a:prstDash val="solid"/>
+                      <a:round/>
+                      <a:headEnd type="none" w="med" len="med"/>
+                      <a:tailEnd type="none" w="med" len="med"/>
+                    </a:lnR>
+                    <a:lnT w="6350" cap="flat" cmpd="sng" algn="ctr">
+                      <a:solidFill>
+                        <a:srgbClr val="E2E8F0"/>
+                      </a:solidFill>
+                      <a:prstDash val="solid"/>
+                      <a:round/>
+                      <a:headEnd type="none" w="med" len="med"/>
+                      <a:tailEnd type="none" w="med" len="med"/>
+                    </a:lnT>
+                    <a:lnB w="6350" cap="flat" cmpd="sng" algn="ctr">
+                      <a:solidFill>
+                        <a:srgbClr val="E2E8F0"/>
+                      </a:solidFill>
+                      <a:prstDash val="solid"/>
+                      <a:round/>
+                      <a:headEnd type="none" w="med" len="med"/>
+                      <a:tailEnd type="none" w="med" len="med"/>
+                    </a:lnB>
+                    <a:solidFill>
+                      <a:srgbClr val="FFFFFF"/>
+                    </a:solidFill>
+                  </a:tcPr>
+                </a:tc>
+                <a:tc>
+                  <a:txBody>
+                    <a:bodyPr/>
+                    <a:lstStyle/>
+                    <a:p>
+                      <a:pPr marL="0" indent="0">
+                        <a:buNone/>
+                      </a:pPr>
+                      <a:r>
+                        <a:rPr lang="en-US" sz="800" dirty="0">
+                          <a:solidFill>
+                            <a:srgbClr val="1E293B"/>
+                          </a:solidFill>
+                        </a:rPr>
+                        <a:t>Lookup</a:t>
+                      </a:r>
+                      <a:endParaRPr lang="en-US" sz="800" dirty="0"/>
+                    </a:p>
+                  </a:txBody>
+                  <a:tcPr>
+                    <a:lnL w="6350" cap="flat" cmpd="sng" algn="ctr">
+                      <a:solidFill>
+                        <a:srgbClr val="E2E8F0"/>
+                      </a:solidFill>
+                      <a:prstDash val="solid"/>
+                      <a:round/>
+                      <a:headEnd type="none" w="med" len="med"/>
+                      <a:tailEnd type="none" w="med" len="med"/>
+                    </a:lnL>
+                    <a:lnR w="6350" cap="flat" cmpd="sng" algn="ctr">
+                      <a:solidFill>
+                        <a:srgbClr val="E2E8F0"/>
+                      </a:solidFill>
+                      <a:prstDash val="solid"/>
+                      <a:round/>
+                      <a:headEnd type="none" w="med" len="med"/>
+                      <a:tailEnd type="none" w="med" len="med"/>
+                    </a:lnR>
+                    <a:lnT w="6350" cap="flat" cmpd="sng" algn="ctr">
+                      <a:solidFill>
+                        <a:srgbClr val="E2E8F0"/>
+                      </a:solidFill>
+                      <a:prstDash val="solid"/>
+                      <a:round/>
+                      <a:headEnd type="none" w="med" len="med"/>
+                      <a:tailEnd type="none" w="med" len="med"/>
+                    </a:lnT>
+                    <a:lnB w="6350" cap="flat" cmpd="sng" algn="ctr">
+                      <a:solidFill>
+                        <a:srgbClr val="E2E8F0"/>
+                      </a:solidFill>
+                      <a:prstDash val="solid"/>
+                      <a:round/>
+                      <a:headEnd type="none" w="med" len="med"/>
+                      <a:tailEnd type="none" w="med" len="med"/>
+                    </a:lnB>
+                    <a:solidFill>
+                      <a:srgbClr val="FFFFFF"/>
+                    </a:solidFill>
+                  </a:tcPr>
+                </a:tc>
+                <a:tc>
+                  <a:txBody>
+                    <a:bodyPr/>
+                    <a:lstStyle/>
+                    <a:p>
+                      <a:pPr marL="0" indent="0">
+                        <a:buNone/>
+                      </a:pPr>
+                      <a:r>
+                        <a:rPr lang="en-US" sz="800" dirty="0">
+                          <a:solidFill>
+                            <a:srgbClr val="1E293B"/>
+                          </a:solidFill>
+                        </a:rPr>
+                        <a:t>Taxpayer categories (Individual, SME, Corp)</a:t>
+                      </a:r>
+                      <a:endParaRPr lang="en-US" sz="800" dirty="0"/>
+                    </a:p>
+                  </a:txBody>
+                  <a:tcPr>
+                    <a:lnL w="6350" cap="flat" cmpd="sng" algn="ctr">
+                      <a:solidFill>
+                        <a:srgbClr val="E2E8F0"/>
+                      </a:solidFill>
+                      <a:prstDash val="solid"/>
+                      <a:round/>
+                      <a:headEnd type="none" w="med" len="med"/>
+                      <a:tailEnd type="none" w="med" len="med"/>
+                    </a:lnL>
+                    <a:lnR w="6350" cap="flat" cmpd="sng" algn="ctr">
+                      <a:solidFill>
+                        <a:srgbClr val="E2E8F0"/>
+                      </a:solidFill>
+                      <a:prstDash val="solid"/>
+                      <a:round/>
+                      <a:headEnd type="none" w="med" len="med"/>
+                      <a:tailEnd type="none" w="med" len="med"/>
+                    </a:lnR>
+                    <a:lnT w="6350" cap="flat" cmpd="sng" algn="ctr">
+                      <a:solidFill>
+                        <a:srgbClr val="E2E8F0"/>
+                      </a:solidFill>
+                      <a:prstDash val="solid"/>
+                      <a:round/>
+                      <a:headEnd type="none" w="med" len="med"/>
+                      <a:tailEnd type="none" w="med" len="med"/>
+                    </a:lnT>
+                    <a:lnB w="6350" cap="flat" cmpd="sng" algn="ctr">
+                      <a:solidFill>
+                        <a:srgbClr val="E2E8F0"/>
+                      </a:solidFill>
+                      <a:prstDash val="solid"/>
+                      <a:round/>
+                      <a:headEnd type="none" w="med" len="med"/>
+                      <a:tailEnd type="none" w="med" len="med"/>
+                    </a:lnB>
+                    <a:solidFill>
+                      <a:srgbClr val="FFFFFF"/>
+                    </a:solidFill>
+                  </a:tcPr>
+                </a:tc>
+                <a:tc>
+                  <a:txBody>
+                    <a:bodyPr/>
+                    <a:lstStyle/>
+                    <a:p>
+                      <a:pPr marL="0" indent="0">
+                        <a:buNone/>
+                      </a:pPr>
+                      <a:r>
+                        <a:rPr lang="en-US" sz="800" b="1" dirty="0">
+                          <a:solidFill>
+                            <a:srgbClr val="2A9D8F"/>
+                          </a:solidFill>
+                        </a:rPr>
+                        <a:t>5</a:t>
+                      </a:r>
+                      <a:endParaRPr lang="en-US" sz="800" dirty="0"/>
+                    </a:p>
+                  </a:txBody>
+                  <a:tcPr>
+                    <a:lnL w="6350" cap="flat" cmpd="sng" algn="ctr">
+                      <a:solidFill>
+                        <a:srgbClr val="E2E8F0"/>
+                      </a:solidFill>
+                      <a:prstDash val="solid"/>
+                      <a:round/>
+                      <a:headEnd type="none" w="med" len="med"/>
+                      <a:tailEnd type="none" w="med" len="med"/>
+                    </a:lnL>
+                    <a:lnR w="6350" cap="flat" cmpd="sng" algn="ctr">
+                      <a:solidFill>
+                        <a:srgbClr val="E2E8F0"/>
+                      </a:solidFill>
+                      <a:prstDash val="solid"/>
+                      <a:round/>
+                      <a:headEnd type="none" w="med" len="med"/>
+                      <a:tailEnd type="none" w="med" len="med"/>
+                    </a:lnR>
+                    <a:lnT w="6350" cap="flat" cmpd="sng" algn="ctr">
+                      <a:solidFill>
+                        <a:srgbClr val="E2E8F0"/>
+                      </a:solidFill>
+                      <a:prstDash val="solid"/>
+                      <a:round/>
+                      <a:headEnd type="none" w="med" len="med"/>
+                      <a:tailEnd type="none" w="med" len="med"/>
+                    </a:lnT>
+                    <a:lnB w="6350" cap="flat" cmpd="sng" algn="ctr">
+                      <a:solidFill>
+                        <a:srgbClr val="E2E8F0"/>
+                      </a:solidFill>
+                      <a:prstDash val="solid"/>
+                      <a:round/>
+                      <a:headEnd type="none" w="med" len="med"/>
+                      <a:tailEnd type="none" w="med" len="med"/>
+                    </a:lnB>
+                    <a:solidFill>
+                      <a:srgbClr val="FFFFFF"/>
+                    </a:solidFill>
+                  </a:tcPr>
+                </a:tc>
+                <a:extLst>
+                  <a:ext uri="{0D108BD9-81ED-4DB2-BD59-A6C34878D82A}">
+                    <a16:rowId xmlns:a16="http://schemas.microsoft.com/office/drawing/2014/main" val="10003"/>
+                  </a:ext>
+                </a:extLst>
+              </a:tr>
               <a:tr h="0">
+                <a:tc>
+                  <a:txBody>
+                    <a:bodyPr/>
+                    <a:lstStyle/>
+                    <a:p>
+                      <a:pPr marL="0" indent="0">
+                        <a:buNone/>
+                      </a:pPr>
+                      <a:r>
+                        <a:rPr lang="en-US" sz="800" b="1" dirty="0">
+                          <a:solidFill>
+                            <a:srgbClr val="1B3A5C"/>
+                          </a:solidFill>
+                        </a:rPr>
+                        <a:t>Structure</a:t>
+                      </a:r>
+                      <a:endParaRPr lang="en-US" sz="800" dirty="0"/>
+                    </a:p>
+                  </a:txBody>
+                  <a:tcPr>
+                    <a:lnL w="6350" cap="flat" cmpd="sng" algn="ctr">
+                      <a:solidFill>
+                        <a:srgbClr val="E2E8F0"/>
+                      </a:solidFill>
+                      <a:prstDash val="solid"/>
+                      <a:round/>
+                      <a:headEnd type="none" w="med" len="med"/>
+                      <a:tailEnd type="none" w="med" len="med"/>
+                    </a:lnL>
+                    <a:lnR w="6350" cap="flat" cmpd="sng" algn="ctr">
+                      <a:solidFill>
+                        <a:srgbClr val="E2E8F0"/>
+                      </a:solidFill>
+                      <a:prstDash val="solid"/>
+                      <a:round/>
+                      <a:headEnd type="none" w="med" len="med"/>
+                      <a:tailEnd type="none" w="med" len="med"/>
+                    </a:lnR>
+                    <a:lnT w="6350" cap="flat" cmpd="sng" algn="ctr">
+                      <a:solidFill>
+                        <a:srgbClr val="E2E8F0"/>
+                      </a:solidFill>
+                      <a:prstDash val="solid"/>
+                      <a:round/>
+                      <a:headEnd type="none" w="med" len="med"/>
+                      <a:tailEnd type="none" w="med" len="med"/>
+                    </a:lnT>
+                    <a:lnB w="6350" cap="flat" cmpd="sng" algn="ctr">
+                      <a:solidFill>
+                        <a:srgbClr val="E2E8F0"/>
+                      </a:solidFill>
+                      <a:prstDash val="solid"/>
+                      <a:round/>
+                      <a:headEnd type="none" w="med" len="med"/>
+                      <a:tailEnd type="none" w="med" len="med"/>
+                    </a:lnB>
+                    <a:solidFill>
+                      <a:srgbClr val="FFFFFF"/>
+                    </a:solidFill>
+                  </a:tcPr>
+                </a:tc>
+                <a:tc>
+                  <a:txBody>
+                    <a:bodyPr/>
+                    <a:lstStyle/>
+                    <a:p>
+                      <a:pPr marL="0" indent="0">
+                        <a:buNone/>
+                      </a:pPr>
+                      <a:r>
+                        <a:rPr lang="en-US" sz="800" dirty="0">
+                          <a:solidFill>
+                            <a:srgbClr val="1E293B"/>
+                          </a:solidFill>
+                        </a:rPr>
+                        <a:t>Lookup</a:t>
+                      </a:r>
+                      <a:endParaRPr lang="en-US" sz="800" dirty="0"/>
+                    </a:p>
+                  </a:txBody>
+                  <a:tcPr>
+                    <a:lnL w="6350" cap="flat" cmpd="sng" algn="ctr">
+                      <a:solidFill>
+                        <a:srgbClr val="E2E8F0"/>
+                      </a:solidFill>
+                      <a:prstDash val="solid"/>
+                      <a:round/>
+                      <a:headEnd type="none" w="med" len="med"/>
+                      <a:tailEnd type="none" w="med" len="med"/>
+                    </a:lnL>
+                    <a:lnR w="6350" cap="flat" cmpd="sng" algn="ctr">
+                      <a:solidFill>
+                        <a:srgbClr val="E2E8F0"/>
+                      </a:solidFill>
+                      <a:prstDash val="solid"/>
+                      <a:round/>
+                      <a:headEnd type="none" w="med" len="med"/>
+                      <a:tailEnd type="none" w="med" len="med"/>
+                    </a:lnR>
+                    <a:lnT w="6350" cap="flat" cmpd="sng" algn="ctr">
+                      <a:solidFill>
+                        <a:srgbClr val="E2E8F0"/>
+                      </a:solidFill>
+                      <a:prstDash val="solid"/>
+                      <a:round/>
+                      <a:headEnd type="none" w="med" len="med"/>
+                      <a:tailEnd type="none" w="med" len="med"/>
+                    </a:lnT>
+                    <a:lnB w="6350" cap="flat" cmpd="sng" algn="ctr">
+                      <a:solidFill>
+                        <a:srgbClr val="E2E8F0"/>
+                      </a:solidFill>
+                      <a:prstDash val="solid"/>
+                      <a:round/>
+                      <a:headEnd type="none" w="med" len="med"/>
+                      <a:tailEnd type="none" w="med" len="med"/>
+                    </a:lnB>
+                    <a:solidFill>
+                      <a:srgbClr val="FFFFFF"/>
+                    </a:solidFill>
+                  </a:tcPr>
+                </a:tc>
+                <a:tc>
+                  <a:txBody>
+                    <a:bodyPr/>
+                    <a:lstStyle/>
+                    <a:p>
+                      <a:pPr marL="0" indent="0">
+                        <a:buNone/>
+                      </a:pPr>
+                      <a:r>
+                        <a:rPr lang="en-US" sz="800" dirty="0">
+                          <a:solidFill>
+                            <a:srgbClr val="1E293B"/>
+                          </a:solidFill>
+                        </a:rPr>
+                        <a:t>Business structure types (Individual, Partnership, Corp)</a:t>
+                      </a:r>
+                      <a:endParaRPr lang="en-US" sz="800" dirty="0"/>
+                    </a:p>
+                  </a:txBody>
+                  <a:tcPr>
+                    <a:lnL w="6350" cap="flat" cmpd="sng" algn="ctr">
+                      <a:solidFill>
+                        <a:srgbClr val="E2E8F0"/>
+                      </a:solidFill>
+                      <a:prstDash val="solid"/>
+                      <a:round/>
+                      <a:headEnd type="none" w="med" len="med"/>
+                      <a:tailEnd type="none" w="med" len="med"/>
+                    </a:lnL>
+                    <a:lnR w="6350" cap="flat" cmpd="sng" algn="ctr">
+                      <a:solidFill>
+                        <a:srgbClr val="E2E8F0"/>
+                      </a:solidFill>
+                      <a:prstDash val="solid"/>
+                      <a:round/>
+                      <a:headEnd type="none" w="med" len="med"/>
+                      <a:tailEnd type="none" w="med" len="med"/>
+                    </a:lnR>
+                    <a:lnT w="6350" cap="flat" cmpd="sng" algn="ctr">
+                      <a:solidFill>
+                        <a:srgbClr val="E2E8F0"/>
+                      </a:solidFill>
+                      <a:prstDash val="solid"/>
+                      <a:round/>
+                      <a:headEnd type="none" w="med" len="med"/>
+                      <a:tailEnd type="none" w="med" len="med"/>
+                    </a:lnT>
+                    <a:lnB w="6350" cap="flat" cmpd="sng" algn="ctr">
+                      <a:solidFill>
+                        <a:srgbClr val="E2E8F0"/>
+                      </a:solidFill>
+                      <a:prstDash val="solid"/>
+                      <a:round/>
+                      <a:headEnd type="none" w="med" len="med"/>
+                      <a:tailEnd type="none" w="med" len="med"/>
+                    </a:lnB>
+                    <a:solidFill>
+                      <a:srgbClr val="FFFFFF"/>
+                    </a:solidFill>
+                  </a:tcPr>
+                </a:tc>
+                <a:tc>
+                  <a:txBody>
+                    <a:bodyPr/>
+                    <a:lstStyle/>
+                    <a:p>
+                      <a:pPr marL="0" indent="0">
+                        <a:buNone/>
+                      </a:pPr>
+                      <a:r>
+                        <a:rPr lang="en-US" sz="800" b="1" dirty="0">
+                          <a:solidFill>
+                            <a:srgbClr val="2A9D8F"/>
+                          </a:solidFill>
+                        </a:rPr>
+                        <a:t>5</a:t>
+                      </a:r>
+                      <a:endParaRPr lang="en-US" sz="800" dirty="0"/>
+                    </a:p>
+                  </a:txBody>
+                  <a:tcPr>
+                    <a:lnL w="6350" cap="flat" cmpd="sng" algn="ctr">
+                      <a:solidFill>
+                        <a:srgbClr val="E2E8F0"/>
+                      </a:solidFill>
+                      <a:prstDash val="solid"/>
+                      <a:round/>
+                      <a:headEnd type="none" w="med" len="med"/>
+                      <a:tailEnd type="none" w="med" len="med"/>
+                    </a:lnL>
+                    <a:lnR w="6350" cap="flat" cmpd="sng" algn="ctr">
+                      <a:solidFill>
+                        <a:srgbClr val="E2E8F0"/>
+                      </a:solidFill>
+                      <a:prstDash val="solid"/>
+                      <a:round/>
+                      <a:headEnd type="none" w="med" len="med"/>
+                      <a:tailEnd type="none" w="med" len="med"/>
+                    </a:lnR>
+                    <a:lnT w="6350" cap="flat" cmpd="sng" algn="ctr">
+                      <a:solidFill>
+                        <a:srgbClr val="E2E8F0"/>
+                      </a:solidFill>
+                      <a:prstDash val="solid"/>
+                      <a:round/>
+                      <a:headEnd type="none" w="med" len="med"/>
+                      <a:tailEnd type="none" w="med" len="med"/>
+                    </a:lnT>
+                    <a:lnB w="6350" cap="flat" cmpd="sng" algn="ctr">
+                      <a:solidFill>
+                        <a:srgbClr val="E2E8F0"/>
+                      </a:solidFill>
+                      <a:prstDash val="solid"/>
+                      <a:round/>
+                      <a:headEnd type="none" w="med" len="med"/>
+                      <a:tailEnd type="none" w="med" len="med"/>
+                    </a:lnB>
+                    <a:solidFill>
+                      <a:srgbClr val="FFFFFF"/>
+                    </a:solidFill>
+                  </a:tcPr>
+                </a:tc>
+                <a:extLst>
+                  <a:ext uri="{0D108BD9-81ED-4DB2-BD59-A6C34878D82A}">
+                    <a16:rowId xmlns:a16="http://schemas.microsoft.com/office/drawing/2014/main" val="1153074418"/>
+                  </a:ext>
+                </a:extLst>
+              </a:tr>
+              <a:tr h="0">
+                <a:tc>
+                  <a:txBody>
+                    <a:bodyPr/>
+                    <a:lstStyle/>
+                    <a:p>
+                      <a:pPr marL="0" indent="0">
+                        <a:buNone/>
+                      </a:pPr>
+                      <a:r>
+                        <a:rPr lang="en-US" sz="800" b="1" dirty="0">
+                          <a:solidFill>
+                            <a:srgbClr val="1B3A5C"/>
+                          </a:solidFill>
+                        </a:rPr>
+                        <a:t>Activity</a:t>
+                      </a:r>
+                      <a:endParaRPr lang="en-US" sz="800" dirty="0"/>
+                    </a:p>
+                  </a:txBody>
+                  <a:tcPr>
+                    <a:lnL w="6350" cap="flat" cmpd="sng" algn="ctr">
+                      <a:solidFill>
+                        <a:srgbClr val="E2E8F0"/>
+                      </a:solidFill>
+                      <a:prstDash val="solid"/>
+                      <a:round/>
+                      <a:headEnd type="none" w="med" len="med"/>
+                      <a:tailEnd type="none" w="med" len="med"/>
+                    </a:lnL>
+                    <a:lnR w="6350" cap="flat" cmpd="sng" algn="ctr">
+                      <a:solidFill>
+                        <a:srgbClr val="E2E8F0"/>
+                      </a:solidFill>
+                      <a:prstDash val="solid"/>
+                      <a:round/>
+                      <a:headEnd type="none" w="med" len="med"/>
+                      <a:tailEnd type="none" w="med" len="med"/>
+                    </a:lnR>
+                    <a:lnT w="6350" cap="flat" cmpd="sng" algn="ctr">
+                      <a:solidFill>
+                        <a:srgbClr val="E2E8F0"/>
+                      </a:solidFill>
+                      <a:prstDash val="solid"/>
+                      <a:round/>
+                      <a:headEnd type="none" w="med" len="med"/>
+                      <a:tailEnd type="none" w="med" len="med"/>
+                    </a:lnT>
+                    <a:lnB w="6350" cap="flat" cmpd="sng" algn="ctr">
+                      <a:solidFill>
+                        <a:srgbClr val="E2E8F0"/>
+                      </a:solidFill>
+                      <a:prstDash val="solid"/>
+                      <a:round/>
+                      <a:headEnd type="none" w="med" len="med"/>
+                      <a:tailEnd type="none" w="med" len="med"/>
+                    </a:lnB>
+                    <a:solidFill>
+                      <a:srgbClr val="FFFFFF"/>
+                    </a:solidFill>
+                  </a:tcPr>
+                </a:tc>
+                <a:tc>
+                  <a:txBody>
+                    <a:bodyPr/>
+                    <a:lstStyle/>
+                    <a:p>
+                      <a:pPr marL="0" indent="0">
+                        <a:buNone/>
+                      </a:pPr>
+                      <a:r>
+                        <a:rPr lang="en-US" sz="800" dirty="0">
+                          <a:solidFill>
+                            <a:srgbClr val="1E293B"/>
+                          </a:solidFill>
+                        </a:rPr>
+                        <a:t>Lookup</a:t>
+                      </a:r>
+                      <a:endParaRPr lang="en-US" sz="800" dirty="0"/>
+                    </a:p>
+                  </a:txBody>
+                  <a:tcPr>
+                    <a:lnL w="6350" cap="flat" cmpd="sng" algn="ctr">
+                      <a:solidFill>
+                        <a:srgbClr val="E2E8F0"/>
+                      </a:solidFill>
+                      <a:prstDash val="solid"/>
+                      <a:round/>
+                      <a:headEnd type="none" w="med" len="med"/>
+                      <a:tailEnd type="none" w="med" len="med"/>
+                    </a:lnL>
+                    <a:lnR w="6350" cap="flat" cmpd="sng" algn="ctr">
+                      <a:solidFill>
+                        <a:srgbClr val="E2E8F0"/>
+                      </a:solidFill>
+                      <a:prstDash val="solid"/>
+                      <a:round/>
+                      <a:headEnd type="none" w="med" len="med"/>
+                      <a:tailEnd type="none" w="med" len="med"/>
+                    </a:lnR>
+                    <a:lnT w="6350" cap="flat" cmpd="sng" algn="ctr">
+                      <a:solidFill>
+                        <a:srgbClr val="E2E8F0"/>
+                      </a:solidFill>
+                      <a:prstDash val="solid"/>
+                      <a:round/>
+                      <a:headEnd type="none" w="med" len="med"/>
+                      <a:tailEnd type="none" w="med" len="med"/>
+                    </a:lnT>
+                    <a:lnB w="6350" cap="flat" cmpd="sng" algn="ctr">
+                      <a:solidFill>
+                        <a:srgbClr val="E2E8F0"/>
+                      </a:solidFill>
+                      <a:prstDash val="solid"/>
+                      <a:round/>
+                      <a:headEnd type="none" w="med" len="med"/>
+                      <a:tailEnd type="none" w="med" len="med"/>
+                    </a:lnB>
+                    <a:solidFill>
+                      <a:srgbClr val="FFFFFF"/>
+                    </a:solidFill>
+                  </a:tcPr>
+                </a:tc>
+                <a:tc>
+                  <a:txBody>
+                    <a:bodyPr/>
+                    <a:lstStyle/>
+                    <a:p>
+                      <a:pPr marL="0" indent="0">
+                        <a:buNone/>
+                      </a:pPr>
+                      <a:r>
+                        <a:rPr lang="en-US" sz="800" dirty="0">
+                          <a:solidFill>
+                            <a:srgbClr val="1E293B"/>
+                          </a:solidFill>
+                        </a:rPr>
+                        <a:t>Business activity sectors (Manufacturing, Service, etc.)</a:t>
+                      </a:r>
+                      <a:endParaRPr lang="en-US" sz="800" dirty="0"/>
+                    </a:p>
+                  </a:txBody>
+                  <a:tcPr>
+                    <a:lnL w="6350" cap="flat" cmpd="sng" algn="ctr">
+                      <a:solidFill>
+                        <a:srgbClr val="E2E8F0"/>
+                      </a:solidFill>
+                      <a:prstDash val="solid"/>
+                      <a:round/>
+                      <a:headEnd type="none" w="med" len="med"/>
+                      <a:tailEnd type="none" w="med" len="med"/>
+                    </a:lnL>
+                    <a:lnR w="6350" cap="flat" cmpd="sng" algn="ctr">
+                      <a:solidFill>
+                        <a:srgbClr val="E2E8F0"/>
+                      </a:solidFill>
+                      <a:prstDash val="solid"/>
+                      <a:round/>
+                      <a:headEnd type="none" w="med" len="med"/>
+                      <a:tailEnd type="none" w="med" len="med"/>
+                    </a:lnR>
+                    <a:lnT w="6350" cap="flat" cmpd="sng" algn="ctr">
+                      <a:solidFill>
+                        <a:srgbClr val="E2E8F0"/>
+                      </a:solidFill>
+                      <a:prstDash val="solid"/>
+                      <a:round/>
+                      <a:headEnd type="none" w="med" len="med"/>
+                      <a:tailEnd type="none" w="med" len="med"/>
+                    </a:lnT>
+                    <a:lnB w="6350" cap="flat" cmpd="sng" algn="ctr">
+                      <a:solidFill>
+                        <a:srgbClr val="E2E8F0"/>
+                      </a:solidFill>
+                      <a:prstDash val="solid"/>
+                      <a:round/>
+                      <a:headEnd type="none" w="med" len="med"/>
+                      <a:tailEnd type="none" w="med" len="med"/>
+                    </a:lnB>
+                    <a:solidFill>
+                      <a:srgbClr val="FFFFFF"/>
+                    </a:solidFill>
+                  </a:tcPr>
+                </a:tc>
+                <a:tc>
+                  <a:txBody>
+                    <a:bodyPr/>
+                    <a:lstStyle/>
+                    <a:p>
+                      <a:pPr marL="0" indent="0">
+                        <a:buNone/>
+                      </a:pPr>
+                      <a:r>
+                        <a:rPr lang="en-US" sz="800" b="1" dirty="0">
+                          <a:solidFill>
+                            <a:srgbClr val="2A9D8F"/>
+                          </a:solidFill>
+                        </a:rPr>
+                        <a:t>5</a:t>
+                      </a:r>
+                      <a:endParaRPr lang="en-US" sz="800" dirty="0"/>
+                    </a:p>
+                  </a:txBody>
+                  <a:tcPr>
+                    <a:lnL w="6350" cap="flat" cmpd="sng" algn="ctr">
+                      <a:solidFill>
+                        <a:srgbClr val="E2E8F0"/>
+                      </a:solidFill>
+                      <a:prstDash val="solid"/>
+                      <a:round/>
+                      <a:headEnd type="none" w="med" len="med"/>
+                      <a:tailEnd type="none" w="med" len="med"/>
+                    </a:lnL>
+                    <a:lnR w="6350" cap="flat" cmpd="sng" algn="ctr">
+                      <a:solidFill>
+                        <a:srgbClr val="E2E8F0"/>
+                      </a:solidFill>
+                      <a:prstDash val="solid"/>
+                      <a:round/>
+                      <a:headEnd type="none" w="med" len="med"/>
+                      <a:tailEnd type="none" w="med" len="med"/>
+                    </a:lnR>
+                    <a:lnT w="6350" cap="flat" cmpd="sng" algn="ctr">
+                      <a:solidFill>
+                        <a:srgbClr val="E2E8F0"/>
+                      </a:solidFill>
+                      <a:prstDash val="solid"/>
+                      <a:round/>
+                      <a:headEnd type="none" w="med" len="med"/>
+                      <a:tailEnd type="none" w="med" len="med"/>
+                    </a:lnT>
+                    <a:lnB w="6350" cap="flat" cmpd="sng" algn="ctr">
+                      <a:solidFill>
+                        <a:srgbClr val="E2E8F0"/>
+                      </a:solidFill>
+                      <a:prstDash val="solid"/>
+                      <a:round/>
+                      <a:headEnd type="none" w="med" len="med"/>
+                      <a:tailEnd type="none" w="med" len="med"/>
+                    </a:lnB>
+                    <a:solidFill>
+                      <a:srgbClr val="FFFFFF"/>
+                    </a:solidFill>
+                  </a:tcPr>
+                </a:tc>
+                <a:extLst>
+                  <a:ext uri="{0D108BD9-81ED-4DB2-BD59-A6C34878D82A}">
+                    <a16:rowId xmlns:a16="http://schemas.microsoft.com/office/drawing/2014/main" val="470788513"/>
+                  </a:ext>
+                </a:extLst>
+              </a:tr>
+              <a:tr h="288963">
                 <a:tc>
                   <a:txBody>
                     <a:bodyPr/>
@@ -16386,7 +15417,7 @@
                             <a:srgbClr val="2A9D8F"/>
                           </a:solidFill>
                         </a:rPr>
-                        <a:t>1,002</a:t>
+                        <a:t>1,000</a:t>
                       </a:r>
                       <a:endParaRPr lang="en-US" sz="800" dirty="0"/>
                     </a:p>
@@ -16439,7 +15470,7 @@
                   </a:ext>
                 </a:extLst>
               </a:tr>
-              <a:tr h="0">
+              <a:tr h="288963">
                 <a:tc>
                   <a:txBody>
                     <a:bodyPr/>
@@ -16690,7 +15721,7 @@
                   </a:ext>
                 </a:extLst>
               </a:tr>
-              <a:tr h="0">
+              <a:tr h="288963">
                 <a:tc>
                   <a:txBody>
                     <a:bodyPr/>
@@ -16705,7 +15736,7 @@
                             <a:srgbClr val="1B3A5C"/>
                           </a:solidFill>
                         </a:rPr>
-                        <a:t>Category</a:t>
+                        <a:t>Owner</a:t>
                       </a:r>
                       <a:endParaRPr lang="en-US" sz="800" dirty="0"/>
                     </a:p>
@@ -16766,7 +15797,7 @@
                             <a:srgbClr val="1E293B"/>
                           </a:solidFill>
                         </a:rPr>
-                        <a:t>Lookup</a:t>
+                        <a:t>Reference</a:t>
                       </a:r>
                       <a:endParaRPr lang="en-US" sz="800" dirty="0"/>
                     </a:p>
@@ -16827,7 +15858,7 @@
                             <a:srgbClr val="1E293B"/>
                           </a:solidFill>
                         </a:rPr>
-                        <a:t>Taxpayer categories (Individual, SME, Corp)</a:t>
+                        <a:t>Business owners with ownership percentages</a:t>
                       </a:r>
                       <a:endParaRPr lang="en-US" sz="800" dirty="0"/>
                     </a:p>
@@ -16888,7 +15919,7 @@
                             <a:srgbClr val="2A9D8F"/>
                           </a:solidFill>
                         </a:rPr>
-                        <a:t>5</a:t>
+                        <a:t>~1,956</a:t>
                       </a:r>
                       <a:endParaRPr lang="en-US" sz="800" dirty="0"/>
                     </a:p>
@@ -16937,11 +15968,11 @@
                 </a:tc>
                 <a:extLst>
                   <a:ext uri="{0D108BD9-81ED-4DB2-BD59-A6C34878D82A}">
-                    <a16:rowId xmlns:a16="http://schemas.microsoft.com/office/drawing/2014/main" val="10003"/>
+                    <a16:rowId xmlns:a16="http://schemas.microsoft.com/office/drawing/2014/main" val="10007"/>
                   </a:ext>
                 </a:extLst>
               </a:tr>
-              <a:tr h="0">
+              <a:tr h="288963">
                 <a:tc>
                   <a:txBody>
                     <a:bodyPr/>
@@ -17192,7 +16223,7 @@
                   </a:ext>
                 </a:extLst>
               </a:tr>
-              <a:tr h="0">
+              <a:tr h="288963">
                 <a:tc>
                   <a:txBody>
                     <a:bodyPr/>
@@ -17443,7 +16474,7 @@
                   </a:ext>
                 </a:extLst>
               </a:tr>
-              <a:tr h="0">
+              <a:tr h="288963">
                 <a:tc>
                   <a:txBody>
                     <a:bodyPr/>
@@ -17694,257 +16725,6 @@
                   </a:ext>
                 </a:extLst>
               </a:tr>
-              <a:tr h="0">
-                <a:tc>
-                  <a:txBody>
-                    <a:bodyPr/>
-                    <a:lstStyle/>
-                    <a:p>
-                      <a:pPr marL="0" indent="0">
-                        <a:buNone/>
-                      </a:pPr>
-                      <a:r>
-                        <a:rPr lang="en-US" sz="800" b="1" dirty="0">
-                          <a:solidFill>
-                            <a:srgbClr val="1B3A5C"/>
-                          </a:solidFill>
-                        </a:rPr>
-                        <a:t>Owner</a:t>
-                      </a:r>
-                      <a:endParaRPr lang="en-US" sz="800" dirty="0"/>
-                    </a:p>
-                  </a:txBody>
-                  <a:tcPr>
-                    <a:lnL w="6350" cap="flat" cmpd="sng" algn="ctr">
-                      <a:solidFill>
-                        <a:srgbClr val="E2E8F0"/>
-                      </a:solidFill>
-                      <a:prstDash val="solid"/>
-                      <a:round/>
-                      <a:headEnd type="none" w="med" len="med"/>
-                      <a:tailEnd type="none" w="med" len="med"/>
-                    </a:lnL>
-                    <a:lnR w="6350" cap="flat" cmpd="sng" algn="ctr">
-                      <a:solidFill>
-                        <a:srgbClr val="E2E8F0"/>
-                      </a:solidFill>
-                      <a:prstDash val="solid"/>
-                      <a:round/>
-                      <a:headEnd type="none" w="med" len="med"/>
-                      <a:tailEnd type="none" w="med" len="med"/>
-                    </a:lnR>
-                    <a:lnT w="6350" cap="flat" cmpd="sng" algn="ctr">
-                      <a:solidFill>
-                        <a:srgbClr val="E2E8F0"/>
-                      </a:solidFill>
-                      <a:prstDash val="solid"/>
-                      <a:round/>
-                      <a:headEnd type="none" w="med" len="med"/>
-                      <a:tailEnd type="none" w="med" len="med"/>
-                    </a:lnT>
-                    <a:lnB w="6350" cap="flat" cmpd="sng" algn="ctr">
-                      <a:solidFill>
-                        <a:srgbClr val="E2E8F0"/>
-                      </a:solidFill>
-                      <a:prstDash val="solid"/>
-                      <a:round/>
-                      <a:headEnd type="none" w="med" len="med"/>
-                      <a:tailEnd type="none" w="med" len="med"/>
-                    </a:lnB>
-                    <a:solidFill>
-                      <a:srgbClr val="FFFFFF"/>
-                    </a:solidFill>
-                  </a:tcPr>
-                </a:tc>
-                <a:tc>
-                  <a:txBody>
-                    <a:bodyPr/>
-                    <a:lstStyle/>
-                    <a:p>
-                      <a:pPr marL="0" indent="0">
-                        <a:buNone/>
-                      </a:pPr>
-                      <a:r>
-                        <a:rPr lang="en-US" sz="800" dirty="0">
-                          <a:solidFill>
-                            <a:srgbClr val="1E293B"/>
-                          </a:solidFill>
-                        </a:rPr>
-                        <a:t>Reference</a:t>
-                      </a:r>
-                      <a:endParaRPr lang="en-US" sz="800" dirty="0"/>
-                    </a:p>
-                  </a:txBody>
-                  <a:tcPr>
-                    <a:lnL w="6350" cap="flat" cmpd="sng" algn="ctr">
-                      <a:solidFill>
-                        <a:srgbClr val="E2E8F0"/>
-                      </a:solidFill>
-                      <a:prstDash val="solid"/>
-                      <a:round/>
-                      <a:headEnd type="none" w="med" len="med"/>
-                      <a:tailEnd type="none" w="med" len="med"/>
-                    </a:lnL>
-                    <a:lnR w="6350" cap="flat" cmpd="sng" algn="ctr">
-                      <a:solidFill>
-                        <a:srgbClr val="E2E8F0"/>
-                      </a:solidFill>
-                      <a:prstDash val="solid"/>
-                      <a:round/>
-                      <a:headEnd type="none" w="med" len="med"/>
-                      <a:tailEnd type="none" w="med" len="med"/>
-                    </a:lnR>
-                    <a:lnT w="6350" cap="flat" cmpd="sng" algn="ctr">
-                      <a:solidFill>
-                        <a:srgbClr val="E2E8F0"/>
-                      </a:solidFill>
-                      <a:prstDash val="solid"/>
-                      <a:round/>
-                      <a:headEnd type="none" w="med" len="med"/>
-                      <a:tailEnd type="none" w="med" len="med"/>
-                    </a:lnT>
-                    <a:lnB w="6350" cap="flat" cmpd="sng" algn="ctr">
-                      <a:solidFill>
-                        <a:srgbClr val="E2E8F0"/>
-                      </a:solidFill>
-                      <a:prstDash val="solid"/>
-                      <a:round/>
-                      <a:headEnd type="none" w="med" len="med"/>
-                      <a:tailEnd type="none" w="med" len="med"/>
-                    </a:lnB>
-                    <a:solidFill>
-                      <a:srgbClr val="FFFFFF"/>
-                    </a:solidFill>
-                  </a:tcPr>
-                </a:tc>
-                <a:tc>
-                  <a:txBody>
-                    <a:bodyPr/>
-                    <a:lstStyle/>
-                    <a:p>
-                      <a:pPr marL="0" indent="0">
-                        <a:buNone/>
-                      </a:pPr>
-                      <a:r>
-                        <a:rPr lang="en-US" sz="800" dirty="0">
-                          <a:solidFill>
-                            <a:srgbClr val="1E293B"/>
-                          </a:solidFill>
-                        </a:rPr>
-                        <a:t>Business owners with ownership percentages</a:t>
-                      </a:r>
-                      <a:endParaRPr lang="en-US" sz="800" dirty="0"/>
-                    </a:p>
-                  </a:txBody>
-                  <a:tcPr>
-                    <a:lnL w="6350" cap="flat" cmpd="sng" algn="ctr">
-                      <a:solidFill>
-                        <a:srgbClr val="E2E8F0"/>
-                      </a:solidFill>
-                      <a:prstDash val="solid"/>
-                      <a:round/>
-                      <a:headEnd type="none" w="med" len="med"/>
-                      <a:tailEnd type="none" w="med" len="med"/>
-                    </a:lnL>
-                    <a:lnR w="6350" cap="flat" cmpd="sng" algn="ctr">
-                      <a:solidFill>
-                        <a:srgbClr val="E2E8F0"/>
-                      </a:solidFill>
-                      <a:prstDash val="solid"/>
-                      <a:round/>
-                      <a:headEnd type="none" w="med" len="med"/>
-                      <a:tailEnd type="none" w="med" len="med"/>
-                    </a:lnR>
-                    <a:lnT w="6350" cap="flat" cmpd="sng" algn="ctr">
-                      <a:solidFill>
-                        <a:srgbClr val="E2E8F0"/>
-                      </a:solidFill>
-                      <a:prstDash val="solid"/>
-                      <a:round/>
-                      <a:headEnd type="none" w="med" len="med"/>
-                      <a:tailEnd type="none" w="med" len="med"/>
-                    </a:lnT>
-                    <a:lnB w="6350" cap="flat" cmpd="sng" algn="ctr">
-                      <a:solidFill>
-                        <a:srgbClr val="E2E8F0"/>
-                      </a:solidFill>
-                      <a:prstDash val="solid"/>
-                      <a:round/>
-                      <a:headEnd type="none" w="med" len="med"/>
-                      <a:tailEnd type="none" w="med" len="med"/>
-                    </a:lnB>
-                    <a:solidFill>
-                      <a:srgbClr val="FFFFFF"/>
-                    </a:solidFill>
-                  </a:tcPr>
-                </a:tc>
-                <a:tc>
-                  <a:txBody>
-                    <a:bodyPr/>
-                    <a:lstStyle/>
-                    <a:p>
-                      <a:pPr marL="0" indent="0">
-                        <a:buNone/>
-                      </a:pPr>
-                      <a:r>
-                        <a:rPr lang="en-US" sz="800" b="1" dirty="0">
-                          <a:solidFill>
-                            <a:srgbClr val="2A9D8F"/>
-                          </a:solidFill>
-                        </a:rPr>
-                        <a:t>~1,956</a:t>
-                      </a:r>
-                      <a:endParaRPr lang="en-US" sz="800" dirty="0"/>
-                    </a:p>
-                  </a:txBody>
-                  <a:tcPr>
-                    <a:lnL w="6350" cap="flat" cmpd="sng" algn="ctr">
-                      <a:solidFill>
-                        <a:srgbClr val="E2E8F0"/>
-                      </a:solidFill>
-                      <a:prstDash val="solid"/>
-                      <a:round/>
-                      <a:headEnd type="none" w="med" len="med"/>
-                      <a:tailEnd type="none" w="med" len="med"/>
-                    </a:lnL>
-                    <a:lnR w="6350" cap="flat" cmpd="sng" algn="ctr">
-                      <a:solidFill>
-                        <a:srgbClr val="E2E8F0"/>
-                      </a:solidFill>
-                      <a:prstDash val="solid"/>
-                      <a:round/>
-                      <a:headEnd type="none" w="med" len="med"/>
-                      <a:tailEnd type="none" w="med" len="med"/>
-                    </a:lnR>
-                    <a:lnT w="6350" cap="flat" cmpd="sng" algn="ctr">
-                      <a:solidFill>
-                        <a:srgbClr val="E2E8F0"/>
-                      </a:solidFill>
-                      <a:prstDash val="solid"/>
-                      <a:round/>
-                      <a:headEnd type="none" w="med" len="med"/>
-                      <a:tailEnd type="none" w="med" len="med"/>
-                    </a:lnT>
-                    <a:lnB w="6350" cap="flat" cmpd="sng" algn="ctr">
-                      <a:solidFill>
-                        <a:srgbClr val="E2E8F0"/>
-                      </a:solidFill>
-                      <a:prstDash val="solid"/>
-                      <a:round/>
-                      <a:headEnd type="none" w="med" len="med"/>
-                      <a:tailEnd type="none" w="med" len="med"/>
-                    </a:lnB>
-                    <a:solidFill>
-                      <a:srgbClr val="FFFFFF"/>
-                    </a:solidFill>
-                  </a:tcPr>
-                </a:tc>
-                <a:extLst>
-                  <a:ext uri="{0D108BD9-81ED-4DB2-BD59-A6C34878D82A}">
-                    <a16:rowId xmlns:a16="http://schemas.microsoft.com/office/drawing/2014/main" val="10007"/>
-                  </a:ext>
-                </a:extLst>
-              </a:tr>
             </a:tbl>
           </a:graphicData>
         </a:graphic>
@@ -17957,7 +16737,7 @@
         </p:nvSpPr>
         <p:spPr>
           <a:xfrm>
-            <a:off x="457200" y="3931920"/>
+            <a:off x="457200" y="4238895"/>
             <a:ext cx="8229600" cy="457200"/>
           </a:xfrm>
           <a:prstGeom prst="rect">
@@ -17979,7 +16759,7 @@
                   <a:srgbClr val="64748B"/>
                 </a:solidFill>
               </a:rPr>
-              <a:t>Data Generator (02_TransactionData.sql): Also includes Structure (5) &amp; Activity (5) lookup tables. 1,000 taxpayers, 4 years (2020–2023), 99.8% filing coverage, 58,813 records. Verified: 10 FKs, 19 CHECK constraints, 37 indexes, 0 orphans, 0 NULLs (see Source Database Verification document).</a:t>
+              <a:t>Data Generator (02_TransactionData.sql): 1,000 taxpayers, 4 years (2020–2023), 99.8% filing coverage, 58,813 records. Verified: 10 FKs, 19 CHECK constraints, 35 indexes, 0 orphans, 0 NULLs (see Source Database Verification document).</a:t>
             </a:r>
             <a:endParaRPr lang="en-US" sz="1000" dirty="0"/>
           </a:p>

--- a/Documents/Final_Presentation.pptx
+++ b/Documents/Final_Presentation.pptx
@@ -5824,7 +5824,7 @@
                     <a:srgbClr val="64748B"/>
                   </a:solidFill>
                 </a:rPr>
-                <a:t>Benchmarks, POC Evidence, Key Insights</a:t>
+                <a:t>POC Evidence, 4 Challenges Addressed, Key Insights</a:t>
               </a:r>
               <a:endParaRPr lang="en-US" sz="1050" dirty="0"/>
             </a:p>
@@ -10549,77 +10549,40 @@
           </a:p>
         </p:txBody>
       </p:sp>
-      <p:sp>
-        <p:nvSpPr>
-          <p:cNvPr id="6" name="Shape 4"/>
-          <p:cNvSpPr/>
-          <p:nvPr/>
-        </p:nvSpPr>
-        <p:spPr>
-          <a:xfrm>
-            <a:off x="274320" y="960120"/>
-            <a:ext cx="1508760" cy="1828800"/>
-          </a:xfrm>
-          <a:prstGeom prst="rect">
-            <a:avLst/>
-          </a:prstGeom>
-          <a:solidFill>
-            <a:srgbClr val="FFFFFF"/>
-          </a:solidFill>
-          <a:ln/>
-          <a:effectLst>
-            <a:outerShdw blurRad="50800" dist="25400" dir="8100000" algn="bl" rotWithShape="0">
-              <a:srgbClr val="000000">
-                <a:alpha val="10000"/>
-              </a:srgbClr>
-            </a:outerShdw>
-          </a:effectLst>
-        </p:spPr>
-        <p:txBody>
-          <a:bodyPr/>
-          <a:lstStyle/>
-          <a:p>
-            <a:endParaRPr/>
-          </a:p>
-        </p:txBody>
-      </p:sp>
-      <p:sp>
-        <p:nvSpPr>
-          <p:cNvPr id="7" name="Shape 5"/>
-          <p:cNvSpPr/>
-          <p:nvPr/>
-        </p:nvSpPr>
-        <p:spPr>
-          <a:xfrm>
-            <a:off x="274320" y="960120"/>
-            <a:ext cx="1508760" cy="365760"/>
-          </a:xfrm>
-          <a:prstGeom prst="rect">
-            <a:avLst/>
-          </a:prstGeom>
-          <a:solidFill>
-            <a:srgbClr val="475569"/>
-          </a:solidFill>
-          <a:ln/>
-        </p:spPr>
-        <p:txBody>
-          <a:bodyPr/>
-          <a:lstStyle/>
-          <a:p>
-            <a:endParaRPr/>
-          </a:p>
-        </p:txBody>
-      </p:sp>
-      <p:sp>
-        <p:nvSpPr>
-          <p:cNvPr id="8" name="Text 6"/>
-          <p:cNvSpPr/>
-          <p:nvPr/>
-        </p:nvSpPr>
-        <p:spPr>
-          <a:xfrm>
-            <a:off x="274320" y="960120"/>
-            <a:ext cx="1508760" cy="365760"/>
+      <p:pic>
+        <p:nvPicPr>
+          <p:cNvPr id="100" name="Figure 3.1"/>
+          <p:cNvPicPr>
+            <a:picLocks noChangeAspect="1"/>
+          </p:cNvPicPr>
+          <p:nvPr/>
+        </p:nvPicPr>
+        <p:blipFill>
+          <a:blip r:embed="rId3"/>
+          <a:stretch>
+            <a:fillRect/>
+          </a:stretch>
+        </p:blipFill>
+        <p:spPr>
+          <a:xfrm>
+            <a:off x="350000" y="830000"/>
+            <a:ext cx="8450000" cy="3780000"/>
+          </a:xfrm>
+          <a:prstGeom prst="rect">
+            <a:avLst/>
+          </a:prstGeom>
+        </p:spPr>
+      </p:pic>
+      <p:sp>
+        <p:nvSpPr>
+          <p:cNvPr id="101" name="Caption"/>
+          <p:cNvSpPr/>
+          <p:nvPr/>
+        </p:nvSpPr>
+        <p:spPr>
+          <a:xfrm>
+            <a:off x="457200" y="4650000"/>
+            <a:ext cx="8229600" cy="274320"/>
           </a:xfrm>
           <a:prstGeom prst="rect">
             <a:avLst/>
@@ -10628,1427 +10591,29 @@
           <a:ln/>
         </p:spPr>
         <p:txBody>
-          <a:bodyPr wrap="square" rtlCol="0" anchor="ctr"/>
+          <a:bodyPr wrap="square" rtlCol="0" anchor="t"/>
           <a:lstStyle/>
           <a:p>
             <a:pPr marL="0" indent="0" algn="ctr">
               <a:buNone/>
             </a:pPr>
             <a:r>
-              <a:rPr lang="en-US" sz="1100" b="1" dirty="0">
-                <a:solidFill>
-                  <a:srgbClr val="FFFFFF"/>
-                </a:solidFill>
-              </a:rPr>
-              <a:t>Source</a:t>
-            </a:r>
-            <a:endParaRPr lang="en-US" sz="1100" dirty="0"/>
-          </a:p>
-        </p:txBody>
-      </p:sp>
-      <p:sp>
-        <p:nvSpPr>
-          <p:cNvPr id="9" name="Text 7"/>
-          <p:cNvSpPr/>
-          <p:nvPr/>
-        </p:nvSpPr>
-        <p:spPr>
-          <a:xfrm>
-            <a:off x="274320" y="1371600"/>
-            <a:ext cx="1508760" cy="274320"/>
-          </a:xfrm>
-          <a:prstGeom prst="rect">
-            <a:avLst/>
-          </a:prstGeom>
-          <a:noFill/>
-          <a:ln/>
-        </p:spPr>
-        <p:txBody>
-          <a:bodyPr wrap="square" rtlCol="0" anchor="ctr"/>
-          <a:lstStyle/>
-          <a:p>
-            <a:pPr marL="0" indent="0" algn="ctr">
-              <a:buNone/>
-            </a:pPr>
-            <a:r>
-              <a:rPr lang="en-US" sz="850" b="1" dirty="0">
+              <a:rPr lang="en-US" sz="900" b="1" dirty="0">
                 <a:solidFill>
                   <a:srgbClr val="1B3A5C"/>
                 </a:solidFill>
+                <a:latin typeface="Calibri"/>
               </a:rPr>
-              <a:t>TaxSystemDB</a:t>
+              <a:t xml:space="preserve">Figure 3.1: </a:t>
             </a:r>
-            <a:endParaRPr lang="en-US" sz="850" dirty="0"/>
-          </a:p>
-        </p:txBody>
-      </p:sp>
-      <p:sp>
-        <p:nvSpPr>
-          <p:cNvPr id="10" name="Text 8"/>
-          <p:cNvSpPr/>
-          <p:nvPr/>
-        </p:nvSpPr>
-        <p:spPr>
-          <a:xfrm>
-            <a:off x="320040" y="1691640"/>
-            <a:ext cx="1417320" cy="914400"/>
-          </a:xfrm>
-          <a:prstGeom prst="rect">
-            <a:avLst/>
-          </a:prstGeom>
-          <a:noFill/>
-          <a:ln/>
-        </p:spPr>
-        <p:txBody>
-          <a:bodyPr wrap="square" rtlCol="0" anchor="t"/>
-          <a:lstStyle/>
-          <a:p>
-            <a:pPr marL="0" indent="0" algn="ctr">
-              <a:buNone/>
-            </a:pPr>
             <a:r>
-              <a:rPr lang="en-US" sz="850" dirty="0">
+              <a:rPr lang="en-US" sz="900" dirty="0">
                 <a:solidFill>
                   <a:srgbClr val="64748B"/>
                 </a:solidFill>
+                <a:latin typeface="Calibri"/>
               </a:rPr>
-              <a:t>9 tables</a:t>
-            </a:r>
-            <a:endParaRPr lang="en-US" sz="850" dirty="0"/>
-          </a:p>
-          <a:p>
-            <a:pPr marL="0" indent="0" algn="ctr">
-              <a:buNone/>
-            </a:pPr>
-            <a:r>
-              <a:rPr lang="en-US" sz="850" dirty="0">
-                <a:solidFill>
-                  <a:srgbClr val="64748B"/>
-                </a:solidFill>
-              </a:rPr>
-              <a:t>+ 3 lookups</a:t>
-            </a:r>
-            <a:endParaRPr lang="en-US" sz="850" dirty="0"/>
-          </a:p>
-        </p:txBody>
-      </p:sp>
-      <p:sp>
-        <p:nvSpPr>
-          <p:cNvPr id="11" name="Shape 9"/>
-          <p:cNvSpPr/>
-          <p:nvPr/>
-        </p:nvSpPr>
-        <p:spPr>
-          <a:xfrm>
-            <a:off x="1965960" y="960120"/>
-            <a:ext cx="1508760" cy="1828800"/>
-          </a:xfrm>
-          <a:prstGeom prst="rect">
-            <a:avLst/>
-          </a:prstGeom>
-          <a:solidFill>
-            <a:srgbClr val="FFFFFF"/>
-          </a:solidFill>
-          <a:ln/>
-          <a:effectLst>
-            <a:outerShdw blurRad="50800" dist="25400" dir="8100000" algn="bl" rotWithShape="0">
-              <a:srgbClr val="000000">
-                <a:alpha val="10000"/>
-              </a:srgbClr>
-            </a:outerShdw>
-          </a:effectLst>
-        </p:spPr>
-        <p:txBody>
-          <a:bodyPr/>
-          <a:lstStyle/>
-          <a:p>
-            <a:endParaRPr/>
-          </a:p>
-        </p:txBody>
-      </p:sp>
-      <p:sp>
-        <p:nvSpPr>
-          <p:cNvPr id="12" name="Shape 10"/>
-          <p:cNvSpPr/>
-          <p:nvPr/>
-        </p:nvSpPr>
-        <p:spPr>
-          <a:xfrm>
-            <a:off x="1965960" y="960120"/>
-            <a:ext cx="1508760" cy="365760"/>
-          </a:xfrm>
-          <a:prstGeom prst="rect">
-            <a:avLst/>
-          </a:prstGeom>
-          <a:solidFill>
-            <a:srgbClr val="94A3B8"/>
-          </a:solidFill>
-          <a:ln/>
-        </p:spPr>
-        <p:txBody>
-          <a:bodyPr/>
-          <a:lstStyle/>
-          <a:p>
-            <a:endParaRPr/>
-          </a:p>
-        </p:txBody>
-      </p:sp>
-      <p:sp>
-        <p:nvSpPr>
-          <p:cNvPr id="13" name="Text 11"/>
-          <p:cNvSpPr/>
-          <p:nvPr/>
-        </p:nvSpPr>
-        <p:spPr>
-          <a:xfrm>
-            <a:off x="1965960" y="960120"/>
-            <a:ext cx="1508760" cy="365760"/>
-          </a:xfrm>
-          <a:prstGeom prst="rect">
-            <a:avLst/>
-          </a:prstGeom>
-          <a:noFill/>
-          <a:ln/>
-        </p:spPr>
-        <p:txBody>
-          <a:bodyPr wrap="square" rtlCol="0" anchor="ctr"/>
-          <a:lstStyle/>
-          <a:p>
-            <a:pPr marL="0" indent="0" algn="ctr">
-              <a:buNone/>
-            </a:pPr>
-            <a:r>
-              <a:rPr lang="en-US" sz="1100" b="1" dirty="0">
-                <a:solidFill>
-                  <a:srgbClr val="FFFFFF"/>
-                </a:solidFill>
-              </a:rPr>
-              <a:t>Staging</a:t>
-            </a:r>
-            <a:endParaRPr lang="en-US" sz="1100" dirty="0"/>
-          </a:p>
-        </p:txBody>
-      </p:sp>
-      <p:sp>
-        <p:nvSpPr>
-          <p:cNvPr id="14" name="Text 12"/>
-          <p:cNvSpPr/>
-          <p:nvPr/>
-        </p:nvSpPr>
-        <p:spPr>
-          <a:xfrm>
-            <a:off x="1965960" y="1371600"/>
-            <a:ext cx="1508760" cy="274320"/>
-          </a:xfrm>
-          <a:prstGeom prst="rect">
-            <a:avLst/>
-          </a:prstGeom>
-          <a:noFill/>
-          <a:ln/>
-        </p:spPr>
-        <p:txBody>
-          <a:bodyPr wrap="square" rtlCol="0" anchor="ctr"/>
-          <a:lstStyle/>
-          <a:p>
-            <a:pPr marL="0" indent="0" algn="ctr">
-              <a:buNone/>
-            </a:pPr>
-            <a:r>
-              <a:rPr lang="en-US" sz="850" b="1" dirty="0">
-                <a:solidFill>
-                  <a:srgbClr val="1B3A5C"/>
-                </a:solidFill>
-              </a:rPr>
-              <a:t>DV_Staging</a:t>
-            </a:r>
-            <a:endParaRPr lang="en-US" sz="850" dirty="0"/>
-          </a:p>
-        </p:txBody>
-      </p:sp>
-      <p:sp>
-        <p:nvSpPr>
-          <p:cNvPr id="15" name="Text 13"/>
-          <p:cNvSpPr/>
-          <p:nvPr/>
-        </p:nvSpPr>
-        <p:spPr>
-          <a:xfrm>
-            <a:off x="2011680" y="1691640"/>
-            <a:ext cx="1417320" cy="914400"/>
-          </a:xfrm>
-          <a:prstGeom prst="rect">
-            <a:avLst/>
-          </a:prstGeom>
-          <a:noFill/>
-          <a:ln/>
-        </p:spPr>
-        <p:txBody>
-          <a:bodyPr wrap="square" rtlCol="0" anchor="t"/>
-          <a:lstStyle/>
-          <a:p>
-            <a:pPr marL="0" indent="0" algn="ctr">
-              <a:buNone/>
-            </a:pPr>
-            <a:r>
-              <a:rPr lang="en-US" sz="850" dirty="0">
-                <a:solidFill>
-                  <a:srgbClr val="64748B"/>
-                </a:solidFill>
-              </a:rPr>
-              <a:t>9 STG</a:t>
-            </a:r>
-            <a:endParaRPr lang="en-US" sz="850" dirty="0"/>
-          </a:p>
-          <a:p>
-            <a:pPr marL="0" indent="0" algn="ctr">
-              <a:buNone/>
-            </a:pPr>
-            <a:r>
-              <a:rPr lang="en-US" sz="850" dirty="0">
-                <a:solidFill>
-                  <a:srgbClr val="64748B"/>
-                </a:solidFill>
-              </a:rPr>
-              <a:t>tables</a:t>
-            </a:r>
-            <a:endParaRPr lang="en-US" sz="850" dirty="0"/>
-          </a:p>
-        </p:txBody>
-      </p:sp>
-      <p:sp>
-        <p:nvSpPr>
-          <p:cNvPr id="16" name="Shape 14"/>
-          <p:cNvSpPr/>
-          <p:nvPr/>
-        </p:nvSpPr>
-        <p:spPr>
-          <a:xfrm>
-            <a:off x="3657600" y="960120"/>
-            <a:ext cx="1508760" cy="1828800"/>
-          </a:xfrm>
-          <a:prstGeom prst="rect">
-            <a:avLst/>
-          </a:prstGeom>
-          <a:solidFill>
-            <a:srgbClr val="FFFFFF"/>
-          </a:solidFill>
-          <a:ln/>
-          <a:effectLst>
-            <a:outerShdw blurRad="50800" dist="25400" dir="8100000" algn="bl" rotWithShape="0">
-              <a:srgbClr val="000000">
-                <a:alpha val="10000"/>
-              </a:srgbClr>
-            </a:outerShdw>
-          </a:effectLst>
-        </p:spPr>
-        <p:txBody>
-          <a:bodyPr/>
-          <a:lstStyle/>
-          <a:p>
-            <a:endParaRPr/>
-          </a:p>
-        </p:txBody>
-      </p:sp>
-      <p:sp>
-        <p:nvSpPr>
-          <p:cNvPr id="17" name="Shape 15"/>
-          <p:cNvSpPr/>
-          <p:nvPr/>
-        </p:nvSpPr>
-        <p:spPr>
-          <a:xfrm>
-            <a:off x="3657600" y="960120"/>
-            <a:ext cx="1508760" cy="365760"/>
-          </a:xfrm>
-          <a:prstGeom prst="rect">
-            <a:avLst/>
-          </a:prstGeom>
-          <a:solidFill>
-            <a:srgbClr val="CD7F32"/>
-          </a:solidFill>
-          <a:ln/>
-        </p:spPr>
-        <p:txBody>
-          <a:bodyPr/>
-          <a:lstStyle/>
-          <a:p>
-            <a:endParaRPr/>
-          </a:p>
-        </p:txBody>
-      </p:sp>
-      <p:sp>
-        <p:nvSpPr>
-          <p:cNvPr id="18" name="Text 16"/>
-          <p:cNvSpPr/>
-          <p:nvPr/>
-        </p:nvSpPr>
-        <p:spPr>
-          <a:xfrm>
-            <a:off x="3657600" y="960120"/>
-            <a:ext cx="1508760" cy="365760"/>
-          </a:xfrm>
-          <a:prstGeom prst="rect">
-            <a:avLst/>
-          </a:prstGeom>
-          <a:noFill/>
-          <a:ln/>
-        </p:spPr>
-        <p:txBody>
-          <a:bodyPr wrap="square" rtlCol="0" anchor="ctr"/>
-          <a:lstStyle/>
-          <a:p>
-            <a:pPr marL="0" indent="0" algn="ctr">
-              <a:buNone/>
-            </a:pPr>
-            <a:r>
-              <a:rPr lang="en-US" sz="1100" b="1" dirty="0">
-                <a:solidFill>
-                  <a:srgbClr val="FFFFFF"/>
-                </a:solidFill>
-              </a:rPr>
-              <a:t>Bronze</a:t>
-            </a:r>
-            <a:endParaRPr lang="en-US" sz="1100" dirty="0"/>
-          </a:p>
-        </p:txBody>
-      </p:sp>
-      <p:sp>
-        <p:nvSpPr>
-          <p:cNvPr id="19" name="Text 17"/>
-          <p:cNvSpPr/>
-          <p:nvPr/>
-        </p:nvSpPr>
-        <p:spPr>
-          <a:xfrm>
-            <a:off x="3657600" y="1371600"/>
-            <a:ext cx="1508760" cy="274320"/>
-          </a:xfrm>
-          <a:prstGeom prst="rect">
-            <a:avLst/>
-          </a:prstGeom>
-          <a:noFill/>
-          <a:ln/>
-        </p:spPr>
-        <p:txBody>
-          <a:bodyPr wrap="square" rtlCol="0" anchor="ctr"/>
-          <a:lstStyle/>
-          <a:p>
-            <a:pPr marL="0" indent="0" algn="ctr">
-              <a:buNone/>
-            </a:pPr>
-            <a:r>
-              <a:rPr lang="en-US" sz="850" b="1" dirty="0">
-                <a:solidFill>
-                  <a:srgbClr val="1B3A5C"/>
-                </a:solidFill>
-              </a:rPr>
-              <a:t>DV_Bronze</a:t>
-            </a:r>
-            <a:endParaRPr lang="en-US" sz="850" dirty="0"/>
-          </a:p>
-        </p:txBody>
-      </p:sp>
-      <p:sp>
-        <p:nvSpPr>
-          <p:cNvPr id="20" name="Text 18"/>
-          <p:cNvSpPr/>
-          <p:nvPr/>
-        </p:nvSpPr>
-        <p:spPr>
-          <a:xfrm>
-            <a:off x="3703320" y="1691640"/>
-            <a:ext cx="1417320" cy="914400"/>
-          </a:xfrm>
-          <a:prstGeom prst="rect">
-            <a:avLst/>
-          </a:prstGeom>
-          <a:noFill/>
-          <a:ln/>
-        </p:spPr>
-        <p:txBody>
-          <a:bodyPr wrap="square" rtlCol="0" anchor="t"/>
-          <a:lstStyle/>
-          <a:p>
-            <a:pPr marL="0" indent="0" algn="ctr">
-              <a:buNone/>
-            </a:pPr>
-            <a:r>
-              <a:rPr lang="en-US" sz="850" dirty="0">
-                <a:solidFill>
-                  <a:srgbClr val="64748B"/>
-                </a:solidFill>
-              </a:rPr>
-              <a:t>9 Hub</a:t>
-            </a:r>
-            <a:endParaRPr lang="en-US" sz="850" dirty="0"/>
-          </a:p>
-          <a:p>
-            <a:pPr marL="0" indent="0" algn="ctr">
-              <a:buNone/>
-            </a:pPr>
-            <a:r>
-              <a:rPr lang="en-US" sz="850" dirty="0">
-                <a:solidFill>
-                  <a:srgbClr val="64748B"/>
-                </a:solidFill>
-              </a:rPr>
-              <a:t>9 SAT</a:t>
-            </a:r>
-            <a:endParaRPr lang="en-US" sz="850" dirty="0"/>
-          </a:p>
-          <a:p>
-            <a:pPr marL="0" indent="0" algn="ctr">
-              <a:buNone/>
-            </a:pPr>
-            <a:r>
-              <a:rPr lang="en-US" sz="850" dirty="0">
-                <a:solidFill>
-                  <a:srgbClr val="64748B"/>
-                </a:solidFill>
-              </a:rPr>
-              <a:t>5 Link</a:t>
-            </a:r>
-            <a:endParaRPr lang="en-US" sz="850" dirty="0"/>
-          </a:p>
-        </p:txBody>
-      </p:sp>
-      <p:sp>
-        <p:nvSpPr>
-          <p:cNvPr id="21" name="Shape 19"/>
-          <p:cNvSpPr/>
-          <p:nvPr/>
-        </p:nvSpPr>
-        <p:spPr>
-          <a:xfrm>
-            <a:off x="5349240" y="960120"/>
-            <a:ext cx="1508760" cy="1828800"/>
-          </a:xfrm>
-          <a:prstGeom prst="rect">
-            <a:avLst/>
-          </a:prstGeom>
-          <a:solidFill>
-            <a:srgbClr val="FFFFFF"/>
-          </a:solidFill>
-          <a:ln/>
-          <a:effectLst>
-            <a:outerShdw blurRad="50800" dist="25400" dir="8100000" algn="bl" rotWithShape="0">
-              <a:srgbClr val="000000">
-                <a:alpha val="10000"/>
-              </a:srgbClr>
-            </a:outerShdw>
-          </a:effectLst>
-        </p:spPr>
-        <p:txBody>
-          <a:bodyPr/>
-          <a:lstStyle/>
-          <a:p>
-            <a:endParaRPr/>
-          </a:p>
-        </p:txBody>
-      </p:sp>
-      <p:sp>
-        <p:nvSpPr>
-          <p:cNvPr id="22" name="Shape 20"/>
-          <p:cNvSpPr/>
-          <p:nvPr/>
-        </p:nvSpPr>
-        <p:spPr>
-          <a:xfrm>
-            <a:off x="5349240" y="960120"/>
-            <a:ext cx="1508760" cy="365760"/>
-          </a:xfrm>
-          <a:prstGeom prst="rect">
-            <a:avLst/>
-          </a:prstGeom>
-          <a:solidFill>
-            <a:srgbClr val="A8A8A8"/>
-          </a:solidFill>
-          <a:ln/>
-        </p:spPr>
-        <p:txBody>
-          <a:bodyPr/>
-          <a:lstStyle/>
-          <a:p>
-            <a:endParaRPr/>
-          </a:p>
-        </p:txBody>
-      </p:sp>
-      <p:sp>
-        <p:nvSpPr>
-          <p:cNvPr id="23" name="Text 21"/>
-          <p:cNvSpPr/>
-          <p:nvPr/>
-        </p:nvSpPr>
-        <p:spPr>
-          <a:xfrm>
-            <a:off x="5349240" y="960120"/>
-            <a:ext cx="1508760" cy="365760"/>
-          </a:xfrm>
-          <a:prstGeom prst="rect">
-            <a:avLst/>
-          </a:prstGeom>
-          <a:noFill/>
-          <a:ln/>
-        </p:spPr>
-        <p:txBody>
-          <a:bodyPr wrap="square" rtlCol="0" anchor="ctr"/>
-          <a:lstStyle/>
-          <a:p>
-            <a:pPr marL="0" indent="0" algn="ctr">
-              <a:buNone/>
-            </a:pPr>
-            <a:r>
-              <a:rPr lang="en-US" sz="1100" b="1" dirty="0">
-                <a:solidFill>
-                  <a:srgbClr val="FFFFFF"/>
-                </a:solidFill>
-              </a:rPr>
-              <a:t>Silver</a:t>
-            </a:r>
-            <a:endParaRPr lang="en-US" sz="1100" dirty="0"/>
-          </a:p>
-        </p:txBody>
-      </p:sp>
-      <p:sp>
-        <p:nvSpPr>
-          <p:cNvPr id="24" name="Text 22"/>
-          <p:cNvSpPr/>
-          <p:nvPr/>
-        </p:nvSpPr>
-        <p:spPr>
-          <a:xfrm>
-            <a:off x="5349240" y="1371600"/>
-            <a:ext cx="1508760" cy="274320"/>
-          </a:xfrm>
-          <a:prstGeom prst="rect">
-            <a:avLst/>
-          </a:prstGeom>
-          <a:noFill/>
-          <a:ln/>
-        </p:spPr>
-        <p:txBody>
-          <a:bodyPr wrap="square" rtlCol="0" anchor="ctr"/>
-          <a:lstStyle/>
-          <a:p>
-            <a:pPr marL="0" indent="0" algn="ctr">
-              <a:buNone/>
-            </a:pPr>
-            <a:r>
-              <a:rPr lang="en-US" sz="850" b="1" dirty="0">
-                <a:solidFill>
-                  <a:srgbClr val="1B3A5C"/>
-                </a:solidFill>
-              </a:rPr>
-              <a:t>DV_Silver</a:t>
-            </a:r>
-            <a:endParaRPr lang="en-US" sz="850" dirty="0"/>
-          </a:p>
-        </p:txBody>
-      </p:sp>
-      <p:sp>
-        <p:nvSpPr>
-          <p:cNvPr id="25" name="Text 23"/>
-          <p:cNvSpPr/>
-          <p:nvPr/>
-        </p:nvSpPr>
-        <p:spPr>
-          <a:xfrm>
-            <a:off x="5394960" y="1691640"/>
-            <a:ext cx="1417320" cy="914400"/>
-          </a:xfrm>
-          <a:prstGeom prst="rect">
-            <a:avLst/>
-          </a:prstGeom>
-          <a:noFill/>
-          <a:ln/>
-        </p:spPr>
-        <p:txBody>
-          <a:bodyPr wrap="square" rtlCol="0" anchor="t"/>
-          <a:lstStyle/>
-          <a:p>
-            <a:pPr marL="0" indent="0" algn="ctr">
-              <a:buNone/>
-            </a:pPr>
-            <a:r>
-              <a:rPr lang="en-US" sz="850" dirty="0">
-                <a:solidFill>
-                  <a:srgbClr val="64748B"/>
-                </a:solidFill>
-              </a:rPr>
-              <a:t>3 PIT</a:t>
-            </a:r>
-            <a:endParaRPr lang="en-US" sz="850" dirty="0"/>
-          </a:p>
-          <a:p>
-            <a:pPr marL="0" indent="0" algn="ctr">
-              <a:buNone/>
-            </a:pPr>
-            <a:r>
-              <a:rPr lang="en-US" sz="850" dirty="0">
-                <a:solidFill>
-                  <a:srgbClr val="64748B"/>
-                </a:solidFill>
-              </a:rPr>
-              <a:t>1 BRG</a:t>
-            </a:r>
-            <a:endParaRPr lang="en-US" sz="850" dirty="0"/>
-          </a:p>
-          <a:p>
-            <a:pPr marL="0" indent="0" algn="ctr">
-              <a:buNone/>
-            </a:pPr>
-            <a:r>
-              <a:rPr lang="en-US" sz="850" dirty="0">
-                <a:solidFill>
-                  <a:srgbClr val="64748B"/>
-                </a:solidFill>
-              </a:rPr>
-              <a:t>2 BUS</a:t>
-            </a:r>
-            <a:endParaRPr lang="en-US" sz="850" dirty="0"/>
-          </a:p>
-        </p:txBody>
-      </p:sp>
-      <p:sp>
-        <p:nvSpPr>
-          <p:cNvPr id="26" name="Shape 24"/>
-          <p:cNvSpPr/>
-          <p:nvPr/>
-        </p:nvSpPr>
-        <p:spPr>
-          <a:xfrm>
-            <a:off x="7040880" y="960120"/>
-            <a:ext cx="1508760" cy="1828800"/>
-          </a:xfrm>
-          <a:prstGeom prst="rect">
-            <a:avLst/>
-          </a:prstGeom>
-          <a:solidFill>
-            <a:srgbClr val="FFFFFF"/>
-          </a:solidFill>
-          <a:ln/>
-          <a:effectLst>
-            <a:outerShdw blurRad="50800" dist="25400" dir="8100000" algn="bl" rotWithShape="0">
-              <a:srgbClr val="000000">
-                <a:alpha val="10000"/>
-              </a:srgbClr>
-            </a:outerShdw>
-          </a:effectLst>
-        </p:spPr>
-        <p:txBody>
-          <a:bodyPr/>
-          <a:lstStyle/>
-          <a:p>
-            <a:endParaRPr/>
-          </a:p>
-        </p:txBody>
-      </p:sp>
-      <p:sp>
-        <p:nvSpPr>
-          <p:cNvPr id="27" name="Shape 25"/>
-          <p:cNvSpPr/>
-          <p:nvPr/>
-        </p:nvSpPr>
-        <p:spPr>
-          <a:xfrm>
-            <a:off x="7040880" y="960120"/>
-            <a:ext cx="1508760" cy="365760"/>
-          </a:xfrm>
-          <a:prstGeom prst="rect">
-            <a:avLst/>
-          </a:prstGeom>
-          <a:solidFill>
-            <a:srgbClr val="D4A843"/>
-          </a:solidFill>
-          <a:ln/>
-        </p:spPr>
-        <p:txBody>
-          <a:bodyPr/>
-          <a:lstStyle/>
-          <a:p>
-            <a:endParaRPr/>
-          </a:p>
-        </p:txBody>
-      </p:sp>
-      <p:sp>
-        <p:nvSpPr>
-          <p:cNvPr id="28" name="Text 26"/>
-          <p:cNvSpPr/>
-          <p:nvPr/>
-        </p:nvSpPr>
-        <p:spPr>
-          <a:xfrm>
-            <a:off x="7040880" y="960120"/>
-            <a:ext cx="1508760" cy="365760"/>
-          </a:xfrm>
-          <a:prstGeom prst="rect">
-            <a:avLst/>
-          </a:prstGeom>
-          <a:noFill/>
-          <a:ln/>
-        </p:spPr>
-        <p:txBody>
-          <a:bodyPr wrap="square" rtlCol="0" anchor="ctr"/>
-          <a:lstStyle/>
-          <a:p>
-            <a:pPr marL="0" indent="0" algn="ctr">
-              <a:buNone/>
-            </a:pPr>
-            <a:r>
-              <a:rPr lang="en-US" sz="1100" b="1" dirty="0">
-                <a:solidFill>
-                  <a:srgbClr val="FFFFFF"/>
-                </a:solidFill>
-              </a:rPr>
-              <a:t>Gold</a:t>
-            </a:r>
-            <a:endParaRPr lang="en-US" sz="1100" dirty="0"/>
-          </a:p>
-        </p:txBody>
-      </p:sp>
-      <p:sp>
-        <p:nvSpPr>
-          <p:cNvPr id="29" name="Text 27"/>
-          <p:cNvSpPr/>
-          <p:nvPr/>
-        </p:nvSpPr>
-        <p:spPr>
-          <a:xfrm>
-            <a:off x="7040880" y="1371600"/>
-            <a:ext cx="1508760" cy="274320"/>
-          </a:xfrm>
-          <a:prstGeom prst="rect">
-            <a:avLst/>
-          </a:prstGeom>
-          <a:noFill/>
-          <a:ln/>
-        </p:spPr>
-        <p:txBody>
-          <a:bodyPr wrap="square" rtlCol="0" anchor="ctr"/>
-          <a:lstStyle/>
-          <a:p>
-            <a:pPr marL="0" indent="0" algn="ctr">
-              <a:buNone/>
-            </a:pPr>
-            <a:r>
-              <a:rPr lang="en-US" sz="850" b="1" dirty="0">
-                <a:solidFill>
-                  <a:srgbClr val="1B3A5C"/>
-                </a:solidFill>
-              </a:rPr>
-              <a:t>DV_Gold</a:t>
-            </a:r>
-            <a:endParaRPr lang="en-US" sz="850" dirty="0"/>
-          </a:p>
-        </p:txBody>
-      </p:sp>
-      <p:sp>
-        <p:nvSpPr>
-          <p:cNvPr id="30" name="Text 28"/>
-          <p:cNvSpPr/>
-          <p:nvPr/>
-        </p:nvSpPr>
-        <p:spPr>
-          <a:xfrm>
-            <a:off x="7086600" y="1691640"/>
-            <a:ext cx="1417320" cy="914400"/>
-          </a:xfrm>
-          <a:prstGeom prst="rect">
-            <a:avLst/>
-          </a:prstGeom>
-          <a:noFill/>
-          <a:ln/>
-        </p:spPr>
-        <p:txBody>
-          <a:bodyPr wrap="square" rtlCol="0" anchor="t"/>
-          <a:lstStyle/>
-          <a:p>
-            <a:pPr marL="0" indent="0" algn="ctr">
-              <a:buNone/>
-            </a:pPr>
-            <a:r>
-              <a:rPr lang="en-US" sz="850" dirty="0">
-                <a:solidFill>
-                  <a:srgbClr val="64748B"/>
-                </a:solidFill>
-              </a:rPr>
-              <a:t>7 DIM</a:t>
-            </a:r>
-            <a:endParaRPr lang="en-US" sz="850" dirty="0"/>
-          </a:p>
-          <a:p>
-            <a:pPr marL="0" indent="0" algn="ctr">
-              <a:buNone/>
-            </a:pPr>
-            <a:r>
-              <a:rPr lang="en-US" sz="850" dirty="0">
-                <a:solidFill>
-                  <a:srgbClr val="64748B"/>
-                </a:solidFill>
-              </a:rPr>
-              <a:t>4 FACT</a:t>
-            </a:r>
-            <a:endParaRPr lang="en-US" sz="850" dirty="0"/>
-          </a:p>
-        </p:txBody>
-      </p:sp>
-      <p:sp>
-        <p:nvSpPr>
-          <p:cNvPr id="31" name="Text 29"/>
-          <p:cNvSpPr/>
-          <p:nvPr/>
-        </p:nvSpPr>
-        <p:spPr>
-          <a:xfrm>
-            <a:off x="1737360" y="1508760"/>
-            <a:ext cx="274320" cy="365760"/>
-          </a:xfrm>
-          <a:prstGeom prst="rect">
-            <a:avLst/>
-          </a:prstGeom>
-          <a:noFill/>
-          <a:ln/>
-        </p:spPr>
-        <p:txBody>
-          <a:bodyPr wrap="square" rtlCol="0" anchor="ctr"/>
-          <a:lstStyle/>
-          <a:p>
-            <a:pPr marL="0" indent="0" algn="ctr">
-              <a:buNone/>
-            </a:pPr>
-            <a:r>
-              <a:rPr lang="en-US" sz="1800" dirty="0">
-                <a:solidFill>
-                  <a:srgbClr val="2A9D8F"/>
-                </a:solidFill>
-              </a:rPr>
-              <a:t>→</a:t>
-            </a:r>
-            <a:endParaRPr lang="en-US" sz="1800" dirty="0"/>
-          </a:p>
-        </p:txBody>
-      </p:sp>
-      <p:sp>
-        <p:nvSpPr>
-          <p:cNvPr id="32" name="Text 30"/>
-          <p:cNvSpPr/>
-          <p:nvPr/>
-        </p:nvSpPr>
-        <p:spPr>
-          <a:xfrm>
-            <a:off x="3429000" y="1508760"/>
-            <a:ext cx="274320" cy="365760"/>
-          </a:xfrm>
-          <a:prstGeom prst="rect">
-            <a:avLst/>
-          </a:prstGeom>
-          <a:noFill/>
-          <a:ln/>
-        </p:spPr>
-        <p:txBody>
-          <a:bodyPr wrap="square" rtlCol="0" anchor="ctr"/>
-          <a:lstStyle/>
-          <a:p>
-            <a:pPr marL="0" indent="0" algn="ctr">
-              <a:buNone/>
-            </a:pPr>
-            <a:r>
-              <a:rPr lang="en-US" sz="1800" dirty="0">
-                <a:solidFill>
-                  <a:srgbClr val="2A9D8F"/>
-                </a:solidFill>
-              </a:rPr>
-              <a:t>→</a:t>
-            </a:r>
-            <a:endParaRPr lang="en-US" sz="1800" dirty="0"/>
-          </a:p>
-        </p:txBody>
-      </p:sp>
-      <p:sp>
-        <p:nvSpPr>
-          <p:cNvPr id="33" name="Text 31"/>
-          <p:cNvSpPr/>
-          <p:nvPr/>
-        </p:nvSpPr>
-        <p:spPr>
-          <a:xfrm>
-            <a:off x="5120640" y="1508760"/>
-            <a:ext cx="274320" cy="365760"/>
-          </a:xfrm>
-          <a:prstGeom prst="rect">
-            <a:avLst/>
-          </a:prstGeom>
-          <a:noFill/>
-          <a:ln/>
-        </p:spPr>
-        <p:txBody>
-          <a:bodyPr wrap="square" rtlCol="0" anchor="ctr"/>
-          <a:lstStyle/>
-          <a:p>
-            <a:pPr marL="0" indent="0" algn="ctr">
-              <a:buNone/>
-            </a:pPr>
-            <a:r>
-              <a:rPr lang="en-US" sz="1800" dirty="0">
-                <a:solidFill>
-                  <a:srgbClr val="2A9D8F"/>
-                </a:solidFill>
-              </a:rPr>
-              <a:t>→</a:t>
-            </a:r>
-            <a:endParaRPr lang="en-US" sz="1800" dirty="0"/>
-          </a:p>
-        </p:txBody>
-      </p:sp>
-      <p:sp>
-        <p:nvSpPr>
-          <p:cNvPr id="34" name="Text 32"/>
-          <p:cNvSpPr/>
-          <p:nvPr/>
-        </p:nvSpPr>
-        <p:spPr>
-          <a:xfrm>
-            <a:off x="6812280" y="1508760"/>
-            <a:ext cx="274320" cy="365760"/>
-          </a:xfrm>
-          <a:prstGeom prst="rect">
-            <a:avLst/>
-          </a:prstGeom>
-          <a:noFill/>
-          <a:ln/>
-        </p:spPr>
-        <p:txBody>
-          <a:bodyPr wrap="square" rtlCol="0" anchor="ctr"/>
-          <a:lstStyle/>
-          <a:p>
-            <a:pPr marL="0" indent="0" algn="ctr">
-              <a:buNone/>
-            </a:pPr>
-            <a:r>
-              <a:rPr lang="en-US" sz="1800" dirty="0">
-                <a:solidFill>
-                  <a:srgbClr val="2A9D8F"/>
-                </a:solidFill>
-              </a:rPr>
-              <a:t>→</a:t>
-            </a:r>
-            <a:endParaRPr lang="en-US" sz="1800" dirty="0"/>
-          </a:p>
-        </p:txBody>
-      </p:sp>
-      <p:sp>
-        <p:nvSpPr>
-          <p:cNvPr id="35" name="Shape 33"/>
-          <p:cNvSpPr/>
-          <p:nvPr/>
-        </p:nvSpPr>
-        <p:spPr>
-          <a:xfrm>
-            <a:off x="274320" y="3017520"/>
-            <a:ext cx="4114800" cy="1737360"/>
-          </a:xfrm>
-          <a:prstGeom prst="rect">
-            <a:avLst/>
-          </a:prstGeom>
-          <a:solidFill>
-            <a:srgbClr val="FFFFFF"/>
-          </a:solidFill>
-          <a:ln/>
-          <a:effectLst>
-            <a:outerShdw blurRad="50800" dist="25400" dir="8100000" algn="bl" rotWithShape="0">
-              <a:srgbClr val="000000">
-                <a:alpha val="10000"/>
-              </a:srgbClr>
-            </a:outerShdw>
-          </a:effectLst>
-        </p:spPr>
-        <p:txBody>
-          <a:bodyPr/>
-          <a:lstStyle/>
-          <a:p>
-            <a:endParaRPr/>
-          </a:p>
-        </p:txBody>
-      </p:sp>
-      <p:sp>
-        <p:nvSpPr>
-          <p:cNvPr id="36" name="Shape 34"/>
-          <p:cNvSpPr/>
-          <p:nvPr/>
-        </p:nvSpPr>
-        <p:spPr>
-          <a:xfrm>
-            <a:off x="274320" y="3017520"/>
-            <a:ext cx="54864" cy="1737360"/>
-          </a:xfrm>
-          <a:prstGeom prst="rect">
-            <a:avLst/>
-          </a:prstGeom>
-          <a:solidFill>
-            <a:srgbClr val="2A9D8F"/>
-          </a:solidFill>
-          <a:ln/>
-        </p:spPr>
-        <p:txBody>
-          <a:bodyPr/>
-          <a:lstStyle/>
-          <a:p>
-            <a:endParaRPr/>
-          </a:p>
-        </p:txBody>
-      </p:sp>
-      <p:sp>
-        <p:nvSpPr>
-          <p:cNvPr id="37" name="Text 35"/>
-          <p:cNvSpPr/>
-          <p:nvPr/>
-        </p:nvSpPr>
-        <p:spPr>
-          <a:xfrm>
-            <a:off x="457200" y="3063240"/>
-            <a:ext cx="3657600" cy="228600"/>
-          </a:xfrm>
-          <a:prstGeom prst="rect">
-            <a:avLst/>
-          </a:prstGeom>
-          <a:noFill/>
-          <a:ln/>
-        </p:spPr>
-        <p:txBody>
-          <a:bodyPr wrap="square" rtlCol="0" anchor="ctr"/>
-          <a:lstStyle/>
-          <a:p>
-            <a:pPr marL="0" indent="0">
-              <a:buNone/>
-            </a:pPr>
-            <a:r>
-              <a:rPr lang="en-US" sz="1100" b="1" dirty="0">
-                <a:solidFill>
-                  <a:srgbClr val="1B3A5C"/>
-                </a:solidFill>
-              </a:rPr>
-              <a:t>ETL Control Framework</a:t>
-            </a:r>
-            <a:endParaRPr lang="en-US" sz="1100" dirty="0"/>
-          </a:p>
-        </p:txBody>
-      </p:sp>
-      <p:sp>
-        <p:nvSpPr>
-          <p:cNvPr id="38" name="Text 36"/>
-          <p:cNvSpPr/>
-          <p:nvPr/>
-        </p:nvSpPr>
-        <p:spPr>
-          <a:xfrm>
-            <a:off x="457200" y="3337560"/>
-            <a:ext cx="3749040" cy="1280160"/>
-          </a:xfrm>
-          <a:prstGeom prst="rect">
-            <a:avLst/>
-          </a:prstGeom>
-          <a:noFill/>
-          <a:ln/>
-        </p:spPr>
-        <p:txBody>
-          <a:bodyPr wrap="square" rtlCol="0" anchor="ctr"/>
-          <a:lstStyle/>
-          <a:p>
-            <a:pPr marL="342900" indent="-342900">
-              <a:spcAft>
-                <a:spcPts val="400"/>
-              </a:spcAft>
-              <a:buSzPct val="100000"/>
-              <a:buChar char="•"/>
-            </a:pPr>
-            <a:r>
-              <a:rPr lang="en-US" sz="900" dirty="0">
-                <a:solidFill>
-                  <a:srgbClr val="1E293B"/>
-                </a:solidFill>
-              </a:rPr>
-              <a:t>ETL_Process — Entity registry &amp; load order</a:t>
-            </a:r>
-            <a:endParaRPr lang="en-US" sz="900" dirty="0"/>
-          </a:p>
-          <a:p>
-            <a:pPr marL="342900" indent="-342900">
-              <a:spcAft>
-                <a:spcPts val="400"/>
-              </a:spcAft>
-              <a:buSzPct val="100000"/>
-              <a:buChar char="•"/>
-            </a:pPr>
-            <a:r>
-              <a:rPr lang="en-US" sz="900" dirty="0">
-                <a:solidFill>
-                  <a:srgbClr val="1E293B"/>
-                </a:solidFill>
-              </a:rPr>
-              <a:t>ETL_BatchLog / StepLog — Execution tracking</a:t>
-            </a:r>
-            <a:endParaRPr lang="en-US" sz="900" dirty="0"/>
-          </a:p>
-          <a:p>
-            <a:pPr marL="342900" indent="-342900">
-              <a:spcAft>
-                <a:spcPts val="400"/>
-              </a:spcAft>
-              <a:buSzPct val="100000"/>
-              <a:buChar char="•"/>
-            </a:pPr>
-            <a:r>
-              <a:rPr lang="en-US" sz="900" dirty="0">
-                <a:solidFill>
-                  <a:srgbClr val="1E293B"/>
-                </a:solidFill>
-              </a:rPr>
-              <a:t>ETL_Watermark — High-water mark per table</a:t>
-            </a:r>
-            <a:endParaRPr lang="en-US" sz="900" dirty="0"/>
-          </a:p>
-          <a:p>
-            <a:pPr marL="342900" indent="-342900">
-              <a:spcAft>
-                <a:spcPts val="400"/>
-              </a:spcAft>
-              <a:buSzPct val="100000"/>
-              <a:buChar char="•"/>
-            </a:pPr>
-            <a:r>
-              <a:rPr lang="en-US" sz="900" dirty="0">
-                <a:solidFill>
-                  <a:srgbClr val="1E293B"/>
-                </a:solidFill>
-              </a:rPr>
-              <a:t>ETL_ErrorLog — Error capture &amp; diagnostics</a:t>
-            </a:r>
-            <a:endParaRPr lang="en-US" sz="900" dirty="0"/>
-          </a:p>
-          <a:p>
-            <a:pPr marL="342900" indent="-342900">
-              <a:spcAft>
-                <a:spcPts val="400"/>
-              </a:spcAft>
-              <a:buSzPct val="100000"/>
-              <a:buChar char="•"/>
-            </a:pPr>
-            <a:r>
-              <a:rPr lang="en-US" sz="900" b="1" dirty="0">
-                <a:solidFill>
-                  <a:srgbClr val="2A9D8F"/>
-                </a:solidFill>
-              </a:rPr>
-              <a:t>Master: Master_Complete_Pipeline.dtsx</a:t>
-            </a:r>
-            <a:endParaRPr lang="en-US" sz="900" dirty="0"/>
-          </a:p>
-        </p:txBody>
-      </p:sp>
-      <p:sp>
-        <p:nvSpPr>
-          <p:cNvPr id="39" name="Shape 37"/>
-          <p:cNvSpPr/>
-          <p:nvPr/>
-        </p:nvSpPr>
-        <p:spPr>
-          <a:xfrm>
-            <a:off x="4754880" y="3017520"/>
-            <a:ext cx="4114800" cy="1737360"/>
-          </a:xfrm>
-          <a:prstGeom prst="rect">
-            <a:avLst/>
-          </a:prstGeom>
-          <a:solidFill>
-            <a:srgbClr val="FFFFFF"/>
-          </a:solidFill>
-          <a:ln/>
-          <a:effectLst>
-            <a:outerShdw blurRad="50800" dist="25400" dir="8100000" algn="bl" rotWithShape="0">
-              <a:srgbClr val="000000">
-                <a:alpha val="10000"/>
-              </a:srgbClr>
-            </a:outerShdw>
-          </a:effectLst>
-        </p:spPr>
-        <p:txBody>
-          <a:bodyPr/>
-          <a:lstStyle/>
-          <a:p>
-            <a:endParaRPr/>
-          </a:p>
-        </p:txBody>
-      </p:sp>
-      <p:sp>
-        <p:nvSpPr>
-          <p:cNvPr id="40" name="Shape 38"/>
-          <p:cNvSpPr/>
-          <p:nvPr/>
-        </p:nvSpPr>
-        <p:spPr>
-          <a:xfrm>
-            <a:off x="4754880" y="3017520"/>
-            <a:ext cx="54864" cy="1737360"/>
-          </a:xfrm>
-          <a:prstGeom prst="rect">
-            <a:avLst/>
-          </a:prstGeom>
-          <a:solidFill>
-            <a:srgbClr val="1B3A5C"/>
-          </a:solidFill>
-          <a:ln/>
-        </p:spPr>
-        <p:txBody>
-          <a:bodyPr/>
-          <a:lstStyle/>
-          <a:p>
-            <a:endParaRPr/>
-          </a:p>
-        </p:txBody>
-      </p:sp>
-      <p:sp>
-        <p:nvSpPr>
-          <p:cNvPr id="41" name="Text 39"/>
-          <p:cNvSpPr/>
-          <p:nvPr/>
-        </p:nvSpPr>
-        <p:spPr>
-          <a:xfrm>
-            <a:off x="4937760" y="3063240"/>
-            <a:ext cx="3657600" cy="228600"/>
-          </a:xfrm>
-          <a:prstGeom prst="rect">
-            <a:avLst/>
-          </a:prstGeom>
-          <a:noFill/>
-          <a:ln/>
-        </p:spPr>
-        <p:txBody>
-          <a:bodyPr wrap="square" rtlCol="0" anchor="ctr"/>
-          <a:lstStyle/>
-          <a:p>
-            <a:pPr marL="0" indent="0">
-              <a:buNone/>
-            </a:pPr>
-            <a:r>
-              <a:rPr lang="en-US" sz="1100" b="1" dirty="0">
-                <a:solidFill>
-                  <a:srgbClr val="1B3A5C"/>
-                </a:solidFill>
-              </a:rPr>
-              <a:t>Technology Stack</a:t>
-            </a:r>
-            <a:endParaRPr lang="en-US" sz="1100" dirty="0"/>
-          </a:p>
-        </p:txBody>
-      </p:sp>
-      <p:sp>
-        <p:nvSpPr>
-          <p:cNvPr id="42" name="Text 40"/>
-          <p:cNvSpPr/>
-          <p:nvPr/>
-        </p:nvSpPr>
-        <p:spPr>
-          <a:xfrm>
-            <a:off x="4937760" y="3337560"/>
-            <a:ext cx="3749040" cy="1280160"/>
-          </a:xfrm>
-          <a:prstGeom prst="rect">
-            <a:avLst/>
-          </a:prstGeom>
-          <a:noFill/>
-          <a:ln/>
-        </p:spPr>
-        <p:txBody>
-          <a:bodyPr wrap="square" rtlCol="0" anchor="ctr"/>
-          <a:lstStyle/>
-          <a:p>
-            <a:pPr marL="342900" indent="-342900">
-              <a:spcAft>
-                <a:spcPts val="400"/>
-              </a:spcAft>
-              <a:buSzPct val="100000"/>
-              <a:buChar char="•"/>
-            </a:pPr>
-            <a:r>
-              <a:rPr lang="en-US" sz="900" dirty="0">
-                <a:solidFill>
-                  <a:srgbClr val="1E293B"/>
-                </a:solidFill>
-              </a:rPr>
-              <a:t>SQL Server 2025 Developer Edition (v17)</a:t>
-            </a:r>
-            <a:endParaRPr lang="en-US" sz="900" dirty="0"/>
-          </a:p>
-          <a:p>
-            <a:pPr marL="342900" indent="-342900">
-              <a:spcAft>
-                <a:spcPts val="400"/>
-              </a:spcAft>
-              <a:buSzPct val="100000"/>
-              <a:buChar char="•"/>
-            </a:pPr>
-            <a:r>
-              <a:rPr lang="en-US" sz="900" dirty="0">
-                <a:solidFill>
-                  <a:srgbClr val="1E293B"/>
-                </a:solidFill>
-              </a:rPr>
-              <a:t>SSIS 2022+ — Project Deployment on SSISDB</a:t>
-            </a:r>
-            <a:endParaRPr lang="en-US" sz="900" dirty="0"/>
-          </a:p>
-          <a:p>
-            <a:pPr marL="342900" indent="-342900">
-              <a:spcAft>
-                <a:spcPts val="400"/>
-              </a:spcAft>
-              <a:buSzPct val="100000"/>
-              <a:buChar char="•"/>
-            </a:pPr>
-            <a:r>
-              <a:rPr lang="en-US" sz="900" dirty="0">
-                <a:solidFill>
-                  <a:srgbClr val="1E293B"/>
-                </a:solidFill>
-              </a:rPr>
-              <a:t>SHA-256 via HASHBYTES → VARBINARY(32)</a:t>
-            </a:r>
-            <a:endParaRPr lang="en-US" sz="900" dirty="0"/>
-          </a:p>
-          <a:p>
-            <a:pPr marL="342900" indent="-342900">
-              <a:spcAft>
-                <a:spcPts val="400"/>
-              </a:spcAft>
-              <a:buSzPct val="100000"/>
-              <a:buChar char="•"/>
-            </a:pPr>
-            <a:r>
-              <a:rPr lang="en-US" sz="900" dirty="0">
-                <a:solidFill>
-                  <a:srgbClr val="1E293B"/>
-                </a:solidFill>
-              </a:rPr>
-              <a:t>GCP e2-standard-4 (4 vCPU, 16GB, 128GB SSD)</a:t>
-            </a:r>
-            <a:endParaRPr lang="en-US" sz="900" dirty="0"/>
-          </a:p>
-          <a:p>
-            <a:pPr marL="342900" indent="-342900">
-              <a:spcAft>
-                <a:spcPts val="400"/>
-              </a:spcAft>
-              <a:buSzPct val="100000"/>
-              <a:buChar char="•"/>
-            </a:pPr>
-            <a:r>
-              <a:rPr lang="en-US" sz="900" b="1" dirty="0">
-                <a:solidFill>
-                  <a:srgbClr val="2A9D8F"/>
-                </a:solidFill>
-              </a:rPr>
-              <a:t>67 objects • 60 SSIS packages • 49 ETL steps</a:t>
+              <a:t>Data Warehouse Model — Data Vault 2.0 Methodology using Medallion Architecture</a:t>
             </a:r>
             <a:endParaRPr lang="en-US" sz="900" dirty="0"/>
           </a:p>

--- a/Documents/Final_Presentation.pptx
+++ b/Documents/Final_Presentation.pptx
@@ -821,7 +821,7 @@
             <a:r>
               <a:rPr lang="en-US" dirty="0"/>
               <a:t>Key achievements: complete 4-layer pipeline with 67 objects and 60 SSIS packages across 6 databases. Full and incremental loading validated through POC demonstrations. All 4 challenges addressed with implementation evidence. Performance benchmarking and scalability analysis identified as future work. Three companion documents provide full reproducibility.
-Three companion documents submitted: [32] Implementation Scenarios with verified SSMS screenshots for Flexibility (23/23 objects unchanged), Materialized Views (73ms to 34ms, 2.1x speedup), and Early Arriving Facts (263-second Hub-to-SAT delay, zero UPDATEs). [33] Performance Benchmarks Verification with reproducible SQL scripts and 14-point checklist. [34] Source Database Verification with 12-point checklist, all passing.</a:t>
+Three companion documents submitted: [32] Implementation Scenarios with step-by-step SQL scripts and SSMS screenshot evidence for Flexibility, Materialized Views, and Early Arriving Facts scenarios. [33] POC Implementation Guide with reproducible SQL scripts for POC demonstrations in Sections 5.2.1 through 5.2.4. [34] Source Database Verification with 12-point checklist, all passing.</a:t>
             </a:r>
           </a:p>
         </p:txBody>
@@ -908,9 +908,9 @@
           <a:p>
             <a:r>
               <a:rPr lang="en-US" dirty="0"/>
-              <a:t>Three categories of future work. Short-term: integrate real GDT data, implement RBAC security, add Power BI dashboards. Medium-term: real-time CDC for near-real-time updates, Big Data scaling with columnstore indexes, implement indexed views.
-Long-term: multi-source integration with customs and business registration, machine learning for fraud detection, cloud migration to Azure SQL.
-Methodological priority: controlled experiment in production GDT environment with real data and user acceptance testing.</a:t>
+              <a:t>Three categories of future work. Short-term: integrate real GDT data with anonymized records, implement role-based access control and data encryption, add Power BI dashboards consuming Gold layer. Medium-term: real-time CDC for near-real-time compliance monitoring, performance benchmarking with columnstore indexes, table partitioning, and materialized views [27].
+Long-term: multi-source integration with customs, banking, and e-invoicing via Same-As Links and Multi-Active Satellites, and advanced analytics with ML models on Gold layer for compliance risk scoring, revenue forecasting, and fraud detection.
+Methodological priority: quantitative performance benchmarking measuring ETL load times and query execution performance, identified as the key future work to strengthen conclusions.</a:t>
             </a:r>
           </a:p>
         </p:txBody>
@@ -999,7 +999,7 @@
               <a:rPr lang="en-US" dirty="0"/>
               <a:t>Thank you for your attention. I am ready for questions.
 Key numbers: 67 objects, 60 SSIS packages, 49 ETL steps across 6 databases, 4 POC demonstrations validating all challenges, 12 source database verification checks all passed, 3 companion documents for full reproducibility.
-Companion documents submitted: [32] Implementation Scenarios (13 pages, 12 SSMS screenshots, verified results for Flexibility, Materialized Views, Early Arriving Facts), [33] Performance Benchmarks Verification (13 pages, reproducible SQL scripts, 14-point checklist), [34] Source Database Verification (8 pages, 12-point checklist). All SQL scripts and screenshots are independently reproducible on the GCP VM.</a:t>
+Companion documents submitted: [32] Implementation Scenarios with step-by-step SQL scripts and SSMS screenshot evidence for Flexibility, Materialized Views, and Early Arriving Facts scenarios. [33] POC Implementation Guide with reproducible SQL scripts for POC demonstrations in Sections 5.2.1 through 5.2.4. [34] Source Database Verification with 12-point checklist, all passing. All SQL scripts are independently reproducible.</a:t>
             </a:r>
           </a:p>
         </p:txBody>
@@ -1086,7 +1086,7 @@
           <a:p>
             <a:r>
               <a:rPr lang="en-US" dirty="0"/>
-              <a:t>This presentation follows a 6-chapter structure. I will cover the background and problem statement, literature review and research gap, methodology and system architecture, implementation details across 4 data warehouse layers, results including ETL benchmarks and query performance, discussion of key insights, and conclude with future work recommendations. The defense will take approximately 20-25 minutes.</a:t>
+              <a:t>This presentation follows a 6-chapter structure. I will cover the background and problem statement, literature review and research gap, methodology and system architecture, implementation details across 4 data warehouse layers, POC evidence addressing 4 key challenges, discussion of key insights, and conclude with future work recommendations. The defense will take approximately 20-25 minutes.</a:t>
             </a:r>
           </a:p>
         </p:txBody>
@@ -1350,9 +1350,9 @@
           <a:p>
             <a:r>
               <a:rPr lang="en-US" dirty="0"/>
-              <a:t>Our theoretical foundation rests on three pillars. First, Linstedt and Olschimke's 2015 Data Vault 2.0 methodology, which defines the hub-satellite-link architecture, hash key generation using SHA-256, and insert-only loading patterns.
-Second, Armbrust et al.'s 2021 Medallion Architecture with Bronze, Silver, and Gold layers providing progressive data refinement. We adapted this for SQL Server by mapping Bronze to Raw Vault, Silver to Business Vault, and Gold to Star Schema.
-Third, Kimball's 34 ETL subsystems framework guides our control architecture. We combine this with DAMA data quality dimensions and watermark-based incremental loading using the MAX ModifiedDate pattern. Our contribution is integrating all three into a single framework with per-step error isolation.</a:t>
+              <a:t>Our theoretical foundation rests on three pillars. First, Linstedt and Olschimke’s 2015 Data Vault 2.0 methodology [1], which defines the hub-satellite-link architecture, hash key generation using SHA-256, and insert-only loading patterns. Hultgren [6] further contributed practical guidance on agile development patterns.
+Second, the Medallion Architecture popularized by Databricks [2] and adopted by Microsoft Fabric [26], with Bronze, Silver, and Gold layers providing progressive data refinement. We adapted this for SQL Server by mapping Bronze to Raw Vault, Silver to Business Vault, and Gold to Star Schema.
+Third, the ETL literature by Vassiliadis et al. [19] and Microsoft SSIS documentation [4] guides our control architecture. We combine this with watermark-based incremental loading using the MAX ModifiedDate pattern [3][19]. Our contribution is integrating all three into a single framework with per-step error isolation.</a:t>
             </a:r>
           </a:p>
         </p:txBody>
@@ -1440,7 +1440,7 @@
             <a:r>
               <a:rPr lang="en-US" dirty="0"/>
               <a:t>This table compares 4 key related studies plus our research. Yessad and Labiod in 2016 compared Inmon, Kimball, and Data Vault theoretically but had no implementation. Naamane and Jovanovic in 2016 provided empirical comparison with telecom data but without medallion architecture or a Gold layer. Vines in 2024 is the most recent, using TPC-DS benchmarks for performance evaluation but without domain-specific application. Singh in 2025 analyzed architectural resilience but remained theoretical with no hands-on implementation.
-Our study is the first to combine DV2 + Medallion + ETL Control + Performance Benchmarks in a government tax domain. The key gap: no published end-to-end DV2 + Medallion for government tax administration.</a:t>
+Our study is the first to combine DV2 + Medallion + ETL Control + POC evaluation in a government tax domain. The key gap: no published end-to-end DV2 + Medallion for government tax administration.</a:t>
             </a:r>
           </a:p>
         </p:txBody>
@@ -1617,7 +1617,7 @@
             <a:r>
               <a:rPr lang="en-US" dirty="0"/>
               <a:t>Detailed object breakdown across 4 layers. Staging: 9 tables with full and incremental loading. Bronze: 9 Hubs for business keys, 9 Satellites for descriptive attributes with hash diff change detection, 5 Links for relationships.
-Silver: 2 PIT tables for Point-In-Time lookups, 1 Bridge table, 3 Business Vault objects including ComplianceScore. Gold: 6 SCD Type 2 dimensions, 3 fact tables, 2 analytical views.
+Silver: 3 PIT tables for Point-In-Time lookups, 1 Bridge table, 2 Business Vault tables including ComplianceScore and MonthlyMetrics. Gold: 7 Dimensions (2 SCD Type 2 + 5 SCD Type 1), 4 Fact tables for monthly declarations, payments, snapshots, and declaration lifecycle.
 Total: 67 objects across 4 layers, 49 automated steps orchestrated by ETL Control Framework.</a:t>
             </a:r>
           </a:p>
@@ -8006,7 +8006,7 @@
                   <a:srgbClr val="1E293B"/>
                 </a:solidFill>
               </a:rPr>
-              <a:t>Kimball ETL Subsystem: 34 subsystems for enterprise ETL [Kimball &amp; Ross, 2013]</a:t>
+              <a:t>ETL Conceptual Modeling: process optimization, pipeline management [Vassiliadis et al., 2002]</a:t>
             </a:r>
             <a:endParaRPr lang="en-US" sz="900" dirty="0"/>
           </a:p>
@@ -8024,7 +8024,7 @@
                   <a:srgbClr val="1E293B"/>
                 </a:solidFill>
               </a:rPr>
-              <a:t>DAMA Data Quality: Completeness, Accuracy, Consistency, Timeliness, Uniqueness, Validity</a:t>
+              <a:t>Data Quality: CHECK constraints, referential integrity, NULL validation, error logging per layer</a:t>
             </a:r>
             <a:endParaRPr lang="en-US" sz="900" dirty="0"/>
           </a:p>

--- a/Documents/Final_Presentation.pptx
+++ b/Documents/Final_Presentation.pptx
@@ -1706,7 +1706,7 @@
             <a:r>
               <a:rPr lang="en-US" dirty="0"/>
               <a:t>The source database TaxSystemDB contains 9 tables in 3 categories: 3 lookup tables for categories, structures, and activities; 3 reference tables for taxpayers, owners, and officers; and 3 transaction tables for monthly declarations, annual declarations, and payments.
-The data generator script 02_TransactionData.sql produces 1,002 taxpayers across 5 categories, 4 years of data from 2020 to 2023, with 99.8% filing coverage. Total records are 58,813.
+The data generator script 02_TransactionData.sql produces 1,000 taxpayers across 5 categories, 4 years of data from 2020 to 2023, with ~80% monthly filing rate. Total records are 58,813.
 This data has been independently verified in our Source Database Verification companion document with a 12-point checklist: 10 foreign keys, 19 CHECK constraints, 35 indexes, zero orphan records across 7 relationships, zero NULLs on 8 critical columns, and unique TaxID verification.</a:t>
             </a:r>
           </a:p>
@@ -7833,7 +7833,7 @@
                   <a:srgbClr val="1E293B"/>
                 </a:solidFill>
               </a:rPr>
-              <a:t>IRS, HMRC Connect, AEAT 70+ sources [CIAT, 2021]</a:t>
+              <a:t>IRS, HMRC, AEAT adoption documented [CIAT, 2021]</a:t>
             </a:r>
             <a:endParaRPr lang="en-US" sz="900" dirty="0"/>
           </a:p>
@@ -7851,7 +7851,7 @@
                   <a:srgbClr val="1E293B"/>
                 </a:solidFill>
               </a:rPr>
-              <a:t>ML + social network analysis for fraud [Shukla, 2019]</a:t>
+              <a:t>Big Data analytics for tax fraud detection [Shukla, 2019]</a:t>
             </a:r>
             <a:endParaRPr lang="en-US" sz="900" dirty="0"/>
           </a:p>
@@ -15324,7 +15324,7 @@
                   <a:srgbClr val="64748B"/>
                 </a:solidFill>
               </a:rPr>
-              <a:t>Data Generator (02_TransactionData.sql): 1,000 taxpayers, 4 years (2020–2023), 99.8% filing coverage, 58,813 records. Verified: 10 FKs, 19 CHECK constraints, 35 indexes, 0 orphans, 0 NULLs (see Source Database Verification document).</a:t>
+              <a:t>Data Generator (02_TransactionData.sql): 1,000 taxpayers, 4 years (2020–2023), ~80% monthly filing rate, 58,813 records. Verified: 10 FKs, 19 CHECK constraints, 35 indexes, 0 orphans, 0 NULLs (see Source Database Verification document).</a:t>
             </a:r>
             <a:endParaRPr lang="en-US" sz="1000" dirty="0"/>
           </a:p>
